--- a/docs/pptx/auc3/jx-auc3-linsubhr-ratio-throm3.pptx
+++ b/docs/pptx/auc3/jx-auc3-linsubhr-ratio-throm3.pptx
@@ -2271,7 +2271,7 @@
           </p:nvSpPr>
           <p:spPr>
             <a:xfrm>
-              <a:off x="817517" y="5114368"/>
+              <a:off x="817517" y="5142518"/>
               <a:ext cx="7799693" cy="0"/>
             </a:xfrm>
             <a:custGeom>
@@ -2314,7 +2314,7 @@
           </p:nvSpPr>
           <p:spPr>
             <a:xfrm>
-              <a:off x="817517" y="4244691"/>
+              <a:off x="817517" y="4313054"/>
               <a:ext cx="7799693" cy="0"/>
             </a:xfrm>
             <a:custGeom>
@@ -2357,7 +2357,7 @@
           </p:nvSpPr>
           <p:spPr>
             <a:xfrm>
-              <a:off x="817517" y="3375014"/>
+              <a:off x="817517" y="3483591"/>
               <a:ext cx="7799693" cy="0"/>
             </a:xfrm>
             <a:custGeom>
@@ -2400,7 +2400,7 @@
           </p:nvSpPr>
           <p:spPr>
             <a:xfrm>
-              <a:off x="817517" y="2505337"/>
+              <a:off x="817517" y="2654127"/>
               <a:ext cx="7799693" cy="0"/>
             </a:xfrm>
             <a:custGeom>
@@ -2443,15 +2443,15 @@
           </p:nvSpPr>
           <p:spPr>
             <a:xfrm>
-              <a:off x="1615213" y="1896563"/>
-              <a:ext cx="0" cy="3826579"/>
+              <a:off x="1615213" y="2073503"/>
+              <a:ext cx="0" cy="3649639"/>
             </a:xfrm>
             <a:custGeom>
               <a:avLst/>
               <a:pathLst>
-                <a:path w="0" h="3826579">
+                <a:path w="0" h="3649639">
                   <a:moveTo>
-                    <a:pt x="0" y="3826579"/>
+                    <a:pt x="0" y="3649639"/>
                   </a:moveTo>
                   <a:lnTo>
                     <a:pt x="0" y="0"/>
@@ -2486,15 +2486,15 @@
           </p:nvSpPr>
           <p:spPr>
             <a:xfrm>
-              <a:off x="3387871" y="1896563"/>
-              <a:ext cx="0" cy="3826579"/>
+              <a:off x="3387871" y="2073503"/>
+              <a:ext cx="0" cy="3649639"/>
             </a:xfrm>
             <a:custGeom>
               <a:avLst/>
               <a:pathLst>
-                <a:path w="0" h="3826579">
+                <a:path w="0" h="3649639">
                   <a:moveTo>
-                    <a:pt x="0" y="3826579"/>
+                    <a:pt x="0" y="3649639"/>
                   </a:moveTo>
                   <a:lnTo>
                     <a:pt x="0" y="0"/>
@@ -2529,15 +2529,15 @@
           </p:nvSpPr>
           <p:spPr>
             <a:xfrm>
-              <a:off x="5160528" y="1896563"/>
-              <a:ext cx="0" cy="3826579"/>
+              <a:off x="5160528" y="2073503"/>
+              <a:ext cx="0" cy="3649639"/>
             </a:xfrm>
             <a:custGeom>
               <a:avLst/>
               <a:pathLst>
-                <a:path w="0" h="3826579">
+                <a:path w="0" h="3649639">
                   <a:moveTo>
-                    <a:pt x="0" y="3826579"/>
+                    <a:pt x="0" y="3649639"/>
                   </a:moveTo>
                   <a:lnTo>
                     <a:pt x="0" y="0"/>
@@ -2572,15 +2572,15 @@
           </p:nvSpPr>
           <p:spPr>
             <a:xfrm>
-              <a:off x="6933186" y="1896563"/>
-              <a:ext cx="0" cy="3826579"/>
+              <a:off x="6933186" y="2073503"/>
+              <a:ext cx="0" cy="3649639"/>
             </a:xfrm>
             <a:custGeom>
               <a:avLst/>
               <a:pathLst>
-                <a:path w="0" h="3826579">
+                <a:path w="0" h="3649639">
                   <a:moveTo>
-                    <a:pt x="0" y="3826579"/>
+                    <a:pt x="0" y="3649639"/>
                   </a:moveTo>
                   <a:lnTo>
                     <a:pt x="0" y="0"/>
@@ -2615,7 +2615,7 @@
           </p:nvSpPr>
           <p:spPr>
             <a:xfrm>
-              <a:off x="817517" y="5549207"/>
+              <a:off x="817517" y="5557249"/>
               <a:ext cx="7799693" cy="0"/>
             </a:xfrm>
             <a:custGeom>
@@ -2658,7 +2658,7 @@
           </p:nvSpPr>
           <p:spPr>
             <a:xfrm>
-              <a:off x="817517" y="4679530"/>
+              <a:off x="817517" y="4727786"/>
               <a:ext cx="7799693" cy="0"/>
             </a:xfrm>
             <a:custGeom>
@@ -2701,7 +2701,7 @@
           </p:nvSpPr>
           <p:spPr>
             <a:xfrm>
-              <a:off x="817517" y="3809853"/>
+              <a:off x="817517" y="3898322"/>
               <a:ext cx="7799693" cy="0"/>
             </a:xfrm>
             <a:custGeom>
@@ -2744,7 +2744,7 @@
           </p:nvSpPr>
           <p:spPr>
             <a:xfrm>
-              <a:off x="817517" y="2940175"/>
+              <a:off x="817517" y="3068859"/>
               <a:ext cx="7799693" cy="0"/>
             </a:xfrm>
             <a:custGeom>
@@ -2787,7 +2787,7 @@
           </p:nvSpPr>
           <p:spPr>
             <a:xfrm>
-              <a:off x="817517" y="2070498"/>
+              <a:off x="817517" y="2239395"/>
               <a:ext cx="7799693" cy="0"/>
             </a:xfrm>
             <a:custGeom>
@@ -2830,15 +2830,15 @@
           </p:nvSpPr>
           <p:spPr>
             <a:xfrm>
-              <a:off x="2501542" y="1896563"/>
-              <a:ext cx="0" cy="3826579"/>
+              <a:off x="2501542" y="2073503"/>
+              <a:ext cx="0" cy="3649639"/>
             </a:xfrm>
             <a:custGeom>
               <a:avLst/>
               <a:pathLst>
-                <a:path w="0" h="3826579">
+                <a:path w="0" h="3649639">
                   <a:moveTo>
-                    <a:pt x="0" y="3826579"/>
+                    <a:pt x="0" y="3649639"/>
                   </a:moveTo>
                   <a:lnTo>
                     <a:pt x="0" y="0"/>
@@ -2873,15 +2873,15 @@
           </p:nvSpPr>
           <p:spPr>
             <a:xfrm>
-              <a:off x="4274200" y="1896563"/>
-              <a:ext cx="0" cy="3826579"/>
+              <a:off x="4274200" y="2073503"/>
+              <a:ext cx="0" cy="3649639"/>
             </a:xfrm>
             <a:custGeom>
               <a:avLst/>
               <a:pathLst>
-                <a:path w="0" h="3826579">
+                <a:path w="0" h="3649639">
                   <a:moveTo>
-                    <a:pt x="0" y="3826579"/>
+                    <a:pt x="0" y="3649639"/>
                   </a:moveTo>
                   <a:lnTo>
                     <a:pt x="0" y="0"/>
@@ -2916,15 +2916,15 @@
           </p:nvSpPr>
           <p:spPr>
             <a:xfrm>
-              <a:off x="6046857" y="1896563"/>
-              <a:ext cx="0" cy="3826579"/>
+              <a:off x="6046857" y="2073503"/>
+              <a:ext cx="0" cy="3649639"/>
             </a:xfrm>
             <a:custGeom>
               <a:avLst/>
               <a:pathLst>
-                <a:path w="0" h="3826579">
+                <a:path w="0" h="3649639">
                   <a:moveTo>
-                    <a:pt x="0" y="3826579"/>
+                    <a:pt x="0" y="3649639"/>
                   </a:moveTo>
                   <a:lnTo>
                     <a:pt x="0" y="0"/>
@@ -2959,15 +2959,15 @@
           </p:nvSpPr>
           <p:spPr>
             <a:xfrm>
-              <a:off x="7819515" y="1896563"/>
-              <a:ext cx="0" cy="3826579"/>
+              <a:off x="7819515" y="2073503"/>
+              <a:ext cx="0" cy="3649639"/>
             </a:xfrm>
             <a:custGeom>
               <a:avLst/>
               <a:pathLst>
-                <a:path w="0" h="3826579">
+                <a:path w="0" h="3649639">
                   <a:moveTo>
-                    <a:pt x="0" y="3826579"/>
+                    <a:pt x="0" y="3649639"/>
                   </a:moveTo>
                   <a:lnTo>
                     <a:pt x="0" y="0"/>
@@ -3002,507 +3002,507 @@
           </p:nvSpPr>
           <p:spPr>
             <a:xfrm>
-              <a:off x="817517" y="1896563"/>
-              <a:ext cx="7392041" cy="3649811"/>
+              <a:off x="817517" y="2073503"/>
+              <a:ext cx="7392041" cy="3481046"/>
             </a:xfrm>
             <a:custGeom>
               <a:avLst/>
               <a:pathLst>
-                <a:path w="7392041" h="3649811">
+                <a:path w="7392041" h="3481046">
                   <a:moveTo>
                     <a:pt x="2275378" y="0"/>
                   </a:moveTo>
                   <a:lnTo>
-                    <a:pt x="2293965" y="97661"/>
-                  </a:lnTo>
-                  <a:lnTo>
-                    <a:pt x="2371209" y="461941"/>
-                  </a:lnTo>
-                  <a:lnTo>
-                    <a:pt x="2448452" y="788892"/>
-                  </a:lnTo>
-                  <a:lnTo>
-                    <a:pt x="2525696" y="1082341"/>
-                  </a:lnTo>
-                  <a:lnTo>
-                    <a:pt x="2602939" y="1345720"/>
-                  </a:lnTo>
-                  <a:lnTo>
-                    <a:pt x="2680183" y="1582111"/>
-                  </a:lnTo>
-                  <a:lnTo>
-                    <a:pt x="2757426" y="1794279"/>
-                  </a:lnTo>
-                  <a:lnTo>
-                    <a:pt x="2834670" y="1984706"/>
-                  </a:lnTo>
-                  <a:lnTo>
-                    <a:pt x="2911914" y="2155620"/>
-                  </a:lnTo>
-                  <a:lnTo>
-                    <a:pt x="2989157" y="2309020"/>
-                  </a:lnTo>
-                  <a:lnTo>
-                    <a:pt x="3066401" y="2446701"/>
-                  </a:lnTo>
-                  <a:lnTo>
-                    <a:pt x="3143644" y="2570274"/>
-                  </a:lnTo>
-                  <a:lnTo>
-                    <a:pt x="3220888" y="2681185"/>
-                  </a:lnTo>
-                  <a:lnTo>
-                    <a:pt x="3298131" y="2780730"/>
-                  </a:lnTo>
-                  <a:lnTo>
-                    <a:pt x="3375375" y="2795703"/>
-                  </a:lnTo>
-                  <a:lnTo>
-                    <a:pt x="3452619" y="2808556"/>
-                  </a:lnTo>
-                  <a:lnTo>
-                    <a:pt x="3529862" y="2821216"/>
-                  </a:lnTo>
-                  <a:lnTo>
-                    <a:pt x="3607106" y="2833687"/>
-                  </a:lnTo>
-                  <a:lnTo>
-                    <a:pt x="3684349" y="2845970"/>
-                  </a:lnTo>
-                  <a:lnTo>
-                    <a:pt x="3761593" y="2858070"/>
-                  </a:lnTo>
-                  <a:lnTo>
-                    <a:pt x="3838836" y="2869987"/>
-                  </a:lnTo>
-                  <a:lnTo>
-                    <a:pt x="3916080" y="2881726"/>
-                  </a:lnTo>
-                  <a:lnTo>
-                    <a:pt x="3993324" y="2893289"/>
-                  </a:lnTo>
-                  <a:lnTo>
-                    <a:pt x="4070567" y="2904679"/>
-                  </a:lnTo>
-                  <a:lnTo>
-                    <a:pt x="4147811" y="2915897"/>
-                  </a:lnTo>
-                  <a:lnTo>
-                    <a:pt x="4225054" y="2926948"/>
-                  </a:lnTo>
-                  <a:lnTo>
-                    <a:pt x="4302298" y="2937832"/>
-                  </a:lnTo>
-                  <a:lnTo>
-                    <a:pt x="4379541" y="2948554"/>
-                  </a:lnTo>
-                  <a:lnTo>
-                    <a:pt x="4456785" y="2959114"/>
-                  </a:lnTo>
-                  <a:lnTo>
-                    <a:pt x="4534029" y="2969516"/>
-                  </a:lnTo>
-                  <a:lnTo>
-                    <a:pt x="4611272" y="2979763"/>
-                  </a:lnTo>
-                  <a:lnTo>
-                    <a:pt x="4688516" y="2989855"/>
-                  </a:lnTo>
-                  <a:lnTo>
-                    <a:pt x="4765759" y="2999796"/>
-                  </a:lnTo>
-                  <a:lnTo>
-                    <a:pt x="4843003" y="3009588"/>
-                  </a:lnTo>
-                  <a:lnTo>
-                    <a:pt x="4920246" y="3019233"/>
-                  </a:lnTo>
-                  <a:lnTo>
-                    <a:pt x="4997490" y="3028734"/>
-                  </a:lnTo>
-                  <a:lnTo>
-                    <a:pt x="5074734" y="3038092"/>
-                  </a:lnTo>
-                  <a:lnTo>
-                    <a:pt x="5151977" y="3047309"/>
-                  </a:lnTo>
-                  <a:lnTo>
-                    <a:pt x="5229221" y="3056389"/>
-                  </a:lnTo>
-                  <a:lnTo>
-                    <a:pt x="5306464" y="3065332"/>
-                  </a:lnTo>
-                  <a:lnTo>
-                    <a:pt x="5383708" y="3074141"/>
-                  </a:lnTo>
-                  <a:lnTo>
-                    <a:pt x="5460951" y="3082818"/>
-                  </a:lnTo>
-                  <a:lnTo>
-                    <a:pt x="5538195" y="3091364"/>
-                  </a:lnTo>
-                  <a:lnTo>
-                    <a:pt x="5615439" y="3099783"/>
-                  </a:lnTo>
-                  <a:lnTo>
-                    <a:pt x="5692682" y="3108075"/>
-                  </a:lnTo>
-                  <a:lnTo>
-                    <a:pt x="5769926" y="3116243"/>
-                  </a:lnTo>
-                  <a:lnTo>
-                    <a:pt x="5847169" y="3124289"/>
-                  </a:lnTo>
-                  <a:lnTo>
-                    <a:pt x="5924413" y="3132213"/>
-                  </a:lnTo>
-                  <a:lnTo>
-                    <a:pt x="6001656" y="3140019"/>
-                  </a:lnTo>
-                  <a:lnTo>
-                    <a:pt x="6078900" y="3147708"/>
-                  </a:lnTo>
-                  <a:lnTo>
-                    <a:pt x="6156144" y="3155282"/>
-                  </a:lnTo>
-                  <a:lnTo>
-                    <a:pt x="6233387" y="3162741"/>
-                  </a:lnTo>
-                  <a:lnTo>
-                    <a:pt x="6310631" y="3170089"/>
-                  </a:lnTo>
-                  <a:lnTo>
-                    <a:pt x="6387874" y="3177327"/>
-                  </a:lnTo>
-                  <a:lnTo>
-                    <a:pt x="6465118" y="3184456"/>
-                  </a:lnTo>
-                  <a:lnTo>
-                    <a:pt x="6542361" y="3191479"/>
-                  </a:lnTo>
-                  <a:lnTo>
-                    <a:pt x="6619605" y="3198396"/>
-                  </a:lnTo>
-                  <a:lnTo>
-                    <a:pt x="6696849" y="3205209"/>
-                  </a:lnTo>
-                  <a:lnTo>
-                    <a:pt x="6774092" y="3211920"/>
-                  </a:lnTo>
-                  <a:lnTo>
-                    <a:pt x="6851336" y="3218530"/>
-                  </a:lnTo>
-                  <a:lnTo>
-                    <a:pt x="6928579" y="3225041"/>
-                  </a:lnTo>
-                  <a:lnTo>
-                    <a:pt x="7005823" y="3231455"/>
-                  </a:lnTo>
-                  <a:lnTo>
-                    <a:pt x="7083066" y="3237772"/>
-                  </a:lnTo>
-                  <a:lnTo>
-                    <a:pt x="7160310" y="3243995"/>
-                  </a:lnTo>
-                  <a:lnTo>
-                    <a:pt x="7237554" y="3250124"/>
-                  </a:lnTo>
-                  <a:lnTo>
-                    <a:pt x="7314797" y="3256162"/>
-                  </a:lnTo>
-                  <a:lnTo>
-                    <a:pt x="7392041" y="3262108"/>
-                  </a:lnTo>
-                  <a:lnTo>
-                    <a:pt x="7392041" y="3649811"/>
-                  </a:lnTo>
-                  <a:lnTo>
-                    <a:pt x="7314797" y="3649488"/>
-                  </a:lnTo>
-                  <a:lnTo>
-                    <a:pt x="7237554" y="3649128"/>
-                  </a:lnTo>
-                  <a:lnTo>
-                    <a:pt x="7160310" y="3648727"/>
-                  </a:lnTo>
-                  <a:lnTo>
-                    <a:pt x="7083066" y="3648279"/>
-                  </a:lnTo>
-                  <a:lnTo>
-                    <a:pt x="7005823" y="3647781"/>
-                  </a:lnTo>
-                  <a:lnTo>
-                    <a:pt x="6928579" y="3647226"/>
-                  </a:lnTo>
-                  <a:lnTo>
-                    <a:pt x="6851336" y="3646608"/>
-                  </a:lnTo>
-                  <a:lnTo>
-                    <a:pt x="6774092" y="3645919"/>
-                  </a:lnTo>
-                  <a:lnTo>
-                    <a:pt x="6696849" y="3645151"/>
-                  </a:lnTo>
-                  <a:lnTo>
-                    <a:pt x="6619605" y="3644295"/>
-                  </a:lnTo>
-                  <a:lnTo>
-                    <a:pt x="6542361" y="3643342"/>
-                  </a:lnTo>
-                  <a:lnTo>
-                    <a:pt x="6465118" y="3642280"/>
-                  </a:lnTo>
-                  <a:lnTo>
-                    <a:pt x="6387874" y="3641097"/>
-                  </a:lnTo>
-                  <a:lnTo>
-                    <a:pt x="6310631" y="3639779"/>
-                  </a:lnTo>
-                  <a:lnTo>
-                    <a:pt x="6233387" y="3638310"/>
-                  </a:lnTo>
-                  <a:lnTo>
-                    <a:pt x="6156144" y="3636674"/>
-                  </a:lnTo>
-                  <a:lnTo>
-                    <a:pt x="6078900" y="3634851"/>
-                  </a:lnTo>
-                  <a:lnTo>
-                    <a:pt x="6001656" y="3632820"/>
-                  </a:lnTo>
-                  <a:lnTo>
-                    <a:pt x="5924413" y="3630556"/>
-                  </a:lnTo>
-                  <a:lnTo>
-                    <a:pt x="5847169" y="3628035"/>
-                  </a:lnTo>
-                  <a:lnTo>
-                    <a:pt x="5769926" y="3625225"/>
-                  </a:lnTo>
-                  <a:lnTo>
-                    <a:pt x="5692682" y="3622095"/>
-                  </a:lnTo>
-                  <a:lnTo>
-                    <a:pt x="5615439" y="3618607"/>
-                  </a:lnTo>
-                  <a:lnTo>
-                    <a:pt x="5538195" y="3614721"/>
-                  </a:lnTo>
-                  <a:lnTo>
-                    <a:pt x="5460951" y="3610392"/>
-                  </a:lnTo>
-                  <a:lnTo>
-                    <a:pt x="5383708" y="3605568"/>
-                  </a:lnTo>
-                  <a:lnTo>
-                    <a:pt x="5306464" y="3600193"/>
-                  </a:lnTo>
-                  <a:lnTo>
-                    <a:pt x="5229221" y="3594205"/>
-                  </a:lnTo>
-                  <a:lnTo>
-                    <a:pt x="5151977" y="3587533"/>
-                  </a:lnTo>
-                  <a:lnTo>
-                    <a:pt x="5074734" y="3580100"/>
-                  </a:lnTo>
-                  <a:lnTo>
-                    <a:pt x="4997490" y="3571818"/>
-                  </a:lnTo>
-                  <a:lnTo>
-                    <a:pt x="4920246" y="3562590"/>
-                  </a:lnTo>
-                  <a:lnTo>
-                    <a:pt x="4843003" y="3552309"/>
-                  </a:lnTo>
-                  <a:lnTo>
-                    <a:pt x="4765759" y="3540853"/>
-                  </a:lnTo>
-                  <a:lnTo>
-                    <a:pt x="4688516" y="3528090"/>
-                  </a:lnTo>
-                  <a:lnTo>
-                    <a:pt x="4611272" y="3513870"/>
-                  </a:lnTo>
-                  <a:lnTo>
-                    <a:pt x="4534029" y="3498027"/>
-                  </a:lnTo>
-                  <a:lnTo>
-                    <a:pt x="4456785" y="3480374"/>
-                  </a:lnTo>
-                  <a:lnTo>
-                    <a:pt x="4379541" y="3460707"/>
-                  </a:lnTo>
-                  <a:lnTo>
-                    <a:pt x="4302298" y="3438793"/>
-                  </a:lnTo>
-                  <a:lnTo>
-                    <a:pt x="4225054" y="3414378"/>
-                  </a:lnTo>
-                  <a:lnTo>
-                    <a:pt x="4147811" y="3387176"/>
-                  </a:lnTo>
-                  <a:lnTo>
-                    <a:pt x="4070567" y="3356868"/>
-                  </a:lnTo>
-                  <a:lnTo>
-                    <a:pt x="3993324" y="3323099"/>
-                  </a:lnTo>
-                  <a:lnTo>
-                    <a:pt x="3916080" y="3285476"/>
-                  </a:lnTo>
-                  <a:lnTo>
-                    <a:pt x="3838836" y="3243556"/>
-                  </a:lnTo>
-                  <a:lnTo>
-                    <a:pt x="3761593" y="3196851"/>
-                  </a:lnTo>
-                  <a:lnTo>
-                    <a:pt x="3684349" y="3144814"/>
-                  </a:lnTo>
-                  <a:lnTo>
-                    <a:pt x="3607106" y="3086836"/>
-                  </a:lnTo>
-                  <a:lnTo>
-                    <a:pt x="3529862" y="3022238"/>
-                  </a:lnTo>
-                  <a:lnTo>
-                    <a:pt x="3452619" y="2950265"/>
-                  </a:lnTo>
-                  <a:lnTo>
-                    <a:pt x="3375375" y="2870075"/>
-                  </a:lnTo>
-                  <a:lnTo>
-                    <a:pt x="3298131" y="2782654"/>
-                  </a:lnTo>
-                  <a:lnTo>
-                    <a:pt x="3220888" y="2769406"/>
-                  </a:lnTo>
-                  <a:lnTo>
-                    <a:pt x="3143644" y="2755957"/>
-                  </a:lnTo>
-                  <a:lnTo>
-                    <a:pt x="3066401" y="2742303"/>
-                  </a:lnTo>
-                  <a:lnTo>
-                    <a:pt x="2989157" y="2728441"/>
-                  </a:lnTo>
-                  <a:lnTo>
-                    <a:pt x="2911914" y="2714368"/>
-                  </a:lnTo>
-                  <a:lnTo>
-                    <a:pt x="2834670" y="2700080"/>
-                  </a:lnTo>
-                  <a:lnTo>
-                    <a:pt x="2757426" y="2685576"/>
-                  </a:lnTo>
-                  <a:lnTo>
-                    <a:pt x="2680183" y="2670850"/>
-                  </a:lnTo>
-                  <a:lnTo>
-                    <a:pt x="2602939" y="2655900"/>
-                  </a:lnTo>
-                  <a:lnTo>
-                    <a:pt x="2525696" y="2640722"/>
-                  </a:lnTo>
-                  <a:lnTo>
-                    <a:pt x="2448452" y="2625313"/>
-                  </a:lnTo>
-                  <a:lnTo>
-                    <a:pt x="2371209" y="2609670"/>
-                  </a:lnTo>
-                  <a:lnTo>
-                    <a:pt x="2293965" y="2593788"/>
-                  </a:lnTo>
-                  <a:lnTo>
-                    <a:pt x="2216721" y="2577664"/>
-                  </a:lnTo>
-                  <a:lnTo>
-                    <a:pt x="2139478" y="2561295"/>
-                  </a:lnTo>
-                  <a:lnTo>
-                    <a:pt x="2062234" y="2544677"/>
-                  </a:lnTo>
-                  <a:lnTo>
-                    <a:pt x="1984991" y="2527806"/>
-                  </a:lnTo>
-                  <a:lnTo>
-                    <a:pt x="1907747" y="2510678"/>
-                  </a:lnTo>
-                  <a:lnTo>
-                    <a:pt x="1830504" y="2493289"/>
-                  </a:lnTo>
-                  <a:lnTo>
-                    <a:pt x="1753260" y="2475635"/>
-                  </a:lnTo>
-                  <a:lnTo>
-                    <a:pt x="1676016" y="2457712"/>
-                  </a:lnTo>
-                  <a:lnTo>
-                    <a:pt x="1598773" y="2439517"/>
-                  </a:lnTo>
-                  <a:lnTo>
-                    <a:pt x="1521529" y="2421044"/>
-                  </a:lnTo>
-                  <a:lnTo>
-                    <a:pt x="1444286" y="2402290"/>
-                  </a:lnTo>
-                  <a:lnTo>
-                    <a:pt x="1367042" y="2383251"/>
-                  </a:lnTo>
-                  <a:lnTo>
-                    <a:pt x="1289799" y="2363921"/>
-                  </a:lnTo>
-                  <a:lnTo>
-                    <a:pt x="1212555" y="2344297"/>
-                  </a:lnTo>
-                  <a:lnTo>
-                    <a:pt x="1135311" y="2324375"/>
-                  </a:lnTo>
-                  <a:lnTo>
-                    <a:pt x="1058068" y="2304149"/>
-                  </a:lnTo>
-                  <a:lnTo>
-                    <a:pt x="980824" y="2283615"/>
-                  </a:lnTo>
-                  <a:lnTo>
-                    <a:pt x="903581" y="2262768"/>
-                  </a:lnTo>
-                  <a:lnTo>
-                    <a:pt x="826337" y="2241604"/>
-                  </a:lnTo>
-                  <a:lnTo>
-                    <a:pt x="749094" y="2220118"/>
-                  </a:lnTo>
-                  <a:lnTo>
-                    <a:pt x="671850" y="2198305"/>
-                  </a:lnTo>
-                  <a:lnTo>
-                    <a:pt x="594606" y="2176159"/>
-                  </a:lnTo>
-                  <a:lnTo>
-                    <a:pt x="517363" y="2153676"/>
-                  </a:lnTo>
-                  <a:lnTo>
-                    <a:pt x="440119" y="2130851"/>
-                  </a:lnTo>
-                  <a:lnTo>
-                    <a:pt x="362876" y="2107678"/>
-                  </a:lnTo>
-                  <a:lnTo>
-                    <a:pt x="285632" y="2084152"/>
-                  </a:lnTo>
-                  <a:lnTo>
-                    <a:pt x="208389" y="2060269"/>
-                  </a:lnTo>
-                  <a:lnTo>
-                    <a:pt x="131145" y="2036021"/>
-                  </a:lnTo>
-                  <a:lnTo>
-                    <a:pt x="53901" y="2011404"/>
-                  </a:lnTo>
-                  <a:lnTo>
-                    <a:pt x="0" y="1993965"/>
+                    <a:pt x="2293965" y="93145"/>
+                  </a:lnTo>
+                  <a:lnTo>
+                    <a:pt x="2371209" y="440581"/>
+                  </a:lnTo>
+                  <a:lnTo>
+                    <a:pt x="2448452" y="752414"/>
+                  </a:lnTo>
+                  <a:lnTo>
+                    <a:pt x="2525696" y="1032294"/>
+                  </a:lnTo>
+                  <a:lnTo>
+                    <a:pt x="2602939" y="1283495"/>
+                  </a:lnTo>
+                  <a:lnTo>
+                    <a:pt x="2680183" y="1508955"/>
+                  </a:lnTo>
+                  <a:lnTo>
+                    <a:pt x="2757426" y="1711312"/>
+                  </a:lnTo>
+                  <a:lnTo>
+                    <a:pt x="2834670" y="1892934"/>
+                  </a:lnTo>
+                  <a:lnTo>
+                    <a:pt x="2911914" y="2055944"/>
+                  </a:lnTo>
+                  <a:lnTo>
+                    <a:pt x="2989157" y="2202252"/>
+                  </a:lnTo>
+                  <a:lnTo>
+                    <a:pt x="3066401" y="2333567"/>
+                  </a:lnTo>
+                  <a:lnTo>
+                    <a:pt x="3143644" y="2451426"/>
+                  </a:lnTo>
+                  <a:lnTo>
+                    <a:pt x="3220888" y="2557208"/>
+                  </a:lnTo>
+                  <a:lnTo>
+                    <a:pt x="3298131" y="2652150"/>
+                  </a:lnTo>
+                  <a:lnTo>
+                    <a:pt x="3375375" y="2666431"/>
+                  </a:lnTo>
+                  <a:lnTo>
+                    <a:pt x="3452619" y="2678689"/>
+                  </a:lnTo>
+                  <a:lnTo>
+                    <a:pt x="3529862" y="2690764"/>
+                  </a:lnTo>
+                  <a:lnTo>
+                    <a:pt x="3607106" y="2702658"/>
+                  </a:lnTo>
+                  <a:lnTo>
+                    <a:pt x="3684349" y="2714374"/>
+                  </a:lnTo>
+                  <a:lnTo>
+                    <a:pt x="3761593" y="2725913"/>
+                  </a:lnTo>
+                  <a:lnTo>
+                    <a:pt x="3838836" y="2737280"/>
+                  </a:lnTo>
+                  <a:lnTo>
+                    <a:pt x="3916080" y="2748476"/>
+                  </a:lnTo>
+                  <a:lnTo>
+                    <a:pt x="3993324" y="2759505"/>
+                  </a:lnTo>
+                  <a:lnTo>
+                    <a:pt x="4070567" y="2770367"/>
+                  </a:lnTo>
+                  <a:lnTo>
+                    <a:pt x="4147811" y="2781067"/>
+                  </a:lnTo>
+                  <a:lnTo>
+                    <a:pt x="4225054" y="2791607"/>
+                  </a:lnTo>
+                  <a:lnTo>
+                    <a:pt x="4302298" y="2801988"/>
+                  </a:lnTo>
+                  <a:lnTo>
+                    <a:pt x="4379541" y="2812214"/>
+                  </a:lnTo>
+                  <a:lnTo>
+                    <a:pt x="4456785" y="2822286"/>
+                  </a:lnTo>
+                  <a:lnTo>
+                    <a:pt x="4534029" y="2832207"/>
+                  </a:lnTo>
+                  <a:lnTo>
+                    <a:pt x="4611272" y="2841979"/>
+                  </a:lnTo>
+                  <a:lnTo>
+                    <a:pt x="4688516" y="2851605"/>
+                  </a:lnTo>
+                  <a:lnTo>
+                    <a:pt x="4765759" y="2861087"/>
+                  </a:lnTo>
+                  <a:lnTo>
+                    <a:pt x="4843003" y="2870426"/>
+                  </a:lnTo>
+                  <a:lnTo>
+                    <a:pt x="4920246" y="2879625"/>
+                  </a:lnTo>
+                  <a:lnTo>
+                    <a:pt x="4997490" y="2888686"/>
+                  </a:lnTo>
+                  <a:lnTo>
+                    <a:pt x="5074734" y="2897611"/>
+                  </a:lnTo>
+                  <a:lnTo>
+                    <a:pt x="5151977" y="2906403"/>
+                  </a:lnTo>
+                  <a:lnTo>
+                    <a:pt x="5229221" y="2915062"/>
+                  </a:lnTo>
+                  <a:lnTo>
+                    <a:pt x="5306464" y="2923592"/>
+                  </a:lnTo>
+                  <a:lnTo>
+                    <a:pt x="5383708" y="2931994"/>
+                  </a:lnTo>
+                  <a:lnTo>
+                    <a:pt x="5460951" y="2940269"/>
+                  </a:lnTo>
+                  <a:lnTo>
+                    <a:pt x="5538195" y="2948421"/>
+                  </a:lnTo>
+                  <a:lnTo>
+                    <a:pt x="5615439" y="2956450"/>
+                  </a:lnTo>
+                  <a:lnTo>
+                    <a:pt x="5692682" y="2964359"/>
+                  </a:lnTo>
+                  <a:lnTo>
+                    <a:pt x="5769926" y="2972149"/>
+                  </a:lnTo>
+                  <a:lnTo>
+                    <a:pt x="5847169" y="2979823"/>
+                  </a:lnTo>
+                  <a:lnTo>
+                    <a:pt x="5924413" y="2987381"/>
+                  </a:lnTo>
+                  <a:lnTo>
+                    <a:pt x="6001656" y="2994826"/>
+                  </a:lnTo>
+                  <a:lnTo>
+                    <a:pt x="6078900" y="3002159"/>
+                  </a:lnTo>
+                  <a:lnTo>
+                    <a:pt x="6156144" y="3009382"/>
+                  </a:lnTo>
+                  <a:lnTo>
+                    <a:pt x="6233387" y="3016497"/>
+                  </a:lnTo>
+                  <a:lnTo>
+                    <a:pt x="6310631" y="3023506"/>
+                  </a:lnTo>
+                  <a:lnTo>
+                    <a:pt x="6387874" y="3030409"/>
+                  </a:lnTo>
+                  <a:lnTo>
+                    <a:pt x="6465118" y="3037208"/>
+                  </a:lnTo>
+                  <a:lnTo>
+                    <a:pt x="6542361" y="3043906"/>
+                  </a:lnTo>
+                  <a:lnTo>
+                    <a:pt x="6619605" y="3050503"/>
+                  </a:lnTo>
+                  <a:lnTo>
+                    <a:pt x="6696849" y="3057001"/>
+                  </a:lnTo>
+                  <a:lnTo>
+                    <a:pt x="6774092" y="3063402"/>
+                  </a:lnTo>
+                  <a:lnTo>
+                    <a:pt x="6851336" y="3069707"/>
+                  </a:lnTo>
+                  <a:lnTo>
+                    <a:pt x="6928579" y="3075917"/>
+                  </a:lnTo>
+                  <a:lnTo>
+                    <a:pt x="7005823" y="3082034"/>
+                  </a:lnTo>
+                  <a:lnTo>
+                    <a:pt x="7083066" y="3088059"/>
+                  </a:lnTo>
+                  <a:lnTo>
+                    <a:pt x="7160310" y="3093994"/>
+                  </a:lnTo>
+                  <a:lnTo>
+                    <a:pt x="7237554" y="3099840"/>
+                  </a:lnTo>
+                  <a:lnTo>
+                    <a:pt x="7314797" y="3105598"/>
+                  </a:lnTo>
+                  <a:lnTo>
+                    <a:pt x="7392041" y="3111270"/>
+                  </a:lnTo>
+                  <a:lnTo>
+                    <a:pt x="7392041" y="3481046"/>
+                  </a:lnTo>
+                  <a:lnTo>
+                    <a:pt x="7314797" y="3480737"/>
+                  </a:lnTo>
+                  <a:lnTo>
+                    <a:pt x="7237554" y="3480394"/>
+                  </a:lnTo>
+                  <a:lnTo>
+                    <a:pt x="7160310" y="3480011"/>
+                  </a:lnTo>
+                  <a:lnTo>
+                    <a:pt x="7083066" y="3479584"/>
+                  </a:lnTo>
+                  <a:lnTo>
+                    <a:pt x="7005823" y="3479109"/>
+                  </a:lnTo>
+                  <a:lnTo>
+                    <a:pt x="6928579" y="3478580"/>
+                  </a:lnTo>
+                  <a:lnTo>
+                    <a:pt x="6851336" y="3477990"/>
+                  </a:lnTo>
+                  <a:lnTo>
+                    <a:pt x="6774092" y="3477333"/>
+                  </a:lnTo>
+                  <a:lnTo>
+                    <a:pt x="6696849" y="3476600"/>
+                  </a:lnTo>
+                  <a:lnTo>
+                    <a:pt x="6619605" y="3475785"/>
+                  </a:lnTo>
+                  <a:lnTo>
+                    <a:pt x="6542361" y="3474876"/>
+                  </a:lnTo>
+                  <a:lnTo>
+                    <a:pt x="6465118" y="3473863"/>
+                  </a:lnTo>
+                  <a:lnTo>
+                    <a:pt x="6387874" y="3472734"/>
+                  </a:lnTo>
+                  <a:lnTo>
+                    <a:pt x="6310631" y="3471477"/>
+                  </a:lnTo>
+                  <a:lnTo>
+                    <a:pt x="6233387" y="3470076"/>
+                  </a:lnTo>
+                  <a:lnTo>
+                    <a:pt x="6156144" y="3468516"/>
+                  </a:lnTo>
+                  <a:lnTo>
+                    <a:pt x="6078900" y="3466777"/>
+                  </a:lnTo>
+                  <a:lnTo>
+                    <a:pt x="6001656" y="3464839"/>
+                  </a:lnTo>
+                  <a:lnTo>
+                    <a:pt x="5924413" y="3462681"/>
+                  </a:lnTo>
+                  <a:lnTo>
+                    <a:pt x="5847169" y="3460276"/>
+                  </a:lnTo>
+                  <a:lnTo>
+                    <a:pt x="5769926" y="3457596"/>
+                  </a:lnTo>
+                  <a:lnTo>
+                    <a:pt x="5692682" y="3454610"/>
+                  </a:lnTo>
+                  <a:lnTo>
+                    <a:pt x="5615439" y="3451284"/>
+                  </a:lnTo>
+                  <a:lnTo>
+                    <a:pt x="5538195" y="3447578"/>
+                  </a:lnTo>
+                  <a:lnTo>
+                    <a:pt x="5460951" y="3443449"/>
+                  </a:lnTo>
+                  <a:lnTo>
+                    <a:pt x="5383708" y="3438848"/>
+                  </a:lnTo>
+                  <a:lnTo>
+                    <a:pt x="5306464" y="3433722"/>
+                  </a:lnTo>
+                  <a:lnTo>
+                    <a:pt x="5229221" y="3428010"/>
+                  </a:lnTo>
+                  <a:lnTo>
+                    <a:pt x="5151977" y="3421647"/>
+                  </a:lnTo>
+                  <a:lnTo>
+                    <a:pt x="5074734" y="3414557"/>
+                  </a:lnTo>
+                  <a:lnTo>
+                    <a:pt x="4997490" y="3406658"/>
+                  </a:lnTo>
+                  <a:lnTo>
+                    <a:pt x="4920246" y="3397857"/>
+                  </a:lnTo>
+                  <a:lnTo>
+                    <a:pt x="4843003" y="3388051"/>
+                  </a:lnTo>
+                  <a:lnTo>
+                    <a:pt x="4765759" y="3377126"/>
+                  </a:lnTo>
+                  <a:lnTo>
+                    <a:pt x="4688516" y="3364953"/>
+                  </a:lnTo>
+                  <a:lnTo>
+                    <a:pt x="4611272" y="3351390"/>
+                  </a:lnTo>
+                  <a:lnTo>
+                    <a:pt x="4534029" y="3336279"/>
+                  </a:lnTo>
+                  <a:lnTo>
+                    <a:pt x="4456785" y="3319443"/>
+                  </a:lnTo>
+                  <a:lnTo>
+                    <a:pt x="4379541" y="3300685"/>
+                  </a:lnTo>
+                  <a:lnTo>
+                    <a:pt x="4302298" y="3279785"/>
+                  </a:lnTo>
+                  <a:lnTo>
+                    <a:pt x="4225054" y="3256499"/>
+                  </a:lnTo>
+                  <a:lnTo>
+                    <a:pt x="4147811" y="3230554"/>
+                  </a:lnTo>
+                  <a:lnTo>
+                    <a:pt x="4070567" y="3201647"/>
+                  </a:lnTo>
+                  <a:lnTo>
+                    <a:pt x="3993324" y="3169440"/>
+                  </a:lnTo>
+                  <a:lnTo>
+                    <a:pt x="3916080" y="3133556"/>
+                  </a:lnTo>
+                  <a:lnTo>
+                    <a:pt x="3838836" y="3093576"/>
+                  </a:lnTo>
+                  <a:lnTo>
+                    <a:pt x="3761593" y="3049030"/>
+                  </a:lnTo>
+                  <a:lnTo>
+                    <a:pt x="3684349" y="2999399"/>
+                  </a:lnTo>
+                  <a:lnTo>
+                    <a:pt x="3607106" y="2944101"/>
+                  </a:lnTo>
+                  <a:lnTo>
+                    <a:pt x="3529862" y="2882491"/>
+                  </a:lnTo>
+                  <a:lnTo>
+                    <a:pt x="3452619" y="2813846"/>
+                  </a:lnTo>
+                  <a:lnTo>
+                    <a:pt x="3375375" y="2737364"/>
+                  </a:lnTo>
+                  <a:lnTo>
+                    <a:pt x="3298131" y="2653985"/>
+                  </a:lnTo>
+                  <a:lnTo>
+                    <a:pt x="3220888" y="2641350"/>
+                  </a:lnTo>
+                  <a:lnTo>
+                    <a:pt x="3143644" y="2628523"/>
+                  </a:lnTo>
+                  <a:lnTo>
+                    <a:pt x="3066401" y="2615500"/>
+                  </a:lnTo>
+                  <a:lnTo>
+                    <a:pt x="2989157" y="2602279"/>
+                  </a:lnTo>
+                  <a:lnTo>
+                    <a:pt x="2911914" y="2588856"/>
+                  </a:lnTo>
+                  <a:lnTo>
+                    <a:pt x="2834670" y="2575230"/>
+                  </a:lnTo>
+                  <a:lnTo>
+                    <a:pt x="2757426" y="2561395"/>
+                  </a:lnTo>
+                  <a:lnTo>
+                    <a:pt x="2680183" y="2547351"/>
+                  </a:lnTo>
+                  <a:lnTo>
+                    <a:pt x="2602939" y="2533092"/>
+                  </a:lnTo>
+                  <a:lnTo>
+                    <a:pt x="2525696" y="2518616"/>
+                  </a:lnTo>
+                  <a:lnTo>
+                    <a:pt x="2448452" y="2503920"/>
+                  </a:lnTo>
+                  <a:lnTo>
+                    <a:pt x="2371209" y="2488999"/>
+                  </a:lnTo>
+                  <a:lnTo>
+                    <a:pt x="2293965" y="2473852"/>
+                  </a:lnTo>
+                  <a:lnTo>
+                    <a:pt x="2216721" y="2458474"/>
+                  </a:lnTo>
+                  <a:lnTo>
+                    <a:pt x="2139478" y="2442862"/>
+                  </a:lnTo>
+                  <a:lnTo>
+                    <a:pt x="2062234" y="2427012"/>
+                  </a:lnTo>
+                  <a:lnTo>
+                    <a:pt x="1984991" y="2410921"/>
+                  </a:lnTo>
+                  <a:lnTo>
+                    <a:pt x="1907747" y="2394585"/>
+                  </a:lnTo>
+                  <a:lnTo>
+                    <a:pt x="1830504" y="2378000"/>
+                  </a:lnTo>
+                  <a:lnTo>
+                    <a:pt x="1753260" y="2361162"/>
+                  </a:lnTo>
+                  <a:lnTo>
+                    <a:pt x="1676016" y="2344068"/>
+                  </a:lnTo>
+                  <a:lnTo>
+                    <a:pt x="1598773" y="2326714"/>
+                  </a:lnTo>
+                  <a:lnTo>
+                    <a:pt x="1521529" y="2309096"/>
+                  </a:lnTo>
+                  <a:lnTo>
+                    <a:pt x="1444286" y="2291209"/>
+                  </a:lnTo>
+                  <a:lnTo>
+                    <a:pt x="1367042" y="2273050"/>
+                  </a:lnTo>
+                  <a:lnTo>
+                    <a:pt x="1289799" y="2254614"/>
+                  </a:lnTo>
+                  <a:lnTo>
+                    <a:pt x="1212555" y="2235898"/>
+                  </a:lnTo>
+                  <a:lnTo>
+                    <a:pt x="1135311" y="2216897"/>
+                  </a:lnTo>
+                  <a:lnTo>
+                    <a:pt x="1058068" y="2197606"/>
+                  </a:lnTo>
+                  <a:lnTo>
+                    <a:pt x="980824" y="2178021"/>
+                  </a:lnTo>
+                  <a:lnTo>
+                    <a:pt x="903581" y="2158139"/>
+                  </a:lnTo>
+                  <a:lnTo>
+                    <a:pt x="826337" y="2137953"/>
+                  </a:lnTo>
+                  <a:lnTo>
+                    <a:pt x="749094" y="2117461"/>
+                  </a:lnTo>
+                  <a:lnTo>
+                    <a:pt x="671850" y="2096656"/>
+                  </a:lnTo>
+                  <a:lnTo>
+                    <a:pt x="594606" y="2075534"/>
+                  </a:lnTo>
+                  <a:lnTo>
+                    <a:pt x="517363" y="2054091"/>
+                  </a:lnTo>
+                  <a:lnTo>
+                    <a:pt x="440119" y="2032321"/>
+                  </a:lnTo>
+                  <a:lnTo>
+                    <a:pt x="362876" y="2010220"/>
+                  </a:lnTo>
+                  <a:lnTo>
+                    <a:pt x="285632" y="1987782"/>
+                  </a:lnTo>
+                  <a:lnTo>
+                    <a:pt x="208389" y="1965002"/>
+                  </a:lnTo>
+                  <a:lnTo>
+                    <a:pt x="131145" y="1941876"/>
+                  </a:lnTo>
+                  <a:lnTo>
+                    <a:pt x="53901" y="1918398"/>
+                  </a:lnTo>
+                  <a:lnTo>
+                    <a:pt x="0" y="1901764"/>
                   </a:lnTo>
                   <a:close/>
                 </a:path>
@@ -3528,216 +3528,216 @@
           </p:nvSpPr>
           <p:spPr>
             <a:xfrm>
-              <a:off x="3092896" y="1896563"/>
-              <a:ext cx="5116662" cy="3262108"/>
+              <a:off x="3092896" y="2073503"/>
+              <a:ext cx="5116662" cy="3111270"/>
             </a:xfrm>
             <a:custGeom>
               <a:avLst/>
               <a:pathLst>
-                <a:path w="5116662" h="3262108">
+                <a:path w="5116662" h="3111270">
                   <a:moveTo>
                     <a:pt x="0" y="0"/>
                   </a:moveTo>
                   <a:lnTo>
-                    <a:pt x="18586" y="97661"/>
-                  </a:lnTo>
-                  <a:lnTo>
-                    <a:pt x="95830" y="461941"/>
-                  </a:lnTo>
-                  <a:lnTo>
-                    <a:pt x="173073" y="788892"/>
-                  </a:lnTo>
-                  <a:lnTo>
-                    <a:pt x="250317" y="1082341"/>
-                  </a:lnTo>
-                  <a:lnTo>
-                    <a:pt x="327560" y="1345720"/>
-                  </a:lnTo>
-                  <a:lnTo>
-                    <a:pt x="404804" y="1582111"/>
-                  </a:lnTo>
-                  <a:lnTo>
-                    <a:pt x="482048" y="1794279"/>
-                  </a:lnTo>
-                  <a:lnTo>
-                    <a:pt x="559291" y="1984706"/>
-                  </a:lnTo>
-                  <a:lnTo>
-                    <a:pt x="636535" y="2155620"/>
-                  </a:lnTo>
-                  <a:lnTo>
-                    <a:pt x="713778" y="2309020"/>
-                  </a:lnTo>
-                  <a:lnTo>
-                    <a:pt x="791022" y="2446701"/>
-                  </a:lnTo>
-                  <a:lnTo>
-                    <a:pt x="868265" y="2570274"/>
-                  </a:lnTo>
-                  <a:lnTo>
-                    <a:pt x="945509" y="2681185"/>
-                  </a:lnTo>
-                  <a:lnTo>
-                    <a:pt x="1022753" y="2780730"/>
-                  </a:lnTo>
-                  <a:lnTo>
-                    <a:pt x="1099996" y="2795703"/>
-                  </a:lnTo>
-                  <a:lnTo>
-                    <a:pt x="1177240" y="2808556"/>
-                  </a:lnTo>
-                  <a:lnTo>
-                    <a:pt x="1254483" y="2821216"/>
-                  </a:lnTo>
-                  <a:lnTo>
-                    <a:pt x="1331727" y="2833687"/>
-                  </a:lnTo>
-                  <a:lnTo>
-                    <a:pt x="1408970" y="2845970"/>
-                  </a:lnTo>
-                  <a:lnTo>
-                    <a:pt x="1486214" y="2858070"/>
-                  </a:lnTo>
-                  <a:lnTo>
-                    <a:pt x="1563458" y="2869987"/>
-                  </a:lnTo>
-                  <a:lnTo>
-                    <a:pt x="1640701" y="2881726"/>
-                  </a:lnTo>
-                  <a:lnTo>
-                    <a:pt x="1717945" y="2893289"/>
-                  </a:lnTo>
-                  <a:lnTo>
-                    <a:pt x="1795188" y="2904679"/>
-                  </a:lnTo>
-                  <a:lnTo>
-                    <a:pt x="1872432" y="2915897"/>
-                  </a:lnTo>
-                  <a:lnTo>
-                    <a:pt x="1949675" y="2926948"/>
-                  </a:lnTo>
-                  <a:lnTo>
-                    <a:pt x="2026919" y="2937832"/>
-                  </a:lnTo>
-                  <a:lnTo>
-                    <a:pt x="2104163" y="2948554"/>
-                  </a:lnTo>
-                  <a:lnTo>
-                    <a:pt x="2181406" y="2959114"/>
-                  </a:lnTo>
-                  <a:lnTo>
-                    <a:pt x="2258650" y="2969516"/>
-                  </a:lnTo>
-                  <a:lnTo>
-                    <a:pt x="2335893" y="2979763"/>
-                  </a:lnTo>
-                  <a:lnTo>
-                    <a:pt x="2413137" y="2989855"/>
-                  </a:lnTo>
-                  <a:lnTo>
-                    <a:pt x="2490380" y="2999796"/>
-                  </a:lnTo>
-                  <a:lnTo>
-                    <a:pt x="2567624" y="3009588"/>
-                  </a:lnTo>
-                  <a:lnTo>
-                    <a:pt x="2644868" y="3019233"/>
-                  </a:lnTo>
-                  <a:lnTo>
-                    <a:pt x="2722111" y="3028734"/>
-                  </a:lnTo>
-                  <a:lnTo>
-                    <a:pt x="2799355" y="3038092"/>
-                  </a:lnTo>
-                  <a:lnTo>
-                    <a:pt x="2876598" y="3047309"/>
-                  </a:lnTo>
-                  <a:lnTo>
-                    <a:pt x="2953842" y="3056389"/>
-                  </a:lnTo>
-                  <a:lnTo>
-                    <a:pt x="3031085" y="3065332"/>
-                  </a:lnTo>
-                  <a:lnTo>
-                    <a:pt x="3108329" y="3074141"/>
-                  </a:lnTo>
-                  <a:lnTo>
-                    <a:pt x="3185573" y="3082818"/>
-                  </a:lnTo>
-                  <a:lnTo>
-                    <a:pt x="3262816" y="3091364"/>
-                  </a:lnTo>
-                  <a:lnTo>
-                    <a:pt x="3340060" y="3099783"/>
-                  </a:lnTo>
-                  <a:lnTo>
-                    <a:pt x="3417303" y="3108075"/>
-                  </a:lnTo>
-                  <a:lnTo>
-                    <a:pt x="3494547" y="3116243"/>
-                  </a:lnTo>
-                  <a:lnTo>
-                    <a:pt x="3571790" y="3124289"/>
-                  </a:lnTo>
-                  <a:lnTo>
-                    <a:pt x="3649034" y="3132213"/>
-                  </a:lnTo>
-                  <a:lnTo>
-                    <a:pt x="3726278" y="3140019"/>
-                  </a:lnTo>
-                  <a:lnTo>
-                    <a:pt x="3803521" y="3147708"/>
-                  </a:lnTo>
-                  <a:lnTo>
-                    <a:pt x="3880765" y="3155282"/>
-                  </a:lnTo>
-                  <a:lnTo>
-                    <a:pt x="3958008" y="3162741"/>
-                  </a:lnTo>
-                  <a:lnTo>
-                    <a:pt x="4035252" y="3170089"/>
-                  </a:lnTo>
-                  <a:lnTo>
-                    <a:pt x="4112495" y="3177327"/>
-                  </a:lnTo>
-                  <a:lnTo>
-                    <a:pt x="4189739" y="3184456"/>
-                  </a:lnTo>
-                  <a:lnTo>
-                    <a:pt x="4266983" y="3191479"/>
-                  </a:lnTo>
-                  <a:lnTo>
-                    <a:pt x="4344226" y="3198396"/>
-                  </a:lnTo>
-                  <a:lnTo>
-                    <a:pt x="4421470" y="3205209"/>
-                  </a:lnTo>
-                  <a:lnTo>
-                    <a:pt x="4498713" y="3211920"/>
-                  </a:lnTo>
-                  <a:lnTo>
-                    <a:pt x="4575957" y="3218530"/>
-                  </a:lnTo>
-                  <a:lnTo>
-                    <a:pt x="4653200" y="3225041"/>
-                  </a:lnTo>
-                  <a:lnTo>
-                    <a:pt x="4730444" y="3231455"/>
-                  </a:lnTo>
-                  <a:lnTo>
-                    <a:pt x="4807688" y="3237772"/>
-                  </a:lnTo>
-                  <a:lnTo>
-                    <a:pt x="4884931" y="3243995"/>
-                  </a:lnTo>
-                  <a:lnTo>
-                    <a:pt x="4962175" y="3250124"/>
-                  </a:lnTo>
-                  <a:lnTo>
-                    <a:pt x="5039418" y="3256162"/>
-                  </a:lnTo>
-                  <a:lnTo>
-                    <a:pt x="5116662" y="3262108"/>
+                    <a:pt x="18586" y="93145"/>
+                  </a:lnTo>
+                  <a:lnTo>
+                    <a:pt x="95830" y="440581"/>
+                  </a:lnTo>
+                  <a:lnTo>
+                    <a:pt x="173073" y="752414"/>
+                  </a:lnTo>
+                  <a:lnTo>
+                    <a:pt x="250317" y="1032294"/>
+                  </a:lnTo>
+                  <a:lnTo>
+                    <a:pt x="327560" y="1283495"/>
+                  </a:lnTo>
+                  <a:lnTo>
+                    <a:pt x="404804" y="1508955"/>
+                  </a:lnTo>
+                  <a:lnTo>
+                    <a:pt x="482048" y="1711312"/>
+                  </a:lnTo>
+                  <a:lnTo>
+                    <a:pt x="559291" y="1892934"/>
+                  </a:lnTo>
+                  <a:lnTo>
+                    <a:pt x="636535" y="2055944"/>
+                  </a:lnTo>
+                  <a:lnTo>
+                    <a:pt x="713778" y="2202252"/>
+                  </a:lnTo>
+                  <a:lnTo>
+                    <a:pt x="791022" y="2333567"/>
+                  </a:lnTo>
+                  <a:lnTo>
+                    <a:pt x="868265" y="2451426"/>
+                  </a:lnTo>
+                  <a:lnTo>
+                    <a:pt x="945509" y="2557208"/>
+                  </a:lnTo>
+                  <a:lnTo>
+                    <a:pt x="1022753" y="2652150"/>
+                  </a:lnTo>
+                  <a:lnTo>
+                    <a:pt x="1099996" y="2666431"/>
+                  </a:lnTo>
+                  <a:lnTo>
+                    <a:pt x="1177240" y="2678689"/>
+                  </a:lnTo>
+                  <a:lnTo>
+                    <a:pt x="1254483" y="2690764"/>
+                  </a:lnTo>
+                  <a:lnTo>
+                    <a:pt x="1331727" y="2702658"/>
+                  </a:lnTo>
+                  <a:lnTo>
+                    <a:pt x="1408970" y="2714374"/>
+                  </a:lnTo>
+                  <a:lnTo>
+                    <a:pt x="1486214" y="2725913"/>
+                  </a:lnTo>
+                  <a:lnTo>
+                    <a:pt x="1563458" y="2737280"/>
+                  </a:lnTo>
+                  <a:lnTo>
+                    <a:pt x="1640701" y="2748476"/>
+                  </a:lnTo>
+                  <a:lnTo>
+                    <a:pt x="1717945" y="2759505"/>
+                  </a:lnTo>
+                  <a:lnTo>
+                    <a:pt x="1795188" y="2770367"/>
+                  </a:lnTo>
+                  <a:lnTo>
+                    <a:pt x="1872432" y="2781067"/>
+                  </a:lnTo>
+                  <a:lnTo>
+                    <a:pt x="1949675" y="2791607"/>
+                  </a:lnTo>
+                  <a:lnTo>
+                    <a:pt x="2026919" y="2801988"/>
+                  </a:lnTo>
+                  <a:lnTo>
+                    <a:pt x="2104163" y="2812214"/>
+                  </a:lnTo>
+                  <a:lnTo>
+                    <a:pt x="2181406" y="2822286"/>
+                  </a:lnTo>
+                  <a:lnTo>
+                    <a:pt x="2258650" y="2832207"/>
+                  </a:lnTo>
+                  <a:lnTo>
+                    <a:pt x="2335893" y="2841979"/>
+                  </a:lnTo>
+                  <a:lnTo>
+                    <a:pt x="2413137" y="2851605"/>
+                  </a:lnTo>
+                  <a:lnTo>
+                    <a:pt x="2490380" y="2861087"/>
+                  </a:lnTo>
+                  <a:lnTo>
+                    <a:pt x="2567624" y="2870426"/>
+                  </a:lnTo>
+                  <a:lnTo>
+                    <a:pt x="2644868" y="2879625"/>
+                  </a:lnTo>
+                  <a:lnTo>
+                    <a:pt x="2722111" y="2888686"/>
+                  </a:lnTo>
+                  <a:lnTo>
+                    <a:pt x="2799355" y="2897611"/>
+                  </a:lnTo>
+                  <a:lnTo>
+                    <a:pt x="2876598" y="2906403"/>
+                  </a:lnTo>
+                  <a:lnTo>
+                    <a:pt x="2953842" y="2915062"/>
+                  </a:lnTo>
+                  <a:lnTo>
+                    <a:pt x="3031085" y="2923592"/>
+                  </a:lnTo>
+                  <a:lnTo>
+                    <a:pt x="3108329" y="2931994"/>
+                  </a:lnTo>
+                  <a:lnTo>
+                    <a:pt x="3185573" y="2940269"/>
+                  </a:lnTo>
+                  <a:lnTo>
+                    <a:pt x="3262816" y="2948421"/>
+                  </a:lnTo>
+                  <a:lnTo>
+                    <a:pt x="3340060" y="2956450"/>
+                  </a:lnTo>
+                  <a:lnTo>
+                    <a:pt x="3417303" y="2964359"/>
+                  </a:lnTo>
+                  <a:lnTo>
+                    <a:pt x="3494547" y="2972149"/>
+                  </a:lnTo>
+                  <a:lnTo>
+                    <a:pt x="3571790" y="2979823"/>
+                  </a:lnTo>
+                  <a:lnTo>
+                    <a:pt x="3649034" y="2987381"/>
+                  </a:lnTo>
+                  <a:lnTo>
+                    <a:pt x="3726278" y="2994826"/>
+                  </a:lnTo>
+                  <a:lnTo>
+                    <a:pt x="3803521" y="3002159"/>
+                  </a:lnTo>
+                  <a:lnTo>
+                    <a:pt x="3880765" y="3009382"/>
+                  </a:lnTo>
+                  <a:lnTo>
+                    <a:pt x="3958008" y="3016497"/>
+                  </a:lnTo>
+                  <a:lnTo>
+                    <a:pt x="4035252" y="3023506"/>
+                  </a:lnTo>
+                  <a:lnTo>
+                    <a:pt x="4112495" y="3030409"/>
+                  </a:lnTo>
+                  <a:lnTo>
+                    <a:pt x="4189739" y="3037208"/>
+                  </a:lnTo>
+                  <a:lnTo>
+                    <a:pt x="4266983" y="3043906"/>
+                  </a:lnTo>
+                  <a:lnTo>
+                    <a:pt x="4344226" y="3050503"/>
+                  </a:lnTo>
+                  <a:lnTo>
+                    <a:pt x="4421470" y="3057001"/>
+                  </a:lnTo>
+                  <a:lnTo>
+                    <a:pt x="4498713" y="3063402"/>
+                  </a:lnTo>
+                  <a:lnTo>
+                    <a:pt x="4575957" y="3069707"/>
+                  </a:lnTo>
+                  <a:lnTo>
+                    <a:pt x="4653200" y="3075917"/>
+                  </a:lnTo>
+                  <a:lnTo>
+                    <a:pt x="4730444" y="3082034"/>
+                  </a:lnTo>
+                  <a:lnTo>
+                    <a:pt x="4807688" y="3088059"/>
+                  </a:lnTo>
+                  <a:lnTo>
+                    <a:pt x="4884931" y="3093994"/>
+                  </a:lnTo>
+                  <a:lnTo>
+                    <a:pt x="4962175" y="3099840"/>
+                  </a:lnTo>
+                  <a:lnTo>
+                    <a:pt x="5039418" y="3105598"/>
+                  </a:lnTo>
+                  <a:lnTo>
+                    <a:pt x="5116662" y="3111270"/>
                   </a:lnTo>
                 </a:path>
               </a:pathLst>
@@ -3757,300 +3757,300 @@
           </p:nvSpPr>
           <p:spPr>
             <a:xfrm>
-              <a:off x="817517" y="3890528"/>
-              <a:ext cx="7392041" cy="1655846"/>
+              <a:off x="817517" y="3975267"/>
+              <a:ext cx="7392041" cy="1579281"/>
             </a:xfrm>
             <a:custGeom>
               <a:avLst/>
               <a:pathLst>
-                <a:path w="7392041" h="1655846">
+                <a:path w="7392041" h="1579281">
                   <a:moveTo>
-                    <a:pt x="7392041" y="1655846"/>
+                    <a:pt x="7392041" y="1579281"/>
                   </a:moveTo>
                   <a:lnTo>
-                    <a:pt x="7314797" y="1655523"/>
-                  </a:lnTo>
-                  <a:lnTo>
-                    <a:pt x="7237554" y="1655163"/>
-                  </a:lnTo>
-                  <a:lnTo>
-                    <a:pt x="7160310" y="1654762"/>
-                  </a:lnTo>
-                  <a:lnTo>
-                    <a:pt x="7083066" y="1654314"/>
-                  </a:lnTo>
-                  <a:lnTo>
-                    <a:pt x="7005823" y="1653816"/>
-                  </a:lnTo>
-                  <a:lnTo>
-                    <a:pt x="6928579" y="1653261"/>
-                  </a:lnTo>
-                  <a:lnTo>
-                    <a:pt x="6851336" y="1652643"/>
-                  </a:lnTo>
-                  <a:lnTo>
-                    <a:pt x="6774092" y="1651954"/>
-                  </a:lnTo>
-                  <a:lnTo>
-                    <a:pt x="6696849" y="1651186"/>
-                  </a:lnTo>
-                  <a:lnTo>
-                    <a:pt x="6619605" y="1650330"/>
-                  </a:lnTo>
-                  <a:lnTo>
-                    <a:pt x="6542361" y="1649377"/>
-                  </a:lnTo>
-                  <a:lnTo>
-                    <a:pt x="6465118" y="1648315"/>
-                  </a:lnTo>
-                  <a:lnTo>
-                    <a:pt x="6387874" y="1647132"/>
-                  </a:lnTo>
-                  <a:lnTo>
-                    <a:pt x="6310631" y="1645814"/>
-                  </a:lnTo>
-                  <a:lnTo>
-                    <a:pt x="6233387" y="1644345"/>
-                  </a:lnTo>
-                  <a:lnTo>
-                    <a:pt x="6156144" y="1642709"/>
-                  </a:lnTo>
-                  <a:lnTo>
-                    <a:pt x="6078900" y="1640886"/>
-                  </a:lnTo>
-                  <a:lnTo>
-                    <a:pt x="6001656" y="1638855"/>
-                  </a:lnTo>
-                  <a:lnTo>
-                    <a:pt x="5924413" y="1636591"/>
-                  </a:lnTo>
-                  <a:lnTo>
-                    <a:pt x="5847169" y="1634070"/>
-                  </a:lnTo>
-                  <a:lnTo>
-                    <a:pt x="5769926" y="1631260"/>
-                  </a:lnTo>
-                  <a:lnTo>
-                    <a:pt x="5692682" y="1628130"/>
-                  </a:lnTo>
-                  <a:lnTo>
-                    <a:pt x="5615439" y="1624642"/>
-                  </a:lnTo>
-                  <a:lnTo>
-                    <a:pt x="5538195" y="1620756"/>
-                  </a:lnTo>
-                  <a:lnTo>
-                    <a:pt x="5460951" y="1616427"/>
-                  </a:lnTo>
-                  <a:lnTo>
-                    <a:pt x="5383708" y="1611603"/>
-                  </a:lnTo>
-                  <a:lnTo>
-                    <a:pt x="5306464" y="1606228"/>
-                  </a:lnTo>
-                  <a:lnTo>
-                    <a:pt x="5229221" y="1600240"/>
-                  </a:lnTo>
-                  <a:lnTo>
-                    <a:pt x="5151977" y="1593568"/>
-                  </a:lnTo>
-                  <a:lnTo>
-                    <a:pt x="5074734" y="1586135"/>
-                  </a:lnTo>
-                  <a:lnTo>
-                    <a:pt x="4997490" y="1577853"/>
-                  </a:lnTo>
-                  <a:lnTo>
-                    <a:pt x="4920246" y="1568625"/>
-                  </a:lnTo>
-                  <a:lnTo>
-                    <a:pt x="4843003" y="1558343"/>
-                  </a:lnTo>
-                  <a:lnTo>
-                    <a:pt x="4765759" y="1546888"/>
-                  </a:lnTo>
-                  <a:lnTo>
-                    <a:pt x="4688516" y="1534125"/>
-                  </a:lnTo>
-                  <a:lnTo>
-                    <a:pt x="4611272" y="1519905"/>
-                  </a:lnTo>
-                  <a:lnTo>
-                    <a:pt x="4534029" y="1504062"/>
-                  </a:lnTo>
-                  <a:lnTo>
-                    <a:pt x="4456785" y="1486409"/>
-                  </a:lnTo>
-                  <a:lnTo>
-                    <a:pt x="4379541" y="1466742"/>
-                  </a:lnTo>
-                  <a:lnTo>
-                    <a:pt x="4302298" y="1444828"/>
-                  </a:lnTo>
-                  <a:lnTo>
-                    <a:pt x="4225054" y="1420413"/>
-                  </a:lnTo>
-                  <a:lnTo>
-                    <a:pt x="4147811" y="1393211"/>
-                  </a:lnTo>
-                  <a:lnTo>
-                    <a:pt x="4070567" y="1362903"/>
-                  </a:lnTo>
-                  <a:lnTo>
-                    <a:pt x="3993324" y="1329134"/>
-                  </a:lnTo>
-                  <a:lnTo>
-                    <a:pt x="3916080" y="1291511"/>
-                  </a:lnTo>
-                  <a:lnTo>
-                    <a:pt x="3838836" y="1249591"/>
-                  </a:lnTo>
-                  <a:lnTo>
-                    <a:pt x="3761593" y="1202886"/>
-                  </a:lnTo>
-                  <a:lnTo>
-                    <a:pt x="3684349" y="1150849"/>
-                  </a:lnTo>
-                  <a:lnTo>
-                    <a:pt x="3607106" y="1092871"/>
-                  </a:lnTo>
-                  <a:lnTo>
-                    <a:pt x="3529862" y="1028273"/>
-                  </a:lnTo>
-                  <a:lnTo>
-                    <a:pt x="3452619" y="956300"/>
-                  </a:lnTo>
-                  <a:lnTo>
-                    <a:pt x="3375375" y="876110"/>
-                  </a:lnTo>
-                  <a:lnTo>
-                    <a:pt x="3298131" y="788689"/>
-                  </a:lnTo>
-                  <a:lnTo>
-                    <a:pt x="3220888" y="775441"/>
-                  </a:lnTo>
-                  <a:lnTo>
-                    <a:pt x="3143644" y="761992"/>
-                  </a:lnTo>
-                  <a:lnTo>
-                    <a:pt x="3066401" y="748338"/>
-                  </a:lnTo>
-                  <a:lnTo>
-                    <a:pt x="2989157" y="734476"/>
-                  </a:lnTo>
-                  <a:lnTo>
-                    <a:pt x="2911914" y="720403"/>
-                  </a:lnTo>
-                  <a:lnTo>
-                    <a:pt x="2834670" y="706115"/>
-                  </a:lnTo>
-                  <a:lnTo>
-                    <a:pt x="2757426" y="691610"/>
-                  </a:lnTo>
-                  <a:lnTo>
-                    <a:pt x="2680183" y="676885"/>
-                  </a:lnTo>
-                  <a:lnTo>
-                    <a:pt x="2602939" y="661935"/>
-                  </a:lnTo>
-                  <a:lnTo>
-                    <a:pt x="2525696" y="646757"/>
-                  </a:lnTo>
-                  <a:lnTo>
-                    <a:pt x="2448452" y="631348"/>
-                  </a:lnTo>
-                  <a:lnTo>
-                    <a:pt x="2371209" y="615705"/>
-                  </a:lnTo>
-                  <a:lnTo>
-                    <a:pt x="2293965" y="599823"/>
-                  </a:lnTo>
-                  <a:lnTo>
-                    <a:pt x="2216721" y="583699"/>
-                  </a:lnTo>
-                  <a:lnTo>
-                    <a:pt x="2139478" y="567330"/>
-                  </a:lnTo>
-                  <a:lnTo>
-                    <a:pt x="2062234" y="550712"/>
-                  </a:lnTo>
-                  <a:lnTo>
-                    <a:pt x="1984991" y="533841"/>
-                  </a:lnTo>
-                  <a:lnTo>
-                    <a:pt x="1907747" y="516713"/>
-                  </a:lnTo>
-                  <a:lnTo>
-                    <a:pt x="1830504" y="499324"/>
-                  </a:lnTo>
-                  <a:lnTo>
-                    <a:pt x="1753260" y="481670"/>
-                  </a:lnTo>
-                  <a:lnTo>
-                    <a:pt x="1676016" y="463747"/>
-                  </a:lnTo>
-                  <a:lnTo>
-                    <a:pt x="1598773" y="445551"/>
-                  </a:lnTo>
-                  <a:lnTo>
-                    <a:pt x="1521529" y="427079"/>
-                  </a:lnTo>
-                  <a:lnTo>
-                    <a:pt x="1444286" y="408325"/>
-                  </a:lnTo>
-                  <a:lnTo>
-                    <a:pt x="1367042" y="389285"/>
-                  </a:lnTo>
-                  <a:lnTo>
-                    <a:pt x="1289799" y="369956"/>
-                  </a:lnTo>
-                  <a:lnTo>
-                    <a:pt x="1212555" y="350332"/>
-                  </a:lnTo>
-                  <a:lnTo>
-                    <a:pt x="1135311" y="330410"/>
-                  </a:lnTo>
-                  <a:lnTo>
-                    <a:pt x="1058068" y="310184"/>
-                  </a:lnTo>
-                  <a:lnTo>
-                    <a:pt x="980824" y="289650"/>
-                  </a:lnTo>
-                  <a:lnTo>
-                    <a:pt x="903581" y="268803"/>
-                  </a:lnTo>
-                  <a:lnTo>
-                    <a:pt x="826337" y="247639"/>
-                  </a:lnTo>
-                  <a:lnTo>
-                    <a:pt x="749094" y="226153"/>
-                  </a:lnTo>
-                  <a:lnTo>
-                    <a:pt x="671850" y="204339"/>
-                  </a:lnTo>
-                  <a:lnTo>
-                    <a:pt x="594606" y="182194"/>
-                  </a:lnTo>
-                  <a:lnTo>
-                    <a:pt x="517363" y="159711"/>
-                  </a:lnTo>
-                  <a:lnTo>
-                    <a:pt x="440119" y="136886"/>
-                  </a:lnTo>
-                  <a:lnTo>
-                    <a:pt x="362876" y="113713"/>
-                  </a:lnTo>
-                  <a:lnTo>
-                    <a:pt x="285632" y="90187"/>
-                  </a:lnTo>
-                  <a:lnTo>
-                    <a:pt x="208389" y="66303"/>
-                  </a:lnTo>
-                  <a:lnTo>
-                    <a:pt x="131145" y="42056"/>
-                  </a:lnTo>
-                  <a:lnTo>
-                    <a:pt x="53901" y="17439"/>
+                    <a:pt x="7314797" y="1578972"/>
+                  </a:lnTo>
+                  <a:lnTo>
+                    <a:pt x="7237554" y="1578629"/>
+                  </a:lnTo>
+                  <a:lnTo>
+                    <a:pt x="7160310" y="1578246"/>
+                  </a:lnTo>
+                  <a:lnTo>
+                    <a:pt x="7083066" y="1577819"/>
+                  </a:lnTo>
+                  <a:lnTo>
+                    <a:pt x="7005823" y="1577344"/>
+                  </a:lnTo>
+                  <a:lnTo>
+                    <a:pt x="6928579" y="1576815"/>
+                  </a:lnTo>
+                  <a:lnTo>
+                    <a:pt x="6851336" y="1576225"/>
+                  </a:lnTo>
+                  <a:lnTo>
+                    <a:pt x="6774092" y="1575568"/>
+                  </a:lnTo>
+                  <a:lnTo>
+                    <a:pt x="6696849" y="1574836"/>
+                  </a:lnTo>
+                  <a:lnTo>
+                    <a:pt x="6619605" y="1574020"/>
+                  </a:lnTo>
+                  <a:lnTo>
+                    <a:pt x="6542361" y="1573111"/>
+                  </a:lnTo>
+                  <a:lnTo>
+                    <a:pt x="6465118" y="1572098"/>
+                  </a:lnTo>
+                  <a:lnTo>
+                    <a:pt x="6387874" y="1570969"/>
+                  </a:lnTo>
+                  <a:lnTo>
+                    <a:pt x="6310631" y="1569712"/>
+                  </a:lnTo>
+                  <a:lnTo>
+                    <a:pt x="6233387" y="1568311"/>
+                  </a:lnTo>
+                  <a:lnTo>
+                    <a:pt x="6156144" y="1566751"/>
+                  </a:lnTo>
+                  <a:lnTo>
+                    <a:pt x="6078900" y="1565012"/>
+                  </a:lnTo>
+                  <a:lnTo>
+                    <a:pt x="6001656" y="1563074"/>
+                  </a:lnTo>
+                  <a:lnTo>
+                    <a:pt x="5924413" y="1560916"/>
+                  </a:lnTo>
+                  <a:lnTo>
+                    <a:pt x="5847169" y="1558511"/>
+                  </a:lnTo>
+                  <a:lnTo>
+                    <a:pt x="5769926" y="1555831"/>
+                  </a:lnTo>
+                  <a:lnTo>
+                    <a:pt x="5692682" y="1552846"/>
+                  </a:lnTo>
+                  <a:lnTo>
+                    <a:pt x="5615439" y="1549519"/>
+                  </a:lnTo>
+                  <a:lnTo>
+                    <a:pt x="5538195" y="1545813"/>
+                  </a:lnTo>
+                  <a:lnTo>
+                    <a:pt x="5460951" y="1541684"/>
+                  </a:lnTo>
+                  <a:lnTo>
+                    <a:pt x="5383708" y="1537083"/>
+                  </a:lnTo>
+                  <a:lnTo>
+                    <a:pt x="5306464" y="1531957"/>
+                  </a:lnTo>
+                  <a:lnTo>
+                    <a:pt x="5229221" y="1526246"/>
+                  </a:lnTo>
+                  <a:lnTo>
+                    <a:pt x="5151977" y="1519882"/>
+                  </a:lnTo>
+                  <a:lnTo>
+                    <a:pt x="5074734" y="1512792"/>
+                  </a:lnTo>
+                  <a:lnTo>
+                    <a:pt x="4997490" y="1504893"/>
+                  </a:lnTo>
+                  <a:lnTo>
+                    <a:pt x="4920246" y="1496092"/>
+                  </a:lnTo>
+                  <a:lnTo>
+                    <a:pt x="4843003" y="1486286"/>
+                  </a:lnTo>
+                  <a:lnTo>
+                    <a:pt x="4765759" y="1475361"/>
+                  </a:lnTo>
+                  <a:lnTo>
+                    <a:pt x="4688516" y="1463188"/>
+                  </a:lnTo>
+                  <a:lnTo>
+                    <a:pt x="4611272" y="1449625"/>
+                  </a:lnTo>
+                  <a:lnTo>
+                    <a:pt x="4534029" y="1434514"/>
+                  </a:lnTo>
+                  <a:lnTo>
+                    <a:pt x="4456785" y="1417678"/>
+                  </a:lnTo>
+                  <a:lnTo>
+                    <a:pt x="4379541" y="1398920"/>
+                  </a:lnTo>
+                  <a:lnTo>
+                    <a:pt x="4302298" y="1378020"/>
+                  </a:lnTo>
+                  <a:lnTo>
+                    <a:pt x="4225054" y="1354734"/>
+                  </a:lnTo>
+                  <a:lnTo>
+                    <a:pt x="4147811" y="1328789"/>
+                  </a:lnTo>
+                  <a:lnTo>
+                    <a:pt x="4070567" y="1299883"/>
+                  </a:lnTo>
+                  <a:lnTo>
+                    <a:pt x="3993324" y="1267676"/>
+                  </a:lnTo>
+                  <a:lnTo>
+                    <a:pt x="3916080" y="1231792"/>
+                  </a:lnTo>
+                  <a:lnTo>
+                    <a:pt x="3838836" y="1191811"/>
+                  </a:lnTo>
+                  <a:lnTo>
+                    <a:pt x="3761593" y="1147265"/>
+                  </a:lnTo>
+                  <a:lnTo>
+                    <a:pt x="3684349" y="1097634"/>
+                  </a:lnTo>
+                  <a:lnTo>
+                    <a:pt x="3607106" y="1042337"/>
+                  </a:lnTo>
+                  <a:lnTo>
+                    <a:pt x="3529862" y="980726"/>
+                  </a:lnTo>
+                  <a:lnTo>
+                    <a:pt x="3452619" y="912081"/>
+                  </a:lnTo>
+                  <a:lnTo>
+                    <a:pt x="3375375" y="835599"/>
+                  </a:lnTo>
+                  <a:lnTo>
+                    <a:pt x="3298131" y="752220"/>
+                  </a:lnTo>
+                  <a:lnTo>
+                    <a:pt x="3220888" y="739585"/>
+                  </a:lnTo>
+                  <a:lnTo>
+                    <a:pt x="3143644" y="726758"/>
+                  </a:lnTo>
+                  <a:lnTo>
+                    <a:pt x="3066401" y="713735"/>
+                  </a:lnTo>
+                  <a:lnTo>
+                    <a:pt x="2989157" y="700514"/>
+                  </a:lnTo>
+                  <a:lnTo>
+                    <a:pt x="2911914" y="687092"/>
+                  </a:lnTo>
+                  <a:lnTo>
+                    <a:pt x="2834670" y="673465"/>
+                  </a:lnTo>
+                  <a:lnTo>
+                    <a:pt x="2757426" y="659631"/>
+                  </a:lnTo>
+                  <a:lnTo>
+                    <a:pt x="2680183" y="645586"/>
+                  </a:lnTo>
+                  <a:lnTo>
+                    <a:pt x="2602939" y="631327"/>
+                  </a:lnTo>
+                  <a:lnTo>
+                    <a:pt x="2525696" y="616851"/>
+                  </a:lnTo>
+                  <a:lnTo>
+                    <a:pt x="2448452" y="602155"/>
+                  </a:lnTo>
+                  <a:lnTo>
+                    <a:pt x="2371209" y="587235"/>
+                  </a:lnTo>
+                  <a:lnTo>
+                    <a:pt x="2293965" y="572087"/>
+                  </a:lnTo>
+                  <a:lnTo>
+                    <a:pt x="2216721" y="556709"/>
+                  </a:lnTo>
+                  <a:lnTo>
+                    <a:pt x="2139478" y="541097"/>
+                  </a:lnTo>
+                  <a:lnTo>
+                    <a:pt x="2062234" y="525247"/>
+                  </a:lnTo>
+                  <a:lnTo>
+                    <a:pt x="1984991" y="509156"/>
+                  </a:lnTo>
+                  <a:lnTo>
+                    <a:pt x="1907747" y="492820"/>
+                  </a:lnTo>
+                  <a:lnTo>
+                    <a:pt x="1830504" y="476235"/>
+                  </a:lnTo>
+                  <a:lnTo>
+                    <a:pt x="1753260" y="459397"/>
+                  </a:lnTo>
+                  <a:lnTo>
+                    <a:pt x="1676016" y="442304"/>
+                  </a:lnTo>
+                  <a:lnTo>
+                    <a:pt x="1598773" y="424949"/>
+                  </a:lnTo>
+                  <a:lnTo>
+                    <a:pt x="1521529" y="407331"/>
+                  </a:lnTo>
+                  <a:lnTo>
+                    <a:pt x="1444286" y="389444"/>
+                  </a:lnTo>
+                  <a:lnTo>
+                    <a:pt x="1367042" y="371285"/>
+                  </a:lnTo>
+                  <a:lnTo>
+                    <a:pt x="1289799" y="352849"/>
+                  </a:lnTo>
+                  <a:lnTo>
+                    <a:pt x="1212555" y="334133"/>
+                  </a:lnTo>
+                  <a:lnTo>
+                    <a:pt x="1135311" y="315132"/>
+                  </a:lnTo>
+                  <a:lnTo>
+                    <a:pt x="1058068" y="295841"/>
+                  </a:lnTo>
+                  <a:lnTo>
+                    <a:pt x="980824" y="276257"/>
+                  </a:lnTo>
+                  <a:lnTo>
+                    <a:pt x="903581" y="256374"/>
+                  </a:lnTo>
+                  <a:lnTo>
+                    <a:pt x="826337" y="236188"/>
+                  </a:lnTo>
+                  <a:lnTo>
+                    <a:pt x="749094" y="215696"/>
+                  </a:lnTo>
+                  <a:lnTo>
+                    <a:pt x="671850" y="194891"/>
+                  </a:lnTo>
+                  <a:lnTo>
+                    <a:pt x="594606" y="173769"/>
+                  </a:lnTo>
+                  <a:lnTo>
+                    <a:pt x="517363" y="152326"/>
+                  </a:lnTo>
+                  <a:lnTo>
+                    <a:pt x="440119" y="130556"/>
+                  </a:lnTo>
+                  <a:lnTo>
+                    <a:pt x="362876" y="108455"/>
+                  </a:lnTo>
+                  <a:lnTo>
+                    <a:pt x="285632" y="86017"/>
+                  </a:lnTo>
+                  <a:lnTo>
+                    <a:pt x="208389" y="63238"/>
+                  </a:lnTo>
+                  <a:lnTo>
+                    <a:pt x="131145" y="40111"/>
+                  </a:lnTo>
+                  <a:lnTo>
+                    <a:pt x="53901" y="16633"/>
                   </a:lnTo>
                   <a:lnTo>
                     <a:pt x="0" y="0"/>
@@ -4073,246 +4073,246 @@
           </p:nvSpPr>
           <p:spPr>
             <a:xfrm>
-              <a:off x="2318732" y="1896563"/>
-              <a:ext cx="5890826" cy="3619388"/>
+              <a:off x="2318732" y="2073503"/>
+              <a:ext cx="5890826" cy="3452029"/>
             </a:xfrm>
             <a:custGeom>
               <a:avLst/>
               <a:pathLst>
-                <a:path w="5890826" h="3619388">
+                <a:path w="5890826" h="3452029">
                   <a:moveTo>
                     <a:pt x="0" y="0"/>
                   </a:moveTo>
                   <a:lnTo>
-                    <a:pt x="20314" y="60043"/>
-                  </a:lnTo>
-                  <a:lnTo>
-                    <a:pt x="97558" y="274705"/>
-                  </a:lnTo>
-                  <a:lnTo>
-                    <a:pt x="174802" y="476541"/>
-                  </a:lnTo>
-                  <a:lnTo>
-                    <a:pt x="252045" y="666316"/>
-                  </a:lnTo>
-                  <a:lnTo>
-                    <a:pt x="329289" y="844753"/>
-                  </a:lnTo>
-                  <a:lnTo>
-                    <a:pt x="406532" y="1012528"/>
-                  </a:lnTo>
-                  <a:lnTo>
-                    <a:pt x="483776" y="1170277"/>
-                  </a:lnTo>
-                  <a:lnTo>
-                    <a:pt x="561019" y="1318602"/>
-                  </a:lnTo>
-                  <a:lnTo>
-                    <a:pt x="638263" y="1458063"/>
-                  </a:lnTo>
-                  <a:lnTo>
-                    <a:pt x="715507" y="1589192"/>
-                  </a:lnTo>
-                  <a:lnTo>
-                    <a:pt x="792750" y="1712486"/>
-                  </a:lnTo>
-                  <a:lnTo>
-                    <a:pt x="869994" y="1828412"/>
-                  </a:lnTo>
-                  <a:lnTo>
-                    <a:pt x="947237" y="1937412"/>
-                  </a:lnTo>
-                  <a:lnTo>
-                    <a:pt x="1024481" y="2039899"/>
-                  </a:lnTo>
-                  <a:lnTo>
-                    <a:pt x="1101724" y="2136263"/>
-                  </a:lnTo>
-                  <a:lnTo>
-                    <a:pt x="1178968" y="2226868"/>
-                  </a:lnTo>
-                  <a:lnTo>
-                    <a:pt x="1256212" y="2312060"/>
-                  </a:lnTo>
-                  <a:lnTo>
-                    <a:pt x="1333455" y="2392161"/>
-                  </a:lnTo>
-                  <a:lnTo>
-                    <a:pt x="1410699" y="2467476"/>
-                  </a:lnTo>
-                  <a:lnTo>
-                    <a:pt x="1487942" y="2538291"/>
-                  </a:lnTo>
-                  <a:lnTo>
-                    <a:pt x="1565186" y="2604875"/>
-                  </a:lnTo>
-                  <a:lnTo>
-                    <a:pt x="1642429" y="2667481"/>
-                  </a:lnTo>
-                  <a:lnTo>
-                    <a:pt x="1719673" y="2726345"/>
-                  </a:lnTo>
-                  <a:lnTo>
-                    <a:pt x="1796917" y="2781693"/>
-                  </a:lnTo>
-                  <a:lnTo>
-                    <a:pt x="1874160" y="2833733"/>
-                  </a:lnTo>
-                  <a:lnTo>
-                    <a:pt x="1951404" y="2882664"/>
-                  </a:lnTo>
-                  <a:lnTo>
-                    <a:pt x="2028647" y="2928671"/>
-                  </a:lnTo>
-                  <a:lnTo>
-                    <a:pt x="2105891" y="2971929"/>
-                  </a:lnTo>
-                  <a:lnTo>
-                    <a:pt x="2183134" y="3012603"/>
-                  </a:lnTo>
-                  <a:lnTo>
-                    <a:pt x="2260378" y="3050846"/>
-                  </a:lnTo>
-                  <a:lnTo>
-                    <a:pt x="2337622" y="3086804"/>
-                  </a:lnTo>
-                  <a:lnTo>
-                    <a:pt x="2414865" y="3120613"/>
-                  </a:lnTo>
-                  <a:lnTo>
-                    <a:pt x="2492109" y="3152403"/>
-                  </a:lnTo>
-                  <a:lnTo>
-                    <a:pt x="2569352" y="3182293"/>
-                  </a:lnTo>
-                  <a:lnTo>
-                    <a:pt x="2646596" y="3210397"/>
-                  </a:lnTo>
-                  <a:lnTo>
-                    <a:pt x="2723839" y="3236821"/>
-                  </a:lnTo>
-                  <a:lnTo>
-                    <a:pt x="2801083" y="3261667"/>
-                  </a:lnTo>
-                  <a:lnTo>
-                    <a:pt x="2878327" y="3285029"/>
-                  </a:lnTo>
-                  <a:lnTo>
-                    <a:pt x="2955570" y="3306994"/>
-                  </a:lnTo>
-                  <a:lnTo>
-                    <a:pt x="3032814" y="3327647"/>
-                  </a:lnTo>
-                  <a:lnTo>
-                    <a:pt x="3110057" y="3347066"/>
-                  </a:lnTo>
-                  <a:lnTo>
-                    <a:pt x="3187301" y="3365324"/>
-                  </a:lnTo>
-                  <a:lnTo>
-                    <a:pt x="3264544" y="3382492"/>
-                  </a:lnTo>
-                  <a:lnTo>
-                    <a:pt x="3341788" y="3398634"/>
-                  </a:lnTo>
-                  <a:lnTo>
-                    <a:pt x="3419032" y="3413811"/>
-                  </a:lnTo>
-                  <a:lnTo>
-                    <a:pt x="3496275" y="3428082"/>
-                  </a:lnTo>
-                  <a:lnTo>
-                    <a:pt x="3573519" y="3441500"/>
-                  </a:lnTo>
-                  <a:lnTo>
-                    <a:pt x="3650762" y="3454116"/>
-                  </a:lnTo>
-                  <a:lnTo>
-                    <a:pt x="3728006" y="3465978"/>
-                  </a:lnTo>
-                  <a:lnTo>
-                    <a:pt x="3805249" y="3477131"/>
-                  </a:lnTo>
-                  <a:lnTo>
-                    <a:pt x="3882493" y="3487618"/>
-                  </a:lnTo>
-                  <a:lnTo>
-                    <a:pt x="3959737" y="3497479"/>
-                  </a:lnTo>
-                  <a:lnTo>
-                    <a:pt x="4036980" y="3506750"/>
-                  </a:lnTo>
-                  <a:lnTo>
-                    <a:pt x="4114224" y="3515467"/>
-                  </a:lnTo>
-                  <a:lnTo>
-                    <a:pt x="4191467" y="3523664"/>
-                  </a:lnTo>
-                  <a:lnTo>
-                    <a:pt x="4268711" y="3531370"/>
-                  </a:lnTo>
-                  <a:lnTo>
-                    <a:pt x="4345954" y="3538617"/>
-                  </a:lnTo>
-                  <a:lnTo>
-                    <a:pt x="4423198" y="3545430"/>
-                  </a:lnTo>
-                  <a:lnTo>
-                    <a:pt x="4500442" y="3551836"/>
-                  </a:lnTo>
-                  <a:lnTo>
-                    <a:pt x="4577685" y="3557859"/>
-                  </a:lnTo>
-                  <a:lnTo>
-                    <a:pt x="4654929" y="3563523"/>
-                  </a:lnTo>
-                  <a:lnTo>
-                    <a:pt x="4732172" y="3568848"/>
-                  </a:lnTo>
-                  <a:lnTo>
-                    <a:pt x="4809416" y="3573855"/>
-                  </a:lnTo>
-                  <a:lnTo>
-                    <a:pt x="4886659" y="3578562"/>
-                  </a:lnTo>
-                  <a:lnTo>
-                    <a:pt x="4963903" y="3582989"/>
-                  </a:lnTo>
-                  <a:lnTo>
-                    <a:pt x="5041147" y="3587151"/>
-                  </a:lnTo>
-                  <a:lnTo>
-                    <a:pt x="5118390" y="3591064"/>
-                  </a:lnTo>
-                  <a:lnTo>
-                    <a:pt x="5195634" y="3594743"/>
-                  </a:lnTo>
-                  <a:lnTo>
-                    <a:pt x="5272877" y="3598203"/>
-                  </a:lnTo>
-                  <a:lnTo>
-                    <a:pt x="5350121" y="3601456"/>
-                  </a:lnTo>
-                  <a:lnTo>
-                    <a:pt x="5427364" y="3604514"/>
-                  </a:lnTo>
-                  <a:lnTo>
-                    <a:pt x="5504608" y="3607390"/>
-                  </a:lnTo>
-                  <a:lnTo>
-                    <a:pt x="5581852" y="3610094"/>
-                  </a:lnTo>
-                  <a:lnTo>
-                    <a:pt x="5659095" y="3612636"/>
-                  </a:lnTo>
-                  <a:lnTo>
-                    <a:pt x="5736339" y="3615027"/>
-                  </a:lnTo>
-                  <a:lnTo>
-                    <a:pt x="5813582" y="3617275"/>
-                  </a:lnTo>
-                  <a:lnTo>
-                    <a:pt x="5890826" y="3619388"/>
+                    <a:pt x="20314" y="57267"/>
+                  </a:lnTo>
+                  <a:lnTo>
+                    <a:pt x="97558" y="262003"/>
+                  </a:lnTo>
+                  <a:lnTo>
+                    <a:pt x="174802" y="454506"/>
+                  </a:lnTo>
+                  <a:lnTo>
+                    <a:pt x="252045" y="635506"/>
+                  </a:lnTo>
+                  <a:lnTo>
+                    <a:pt x="329289" y="805692"/>
+                  </a:lnTo>
+                  <a:lnTo>
+                    <a:pt x="406532" y="965709"/>
+                  </a:lnTo>
+                  <a:lnTo>
+                    <a:pt x="483776" y="1116164"/>
+                  </a:lnTo>
+                  <a:lnTo>
+                    <a:pt x="561019" y="1257630"/>
+                  </a:lnTo>
+                  <a:lnTo>
+                    <a:pt x="638263" y="1390643"/>
+                  </a:lnTo>
+                  <a:lnTo>
+                    <a:pt x="715507" y="1515708"/>
+                  </a:lnTo>
+                  <a:lnTo>
+                    <a:pt x="792750" y="1633301"/>
+                  </a:lnTo>
+                  <a:lnTo>
+                    <a:pt x="869994" y="1743867"/>
+                  </a:lnTo>
+                  <a:lnTo>
+                    <a:pt x="947237" y="1847827"/>
+                  </a:lnTo>
+                  <a:lnTo>
+                    <a:pt x="1024481" y="1945575"/>
+                  </a:lnTo>
+                  <a:lnTo>
+                    <a:pt x="1101724" y="2037483"/>
+                  </a:lnTo>
+                  <a:lnTo>
+                    <a:pt x="1178968" y="2123898"/>
+                  </a:lnTo>
+                  <a:lnTo>
+                    <a:pt x="1256212" y="2205151"/>
+                  </a:lnTo>
+                  <a:lnTo>
+                    <a:pt x="1333455" y="2281548"/>
+                  </a:lnTo>
+                  <a:lnTo>
+                    <a:pt x="1410699" y="2353381"/>
+                  </a:lnTo>
+                  <a:lnTo>
+                    <a:pt x="1487942" y="2420922"/>
+                  </a:lnTo>
+                  <a:lnTo>
+                    <a:pt x="1565186" y="2484427"/>
+                  </a:lnTo>
+                  <a:lnTo>
+                    <a:pt x="1642429" y="2544137"/>
+                  </a:lnTo>
+                  <a:lnTo>
+                    <a:pt x="1719673" y="2600280"/>
+                  </a:lnTo>
+                  <a:lnTo>
+                    <a:pt x="1796917" y="2653068"/>
+                  </a:lnTo>
+                  <a:lnTo>
+                    <a:pt x="1874160" y="2702702"/>
+                  </a:lnTo>
+                  <a:lnTo>
+                    <a:pt x="1951404" y="2749370"/>
+                  </a:lnTo>
+                  <a:lnTo>
+                    <a:pt x="2028647" y="2793250"/>
+                  </a:lnTo>
+                  <a:lnTo>
+                    <a:pt x="2105891" y="2834508"/>
+                  </a:lnTo>
+                  <a:lnTo>
+                    <a:pt x="2183134" y="2873301"/>
+                  </a:lnTo>
+                  <a:lnTo>
+                    <a:pt x="2260378" y="2909776"/>
+                  </a:lnTo>
+                  <a:lnTo>
+                    <a:pt x="2337622" y="2944071"/>
+                  </a:lnTo>
+                  <a:lnTo>
+                    <a:pt x="2414865" y="2976317"/>
+                  </a:lnTo>
+                  <a:lnTo>
+                    <a:pt x="2492109" y="3006637"/>
+                  </a:lnTo>
+                  <a:lnTo>
+                    <a:pt x="2569352" y="3035145"/>
+                  </a:lnTo>
+                  <a:lnTo>
+                    <a:pt x="2646596" y="3061949"/>
+                  </a:lnTo>
+                  <a:lnTo>
+                    <a:pt x="2723839" y="3087152"/>
+                  </a:lnTo>
+                  <a:lnTo>
+                    <a:pt x="2801083" y="3110849"/>
+                  </a:lnTo>
+                  <a:lnTo>
+                    <a:pt x="2878327" y="3133130"/>
+                  </a:lnTo>
+                  <a:lnTo>
+                    <a:pt x="2955570" y="3154080"/>
+                  </a:lnTo>
+                  <a:lnTo>
+                    <a:pt x="3032814" y="3173778"/>
+                  </a:lnTo>
+                  <a:lnTo>
+                    <a:pt x="3110057" y="3192299"/>
+                  </a:lnTo>
+                  <a:lnTo>
+                    <a:pt x="3187301" y="3209713"/>
+                  </a:lnTo>
+                  <a:lnTo>
+                    <a:pt x="3264544" y="3226087"/>
+                  </a:lnTo>
+                  <a:lnTo>
+                    <a:pt x="3341788" y="3241482"/>
+                  </a:lnTo>
+                  <a:lnTo>
+                    <a:pt x="3419032" y="3255958"/>
+                  </a:lnTo>
+                  <a:lnTo>
+                    <a:pt x="3496275" y="3269568"/>
+                  </a:lnTo>
+                  <a:lnTo>
+                    <a:pt x="3573519" y="3282366"/>
+                  </a:lnTo>
+                  <a:lnTo>
+                    <a:pt x="3650762" y="3294399"/>
+                  </a:lnTo>
+                  <a:lnTo>
+                    <a:pt x="3728006" y="3305712"/>
+                  </a:lnTo>
+                  <a:lnTo>
+                    <a:pt x="3805249" y="3316350"/>
+                  </a:lnTo>
+                  <a:lnTo>
+                    <a:pt x="3882493" y="3326352"/>
+                  </a:lnTo>
+                  <a:lnTo>
+                    <a:pt x="3959737" y="3335757"/>
+                  </a:lnTo>
+                  <a:lnTo>
+                    <a:pt x="4036980" y="3344599"/>
+                  </a:lnTo>
+                  <a:lnTo>
+                    <a:pt x="4114224" y="3352913"/>
+                  </a:lnTo>
+                  <a:lnTo>
+                    <a:pt x="4191467" y="3360731"/>
+                  </a:lnTo>
+                  <a:lnTo>
+                    <a:pt x="4268711" y="3368081"/>
+                  </a:lnTo>
+                  <a:lnTo>
+                    <a:pt x="4345954" y="3374992"/>
+                  </a:lnTo>
+                  <a:lnTo>
+                    <a:pt x="4423198" y="3381490"/>
+                  </a:lnTo>
+                  <a:lnTo>
+                    <a:pt x="4500442" y="3387600"/>
+                  </a:lnTo>
+                  <a:lnTo>
+                    <a:pt x="4577685" y="3393345"/>
+                  </a:lnTo>
+                  <a:lnTo>
+                    <a:pt x="4654929" y="3398747"/>
+                  </a:lnTo>
+                  <a:lnTo>
+                    <a:pt x="4732172" y="3403826"/>
+                  </a:lnTo>
+                  <a:lnTo>
+                    <a:pt x="4809416" y="3408601"/>
+                  </a:lnTo>
+                  <a:lnTo>
+                    <a:pt x="4886659" y="3413091"/>
+                  </a:lnTo>
+                  <a:lnTo>
+                    <a:pt x="4963903" y="3417313"/>
+                  </a:lnTo>
+                  <a:lnTo>
+                    <a:pt x="5041147" y="3421282"/>
+                  </a:lnTo>
+                  <a:lnTo>
+                    <a:pt x="5118390" y="3425015"/>
+                  </a:lnTo>
+                  <a:lnTo>
+                    <a:pt x="5195634" y="3428524"/>
+                  </a:lnTo>
+                  <a:lnTo>
+                    <a:pt x="5272877" y="3431823"/>
+                  </a:lnTo>
+                  <a:lnTo>
+                    <a:pt x="5350121" y="3434926"/>
+                  </a:lnTo>
+                  <a:lnTo>
+                    <a:pt x="5427364" y="3437843"/>
+                  </a:lnTo>
+                  <a:lnTo>
+                    <a:pt x="5504608" y="3440586"/>
+                  </a:lnTo>
+                  <a:lnTo>
+                    <a:pt x="5581852" y="3443165"/>
+                  </a:lnTo>
+                  <a:lnTo>
+                    <a:pt x="5659095" y="3445589"/>
+                  </a:lnTo>
+                  <a:lnTo>
+                    <a:pt x="5736339" y="3447869"/>
+                  </a:lnTo>
+                  <a:lnTo>
+                    <a:pt x="5813582" y="3450013"/>
+                  </a:lnTo>
+                  <a:lnTo>
+                    <a:pt x="5890826" y="3452029"/>
                   </a:lnTo>
                 </a:path>
               </a:pathLst>
@@ -4341,7 +4341,7 @@
           </p:nvSpPr>
           <p:spPr>
             <a:xfrm>
-              <a:off x="817517" y="4679530"/>
+              <a:off x="817517" y="4727786"/>
               <a:ext cx="7799693" cy="0"/>
             </a:xfrm>
             <a:custGeom>
@@ -4384,15 +4384,15 @@
           </p:nvSpPr>
           <p:spPr>
             <a:xfrm>
-              <a:off x="4117484" y="1896563"/>
-              <a:ext cx="0" cy="3826579"/>
+              <a:off x="4117484" y="2073503"/>
+              <a:ext cx="0" cy="3649639"/>
             </a:xfrm>
             <a:custGeom>
               <a:avLst/>
               <a:pathLst>
-                <a:path w="0" h="3826579">
+                <a:path w="0" h="3649639">
                   <a:moveTo>
-                    <a:pt x="0" y="3826579"/>
+                    <a:pt x="0" y="3649639"/>
                   </a:moveTo>
                   <a:lnTo>
                     <a:pt x="0" y="0"/>
@@ -4427,7 +4427,7 @@
           </p:nvSpPr>
           <p:spPr>
             <a:xfrm>
-              <a:off x="692708" y="5509156"/>
+              <a:off x="692708" y="5517199"/>
               <a:ext cx="62179" cy="80101"/>
             </a:xfrm>
             <a:prstGeom prst="rect">
@@ -4473,7 +4473,7 @@
           </p:nvSpPr>
           <p:spPr>
             <a:xfrm>
-              <a:off x="692708" y="4639479"/>
+              <a:off x="692708" y="4687735"/>
               <a:ext cx="62179" cy="80101"/>
             </a:xfrm>
             <a:prstGeom prst="rect">
@@ -4519,7 +4519,7 @@
           </p:nvSpPr>
           <p:spPr>
             <a:xfrm>
-              <a:off x="692708" y="3769802"/>
+              <a:off x="692708" y="3858272"/>
               <a:ext cx="62179" cy="80101"/>
             </a:xfrm>
             <a:prstGeom prst="rect">
@@ -4565,7 +4565,7 @@
           </p:nvSpPr>
           <p:spPr>
             <a:xfrm>
-              <a:off x="692708" y="2900125"/>
+              <a:off x="692708" y="3028808"/>
               <a:ext cx="62179" cy="80101"/>
             </a:xfrm>
             <a:prstGeom prst="rect">
@@ -4611,7 +4611,7 @@
           </p:nvSpPr>
           <p:spPr>
             <a:xfrm>
-              <a:off x="692708" y="2030448"/>
+              <a:off x="692708" y="2199345"/>
               <a:ext cx="62179" cy="80101"/>
             </a:xfrm>
             <a:prstGeom prst="rect">
@@ -4887,7 +4887,7 @@
           </p:nvSpPr>
           <p:spPr>
             <a:xfrm rot="-5400000">
-              <a:off x="68446" y="3759743"/>
+              <a:off x="68446" y="3848213"/>
               <a:ext cx="1016904" cy="100218"/>
             </a:xfrm>
             <a:prstGeom prst="rect">
@@ -4928,6 +4928,52 @@
         <p:sp>
           <p:nvSpPr>
             <p:cNvPr id="38" name="tx38"/>
+            <p:cNvSpPr/>
+            <p:nvPr/>
+          </p:nvSpPr>
+          <p:spPr>
+            <a:xfrm>
+              <a:off x="817517" y="1896563"/>
+              <a:ext cx="5689762" cy="82021"/>
+            </a:xfrm>
+            <a:prstGeom prst="rect">
+              <a:avLst/>
+            </a:prstGeom>
+            <a:noFill/>
+          </p:spPr>
+          <p:txBody>
+            <a:bodyPr lIns="0" rIns="0" tIns="0" bIns="0" anchorCtr="1" anchor="ctr" wrap="none"/>
+            <a:lstStyle/>
+            <a:p>
+              <a:pPr algn="l" marL="0" marR="0" indent="0">
+                <a:lnSpc>
+                  <a:spcPts val="900"/>
+                </a:lnSpc>
+                <a:spcBef>
+                  <a:spcPts val="0"/>
+                </a:spcBef>
+                <a:spcAft>
+                  <a:spcPts val="0"/>
+                </a:spcAft>
+              </a:pPr>
+              <a:r>
+                <a:rPr sz="900">
+                  <a:solidFill>
+                    <a:srgbClr val="404040">
+                      <a:alpha val="100000"/>
+                    </a:srgbClr>
+                  </a:solidFill>
+                  <a:latin typeface="Helvetica"/>
+                  <a:cs typeface="Helvetica"/>
+                </a:rPr>
+                <a:t>subHR per 0.1 ratio decline: 2.03 (1.19-3.46)  |  per IQR decline (Δ = 0.30): 8.07 (1.67-39.01)  |  IQR: [0.84, 1.14]</a:t>
+              </a:r>
+            </a:p>
+          </p:txBody>
+        </p:sp>
+        <p:sp>
+          <p:nvSpPr>
+            <p:cNvPr id="39" name="tx39"/>
             <p:cNvSpPr/>
             <p:nvPr/>
           </p:nvSpPr>

--- a/docs/pptx/auc3/jx-auc3-linsubhr-ratio-throm3.pptx
+++ b/docs/pptx/auc3/jx-auc3-linsubhr-ratio-throm3.pptx
@@ -4934,7 +4934,7 @@
           <p:spPr>
             <a:xfrm>
               <a:off x="817517" y="1896563"/>
-              <a:ext cx="5689762" cy="82021"/>
+              <a:ext cx="6232916" cy="82021"/>
             </a:xfrm>
             <a:prstGeom prst="rect">
               <a:avLst/>
@@ -4966,7 +4966,7 @@
                   <a:latin typeface="Helvetica"/>
                   <a:cs typeface="Helvetica"/>
                 </a:rPr>
-                <a:t>subHR per 0.1 ratio decline: 2.03 (1.19-3.46)  |  per IQR decline (Δ = 0.30): 8.07 (1.67-39.01)  |  IQR: [0.84, 1.14]</a:t>
+                <a:t>subHR per 0.1 ratio decline: 2.03 (1.19-3.46), p = 0.009  |  per IQR decline (Δ = 0.30): 8.07 (1.67-39.01)  |  IQR: [0.84, 1.14]</a:t>
               </a:r>
             </a:p>
           </p:txBody>

--- a/docs/pptx/auc3/jx-auc3-linsubhr-ratio-throm3.pptx
+++ b/docs/pptx/auc3/jx-auc3-linsubhr-ratio-throm3.pptx
@@ -4934,7 +4934,7 @@
           <p:spPr>
             <a:xfrm>
               <a:off x="817517" y="1896563"/>
-              <a:ext cx="6232916" cy="82021"/>
+              <a:ext cx="6896679" cy="82021"/>
             </a:xfrm>
             <a:prstGeom prst="rect">
               <a:avLst/>
@@ -4966,7 +4966,7 @@
                   <a:latin typeface="Helvetica"/>
                   <a:cs typeface="Helvetica"/>
                 </a:rPr>
-                <a:t>subHR per 0.1 ratio decline: 2.03 (1.19-3.46), p = 0.009  |  per IQR decline (Δ = 0.30): 8.07 (1.67-39.01)  |  IQR: [0.84, 1.14]</a:t>
+                <a:t>subHR per 0.1 ratio decline: 2.03 (1.19-3.46), p_Bonf = 0.056 (n = 6)  |  per IQR decline (Δ = 0.30): 8.07 (1.67-39.01)  |  IQR: [0.84, 1.14]</a:t>
               </a:r>
             </a:p>
           </p:txBody>

--- a/docs/pptx/auc3/jx-auc3-linsubhr-ratio-throm3.pptx
+++ b/docs/pptx/auc3/jx-auc3-linsubhr-ratio-throm3.pptx
@@ -2443,7 +2443,7 @@
           </p:nvSpPr>
           <p:spPr>
             <a:xfrm>
-              <a:off x="1615213" y="2073503"/>
+              <a:off x="1531834" y="2073503"/>
               <a:ext cx="0" cy="3649639"/>
             </a:xfrm>
             <a:custGeom>
@@ -2486,7 +2486,7 @@
           </p:nvSpPr>
           <p:spPr>
             <a:xfrm>
-              <a:off x="3387871" y="2073503"/>
+              <a:off x="3586410" y="2073503"/>
               <a:ext cx="0" cy="3649639"/>
             </a:xfrm>
             <a:custGeom>
@@ -2529,7 +2529,7 @@
           </p:nvSpPr>
           <p:spPr>
             <a:xfrm>
-              <a:off x="5160528" y="2073503"/>
+              <a:off x="5640985" y="2073503"/>
               <a:ext cx="0" cy="3649639"/>
             </a:xfrm>
             <a:custGeom>
@@ -2572,7 +2572,7 @@
           </p:nvSpPr>
           <p:spPr>
             <a:xfrm>
-              <a:off x="6933186" y="2073503"/>
+              <a:off x="7695561" y="2073503"/>
               <a:ext cx="0" cy="3649639"/>
             </a:xfrm>
             <a:custGeom>
@@ -2830,7 +2830,7 @@
           </p:nvSpPr>
           <p:spPr>
             <a:xfrm>
-              <a:off x="2501542" y="2073503"/>
+              <a:off x="2559122" y="2073503"/>
               <a:ext cx="0" cy="3649639"/>
             </a:xfrm>
             <a:custGeom>
@@ -2873,7 +2873,7 @@
           </p:nvSpPr>
           <p:spPr>
             <a:xfrm>
-              <a:off x="4274200" y="2073503"/>
+              <a:off x="4613698" y="2073503"/>
               <a:ext cx="0" cy="3649639"/>
             </a:xfrm>
             <a:custGeom>
@@ -2916,7 +2916,7 @@
           </p:nvSpPr>
           <p:spPr>
             <a:xfrm>
-              <a:off x="6046857" y="2073503"/>
+              <a:off x="6668273" y="2073503"/>
               <a:ext cx="0" cy="3649639"/>
             </a:xfrm>
             <a:custGeom>
@@ -2953,556 +2953,525 @@
         </p:sp>
         <p:sp>
           <p:nvSpPr>
-            <p:cNvPr id="20" name="pl20"/>
+            <p:cNvPr id="20" name="pg20"/>
             <p:cNvSpPr/>
             <p:nvPr/>
           </p:nvSpPr>
           <p:spPr>
             <a:xfrm>
-              <a:off x="7819515" y="2073503"/>
-              <a:ext cx="0" cy="3649639"/>
+              <a:off x="1172049" y="2073503"/>
+              <a:ext cx="7090630" cy="3481046"/>
             </a:xfrm>
             <a:custGeom>
               <a:avLst/>
               <a:pathLst>
-                <a:path w="0" h="3649639">
+                <a:path w="7090630" h="3481046">
                   <a:moveTo>
-                    <a:pt x="0" y="3649639"/>
+                    <a:pt x="2346309" y="0"/>
                   </a:moveTo>
                   <a:lnTo>
+                    <a:pt x="2363543" y="93145"/>
+                  </a:lnTo>
+                  <a:lnTo>
+                    <a:pt x="2435165" y="440581"/>
+                  </a:lnTo>
+                  <a:lnTo>
+                    <a:pt x="2506788" y="752414"/>
+                  </a:lnTo>
+                  <a:lnTo>
+                    <a:pt x="2578410" y="1032294"/>
+                  </a:lnTo>
+                  <a:lnTo>
+                    <a:pt x="2650033" y="1283495"/>
+                  </a:lnTo>
+                  <a:lnTo>
+                    <a:pt x="2721655" y="1508955"/>
+                  </a:lnTo>
+                  <a:lnTo>
+                    <a:pt x="2793278" y="1711312"/>
+                  </a:lnTo>
+                  <a:lnTo>
+                    <a:pt x="2864901" y="1892934"/>
+                  </a:lnTo>
+                  <a:lnTo>
+                    <a:pt x="2936523" y="2055944"/>
+                  </a:lnTo>
+                  <a:lnTo>
+                    <a:pt x="3008146" y="2202252"/>
+                  </a:lnTo>
+                  <a:lnTo>
+                    <a:pt x="3079768" y="2333567"/>
+                  </a:lnTo>
+                  <a:lnTo>
+                    <a:pt x="3151391" y="2451426"/>
+                  </a:lnTo>
+                  <a:lnTo>
+                    <a:pt x="3223013" y="2557208"/>
+                  </a:lnTo>
+                  <a:lnTo>
+                    <a:pt x="3294636" y="2652150"/>
+                  </a:lnTo>
+                  <a:lnTo>
+                    <a:pt x="3366258" y="2666431"/>
+                  </a:lnTo>
+                  <a:lnTo>
+                    <a:pt x="3437881" y="2678689"/>
+                  </a:lnTo>
+                  <a:lnTo>
+                    <a:pt x="3509503" y="2690764"/>
+                  </a:lnTo>
+                  <a:lnTo>
+                    <a:pt x="3581126" y="2702658"/>
+                  </a:lnTo>
+                  <a:lnTo>
+                    <a:pt x="3652748" y="2714374"/>
+                  </a:lnTo>
+                  <a:lnTo>
+                    <a:pt x="3724371" y="2725913"/>
+                  </a:lnTo>
+                  <a:lnTo>
+                    <a:pt x="3795993" y="2737280"/>
+                  </a:lnTo>
+                  <a:lnTo>
+                    <a:pt x="3867616" y="2748476"/>
+                  </a:lnTo>
+                  <a:lnTo>
+                    <a:pt x="3939238" y="2759505"/>
+                  </a:lnTo>
+                  <a:lnTo>
+                    <a:pt x="4010861" y="2770367"/>
+                  </a:lnTo>
+                  <a:lnTo>
+                    <a:pt x="4082483" y="2781067"/>
+                  </a:lnTo>
+                  <a:lnTo>
+                    <a:pt x="4154106" y="2791607"/>
+                  </a:lnTo>
+                  <a:lnTo>
+                    <a:pt x="4225729" y="2801988"/>
+                  </a:lnTo>
+                  <a:lnTo>
+                    <a:pt x="4297351" y="2812214"/>
+                  </a:lnTo>
+                  <a:lnTo>
+                    <a:pt x="4368974" y="2822286"/>
+                  </a:lnTo>
+                  <a:lnTo>
+                    <a:pt x="4440596" y="2832207"/>
+                  </a:lnTo>
+                  <a:lnTo>
+                    <a:pt x="4512219" y="2841979"/>
+                  </a:lnTo>
+                  <a:lnTo>
+                    <a:pt x="4583841" y="2851605"/>
+                  </a:lnTo>
+                  <a:lnTo>
+                    <a:pt x="4655464" y="2861087"/>
+                  </a:lnTo>
+                  <a:lnTo>
+                    <a:pt x="4727086" y="2870426"/>
+                  </a:lnTo>
+                  <a:lnTo>
+                    <a:pt x="4798709" y="2879625"/>
+                  </a:lnTo>
+                  <a:lnTo>
+                    <a:pt x="4870331" y="2888686"/>
+                  </a:lnTo>
+                  <a:lnTo>
+                    <a:pt x="4941954" y="2897611"/>
+                  </a:lnTo>
+                  <a:lnTo>
+                    <a:pt x="5013576" y="2906403"/>
+                  </a:lnTo>
+                  <a:lnTo>
+                    <a:pt x="5085199" y="2915062"/>
+                  </a:lnTo>
+                  <a:lnTo>
+                    <a:pt x="5156821" y="2923592"/>
+                  </a:lnTo>
+                  <a:lnTo>
+                    <a:pt x="5228444" y="2931994"/>
+                  </a:lnTo>
+                  <a:lnTo>
+                    <a:pt x="5300066" y="2940269"/>
+                  </a:lnTo>
+                  <a:lnTo>
+                    <a:pt x="5371689" y="2948421"/>
+                  </a:lnTo>
+                  <a:lnTo>
+                    <a:pt x="5443311" y="2956450"/>
+                  </a:lnTo>
+                  <a:lnTo>
+                    <a:pt x="5514934" y="2964359"/>
+                  </a:lnTo>
+                  <a:lnTo>
+                    <a:pt x="5586557" y="2972149"/>
+                  </a:lnTo>
+                  <a:lnTo>
+                    <a:pt x="5658179" y="2979823"/>
+                  </a:lnTo>
+                  <a:lnTo>
+                    <a:pt x="5729802" y="2987381"/>
+                  </a:lnTo>
+                  <a:lnTo>
+                    <a:pt x="5801424" y="2994826"/>
+                  </a:lnTo>
+                  <a:lnTo>
+                    <a:pt x="5873047" y="3002159"/>
+                  </a:lnTo>
+                  <a:lnTo>
+                    <a:pt x="5944669" y="3009382"/>
+                  </a:lnTo>
+                  <a:lnTo>
+                    <a:pt x="6016292" y="3016497"/>
+                  </a:lnTo>
+                  <a:lnTo>
+                    <a:pt x="6087914" y="3023506"/>
+                  </a:lnTo>
+                  <a:lnTo>
+                    <a:pt x="6159537" y="3030409"/>
+                  </a:lnTo>
+                  <a:lnTo>
+                    <a:pt x="6231159" y="3037208"/>
+                  </a:lnTo>
+                  <a:lnTo>
+                    <a:pt x="6302782" y="3043906"/>
+                  </a:lnTo>
+                  <a:lnTo>
+                    <a:pt x="6374404" y="3050503"/>
+                  </a:lnTo>
+                  <a:lnTo>
+                    <a:pt x="6446027" y="3057001"/>
+                  </a:lnTo>
+                  <a:lnTo>
+                    <a:pt x="6517649" y="3063402"/>
+                  </a:lnTo>
+                  <a:lnTo>
+                    <a:pt x="6589272" y="3069707"/>
+                  </a:lnTo>
+                  <a:lnTo>
+                    <a:pt x="6660894" y="3075917"/>
+                  </a:lnTo>
+                  <a:lnTo>
+                    <a:pt x="6732517" y="3082034"/>
+                  </a:lnTo>
+                  <a:lnTo>
+                    <a:pt x="6804139" y="3088059"/>
+                  </a:lnTo>
+                  <a:lnTo>
+                    <a:pt x="6875762" y="3093994"/>
+                  </a:lnTo>
+                  <a:lnTo>
+                    <a:pt x="6947385" y="3099840"/>
+                  </a:lnTo>
+                  <a:lnTo>
+                    <a:pt x="7019007" y="3105598"/>
+                  </a:lnTo>
+                  <a:lnTo>
+                    <a:pt x="7090630" y="3111270"/>
+                  </a:lnTo>
+                  <a:lnTo>
+                    <a:pt x="7090630" y="3481046"/>
+                  </a:lnTo>
+                  <a:lnTo>
+                    <a:pt x="7019007" y="3480737"/>
+                  </a:lnTo>
+                  <a:lnTo>
+                    <a:pt x="6947385" y="3480394"/>
+                  </a:lnTo>
+                  <a:lnTo>
+                    <a:pt x="6875762" y="3480011"/>
+                  </a:lnTo>
+                  <a:lnTo>
+                    <a:pt x="6804139" y="3479584"/>
+                  </a:lnTo>
+                  <a:lnTo>
+                    <a:pt x="6732517" y="3479109"/>
+                  </a:lnTo>
+                  <a:lnTo>
+                    <a:pt x="6660894" y="3478580"/>
+                  </a:lnTo>
+                  <a:lnTo>
+                    <a:pt x="6589272" y="3477990"/>
+                  </a:lnTo>
+                  <a:lnTo>
+                    <a:pt x="6517649" y="3477333"/>
+                  </a:lnTo>
+                  <a:lnTo>
+                    <a:pt x="6446027" y="3476600"/>
+                  </a:lnTo>
+                  <a:lnTo>
+                    <a:pt x="6374404" y="3475785"/>
+                  </a:lnTo>
+                  <a:lnTo>
+                    <a:pt x="6302782" y="3474876"/>
+                  </a:lnTo>
+                  <a:lnTo>
+                    <a:pt x="6231159" y="3473863"/>
+                  </a:lnTo>
+                  <a:lnTo>
+                    <a:pt x="6159537" y="3472734"/>
+                  </a:lnTo>
+                  <a:lnTo>
+                    <a:pt x="6087914" y="3471477"/>
+                  </a:lnTo>
+                  <a:lnTo>
+                    <a:pt x="6016292" y="3470076"/>
+                  </a:lnTo>
+                  <a:lnTo>
+                    <a:pt x="5944669" y="3468516"/>
+                  </a:lnTo>
+                  <a:lnTo>
+                    <a:pt x="5873047" y="3466777"/>
+                  </a:lnTo>
+                  <a:lnTo>
+                    <a:pt x="5801424" y="3464839"/>
+                  </a:lnTo>
+                  <a:lnTo>
+                    <a:pt x="5729802" y="3462681"/>
+                  </a:lnTo>
+                  <a:lnTo>
+                    <a:pt x="5658179" y="3460276"/>
+                  </a:lnTo>
+                  <a:lnTo>
+                    <a:pt x="5586557" y="3457596"/>
+                  </a:lnTo>
+                  <a:lnTo>
+                    <a:pt x="5514934" y="3454610"/>
+                  </a:lnTo>
+                  <a:lnTo>
+                    <a:pt x="5443311" y="3451284"/>
+                  </a:lnTo>
+                  <a:lnTo>
+                    <a:pt x="5371689" y="3447578"/>
+                  </a:lnTo>
+                  <a:lnTo>
+                    <a:pt x="5300066" y="3443449"/>
+                  </a:lnTo>
+                  <a:lnTo>
+                    <a:pt x="5228444" y="3438848"/>
+                  </a:lnTo>
+                  <a:lnTo>
+                    <a:pt x="5156821" y="3433722"/>
+                  </a:lnTo>
+                  <a:lnTo>
+                    <a:pt x="5085199" y="3428010"/>
+                  </a:lnTo>
+                  <a:lnTo>
+                    <a:pt x="5013576" y="3421647"/>
+                  </a:lnTo>
+                  <a:lnTo>
+                    <a:pt x="4941954" y="3414557"/>
+                  </a:lnTo>
+                  <a:lnTo>
+                    <a:pt x="4870331" y="3406658"/>
+                  </a:lnTo>
+                  <a:lnTo>
+                    <a:pt x="4798709" y="3397857"/>
+                  </a:lnTo>
+                  <a:lnTo>
+                    <a:pt x="4727086" y="3388051"/>
+                  </a:lnTo>
+                  <a:lnTo>
+                    <a:pt x="4655464" y="3377126"/>
+                  </a:lnTo>
+                  <a:lnTo>
+                    <a:pt x="4583841" y="3364953"/>
+                  </a:lnTo>
+                  <a:lnTo>
+                    <a:pt x="4512219" y="3351390"/>
+                  </a:lnTo>
+                  <a:lnTo>
+                    <a:pt x="4440596" y="3336279"/>
+                  </a:lnTo>
+                  <a:lnTo>
+                    <a:pt x="4368974" y="3319443"/>
+                  </a:lnTo>
+                  <a:lnTo>
+                    <a:pt x="4297351" y="3300685"/>
+                  </a:lnTo>
+                  <a:lnTo>
+                    <a:pt x="4225729" y="3279785"/>
+                  </a:lnTo>
+                  <a:lnTo>
+                    <a:pt x="4154106" y="3256499"/>
+                  </a:lnTo>
+                  <a:lnTo>
+                    <a:pt x="4082483" y="3230554"/>
+                  </a:lnTo>
+                  <a:lnTo>
+                    <a:pt x="4010861" y="3201647"/>
+                  </a:lnTo>
+                  <a:lnTo>
+                    <a:pt x="3939238" y="3169440"/>
+                  </a:lnTo>
+                  <a:lnTo>
+                    <a:pt x="3867616" y="3133556"/>
+                  </a:lnTo>
+                  <a:lnTo>
+                    <a:pt x="3795993" y="3093576"/>
+                  </a:lnTo>
+                  <a:lnTo>
+                    <a:pt x="3724371" y="3049030"/>
+                  </a:lnTo>
+                  <a:lnTo>
+                    <a:pt x="3652748" y="2999399"/>
+                  </a:lnTo>
+                  <a:lnTo>
+                    <a:pt x="3581126" y="2944101"/>
+                  </a:lnTo>
+                  <a:lnTo>
+                    <a:pt x="3509503" y="2882491"/>
+                  </a:lnTo>
+                  <a:lnTo>
+                    <a:pt x="3437881" y="2813846"/>
+                  </a:lnTo>
+                  <a:lnTo>
+                    <a:pt x="3366258" y="2737364"/>
+                  </a:lnTo>
+                  <a:lnTo>
+                    <a:pt x="3294636" y="2653985"/>
+                  </a:lnTo>
+                  <a:lnTo>
+                    <a:pt x="3223013" y="2641350"/>
+                  </a:lnTo>
+                  <a:lnTo>
+                    <a:pt x="3151391" y="2628523"/>
+                  </a:lnTo>
+                  <a:lnTo>
+                    <a:pt x="3079768" y="2615500"/>
+                  </a:lnTo>
+                  <a:lnTo>
+                    <a:pt x="3008146" y="2602279"/>
+                  </a:lnTo>
+                  <a:lnTo>
+                    <a:pt x="2936523" y="2588856"/>
+                  </a:lnTo>
+                  <a:lnTo>
+                    <a:pt x="2864901" y="2575230"/>
+                  </a:lnTo>
+                  <a:lnTo>
+                    <a:pt x="2793278" y="2561395"/>
+                  </a:lnTo>
+                  <a:lnTo>
+                    <a:pt x="2721655" y="2547351"/>
+                  </a:lnTo>
+                  <a:lnTo>
+                    <a:pt x="2650033" y="2533092"/>
+                  </a:lnTo>
+                  <a:lnTo>
+                    <a:pt x="2578410" y="2518616"/>
+                  </a:lnTo>
+                  <a:lnTo>
+                    <a:pt x="2506788" y="2503920"/>
+                  </a:lnTo>
+                  <a:lnTo>
+                    <a:pt x="2435165" y="2488999"/>
+                  </a:lnTo>
+                  <a:lnTo>
+                    <a:pt x="2363543" y="2473852"/>
+                  </a:lnTo>
+                  <a:lnTo>
+                    <a:pt x="2291920" y="2458474"/>
+                  </a:lnTo>
+                  <a:lnTo>
+                    <a:pt x="2220298" y="2442862"/>
+                  </a:lnTo>
+                  <a:lnTo>
+                    <a:pt x="2148675" y="2427012"/>
+                  </a:lnTo>
+                  <a:lnTo>
+                    <a:pt x="2077053" y="2410921"/>
+                  </a:lnTo>
+                  <a:lnTo>
+                    <a:pt x="2005430" y="2394585"/>
+                  </a:lnTo>
+                  <a:lnTo>
+                    <a:pt x="1933808" y="2378000"/>
+                  </a:lnTo>
+                  <a:lnTo>
+                    <a:pt x="1862185" y="2361162"/>
+                  </a:lnTo>
+                  <a:lnTo>
+                    <a:pt x="1790563" y="2344068"/>
+                  </a:lnTo>
+                  <a:lnTo>
+                    <a:pt x="1718940" y="2326714"/>
+                  </a:lnTo>
+                  <a:lnTo>
+                    <a:pt x="1647318" y="2309096"/>
+                  </a:lnTo>
+                  <a:lnTo>
+                    <a:pt x="1575695" y="2291209"/>
+                  </a:lnTo>
+                  <a:lnTo>
+                    <a:pt x="1504073" y="2273050"/>
+                  </a:lnTo>
+                  <a:lnTo>
+                    <a:pt x="1432450" y="2254614"/>
+                  </a:lnTo>
+                  <a:lnTo>
+                    <a:pt x="1360827" y="2235898"/>
+                  </a:lnTo>
+                  <a:lnTo>
+                    <a:pt x="1289205" y="2216897"/>
+                  </a:lnTo>
+                  <a:lnTo>
+                    <a:pt x="1217582" y="2197606"/>
+                  </a:lnTo>
+                  <a:lnTo>
+                    <a:pt x="1145960" y="2178021"/>
+                  </a:lnTo>
+                  <a:lnTo>
+                    <a:pt x="1074337" y="2158139"/>
+                  </a:lnTo>
+                  <a:lnTo>
+                    <a:pt x="1002715" y="2137953"/>
+                  </a:lnTo>
+                  <a:lnTo>
+                    <a:pt x="931092" y="2117461"/>
+                  </a:lnTo>
+                  <a:lnTo>
+                    <a:pt x="859470" y="2096656"/>
+                  </a:lnTo>
+                  <a:lnTo>
+                    <a:pt x="787847" y="2075534"/>
+                  </a:lnTo>
+                  <a:lnTo>
+                    <a:pt x="716225" y="2054091"/>
+                  </a:lnTo>
+                  <a:lnTo>
+                    <a:pt x="644602" y="2032321"/>
+                  </a:lnTo>
+                  <a:lnTo>
+                    <a:pt x="572980" y="2010220"/>
+                  </a:lnTo>
+                  <a:lnTo>
+                    <a:pt x="501357" y="1987782"/>
+                  </a:lnTo>
+                  <a:lnTo>
+                    <a:pt x="429735" y="1965002"/>
+                  </a:lnTo>
+                  <a:lnTo>
+                    <a:pt x="358112" y="1941876"/>
+                  </a:lnTo>
+                  <a:lnTo>
+                    <a:pt x="286490" y="1918398"/>
+                  </a:lnTo>
+                  <a:lnTo>
+                    <a:pt x="214867" y="1894562"/>
+                  </a:lnTo>
+                  <a:lnTo>
+                    <a:pt x="143245" y="1870363"/>
+                  </a:lnTo>
+                  <a:lnTo>
+                    <a:pt x="71622" y="1845795"/>
+                  </a:lnTo>
+                  <a:lnTo>
+                    <a:pt x="0" y="1820854"/>
+                  </a:lnTo>
+                  <a:lnTo>
                     <a:pt x="0" y="0"/>
-                  </a:lnTo>
-                  <a:lnTo>
-                    <a:pt x="0" y="0"/>
-                  </a:lnTo>
-                </a:path>
-              </a:pathLst>
-            </a:custGeom>
-            <a:ln w="13550" cap="flat">
-              <a:solidFill>
-                <a:srgbClr val="EBEBEB">
-                  <a:alpha val="100000"/>
-                </a:srgbClr>
-              </a:solidFill>
-              <a:prstDash val="solid"/>
-              <a:round/>
-            </a:ln>
-          </p:spPr>
-          <p:txBody>
-            <a:bodyPr/>
-            <a:lstStyle/>
-            <a:p/>
-          </p:txBody>
-        </p:sp>
-        <p:sp>
-          <p:nvSpPr>
-            <p:cNvPr id="21" name="pg21"/>
-            <p:cNvSpPr/>
-            <p:nvPr/>
-          </p:nvSpPr>
-          <p:spPr>
-            <a:xfrm>
-              <a:off x="817517" y="2073503"/>
-              <a:ext cx="7392041" cy="3481046"/>
-            </a:xfrm>
-            <a:custGeom>
-              <a:avLst/>
-              <a:pathLst>
-                <a:path w="7392041" h="3481046">
-                  <a:moveTo>
-                    <a:pt x="2275378" y="0"/>
-                  </a:moveTo>
-                  <a:lnTo>
-                    <a:pt x="2293965" y="93145"/>
-                  </a:lnTo>
-                  <a:lnTo>
-                    <a:pt x="2371209" y="440581"/>
-                  </a:lnTo>
-                  <a:lnTo>
-                    <a:pt x="2448452" y="752414"/>
-                  </a:lnTo>
-                  <a:lnTo>
-                    <a:pt x="2525696" y="1032294"/>
-                  </a:lnTo>
-                  <a:lnTo>
-                    <a:pt x="2602939" y="1283495"/>
-                  </a:lnTo>
-                  <a:lnTo>
-                    <a:pt x="2680183" y="1508955"/>
-                  </a:lnTo>
-                  <a:lnTo>
-                    <a:pt x="2757426" y="1711312"/>
-                  </a:lnTo>
-                  <a:lnTo>
-                    <a:pt x="2834670" y="1892934"/>
-                  </a:lnTo>
-                  <a:lnTo>
-                    <a:pt x="2911914" y="2055944"/>
-                  </a:lnTo>
-                  <a:lnTo>
-                    <a:pt x="2989157" y="2202252"/>
-                  </a:lnTo>
-                  <a:lnTo>
-                    <a:pt x="3066401" y="2333567"/>
-                  </a:lnTo>
-                  <a:lnTo>
-                    <a:pt x="3143644" y="2451426"/>
-                  </a:lnTo>
-                  <a:lnTo>
-                    <a:pt x="3220888" y="2557208"/>
-                  </a:lnTo>
-                  <a:lnTo>
-                    <a:pt x="3298131" y="2652150"/>
-                  </a:lnTo>
-                  <a:lnTo>
-                    <a:pt x="3375375" y="2666431"/>
-                  </a:lnTo>
-                  <a:lnTo>
-                    <a:pt x="3452619" y="2678689"/>
-                  </a:lnTo>
-                  <a:lnTo>
-                    <a:pt x="3529862" y="2690764"/>
-                  </a:lnTo>
-                  <a:lnTo>
-                    <a:pt x="3607106" y="2702658"/>
-                  </a:lnTo>
-                  <a:lnTo>
-                    <a:pt x="3684349" y="2714374"/>
-                  </a:lnTo>
-                  <a:lnTo>
-                    <a:pt x="3761593" y="2725913"/>
-                  </a:lnTo>
-                  <a:lnTo>
-                    <a:pt x="3838836" y="2737280"/>
-                  </a:lnTo>
-                  <a:lnTo>
-                    <a:pt x="3916080" y="2748476"/>
-                  </a:lnTo>
-                  <a:lnTo>
-                    <a:pt x="3993324" y="2759505"/>
-                  </a:lnTo>
-                  <a:lnTo>
-                    <a:pt x="4070567" y="2770367"/>
-                  </a:lnTo>
-                  <a:lnTo>
-                    <a:pt x="4147811" y="2781067"/>
-                  </a:lnTo>
-                  <a:lnTo>
-                    <a:pt x="4225054" y="2791607"/>
-                  </a:lnTo>
-                  <a:lnTo>
-                    <a:pt x="4302298" y="2801988"/>
-                  </a:lnTo>
-                  <a:lnTo>
-                    <a:pt x="4379541" y="2812214"/>
-                  </a:lnTo>
-                  <a:lnTo>
-                    <a:pt x="4456785" y="2822286"/>
-                  </a:lnTo>
-                  <a:lnTo>
-                    <a:pt x="4534029" y="2832207"/>
-                  </a:lnTo>
-                  <a:lnTo>
-                    <a:pt x="4611272" y="2841979"/>
-                  </a:lnTo>
-                  <a:lnTo>
-                    <a:pt x="4688516" y="2851605"/>
-                  </a:lnTo>
-                  <a:lnTo>
-                    <a:pt x="4765759" y="2861087"/>
-                  </a:lnTo>
-                  <a:lnTo>
-                    <a:pt x="4843003" y="2870426"/>
-                  </a:lnTo>
-                  <a:lnTo>
-                    <a:pt x="4920246" y="2879625"/>
-                  </a:lnTo>
-                  <a:lnTo>
-                    <a:pt x="4997490" y="2888686"/>
-                  </a:lnTo>
-                  <a:lnTo>
-                    <a:pt x="5074734" y="2897611"/>
-                  </a:lnTo>
-                  <a:lnTo>
-                    <a:pt x="5151977" y="2906403"/>
-                  </a:lnTo>
-                  <a:lnTo>
-                    <a:pt x="5229221" y="2915062"/>
-                  </a:lnTo>
-                  <a:lnTo>
-                    <a:pt x="5306464" y="2923592"/>
-                  </a:lnTo>
-                  <a:lnTo>
-                    <a:pt x="5383708" y="2931994"/>
-                  </a:lnTo>
-                  <a:lnTo>
-                    <a:pt x="5460951" y="2940269"/>
-                  </a:lnTo>
-                  <a:lnTo>
-                    <a:pt x="5538195" y="2948421"/>
-                  </a:lnTo>
-                  <a:lnTo>
-                    <a:pt x="5615439" y="2956450"/>
-                  </a:lnTo>
-                  <a:lnTo>
-                    <a:pt x="5692682" y="2964359"/>
-                  </a:lnTo>
-                  <a:lnTo>
-                    <a:pt x="5769926" y="2972149"/>
-                  </a:lnTo>
-                  <a:lnTo>
-                    <a:pt x="5847169" y="2979823"/>
-                  </a:lnTo>
-                  <a:lnTo>
-                    <a:pt x="5924413" y="2987381"/>
-                  </a:lnTo>
-                  <a:lnTo>
-                    <a:pt x="6001656" y="2994826"/>
-                  </a:lnTo>
-                  <a:lnTo>
-                    <a:pt x="6078900" y="3002159"/>
-                  </a:lnTo>
-                  <a:lnTo>
-                    <a:pt x="6156144" y="3009382"/>
-                  </a:lnTo>
-                  <a:lnTo>
-                    <a:pt x="6233387" y="3016497"/>
-                  </a:lnTo>
-                  <a:lnTo>
-                    <a:pt x="6310631" y="3023506"/>
-                  </a:lnTo>
-                  <a:lnTo>
-                    <a:pt x="6387874" y="3030409"/>
-                  </a:lnTo>
-                  <a:lnTo>
-                    <a:pt x="6465118" y="3037208"/>
-                  </a:lnTo>
-                  <a:lnTo>
-                    <a:pt x="6542361" y="3043906"/>
-                  </a:lnTo>
-                  <a:lnTo>
-                    <a:pt x="6619605" y="3050503"/>
-                  </a:lnTo>
-                  <a:lnTo>
-                    <a:pt x="6696849" y="3057001"/>
-                  </a:lnTo>
-                  <a:lnTo>
-                    <a:pt x="6774092" y="3063402"/>
-                  </a:lnTo>
-                  <a:lnTo>
-                    <a:pt x="6851336" y="3069707"/>
-                  </a:lnTo>
-                  <a:lnTo>
-                    <a:pt x="6928579" y="3075917"/>
-                  </a:lnTo>
-                  <a:lnTo>
-                    <a:pt x="7005823" y="3082034"/>
-                  </a:lnTo>
-                  <a:lnTo>
-                    <a:pt x="7083066" y="3088059"/>
-                  </a:lnTo>
-                  <a:lnTo>
-                    <a:pt x="7160310" y="3093994"/>
-                  </a:lnTo>
-                  <a:lnTo>
-                    <a:pt x="7237554" y="3099840"/>
-                  </a:lnTo>
-                  <a:lnTo>
-                    <a:pt x="7314797" y="3105598"/>
-                  </a:lnTo>
-                  <a:lnTo>
-                    <a:pt x="7392041" y="3111270"/>
-                  </a:lnTo>
-                  <a:lnTo>
-                    <a:pt x="7392041" y="3481046"/>
-                  </a:lnTo>
-                  <a:lnTo>
-                    <a:pt x="7314797" y="3480737"/>
-                  </a:lnTo>
-                  <a:lnTo>
-                    <a:pt x="7237554" y="3480394"/>
-                  </a:lnTo>
-                  <a:lnTo>
-                    <a:pt x="7160310" y="3480011"/>
-                  </a:lnTo>
-                  <a:lnTo>
-                    <a:pt x="7083066" y="3479584"/>
-                  </a:lnTo>
-                  <a:lnTo>
-                    <a:pt x="7005823" y="3479109"/>
-                  </a:lnTo>
-                  <a:lnTo>
-                    <a:pt x="6928579" y="3478580"/>
-                  </a:lnTo>
-                  <a:lnTo>
-                    <a:pt x="6851336" y="3477990"/>
-                  </a:lnTo>
-                  <a:lnTo>
-                    <a:pt x="6774092" y="3477333"/>
-                  </a:lnTo>
-                  <a:lnTo>
-                    <a:pt x="6696849" y="3476600"/>
-                  </a:lnTo>
-                  <a:lnTo>
-                    <a:pt x="6619605" y="3475785"/>
-                  </a:lnTo>
-                  <a:lnTo>
-                    <a:pt x="6542361" y="3474876"/>
-                  </a:lnTo>
-                  <a:lnTo>
-                    <a:pt x="6465118" y="3473863"/>
-                  </a:lnTo>
-                  <a:lnTo>
-                    <a:pt x="6387874" y="3472734"/>
-                  </a:lnTo>
-                  <a:lnTo>
-                    <a:pt x="6310631" y="3471477"/>
-                  </a:lnTo>
-                  <a:lnTo>
-                    <a:pt x="6233387" y="3470076"/>
-                  </a:lnTo>
-                  <a:lnTo>
-                    <a:pt x="6156144" y="3468516"/>
-                  </a:lnTo>
-                  <a:lnTo>
-                    <a:pt x="6078900" y="3466777"/>
-                  </a:lnTo>
-                  <a:lnTo>
-                    <a:pt x="6001656" y="3464839"/>
-                  </a:lnTo>
-                  <a:lnTo>
-                    <a:pt x="5924413" y="3462681"/>
-                  </a:lnTo>
-                  <a:lnTo>
-                    <a:pt x="5847169" y="3460276"/>
-                  </a:lnTo>
-                  <a:lnTo>
-                    <a:pt x="5769926" y="3457596"/>
-                  </a:lnTo>
-                  <a:lnTo>
-                    <a:pt x="5692682" y="3454610"/>
-                  </a:lnTo>
-                  <a:lnTo>
-                    <a:pt x="5615439" y="3451284"/>
-                  </a:lnTo>
-                  <a:lnTo>
-                    <a:pt x="5538195" y="3447578"/>
-                  </a:lnTo>
-                  <a:lnTo>
-                    <a:pt x="5460951" y="3443449"/>
-                  </a:lnTo>
-                  <a:lnTo>
-                    <a:pt x="5383708" y="3438848"/>
-                  </a:lnTo>
-                  <a:lnTo>
-                    <a:pt x="5306464" y="3433722"/>
-                  </a:lnTo>
-                  <a:lnTo>
-                    <a:pt x="5229221" y="3428010"/>
-                  </a:lnTo>
-                  <a:lnTo>
-                    <a:pt x="5151977" y="3421647"/>
-                  </a:lnTo>
-                  <a:lnTo>
-                    <a:pt x="5074734" y="3414557"/>
-                  </a:lnTo>
-                  <a:lnTo>
-                    <a:pt x="4997490" y="3406658"/>
-                  </a:lnTo>
-                  <a:lnTo>
-                    <a:pt x="4920246" y="3397857"/>
-                  </a:lnTo>
-                  <a:lnTo>
-                    <a:pt x="4843003" y="3388051"/>
-                  </a:lnTo>
-                  <a:lnTo>
-                    <a:pt x="4765759" y="3377126"/>
-                  </a:lnTo>
-                  <a:lnTo>
-                    <a:pt x="4688516" y="3364953"/>
-                  </a:lnTo>
-                  <a:lnTo>
-                    <a:pt x="4611272" y="3351390"/>
-                  </a:lnTo>
-                  <a:lnTo>
-                    <a:pt x="4534029" y="3336279"/>
-                  </a:lnTo>
-                  <a:lnTo>
-                    <a:pt x="4456785" y="3319443"/>
-                  </a:lnTo>
-                  <a:lnTo>
-                    <a:pt x="4379541" y="3300685"/>
-                  </a:lnTo>
-                  <a:lnTo>
-                    <a:pt x="4302298" y="3279785"/>
-                  </a:lnTo>
-                  <a:lnTo>
-                    <a:pt x="4225054" y="3256499"/>
-                  </a:lnTo>
-                  <a:lnTo>
-                    <a:pt x="4147811" y="3230554"/>
-                  </a:lnTo>
-                  <a:lnTo>
-                    <a:pt x="4070567" y="3201647"/>
-                  </a:lnTo>
-                  <a:lnTo>
-                    <a:pt x="3993324" y="3169440"/>
-                  </a:lnTo>
-                  <a:lnTo>
-                    <a:pt x="3916080" y="3133556"/>
-                  </a:lnTo>
-                  <a:lnTo>
-                    <a:pt x="3838836" y="3093576"/>
-                  </a:lnTo>
-                  <a:lnTo>
-                    <a:pt x="3761593" y="3049030"/>
-                  </a:lnTo>
-                  <a:lnTo>
-                    <a:pt x="3684349" y="2999399"/>
-                  </a:lnTo>
-                  <a:lnTo>
-                    <a:pt x="3607106" y="2944101"/>
-                  </a:lnTo>
-                  <a:lnTo>
-                    <a:pt x="3529862" y="2882491"/>
-                  </a:lnTo>
-                  <a:lnTo>
-                    <a:pt x="3452619" y="2813846"/>
-                  </a:lnTo>
-                  <a:lnTo>
-                    <a:pt x="3375375" y="2737364"/>
-                  </a:lnTo>
-                  <a:lnTo>
-                    <a:pt x="3298131" y="2653985"/>
-                  </a:lnTo>
-                  <a:lnTo>
-                    <a:pt x="3220888" y="2641350"/>
-                  </a:lnTo>
-                  <a:lnTo>
-                    <a:pt x="3143644" y="2628523"/>
-                  </a:lnTo>
-                  <a:lnTo>
-                    <a:pt x="3066401" y="2615500"/>
-                  </a:lnTo>
-                  <a:lnTo>
-                    <a:pt x="2989157" y="2602279"/>
-                  </a:lnTo>
-                  <a:lnTo>
-                    <a:pt x="2911914" y="2588856"/>
-                  </a:lnTo>
-                  <a:lnTo>
-                    <a:pt x="2834670" y="2575230"/>
-                  </a:lnTo>
-                  <a:lnTo>
-                    <a:pt x="2757426" y="2561395"/>
-                  </a:lnTo>
-                  <a:lnTo>
-                    <a:pt x="2680183" y="2547351"/>
-                  </a:lnTo>
-                  <a:lnTo>
-                    <a:pt x="2602939" y="2533092"/>
-                  </a:lnTo>
-                  <a:lnTo>
-                    <a:pt x="2525696" y="2518616"/>
-                  </a:lnTo>
-                  <a:lnTo>
-                    <a:pt x="2448452" y="2503920"/>
-                  </a:lnTo>
-                  <a:lnTo>
-                    <a:pt x="2371209" y="2488999"/>
-                  </a:lnTo>
-                  <a:lnTo>
-                    <a:pt x="2293965" y="2473852"/>
-                  </a:lnTo>
-                  <a:lnTo>
-                    <a:pt x="2216721" y="2458474"/>
-                  </a:lnTo>
-                  <a:lnTo>
-                    <a:pt x="2139478" y="2442862"/>
-                  </a:lnTo>
-                  <a:lnTo>
-                    <a:pt x="2062234" y="2427012"/>
-                  </a:lnTo>
-                  <a:lnTo>
-                    <a:pt x="1984991" y="2410921"/>
-                  </a:lnTo>
-                  <a:lnTo>
-                    <a:pt x="1907747" y="2394585"/>
-                  </a:lnTo>
-                  <a:lnTo>
-                    <a:pt x="1830504" y="2378000"/>
-                  </a:lnTo>
-                  <a:lnTo>
-                    <a:pt x="1753260" y="2361162"/>
-                  </a:lnTo>
-                  <a:lnTo>
-                    <a:pt x="1676016" y="2344068"/>
-                  </a:lnTo>
-                  <a:lnTo>
-                    <a:pt x="1598773" y="2326714"/>
-                  </a:lnTo>
-                  <a:lnTo>
-                    <a:pt x="1521529" y="2309096"/>
-                  </a:lnTo>
-                  <a:lnTo>
-                    <a:pt x="1444286" y="2291209"/>
-                  </a:lnTo>
-                  <a:lnTo>
-                    <a:pt x="1367042" y="2273050"/>
-                  </a:lnTo>
-                  <a:lnTo>
-                    <a:pt x="1289799" y="2254614"/>
-                  </a:lnTo>
-                  <a:lnTo>
-                    <a:pt x="1212555" y="2235898"/>
-                  </a:lnTo>
-                  <a:lnTo>
-                    <a:pt x="1135311" y="2216897"/>
-                  </a:lnTo>
-                  <a:lnTo>
-                    <a:pt x="1058068" y="2197606"/>
-                  </a:lnTo>
-                  <a:lnTo>
-                    <a:pt x="980824" y="2178021"/>
-                  </a:lnTo>
-                  <a:lnTo>
-                    <a:pt x="903581" y="2158139"/>
-                  </a:lnTo>
-                  <a:lnTo>
-                    <a:pt x="826337" y="2137953"/>
-                  </a:lnTo>
-                  <a:lnTo>
-                    <a:pt x="749094" y="2117461"/>
-                  </a:lnTo>
-                  <a:lnTo>
-                    <a:pt x="671850" y="2096656"/>
-                  </a:lnTo>
-                  <a:lnTo>
-                    <a:pt x="594606" y="2075534"/>
-                  </a:lnTo>
-                  <a:lnTo>
-                    <a:pt x="517363" y="2054091"/>
-                  </a:lnTo>
-                  <a:lnTo>
-                    <a:pt x="440119" y="2032321"/>
-                  </a:lnTo>
-                  <a:lnTo>
-                    <a:pt x="362876" y="2010220"/>
-                  </a:lnTo>
-                  <a:lnTo>
-                    <a:pt x="285632" y="1987782"/>
-                  </a:lnTo>
-                  <a:lnTo>
-                    <a:pt x="208389" y="1965002"/>
-                  </a:lnTo>
-                  <a:lnTo>
-                    <a:pt x="131145" y="1941876"/>
-                  </a:lnTo>
-                  <a:lnTo>
-                    <a:pt x="53901" y="1918398"/>
-                  </a:lnTo>
-                  <a:lnTo>
-                    <a:pt x="0" y="1901764"/>
                   </a:lnTo>
                   <a:close/>
                 </a:path>
@@ -3522,222 +3491,547 @@
         </p:sp>
         <p:sp>
           <p:nvSpPr>
+            <p:cNvPr id="21" name="pl21"/>
+            <p:cNvSpPr/>
+            <p:nvPr/>
+          </p:nvSpPr>
+          <p:spPr>
+            <a:xfrm>
+              <a:off x="3518358" y="2073503"/>
+              <a:ext cx="4744320" cy="3111270"/>
+            </a:xfrm>
+            <a:custGeom>
+              <a:avLst/>
+              <a:pathLst>
+                <a:path w="4744320" h="3111270">
+                  <a:moveTo>
+                    <a:pt x="0" y="0"/>
+                  </a:moveTo>
+                  <a:lnTo>
+                    <a:pt x="17234" y="93145"/>
+                  </a:lnTo>
+                  <a:lnTo>
+                    <a:pt x="88856" y="440581"/>
+                  </a:lnTo>
+                  <a:lnTo>
+                    <a:pt x="160479" y="752414"/>
+                  </a:lnTo>
+                  <a:lnTo>
+                    <a:pt x="232101" y="1032294"/>
+                  </a:lnTo>
+                  <a:lnTo>
+                    <a:pt x="303724" y="1283495"/>
+                  </a:lnTo>
+                  <a:lnTo>
+                    <a:pt x="375346" y="1508955"/>
+                  </a:lnTo>
+                  <a:lnTo>
+                    <a:pt x="446969" y="1711312"/>
+                  </a:lnTo>
+                  <a:lnTo>
+                    <a:pt x="518591" y="1892934"/>
+                  </a:lnTo>
+                  <a:lnTo>
+                    <a:pt x="590214" y="2055944"/>
+                  </a:lnTo>
+                  <a:lnTo>
+                    <a:pt x="661836" y="2202252"/>
+                  </a:lnTo>
+                  <a:lnTo>
+                    <a:pt x="733459" y="2333567"/>
+                  </a:lnTo>
+                  <a:lnTo>
+                    <a:pt x="805081" y="2451426"/>
+                  </a:lnTo>
+                  <a:lnTo>
+                    <a:pt x="876704" y="2557208"/>
+                  </a:lnTo>
+                  <a:lnTo>
+                    <a:pt x="948326" y="2652150"/>
+                  </a:lnTo>
+                  <a:lnTo>
+                    <a:pt x="1019949" y="2666431"/>
+                  </a:lnTo>
+                  <a:lnTo>
+                    <a:pt x="1091571" y="2678689"/>
+                  </a:lnTo>
+                  <a:lnTo>
+                    <a:pt x="1163194" y="2690764"/>
+                  </a:lnTo>
+                  <a:lnTo>
+                    <a:pt x="1234816" y="2702658"/>
+                  </a:lnTo>
+                  <a:lnTo>
+                    <a:pt x="1306439" y="2714374"/>
+                  </a:lnTo>
+                  <a:lnTo>
+                    <a:pt x="1378062" y="2725913"/>
+                  </a:lnTo>
+                  <a:lnTo>
+                    <a:pt x="1449684" y="2737280"/>
+                  </a:lnTo>
+                  <a:lnTo>
+                    <a:pt x="1521307" y="2748476"/>
+                  </a:lnTo>
+                  <a:lnTo>
+                    <a:pt x="1592929" y="2759505"/>
+                  </a:lnTo>
+                  <a:lnTo>
+                    <a:pt x="1664552" y="2770367"/>
+                  </a:lnTo>
+                  <a:lnTo>
+                    <a:pt x="1736174" y="2781067"/>
+                  </a:lnTo>
+                  <a:lnTo>
+                    <a:pt x="1807797" y="2791607"/>
+                  </a:lnTo>
+                  <a:lnTo>
+                    <a:pt x="1879419" y="2801988"/>
+                  </a:lnTo>
+                  <a:lnTo>
+                    <a:pt x="1951042" y="2812214"/>
+                  </a:lnTo>
+                  <a:lnTo>
+                    <a:pt x="2022664" y="2822286"/>
+                  </a:lnTo>
+                  <a:lnTo>
+                    <a:pt x="2094287" y="2832207"/>
+                  </a:lnTo>
+                  <a:lnTo>
+                    <a:pt x="2165909" y="2841979"/>
+                  </a:lnTo>
+                  <a:lnTo>
+                    <a:pt x="2237532" y="2851605"/>
+                  </a:lnTo>
+                  <a:lnTo>
+                    <a:pt x="2309154" y="2861087"/>
+                  </a:lnTo>
+                  <a:lnTo>
+                    <a:pt x="2380777" y="2870426"/>
+                  </a:lnTo>
+                  <a:lnTo>
+                    <a:pt x="2452399" y="2879625"/>
+                  </a:lnTo>
+                  <a:lnTo>
+                    <a:pt x="2524022" y="2888686"/>
+                  </a:lnTo>
+                  <a:lnTo>
+                    <a:pt x="2595644" y="2897611"/>
+                  </a:lnTo>
+                  <a:lnTo>
+                    <a:pt x="2667267" y="2906403"/>
+                  </a:lnTo>
+                  <a:lnTo>
+                    <a:pt x="2738890" y="2915062"/>
+                  </a:lnTo>
+                  <a:lnTo>
+                    <a:pt x="2810512" y="2923592"/>
+                  </a:lnTo>
+                  <a:lnTo>
+                    <a:pt x="2882135" y="2931994"/>
+                  </a:lnTo>
+                  <a:lnTo>
+                    <a:pt x="2953757" y="2940269"/>
+                  </a:lnTo>
+                  <a:lnTo>
+                    <a:pt x="3025380" y="2948421"/>
+                  </a:lnTo>
+                  <a:lnTo>
+                    <a:pt x="3097002" y="2956450"/>
+                  </a:lnTo>
+                  <a:lnTo>
+                    <a:pt x="3168625" y="2964359"/>
+                  </a:lnTo>
+                  <a:lnTo>
+                    <a:pt x="3240247" y="2972149"/>
+                  </a:lnTo>
+                  <a:lnTo>
+                    <a:pt x="3311870" y="2979823"/>
+                  </a:lnTo>
+                  <a:lnTo>
+                    <a:pt x="3383492" y="2987381"/>
+                  </a:lnTo>
+                  <a:lnTo>
+                    <a:pt x="3455115" y="2994826"/>
+                  </a:lnTo>
+                  <a:lnTo>
+                    <a:pt x="3526737" y="3002159"/>
+                  </a:lnTo>
+                  <a:lnTo>
+                    <a:pt x="3598360" y="3009382"/>
+                  </a:lnTo>
+                  <a:lnTo>
+                    <a:pt x="3669982" y="3016497"/>
+                  </a:lnTo>
+                  <a:lnTo>
+                    <a:pt x="3741605" y="3023506"/>
+                  </a:lnTo>
+                  <a:lnTo>
+                    <a:pt x="3813227" y="3030409"/>
+                  </a:lnTo>
+                  <a:lnTo>
+                    <a:pt x="3884850" y="3037208"/>
+                  </a:lnTo>
+                  <a:lnTo>
+                    <a:pt x="3956472" y="3043906"/>
+                  </a:lnTo>
+                  <a:lnTo>
+                    <a:pt x="4028095" y="3050503"/>
+                  </a:lnTo>
+                  <a:lnTo>
+                    <a:pt x="4099718" y="3057001"/>
+                  </a:lnTo>
+                  <a:lnTo>
+                    <a:pt x="4171340" y="3063402"/>
+                  </a:lnTo>
+                  <a:lnTo>
+                    <a:pt x="4242963" y="3069707"/>
+                  </a:lnTo>
+                  <a:lnTo>
+                    <a:pt x="4314585" y="3075917"/>
+                  </a:lnTo>
+                  <a:lnTo>
+                    <a:pt x="4386208" y="3082034"/>
+                  </a:lnTo>
+                  <a:lnTo>
+                    <a:pt x="4457830" y="3088059"/>
+                  </a:lnTo>
+                  <a:lnTo>
+                    <a:pt x="4529453" y="3093994"/>
+                  </a:lnTo>
+                  <a:lnTo>
+                    <a:pt x="4601075" y="3099840"/>
+                  </a:lnTo>
+                  <a:lnTo>
+                    <a:pt x="4672698" y="3105598"/>
+                  </a:lnTo>
+                  <a:lnTo>
+                    <a:pt x="4744320" y="3111270"/>
+                  </a:lnTo>
+                </a:path>
+              </a:pathLst>
+            </a:custGeom>
+          </p:spPr>
+          <p:txBody>
+            <a:bodyPr/>
+            <a:lstStyle/>
+            <a:p/>
+          </p:txBody>
+        </p:sp>
+        <p:sp>
+          <p:nvSpPr>
             <p:cNvPr id="22" name="pl22"/>
             <p:cNvSpPr/>
             <p:nvPr/>
           </p:nvSpPr>
           <p:spPr>
             <a:xfrm>
-              <a:off x="3092896" y="2073503"/>
-              <a:ext cx="5116662" cy="3111270"/>
+              <a:off x="1172049" y="3894357"/>
+              <a:ext cx="7090630" cy="1660192"/>
             </a:xfrm>
             <a:custGeom>
               <a:avLst/>
               <a:pathLst>
-                <a:path w="5116662" h="3111270">
+                <a:path w="7090630" h="1660192">
                   <a:moveTo>
+                    <a:pt x="7090630" y="1660192"/>
+                  </a:moveTo>
+                  <a:lnTo>
+                    <a:pt x="7019007" y="1659883"/>
+                  </a:lnTo>
+                  <a:lnTo>
+                    <a:pt x="6947385" y="1659540"/>
+                  </a:lnTo>
+                  <a:lnTo>
+                    <a:pt x="6875762" y="1659157"/>
+                  </a:lnTo>
+                  <a:lnTo>
+                    <a:pt x="6804139" y="1658730"/>
+                  </a:lnTo>
+                  <a:lnTo>
+                    <a:pt x="6732517" y="1658255"/>
+                  </a:lnTo>
+                  <a:lnTo>
+                    <a:pt x="6660894" y="1657726"/>
+                  </a:lnTo>
+                  <a:lnTo>
+                    <a:pt x="6589272" y="1657136"/>
+                  </a:lnTo>
+                  <a:lnTo>
+                    <a:pt x="6517649" y="1656479"/>
+                  </a:lnTo>
+                  <a:lnTo>
+                    <a:pt x="6446027" y="1655746"/>
+                  </a:lnTo>
+                  <a:lnTo>
+                    <a:pt x="6374404" y="1654930"/>
+                  </a:lnTo>
+                  <a:lnTo>
+                    <a:pt x="6302782" y="1654021"/>
+                  </a:lnTo>
+                  <a:lnTo>
+                    <a:pt x="6231159" y="1653009"/>
+                  </a:lnTo>
+                  <a:lnTo>
+                    <a:pt x="6159537" y="1651880"/>
+                  </a:lnTo>
+                  <a:lnTo>
+                    <a:pt x="6087914" y="1650623"/>
+                  </a:lnTo>
+                  <a:lnTo>
+                    <a:pt x="6016292" y="1649222"/>
+                  </a:lnTo>
+                  <a:lnTo>
+                    <a:pt x="5944669" y="1647662"/>
+                  </a:lnTo>
+                  <a:lnTo>
+                    <a:pt x="5873047" y="1645923"/>
+                  </a:lnTo>
+                  <a:lnTo>
+                    <a:pt x="5801424" y="1643985"/>
+                  </a:lnTo>
+                  <a:lnTo>
+                    <a:pt x="5729802" y="1641827"/>
+                  </a:lnTo>
+                  <a:lnTo>
+                    <a:pt x="5658179" y="1639422"/>
+                  </a:lnTo>
+                  <a:lnTo>
+                    <a:pt x="5586557" y="1636742"/>
+                  </a:lnTo>
+                  <a:lnTo>
+                    <a:pt x="5514934" y="1633756"/>
+                  </a:lnTo>
+                  <a:lnTo>
+                    <a:pt x="5443311" y="1630430"/>
+                  </a:lnTo>
+                  <a:lnTo>
+                    <a:pt x="5371689" y="1626724"/>
+                  </a:lnTo>
+                  <a:lnTo>
+                    <a:pt x="5300066" y="1622595"/>
+                  </a:lnTo>
+                  <a:lnTo>
+                    <a:pt x="5228444" y="1617994"/>
+                  </a:lnTo>
+                  <a:lnTo>
+                    <a:pt x="5156821" y="1612868"/>
+                  </a:lnTo>
+                  <a:lnTo>
+                    <a:pt x="5085199" y="1607156"/>
+                  </a:lnTo>
+                  <a:lnTo>
+                    <a:pt x="5013576" y="1600793"/>
+                  </a:lnTo>
+                  <a:lnTo>
+                    <a:pt x="4941954" y="1593703"/>
+                  </a:lnTo>
+                  <a:lnTo>
+                    <a:pt x="4870331" y="1585804"/>
+                  </a:lnTo>
+                  <a:lnTo>
+                    <a:pt x="4798709" y="1577003"/>
+                  </a:lnTo>
+                  <a:lnTo>
+                    <a:pt x="4727086" y="1567197"/>
+                  </a:lnTo>
+                  <a:lnTo>
+                    <a:pt x="4655464" y="1556272"/>
+                  </a:lnTo>
+                  <a:lnTo>
+                    <a:pt x="4583841" y="1544099"/>
+                  </a:lnTo>
+                  <a:lnTo>
+                    <a:pt x="4512219" y="1530536"/>
+                  </a:lnTo>
+                  <a:lnTo>
+                    <a:pt x="4440596" y="1515425"/>
+                  </a:lnTo>
+                  <a:lnTo>
+                    <a:pt x="4368974" y="1498589"/>
+                  </a:lnTo>
+                  <a:lnTo>
+                    <a:pt x="4297351" y="1479831"/>
+                  </a:lnTo>
+                  <a:lnTo>
+                    <a:pt x="4225729" y="1458931"/>
+                  </a:lnTo>
+                  <a:lnTo>
+                    <a:pt x="4154106" y="1435645"/>
+                  </a:lnTo>
+                  <a:lnTo>
+                    <a:pt x="4082483" y="1409700"/>
+                  </a:lnTo>
+                  <a:lnTo>
+                    <a:pt x="4010861" y="1380793"/>
+                  </a:lnTo>
+                  <a:lnTo>
+                    <a:pt x="3939238" y="1348586"/>
+                  </a:lnTo>
+                  <a:lnTo>
+                    <a:pt x="3867616" y="1312702"/>
+                  </a:lnTo>
+                  <a:lnTo>
+                    <a:pt x="3795993" y="1272722"/>
+                  </a:lnTo>
+                  <a:lnTo>
+                    <a:pt x="3724371" y="1228176"/>
+                  </a:lnTo>
+                  <a:lnTo>
+                    <a:pt x="3652748" y="1178545"/>
+                  </a:lnTo>
+                  <a:lnTo>
+                    <a:pt x="3581126" y="1123247"/>
+                  </a:lnTo>
+                  <a:lnTo>
+                    <a:pt x="3509503" y="1061637"/>
+                  </a:lnTo>
+                  <a:lnTo>
+                    <a:pt x="3437881" y="992992"/>
+                  </a:lnTo>
+                  <a:lnTo>
+                    <a:pt x="3366258" y="916510"/>
+                  </a:lnTo>
+                  <a:lnTo>
+                    <a:pt x="3294636" y="833131"/>
+                  </a:lnTo>
+                  <a:lnTo>
+                    <a:pt x="3223013" y="820496"/>
+                  </a:lnTo>
+                  <a:lnTo>
+                    <a:pt x="3151391" y="807669"/>
+                  </a:lnTo>
+                  <a:lnTo>
+                    <a:pt x="3079768" y="794646"/>
+                  </a:lnTo>
+                  <a:lnTo>
+                    <a:pt x="3008146" y="781425"/>
+                  </a:lnTo>
+                  <a:lnTo>
+                    <a:pt x="2936523" y="768002"/>
+                  </a:lnTo>
+                  <a:lnTo>
+                    <a:pt x="2864901" y="754376"/>
+                  </a:lnTo>
+                  <a:lnTo>
+                    <a:pt x="2793278" y="740541"/>
+                  </a:lnTo>
+                  <a:lnTo>
+                    <a:pt x="2721655" y="726497"/>
+                  </a:lnTo>
+                  <a:lnTo>
+                    <a:pt x="2650033" y="712238"/>
+                  </a:lnTo>
+                  <a:lnTo>
+                    <a:pt x="2578410" y="697762"/>
+                  </a:lnTo>
+                  <a:lnTo>
+                    <a:pt x="2506788" y="683066"/>
+                  </a:lnTo>
+                  <a:lnTo>
+                    <a:pt x="2435165" y="668145"/>
+                  </a:lnTo>
+                  <a:lnTo>
+                    <a:pt x="2363543" y="652998"/>
+                  </a:lnTo>
+                  <a:lnTo>
+                    <a:pt x="2291920" y="637620"/>
+                  </a:lnTo>
+                  <a:lnTo>
+                    <a:pt x="2220298" y="622008"/>
+                  </a:lnTo>
+                  <a:lnTo>
+                    <a:pt x="2148675" y="606158"/>
+                  </a:lnTo>
+                  <a:lnTo>
+                    <a:pt x="2077053" y="590067"/>
+                  </a:lnTo>
+                  <a:lnTo>
+                    <a:pt x="2005430" y="573731"/>
+                  </a:lnTo>
+                  <a:lnTo>
+                    <a:pt x="1933808" y="557146"/>
+                  </a:lnTo>
+                  <a:lnTo>
+                    <a:pt x="1862185" y="540308"/>
+                  </a:lnTo>
+                  <a:lnTo>
+                    <a:pt x="1790563" y="523214"/>
+                  </a:lnTo>
+                  <a:lnTo>
+                    <a:pt x="1718940" y="505860"/>
+                  </a:lnTo>
+                  <a:lnTo>
+                    <a:pt x="1647318" y="488242"/>
+                  </a:lnTo>
+                  <a:lnTo>
+                    <a:pt x="1575695" y="470355"/>
+                  </a:lnTo>
+                  <a:lnTo>
+                    <a:pt x="1504073" y="452196"/>
+                  </a:lnTo>
+                  <a:lnTo>
+                    <a:pt x="1432450" y="433760"/>
+                  </a:lnTo>
+                  <a:lnTo>
+                    <a:pt x="1360827" y="415044"/>
+                  </a:lnTo>
+                  <a:lnTo>
+                    <a:pt x="1289205" y="396042"/>
+                  </a:lnTo>
+                  <a:lnTo>
+                    <a:pt x="1217582" y="376752"/>
+                  </a:lnTo>
+                  <a:lnTo>
+                    <a:pt x="1145960" y="357167"/>
+                  </a:lnTo>
+                  <a:lnTo>
+                    <a:pt x="1074337" y="337285"/>
+                  </a:lnTo>
+                  <a:lnTo>
+                    <a:pt x="1002715" y="317099"/>
+                  </a:lnTo>
+                  <a:lnTo>
+                    <a:pt x="931092" y="296607"/>
+                  </a:lnTo>
+                  <a:lnTo>
+                    <a:pt x="859470" y="275802"/>
+                  </a:lnTo>
+                  <a:lnTo>
+                    <a:pt x="787847" y="254680"/>
+                  </a:lnTo>
+                  <a:lnTo>
+                    <a:pt x="716225" y="233237"/>
+                  </a:lnTo>
+                  <a:lnTo>
+                    <a:pt x="644602" y="211467"/>
+                  </a:lnTo>
+                  <a:lnTo>
+                    <a:pt x="572980" y="189366"/>
+                  </a:lnTo>
+                  <a:lnTo>
+                    <a:pt x="501357" y="166928"/>
+                  </a:lnTo>
+                  <a:lnTo>
+                    <a:pt x="429735" y="144148"/>
+                  </a:lnTo>
+                  <a:lnTo>
+                    <a:pt x="358112" y="121022"/>
+                  </a:lnTo>
+                  <a:lnTo>
+                    <a:pt x="286490" y="97544"/>
+                  </a:lnTo>
+                  <a:lnTo>
+                    <a:pt x="214867" y="73708"/>
+                  </a:lnTo>
+                  <a:lnTo>
+                    <a:pt x="143245" y="49509"/>
+                  </a:lnTo>
+                  <a:lnTo>
+                    <a:pt x="71622" y="24941"/>
+                  </a:lnTo>
+                  <a:lnTo>
                     <a:pt x="0" y="0"/>
-                  </a:moveTo>
-                  <a:lnTo>
-                    <a:pt x="18586" y="93145"/>
-                  </a:lnTo>
-                  <a:lnTo>
-                    <a:pt x="95830" y="440581"/>
-                  </a:lnTo>
-                  <a:lnTo>
-                    <a:pt x="173073" y="752414"/>
-                  </a:lnTo>
-                  <a:lnTo>
-                    <a:pt x="250317" y="1032294"/>
-                  </a:lnTo>
-                  <a:lnTo>
-                    <a:pt x="327560" y="1283495"/>
-                  </a:lnTo>
-                  <a:lnTo>
-                    <a:pt x="404804" y="1508955"/>
-                  </a:lnTo>
-                  <a:lnTo>
-                    <a:pt x="482048" y="1711312"/>
-                  </a:lnTo>
-                  <a:lnTo>
-                    <a:pt x="559291" y="1892934"/>
-                  </a:lnTo>
-                  <a:lnTo>
-                    <a:pt x="636535" y="2055944"/>
-                  </a:lnTo>
-                  <a:lnTo>
-                    <a:pt x="713778" y="2202252"/>
-                  </a:lnTo>
-                  <a:lnTo>
-                    <a:pt x="791022" y="2333567"/>
-                  </a:lnTo>
-                  <a:lnTo>
-                    <a:pt x="868265" y="2451426"/>
-                  </a:lnTo>
-                  <a:lnTo>
-                    <a:pt x="945509" y="2557208"/>
-                  </a:lnTo>
-                  <a:lnTo>
-                    <a:pt x="1022753" y="2652150"/>
-                  </a:lnTo>
-                  <a:lnTo>
-                    <a:pt x="1099996" y="2666431"/>
-                  </a:lnTo>
-                  <a:lnTo>
-                    <a:pt x="1177240" y="2678689"/>
-                  </a:lnTo>
-                  <a:lnTo>
-                    <a:pt x="1254483" y="2690764"/>
-                  </a:lnTo>
-                  <a:lnTo>
-                    <a:pt x="1331727" y="2702658"/>
-                  </a:lnTo>
-                  <a:lnTo>
-                    <a:pt x="1408970" y="2714374"/>
-                  </a:lnTo>
-                  <a:lnTo>
-                    <a:pt x="1486214" y="2725913"/>
-                  </a:lnTo>
-                  <a:lnTo>
-                    <a:pt x="1563458" y="2737280"/>
-                  </a:lnTo>
-                  <a:lnTo>
-                    <a:pt x="1640701" y="2748476"/>
-                  </a:lnTo>
-                  <a:lnTo>
-                    <a:pt x="1717945" y="2759505"/>
-                  </a:lnTo>
-                  <a:lnTo>
-                    <a:pt x="1795188" y="2770367"/>
-                  </a:lnTo>
-                  <a:lnTo>
-                    <a:pt x="1872432" y="2781067"/>
-                  </a:lnTo>
-                  <a:lnTo>
-                    <a:pt x="1949675" y="2791607"/>
-                  </a:lnTo>
-                  <a:lnTo>
-                    <a:pt x="2026919" y="2801988"/>
-                  </a:lnTo>
-                  <a:lnTo>
-                    <a:pt x="2104163" y="2812214"/>
-                  </a:lnTo>
-                  <a:lnTo>
-                    <a:pt x="2181406" y="2822286"/>
-                  </a:lnTo>
-                  <a:lnTo>
-                    <a:pt x="2258650" y="2832207"/>
-                  </a:lnTo>
-                  <a:lnTo>
-                    <a:pt x="2335893" y="2841979"/>
-                  </a:lnTo>
-                  <a:lnTo>
-                    <a:pt x="2413137" y="2851605"/>
-                  </a:lnTo>
-                  <a:lnTo>
-                    <a:pt x="2490380" y="2861087"/>
-                  </a:lnTo>
-                  <a:lnTo>
-                    <a:pt x="2567624" y="2870426"/>
-                  </a:lnTo>
-                  <a:lnTo>
-                    <a:pt x="2644868" y="2879625"/>
-                  </a:lnTo>
-                  <a:lnTo>
-                    <a:pt x="2722111" y="2888686"/>
-                  </a:lnTo>
-                  <a:lnTo>
-                    <a:pt x="2799355" y="2897611"/>
-                  </a:lnTo>
-                  <a:lnTo>
-                    <a:pt x="2876598" y="2906403"/>
-                  </a:lnTo>
-                  <a:lnTo>
-                    <a:pt x="2953842" y="2915062"/>
-                  </a:lnTo>
-                  <a:lnTo>
-                    <a:pt x="3031085" y="2923592"/>
-                  </a:lnTo>
-                  <a:lnTo>
-                    <a:pt x="3108329" y="2931994"/>
-                  </a:lnTo>
-                  <a:lnTo>
-                    <a:pt x="3185573" y="2940269"/>
-                  </a:lnTo>
-                  <a:lnTo>
-                    <a:pt x="3262816" y="2948421"/>
-                  </a:lnTo>
-                  <a:lnTo>
-                    <a:pt x="3340060" y="2956450"/>
-                  </a:lnTo>
-                  <a:lnTo>
-                    <a:pt x="3417303" y="2964359"/>
-                  </a:lnTo>
-                  <a:lnTo>
-                    <a:pt x="3494547" y="2972149"/>
-                  </a:lnTo>
-                  <a:lnTo>
-                    <a:pt x="3571790" y="2979823"/>
-                  </a:lnTo>
-                  <a:lnTo>
-                    <a:pt x="3649034" y="2987381"/>
-                  </a:lnTo>
-                  <a:lnTo>
-                    <a:pt x="3726278" y="2994826"/>
-                  </a:lnTo>
-                  <a:lnTo>
-                    <a:pt x="3803521" y="3002159"/>
-                  </a:lnTo>
-                  <a:lnTo>
-                    <a:pt x="3880765" y="3009382"/>
-                  </a:lnTo>
-                  <a:lnTo>
-                    <a:pt x="3958008" y="3016497"/>
-                  </a:lnTo>
-                  <a:lnTo>
-                    <a:pt x="4035252" y="3023506"/>
-                  </a:lnTo>
-                  <a:lnTo>
-                    <a:pt x="4112495" y="3030409"/>
-                  </a:lnTo>
-                  <a:lnTo>
-                    <a:pt x="4189739" y="3037208"/>
-                  </a:lnTo>
-                  <a:lnTo>
-                    <a:pt x="4266983" y="3043906"/>
-                  </a:lnTo>
-                  <a:lnTo>
-                    <a:pt x="4344226" y="3050503"/>
-                  </a:lnTo>
-                  <a:lnTo>
-                    <a:pt x="4421470" y="3057001"/>
-                  </a:lnTo>
-                  <a:lnTo>
-                    <a:pt x="4498713" y="3063402"/>
-                  </a:lnTo>
-                  <a:lnTo>
-                    <a:pt x="4575957" y="3069707"/>
-                  </a:lnTo>
-                  <a:lnTo>
-                    <a:pt x="4653200" y="3075917"/>
-                  </a:lnTo>
-                  <a:lnTo>
-                    <a:pt x="4730444" y="3082034"/>
-                  </a:lnTo>
-                  <a:lnTo>
-                    <a:pt x="4807688" y="3088059"/>
-                  </a:lnTo>
-                  <a:lnTo>
-                    <a:pt x="4884931" y="3093994"/>
-                  </a:lnTo>
-                  <a:lnTo>
-                    <a:pt x="4962175" y="3099840"/>
-                  </a:lnTo>
-                  <a:lnTo>
-                    <a:pt x="5039418" y="3105598"/>
-                  </a:lnTo>
-                  <a:lnTo>
-                    <a:pt x="5116662" y="3111270"/>
                   </a:lnTo>
                 </a:path>
               </a:pathLst>
@@ -3757,562 +4051,246 @@
           </p:nvSpPr>
           <p:spPr>
             <a:xfrm>
-              <a:off x="817517" y="3975267"/>
-              <a:ext cx="7392041" cy="1579281"/>
+              <a:off x="2800530" y="2073503"/>
+              <a:ext cx="5462148" cy="3452029"/>
             </a:xfrm>
             <a:custGeom>
               <a:avLst/>
               <a:pathLst>
-                <a:path w="7392041" h="1579281">
-                  <a:moveTo>
-                    <a:pt x="7392041" y="1579281"/>
-                  </a:moveTo>
-                  <a:lnTo>
-                    <a:pt x="7314797" y="1578972"/>
-                  </a:lnTo>
-                  <a:lnTo>
-                    <a:pt x="7237554" y="1578629"/>
-                  </a:lnTo>
-                  <a:lnTo>
-                    <a:pt x="7160310" y="1578246"/>
-                  </a:lnTo>
-                  <a:lnTo>
-                    <a:pt x="7083066" y="1577819"/>
-                  </a:lnTo>
-                  <a:lnTo>
-                    <a:pt x="7005823" y="1577344"/>
-                  </a:lnTo>
-                  <a:lnTo>
-                    <a:pt x="6928579" y="1576815"/>
-                  </a:lnTo>
-                  <a:lnTo>
-                    <a:pt x="6851336" y="1576225"/>
-                  </a:lnTo>
-                  <a:lnTo>
-                    <a:pt x="6774092" y="1575568"/>
-                  </a:lnTo>
-                  <a:lnTo>
-                    <a:pt x="6696849" y="1574836"/>
-                  </a:lnTo>
-                  <a:lnTo>
-                    <a:pt x="6619605" y="1574020"/>
-                  </a:lnTo>
-                  <a:lnTo>
-                    <a:pt x="6542361" y="1573111"/>
-                  </a:lnTo>
-                  <a:lnTo>
-                    <a:pt x="6465118" y="1572098"/>
-                  </a:lnTo>
-                  <a:lnTo>
-                    <a:pt x="6387874" y="1570969"/>
-                  </a:lnTo>
-                  <a:lnTo>
-                    <a:pt x="6310631" y="1569712"/>
-                  </a:lnTo>
-                  <a:lnTo>
-                    <a:pt x="6233387" y="1568311"/>
-                  </a:lnTo>
-                  <a:lnTo>
-                    <a:pt x="6156144" y="1566751"/>
-                  </a:lnTo>
-                  <a:lnTo>
-                    <a:pt x="6078900" y="1565012"/>
-                  </a:lnTo>
-                  <a:lnTo>
-                    <a:pt x="6001656" y="1563074"/>
-                  </a:lnTo>
-                  <a:lnTo>
-                    <a:pt x="5924413" y="1560916"/>
-                  </a:lnTo>
-                  <a:lnTo>
-                    <a:pt x="5847169" y="1558511"/>
-                  </a:lnTo>
-                  <a:lnTo>
-                    <a:pt x="5769926" y="1555831"/>
-                  </a:lnTo>
-                  <a:lnTo>
-                    <a:pt x="5692682" y="1552846"/>
-                  </a:lnTo>
-                  <a:lnTo>
-                    <a:pt x="5615439" y="1549519"/>
-                  </a:lnTo>
-                  <a:lnTo>
-                    <a:pt x="5538195" y="1545813"/>
-                  </a:lnTo>
-                  <a:lnTo>
-                    <a:pt x="5460951" y="1541684"/>
-                  </a:lnTo>
-                  <a:lnTo>
-                    <a:pt x="5383708" y="1537083"/>
-                  </a:lnTo>
-                  <a:lnTo>
-                    <a:pt x="5306464" y="1531957"/>
-                  </a:lnTo>
-                  <a:lnTo>
-                    <a:pt x="5229221" y="1526246"/>
-                  </a:lnTo>
-                  <a:lnTo>
-                    <a:pt x="5151977" y="1519882"/>
-                  </a:lnTo>
-                  <a:lnTo>
-                    <a:pt x="5074734" y="1512792"/>
-                  </a:lnTo>
-                  <a:lnTo>
-                    <a:pt x="4997490" y="1504893"/>
-                  </a:lnTo>
-                  <a:lnTo>
-                    <a:pt x="4920246" y="1496092"/>
-                  </a:lnTo>
-                  <a:lnTo>
-                    <a:pt x="4843003" y="1486286"/>
-                  </a:lnTo>
-                  <a:lnTo>
-                    <a:pt x="4765759" y="1475361"/>
-                  </a:lnTo>
-                  <a:lnTo>
-                    <a:pt x="4688516" y="1463188"/>
-                  </a:lnTo>
-                  <a:lnTo>
-                    <a:pt x="4611272" y="1449625"/>
-                  </a:lnTo>
-                  <a:lnTo>
-                    <a:pt x="4534029" y="1434514"/>
-                  </a:lnTo>
-                  <a:lnTo>
-                    <a:pt x="4456785" y="1417678"/>
-                  </a:lnTo>
-                  <a:lnTo>
-                    <a:pt x="4379541" y="1398920"/>
-                  </a:lnTo>
-                  <a:lnTo>
-                    <a:pt x="4302298" y="1378020"/>
-                  </a:lnTo>
-                  <a:lnTo>
-                    <a:pt x="4225054" y="1354734"/>
-                  </a:lnTo>
-                  <a:lnTo>
-                    <a:pt x="4147811" y="1328789"/>
-                  </a:lnTo>
-                  <a:lnTo>
-                    <a:pt x="4070567" y="1299883"/>
-                  </a:lnTo>
-                  <a:lnTo>
-                    <a:pt x="3993324" y="1267676"/>
-                  </a:lnTo>
-                  <a:lnTo>
-                    <a:pt x="3916080" y="1231792"/>
-                  </a:lnTo>
-                  <a:lnTo>
-                    <a:pt x="3838836" y="1191811"/>
-                  </a:lnTo>
-                  <a:lnTo>
-                    <a:pt x="3761593" y="1147265"/>
-                  </a:lnTo>
-                  <a:lnTo>
-                    <a:pt x="3684349" y="1097634"/>
-                  </a:lnTo>
-                  <a:lnTo>
-                    <a:pt x="3607106" y="1042337"/>
-                  </a:lnTo>
-                  <a:lnTo>
-                    <a:pt x="3529862" y="980726"/>
-                  </a:lnTo>
-                  <a:lnTo>
-                    <a:pt x="3452619" y="912081"/>
-                  </a:lnTo>
-                  <a:lnTo>
-                    <a:pt x="3375375" y="835599"/>
-                  </a:lnTo>
-                  <a:lnTo>
-                    <a:pt x="3298131" y="752220"/>
-                  </a:lnTo>
-                  <a:lnTo>
-                    <a:pt x="3220888" y="739585"/>
-                  </a:lnTo>
-                  <a:lnTo>
-                    <a:pt x="3143644" y="726758"/>
-                  </a:lnTo>
-                  <a:lnTo>
-                    <a:pt x="3066401" y="713735"/>
-                  </a:lnTo>
-                  <a:lnTo>
-                    <a:pt x="2989157" y="700514"/>
-                  </a:lnTo>
-                  <a:lnTo>
-                    <a:pt x="2911914" y="687092"/>
-                  </a:lnTo>
-                  <a:lnTo>
-                    <a:pt x="2834670" y="673465"/>
-                  </a:lnTo>
-                  <a:lnTo>
-                    <a:pt x="2757426" y="659631"/>
-                  </a:lnTo>
-                  <a:lnTo>
-                    <a:pt x="2680183" y="645586"/>
-                  </a:lnTo>
-                  <a:lnTo>
-                    <a:pt x="2602939" y="631327"/>
-                  </a:lnTo>
-                  <a:lnTo>
-                    <a:pt x="2525696" y="616851"/>
-                  </a:lnTo>
-                  <a:lnTo>
-                    <a:pt x="2448452" y="602155"/>
-                  </a:lnTo>
-                  <a:lnTo>
-                    <a:pt x="2371209" y="587235"/>
-                  </a:lnTo>
-                  <a:lnTo>
-                    <a:pt x="2293965" y="572087"/>
-                  </a:lnTo>
-                  <a:lnTo>
-                    <a:pt x="2216721" y="556709"/>
-                  </a:lnTo>
-                  <a:lnTo>
-                    <a:pt x="2139478" y="541097"/>
-                  </a:lnTo>
-                  <a:lnTo>
-                    <a:pt x="2062234" y="525247"/>
-                  </a:lnTo>
-                  <a:lnTo>
-                    <a:pt x="1984991" y="509156"/>
-                  </a:lnTo>
-                  <a:lnTo>
-                    <a:pt x="1907747" y="492820"/>
-                  </a:lnTo>
-                  <a:lnTo>
-                    <a:pt x="1830504" y="476235"/>
-                  </a:lnTo>
-                  <a:lnTo>
-                    <a:pt x="1753260" y="459397"/>
-                  </a:lnTo>
-                  <a:lnTo>
-                    <a:pt x="1676016" y="442304"/>
-                  </a:lnTo>
-                  <a:lnTo>
-                    <a:pt x="1598773" y="424949"/>
-                  </a:lnTo>
-                  <a:lnTo>
-                    <a:pt x="1521529" y="407331"/>
-                  </a:lnTo>
-                  <a:lnTo>
-                    <a:pt x="1444286" y="389444"/>
-                  </a:lnTo>
-                  <a:lnTo>
-                    <a:pt x="1367042" y="371285"/>
-                  </a:lnTo>
-                  <a:lnTo>
-                    <a:pt x="1289799" y="352849"/>
-                  </a:lnTo>
-                  <a:lnTo>
-                    <a:pt x="1212555" y="334133"/>
-                  </a:lnTo>
-                  <a:lnTo>
-                    <a:pt x="1135311" y="315132"/>
-                  </a:lnTo>
-                  <a:lnTo>
-                    <a:pt x="1058068" y="295841"/>
-                  </a:lnTo>
-                  <a:lnTo>
-                    <a:pt x="980824" y="276257"/>
-                  </a:lnTo>
-                  <a:lnTo>
-                    <a:pt x="903581" y="256374"/>
-                  </a:lnTo>
-                  <a:lnTo>
-                    <a:pt x="826337" y="236188"/>
-                  </a:lnTo>
-                  <a:lnTo>
-                    <a:pt x="749094" y="215696"/>
-                  </a:lnTo>
-                  <a:lnTo>
-                    <a:pt x="671850" y="194891"/>
-                  </a:lnTo>
-                  <a:lnTo>
-                    <a:pt x="594606" y="173769"/>
-                  </a:lnTo>
-                  <a:lnTo>
-                    <a:pt x="517363" y="152326"/>
-                  </a:lnTo>
-                  <a:lnTo>
-                    <a:pt x="440119" y="130556"/>
-                  </a:lnTo>
-                  <a:lnTo>
-                    <a:pt x="362876" y="108455"/>
-                  </a:lnTo>
-                  <a:lnTo>
-                    <a:pt x="285632" y="86017"/>
-                  </a:lnTo>
-                  <a:lnTo>
-                    <a:pt x="208389" y="63238"/>
-                  </a:lnTo>
-                  <a:lnTo>
-                    <a:pt x="131145" y="40111"/>
-                  </a:lnTo>
-                  <a:lnTo>
-                    <a:pt x="53901" y="16633"/>
-                  </a:lnTo>
-                  <a:lnTo>
-                    <a:pt x="0" y="0"/>
-                  </a:lnTo>
-                </a:path>
-              </a:pathLst>
-            </a:custGeom>
-          </p:spPr>
-          <p:txBody>
-            <a:bodyPr/>
-            <a:lstStyle/>
-            <a:p/>
-          </p:txBody>
-        </p:sp>
-        <p:sp>
-          <p:nvSpPr>
-            <p:cNvPr id="24" name="pl24"/>
-            <p:cNvSpPr/>
-            <p:nvPr/>
-          </p:nvSpPr>
-          <p:spPr>
-            <a:xfrm>
-              <a:off x="2318732" y="2073503"/>
-              <a:ext cx="5890826" cy="3452029"/>
-            </a:xfrm>
-            <a:custGeom>
-              <a:avLst/>
-              <a:pathLst>
-                <a:path w="5890826" h="3452029">
+                <a:path w="5462148" h="3452029">
                   <a:moveTo>
                     <a:pt x="0" y="0"/>
                   </a:moveTo>
                   <a:lnTo>
-                    <a:pt x="20314" y="57267"/>
-                  </a:lnTo>
-                  <a:lnTo>
-                    <a:pt x="97558" y="262003"/>
-                  </a:lnTo>
-                  <a:lnTo>
-                    <a:pt x="174802" y="454506"/>
-                  </a:lnTo>
-                  <a:lnTo>
-                    <a:pt x="252045" y="635506"/>
-                  </a:lnTo>
-                  <a:lnTo>
-                    <a:pt x="329289" y="805692"/>
-                  </a:lnTo>
-                  <a:lnTo>
-                    <a:pt x="406532" y="965709"/>
-                  </a:lnTo>
-                  <a:lnTo>
-                    <a:pt x="483776" y="1116164"/>
-                  </a:lnTo>
-                  <a:lnTo>
-                    <a:pt x="561019" y="1257630"/>
-                  </a:lnTo>
-                  <a:lnTo>
-                    <a:pt x="638263" y="1390643"/>
-                  </a:lnTo>
-                  <a:lnTo>
-                    <a:pt x="715507" y="1515708"/>
-                  </a:lnTo>
-                  <a:lnTo>
-                    <a:pt x="792750" y="1633301"/>
-                  </a:lnTo>
-                  <a:lnTo>
-                    <a:pt x="869994" y="1743867"/>
-                  </a:lnTo>
-                  <a:lnTo>
-                    <a:pt x="947237" y="1847827"/>
-                  </a:lnTo>
-                  <a:lnTo>
-                    <a:pt x="1024481" y="1945575"/>
-                  </a:lnTo>
-                  <a:lnTo>
-                    <a:pt x="1101724" y="2037483"/>
-                  </a:lnTo>
-                  <a:lnTo>
-                    <a:pt x="1178968" y="2123898"/>
-                  </a:lnTo>
-                  <a:lnTo>
-                    <a:pt x="1256212" y="2205151"/>
-                  </a:lnTo>
-                  <a:lnTo>
-                    <a:pt x="1333455" y="2281548"/>
-                  </a:lnTo>
-                  <a:lnTo>
-                    <a:pt x="1410699" y="2353381"/>
-                  </a:lnTo>
-                  <a:lnTo>
-                    <a:pt x="1487942" y="2420922"/>
-                  </a:lnTo>
-                  <a:lnTo>
-                    <a:pt x="1565186" y="2484427"/>
-                  </a:lnTo>
-                  <a:lnTo>
-                    <a:pt x="1642429" y="2544137"/>
-                  </a:lnTo>
-                  <a:lnTo>
-                    <a:pt x="1719673" y="2600280"/>
-                  </a:lnTo>
-                  <a:lnTo>
-                    <a:pt x="1796917" y="2653068"/>
-                  </a:lnTo>
-                  <a:lnTo>
-                    <a:pt x="1874160" y="2702702"/>
-                  </a:lnTo>
-                  <a:lnTo>
-                    <a:pt x="1951404" y="2749370"/>
-                  </a:lnTo>
-                  <a:lnTo>
-                    <a:pt x="2028647" y="2793250"/>
-                  </a:lnTo>
-                  <a:lnTo>
-                    <a:pt x="2105891" y="2834508"/>
-                  </a:lnTo>
-                  <a:lnTo>
-                    <a:pt x="2183134" y="2873301"/>
-                  </a:lnTo>
-                  <a:lnTo>
-                    <a:pt x="2260378" y="2909776"/>
-                  </a:lnTo>
-                  <a:lnTo>
-                    <a:pt x="2337622" y="2944071"/>
-                  </a:lnTo>
-                  <a:lnTo>
-                    <a:pt x="2414865" y="2976317"/>
-                  </a:lnTo>
-                  <a:lnTo>
-                    <a:pt x="2492109" y="3006637"/>
-                  </a:lnTo>
-                  <a:lnTo>
-                    <a:pt x="2569352" y="3035145"/>
-                  </a:lnTo>
-                  <a:lnTo>
-                    <a:pt x="2646596" y="3061949"/>
-                  </a:lnTo>
-                  <a:lnTo>
-                    <a:pt x="2723839" y="3087152"/>
-                  </a:lnTo>
-                  <a:lnTo>
-                    <a:pt x="2801083" y="3110849"/>
-                  </a:lnTo>
-                  <a:lnTo>
-                    <a:pt x="2878327" y="3133130"/>
-                  </a:lnTo>
-                  <a:lnTo>
-                    <a:pt x="2955570" y="3154080"/>
-                  </a:lnTo>
-                  <a:lnTo>
-                    <a:pt x="3032814" y="3173778"/>
-                  </a:lnTo>
-                  <a:lnTo>
-                    <a:pt x="3110057" y="3192299"/>
-                  </a:lnTo>
-                  <a:lnTo>
-                    <a:pt x="3187301" y="3209713"/>
-                  </a:lnTo>
-                  <a:lnTo>
-                    <a:pt x="3264544" y="3226087"/>
-                  </a:lnTo>
-                  <a:lnTo>
-                    <a:pt x="3341788" y="3241482"/>
-                  </a:lnTo>
-                  <a:lnTo>
-                    <a:pt x="3419032" y="3255958"/>
-                  </a:lnTo>
-                  <a:lnTo>
-                    <a:pt x="3496275" y="3269568"/>
-                  </a:lnTo>
-                  <a:lnTo>
-                    <a:pt x="3573519" y="3282366"/>
-                  </a:lnTo>
-                  <a:lnTo>
-                    <a:pt x="3650762" y="3294399"/>
-                  </a:lnTo>
-                  <a:lnTo>
-                    <a:pt x="3728006" y="3305712"/>
-                  </a:lnTo>
-                  <a:lnTo>
-                    <a:pt x="3805249" y="3316350"/>
-                  </a:lnTo>
-                  <a:lnTo>
-                    <a:pt x="3882493" y="3326352"/>
-                  </a:lnTo>
-                  <a:lnTo>
-                    <a:pt x="3959737" y="3335757"/>
-                  </a:lnTo>
-                  <a:lnTo>
-                    <a:pt x="4036980" y="3344599"/>
-                  </a:lnTo>
-                  <a:lnTo>
-                    <a:pt x="4114224" y="3352913"/>
-                  </a:lnTo>
-                  <a:lnTo>
-                    <a:pt x="4191467" y="3360731"/>
-                  </a:lnTo>
-                  <a:lnTo>
-                    <a:pt x="4268711" y="3368081"/>
-                  </a:lnTo>
-                  <a:lnTo>
-                    <a:pt x="4345954" y="3374992"/>
-                  </a:lnTo>
-                  <a:lnTo>
-                    <a:pt x="4423198" y="3381490"/>
-                  </a:lnTo>
-                  <a:lnTo>
-                    <a:pt x="4500442" y="3387600"/>
-                  </a:lnTo>
-                  <a:lnTo>
-                    <a:pt x="4577685" y="3393345"/>
-                  </a:lnTo>
-                  <a:lnTo>
-                    <a:pt x="4654929" y="3398747"/>
-                  </a:lnTo>
-                  <a:lnTo>
-                    <a:pt x="4732172" y="3403826"/>
-                  </a:lnTo>
-                  <a:lnTo>
-                    <a:pt x="4809416" y="3408601"/>
-                  </a:lnTo>
-                  <a:lnTo>
-                    <a:pt x="4886659" y="3413091"/>
-                  </a:lnTo>
-                  <a:lnTo>
-                    <a:pt x="4963903" y="3417313"/>
-                  </a:lnTo>
-                  <a:lnTo>
-                    <a:pt x="5041147" y="3421282"/>
-                  </a:lnTo>
-                  <a:lnTo>
-                    <a:pt x="5118390" y="3425015"/>
-                  </a:lnTo>
-                  <a:lnTo>
-                    <a:pt x="5195634" y="3428524"/>
-                  </a:lnTo>
-                  <a:lnTo>
-                    <a:pt x="5272877" y="3431823"/>
-                  </a:lnTo>
-                  <a:lnTo>
-                    <a:pt x="5350121" y="3434926"/>
-                  </a:lnTo>
-                  <a:lnTo>
-                    <a:pt x="5427364" y="3437843"/>
-                  </a:lnTo>
-                  <a:lnTo>
-                    <a:pt x="5504608" y="3440586"/>
-                  </a:lnTo>
-                  <a:lnTo>
-                    <a:pt x="5581852" y="3443165"/>
-                  </a:lnTo>
-                  <a:lnTo>
-                    <a:pt x="5659095" y="3445589"/>
-                  </a:lnTo>
-                  <a:lnTo>
-                    <a:pt x="5736339" y="3447869"/>
-                  </a:lnTo>
-                  <a:lnTo>
-                    <a:pt x="5813582" y="3450013"/>
-                  </a:lnTo>
-                  <a:lnTo>
-                    <a:pt x="5890826" y="3452029"/>
+                    <a:pt x="18836" y="57267"/>
+                  </a:lnTo>
+                  <a:lnTo>
+                    <a:pt x="90459" y="262003"/>
+                  </a:lnTo>
+                  <a:lnTo>
+                    <a:pt x="162081" y="454506"/>
+                  </a:lnTo>
+                  <a:lnTo>
+                    <a:pt x="233704" y="635506"/>
+                  </a:lnTo>
+                  <a:lnTo>
+                    <a:pt x="305326" y="805692"/>
+                  </a:lnTo>
+                  <a:lnTo>
+                    <a:pt x="376949" y="965709"/>
+                  </a:lnTo>
+                  <a:lnTo>
+                    <a:pt x="448571" y="1116164"/>
+                  </a:lnTo>
+                  <a:lnTo>
+                    <a:pt x="520194" y="1257630"/>
+                  </a:lnTo>
+                  <a:lnTo>
+                    <a:pt x="591816" y="1390643"/>
+                  </a:lnTo>
+                  <a:lnTo>
+                    <a:pt x="663439" y="1515708"/>
+                  </a:lnTo>
+                  <a:lnTo>
+                    <a:pt x="735061" y="1633301"/>
+                  </a:lnTo>
+                  <a:lnTo>
+                    <a:pt x="806684" y="1743867"/>
+                  </a:lnTo>
+                  <a:lnTo>
+                    <a:pt x="878306" y="1847827"/>
+                  </a:lnTo>
+                  <a:lnTo>
+                    <a:pt x="949929" y="1945575"/>
+                  </a:lnTo>
+                  <a:lnTo>
+                    <a:pt x="1021551" y="2037483"/>
+                  </a:lnTo>
+                  <a:lnTo>
+                    <a:pt x="1093174" y="2123898"/>
+                  </a:lnTo>
+                  <a:lnTo>
+                    <a:pt x="1164797" y="2205151"/>
+                  </a:lnTo>
+                  <a:lnTo>
+                    <a:pt x="1236419" y="2281548"/>
+                  </a:lnTo>
+                  <a:lnTo>
+                    <a:pt x="1308042" y="2353381"/>
+                  </a:lnTo>
+                  <a:lnTo>
+                    <a:pt x="1379664" y="2420922"/>
+                  </a:lnTo>
+                  <a:lnTo>
+                    <a:pt x="1451287" y="2484427"/>
+                  </a:lnTo>
+                  <a:lnTo>
+                    <a:pt x="1522909" y="2544137"/>
+                  </a:lnTo>
+                  <a:lnTo>
+                    <a:pt x="1594532" y="2600280"/>
+                  </a:lnTo>
+                  <a:lnTo>
+                    <a:pt x="1666154" y="2653068"/>
+                  </a:lnTo>
+                  <a:lnTo>
+                    <a:pt x="1737777" y="2702702"/>
+                  </a:lnTo>
+                  <a:lnTo>
+                    <a:pt x="1809399" y="2749370"/>
+                  </a:lnTo>
+                  <a:lnTo>
+                    <a:pt x="1881022" y="2793250"/>
+                  </a:lnTo>
+                  <a:lnTo>
+                    <a:pt x="1952644" y="2834508"/>
+                  </a:lnTo>
+                  <a:lnTo>
+                    <a:pt x="2024267" y="2873301"/>
+                  </a:lnTo>
+                  <a:lnTo>
+                    <a:pt x="2095889" y="2909776"/>
+                  </a:lnTo>
+                  <a:lnTo>
+                    <a:pt x="2167512" y="2944071"/>
+                  </a:lnTo>
+                  <a:lnTo>
+                    <a:pt x="2239134" y="2976317"/>
+                  </a:lnTo>
+                  <a:lnTo>
+                    <a:pt x="2310757" y="3006637"/>
+                  </a:lnTo>
+                  <a:lnTo>
+                    <a:pt x="2382379" y="3035145"/>
+                  </a:lnTo>
+                  <a:lnTo>
+                    <a:pt x="2454002" y="3061949"/>
+                  </a:lnTo>
+                  <a:lnTo>
+                    <a:pt x="2525625" y="3087152"/>
+                  </a:lnTo>
+                  <a:lnTo>
+                    <a:pt x="2597247" y="3110849"/>
+                  </a:lnTo>
+                  <a:lnTo>
+                    <a:pt x="2668870" y="3133130"/>
+                  </a:lnTo>
+                  <a:lnTo>
+                    <a:pt x="2740492" y="3154080"/>
+                  </a:lnTo>
+                  <a:lnTo>
+                    <a:pt x="2812115" y="3173778"/>
+                  </a:lnTo>
+                  <a:lnTo>
+                    <a:pt x="2883737" y="3192299"/>
+                  </a:lnTo>
+                  <a:lnTo>
+                    <a:pt x="2955360" y="3209713"/>
+                  </a:lnTo>
+                  <a:lnTo>
+                    <a:pt x="3026982" y="3226087"/>
+                  </a:lnTo>
+                  <a:lnTo>
+                    <a:pt x="3098605" y="3241482"/>
+                  </a:lnTo>
+                  <a:lnTo>
+                    <a:pt x="3170227" y="3255958"/>
+                  </a:lnTo>
+                  <a:lnTo>
+                    <a:pt x="3241850" y="3269568"/>
+                  </a:lnTo>
+                  <a:lnTo>
+                    <a:pt x="3313472" y="3282366"/>
+                  </a:lnTo>
+                  <a:lnTo>
+                    <a:pt x="3385095" y="3294399"/>
+                  </a:lnTo>
+                  <a:lnTo>
+                    <a:pt x="3456717" y="3305712"/>
+                  </a:lnTo>
+                  <a:lnTo>
+                    <a:pt x="3528340" y="3316350"/>
+                  </a:lnTo>
+                  <a:lnTo>
+                    <a:pt x="3599962" y="3326352"/>
+                  </a:lnTo>
+                  <a:lnTo>
+                    <a:pt x="3671585" y="3335757"/>
+                  </a:lnTo>
+                  <a:lnTo>
+                    <a:pt x="3743207" y="3344599"/>
+                  </a:lnTo>
+                  <a:lnTo>
+                    <a:pt x="3814830" y="3352913"/>
+                  </a:lnTo>
+                  <a:lnTo>
+                    <a:pt x="3886453" y="3360731"/>
+                  </a:lnTo>
+                  <a:lnTo>
+                    <a:pt x="3958075" y="3368081"/>
+                  </a:lnTo>
+                  <a:lnTo>
+                    <a:pt x="4029698" y="3374992"/>
+                  </a:lnTo>
+                  <a:lnTo>
+                    <a:pt x="4101320" y="3381490"/>
+                  </a:lnTo>
+                  <a:lnTo>
+                    <a:pt x="4172943" y="3387600"/>
+                  </a:lnTo>
+                  <a:lnTo>
+                    <a:pt x="4244565" y="3393345"/>
+                  </a:lnTo>
+                  <a:lnTo>
+                    <a:pt x="4316188" y="3398747"/>
+                  </a:lnTo>
+                  <a:lnTo>
+                    <a:pt x="4387810" y="3403826"/>
+                  </a:lnTo>
+                  <a:lnTo>
+                    <a:pt x="4459433" y="3408601"/>
+                  </a:lnTo>
+                  <a:lnTo>
+                    <a:pt x="4531055" y="3413091"/>
+                  </a:lnTo>
+                  <a:lnTo>
+                    <a:pt x="4602678" y="3417313"/>
+                  </a:lnTo>
+                  <a:lnTo>
+                    <a:pt x="4674300" y="3421282"/>
+                  </a:lnTo>
+                  <a:lnTo>
+                    <a:pt x="4745923" y="3425015"/>
+                  </a:lnTo>
+                  <a:lnTo>
+                    <a:pt x="4817545" y="3428524"/>
+                  </a:lnTo>
+                  <a:lnTo>
+                    <a:pt x="4889168" y="3431823"/>
+                  </a:lnTo>
+                  <a:lnTo>
+                    <a:pt x="4960790" y="3434926"/>
+                  </a:lnTo>
+                  <a:lnTo>
+                    <a:pt x="5032413" y="3437843"/>
+                  </a:lnTo>
+                  <a:lnTo>
+                    <a:pt x="5104035" y="3440586"/>
+                  </a:lnTo>
+                  <a:lnTo>
+                    <a:pt x="5175658" y="3443165"/>
+                  </a:lnTo>
+                  <a:lnTo>
+                    <a:pt x="5247281" y="3445589"/>
+                  </a:lnTo>
+                  <a:lnTo>
+                    <a:pt x="5318903" y="3447869"/>
+                  </a:lnTo>
+                  <a:lnTo>
+                    <a:pt x="5390526" y="3450013"/>
+                  </a:lnTo>
+                  <a:lnTo>
+                    <a:pt x="5462148" y="3452029"/>
                   </a:lnTo>
                 </a:path>
               </a:pathLst>
@@ -4335,7 +4313,7 @@
         </p:sp>
         <p:sp>
           <p:nvSpPr>
-            <p:cNvPr id="25" name="pl25"/>
+            <p:cNvPr id="24" name="pl24"/>
             <p:cNvSpPr/>
             <p:nvPr/>
           </p:nvSpPr>
@@ -4378,13 +4356,13 @@
         </p:sp>
         <p:sp>
           <p:nvSpPr>
-            <p:cNvPr id="26" name="pl26"/>
+            <p:cNvPr id="25" name="pl25"/>
             <p:cNvSpPr/>
             <p:nvPr/>
           </p:nvSpPr>
           <p:spPr>
             <a:xfrm>
-              <a:off x="4117484" y="2073503"/>
+              <a:off x="4468386" y="2073503"/>
               <a:ext cx="0" cy="3649639"/>
             </a:xfrm>
             <a:custGeom>
@@ -4421,7 +4399,7 @@
         </p:sp>
         <p:sp>
           <p:nvSpPr>
-            <p:cNvPr id="27" name="tx27"/>
+            <p:cNvPr id="26" name="tx26"/>
             <p:cNvSpPr/>
             <p:nvPr/>
           </p:nvSpPr>
@@ -4467,7 +4445,7 @@
         </p:sp>
         <p:sp>
           <p:nvSpPr>
-            <p:cNvPr id="28" name="tx28"/>
+            <p:cNvPr id="27" name="tx27"/>
             <p:cNvSpPr/>
             <p:nvPr/>
           </p:nvSpPr>
@@ -4513,7 +4491,7 @@
         </p:sp>
         <p:sp>
           <p:nvSpPr>
-            <p:cNvPr id="29" name="tx29"/>
+            <p:cNvPr id="28" name="tx28"/>
             <p:cNvSpPr/>
             <p:nvPr/>
           </p:nvSpPr>
@@ -4559,7 +4537,7 @@
         </p:sp>
         <p:sp>
           <p:nvSpPr>
-            <p:cNvPr id="30" name="tx30"/>
+            <p:cNvPr id="29" name="tx29"/>
             <p:cNvSpPr/>
             <p:nvPr/>
           </p:nvSpPr>
@@ -4605,7 +4583,7 @@
         </p:sp>
         <p:sp>
           <p:nvSpPr>
-            <p:cNvPr id="31" name="tx31"/>
+            <p:cNvPr id="30" name="tx30"/>
             <p:cNvSpPr/>
             <p:nvPr/>
           </p:nvSpPr>
@@ -4651,14 +4629,14 @@
         </p:sp>
         <p:sp>
           <p:nvSpPr>
-            <p:cNvPr id="32" name="tx32"/>
+            <p:cNvPr id="31" name="tx31"/>
             <p:cNvSpPr/>
             <p:nvPr/>
           </p:nvSpPr>
           <p:spPr>
             <a:xfrm>
-              <a:off x="2423864" y="5785772"/>
-              <a:ext cx="155356" cy="80101"/>
+              <a:off x="2478335" y="5785772"/>
+              <a:ext cx="161574" cy="80101"/>
             </a:xfrm>
             <a:prstGeom prst="rect">
               <a:avLst/>
@@ -4690,21 +4668,21 @@
                   <a:latin typeface="Helvetica"/>
                   <a:cs typeface="Helvetica"/>
                 </a:rPr>
-                <a:t>0.8</a:t>
+                <a:t>-25</a:t>
               </a:r>
             </a:p>
           </p:txBody>
         </p:sp>
         <p:sp>
           <p:nvSpPr>
-            <p:cNvPr id="33" name="tx33"/>
+            <p:cNvPr id="32" name="tx32"/>
             <p:cNvSpPr/>
             <p:nvPr/>
           </p:nvSpPr>
           <p:spPr>
             <a:xfrm>
-              <a:off x="4196521" y="5785772"/>
-              <a:ext cx="155356" cy="80101"/>
+              <a:off x="4582608" y="5785772"/>
+              <a:ext cx="62179" cy="80101"/>
             </a:xfrm>
             <a:prstGeom prst="rect">
               <a:avLst/>
@@ -4736,21 +4714,21 @@
                   <a:latin typeface="Helvetica"/>
                   <a:cs typeface="Helvetica"/>
                 </a:rPr>
-                <a:t>1.0</a:t>
+                <a:t>0</a:t>
               </a:r>
             </a:p>
           </p:txBody>
         </p:sp>
         <p:sp>
           <p:nvSpPr>
-            <p:cNvPr id="34" name="tx34"/>
+            <p:cNvPr id="33" name="tx33"/>
             <p:cNvSpPr/>
             <p:nvPr/>
           </p:nvSpPr>
           <p:spPr>
             <a:xfrm>
-              <a:off x="5969179" y="5785772"/>
-              <a:ext cx="155356" cy="80101"/>
+              <a:off x="6606094" y="5785772"/>
+              <a:ext cx="124358" cy="80101"/>
             </a:xfrm>
             <a:prstGeom prst="rect">
               <a:avLst/>
@@ -4782,67 +4760,21 @@
                   <a:latin typeface="Helvetica"/>
                   <a:cs typeface="Helvetica"/>
                 </a:rPr>
-                <a:t>1.2</a:t>
+                <a:t>25</a:t>
               </a:r>
             </a:p>
           </p:txBody>
         </p:sp>
         <p:sp>
           <p:nvSpPr>
-            <p:cNvPr id="35" name="tx35"/>
+            <p:cNvPr id="34" name="tx34"/>
             <p:cNvSpPr/>
             <p:nvPr/>
           </p:nvSpPr>
           <p:spPr>
             <a:xfrm>
-              <a:off x="7741836" y="5785772"/>
-              <a:ext cx="155356" cy="80101"/>
-            </a:xfrm>
-            <a:prstGeom prst="rect">
-              <a:avLst/>
-            </a:prstGeom>
-            <a:noFill/>
-          </p:spPr>
-          <p:txBody>
-            <a:bodyPr lIns="0" rIns="0" tIns="0" bIns="0" anchorCtr="1" anchor="ctr" wrap="none"/>
-            <a:lstStyle/>
-            <a:p>
-              <a:pPr algn="l" marL="0" marR="0" indent="0">
-                <a:lnSpc>
-                  <a:spcPts val="880"/>
-                </a:lnSpc>
-                <a:spcBef>
-                  <a:spcPts val="0"/>
-                </a:spcBef>
-                <a:spcAft>
-                  <a:spcPts val="0"/>
-                </a:spcAft>
-              </a:pPr>
-              <a:r>
-                <a:rPr sz="880">
-                  <a:solidFill>
-                    <a:srgbClr val="4D4D4D">
-                      <a:alpha val="100000"/>
-                    </a:srgbClr>
-                  </a:solidFill>
-                  <a:latin typeface="Helvetica"/>
-                  <a:cs typeface="Helvetica"/>
-                </a:rPr>
-                <a:t>1.4</a:t>
-              </a:r>
-            </a:p>
-          </p:txBody>
-        </p:sp>
-        <p:sp>
-          <p:nvSpPr>
-            <p:cNvPr id="36" name="tx36"/>
-            <p:cNvSpPr/>
-            <p:nvPr/>
-          </p:nvSpPr>
-          <p:spPr>
-            <a:xfrm>
-              <a:off x="3879271" y="5925448"/>
-              <a:ext cx="1676186" cy="100218"/>
+              <a:off x="2928340" y="5925448"/>
+              <a:ext cx="3578047" cy="100218"/>
             </a:xfrm>
             <a:prstGeom prst="rect">
               <a:avLst/>
@@ -4874,14 +4806,14 @@
                   <a:latin typeface="Helvetica"/>
                   <a:cs typeface="Helvetica"/>
                 </a:rPr>
-                <a:t>CKD-EPI Cr-Cys / CG ratio</a:t>
+                <a:t>eGFR difference (%): 100 × (CKD-EPI Cr-Cys − CG) / CG</a:t>
               </a:r>
             </a:p>
           </p:txBody>
         </p:sp>
         <p:sp>
           <p:nvSpPr>
-            <p:cNvPr id="37" name="tx37"/>
+            <p:cNvPr id="35" name="tx35"/>
             <p:cNvSpPr/>
             <p:nvPr/>
           </p:nvSpPr>
@@ -4927,14 +4859,14 @@
         </p:sp>
         <p:sp>
           <p:nvSpPr>
-            <p:cNvPr id="38" name="tx38"/>
+            <p:cNvPr id="36" name="tx36"/>
             <p:cNvSpPr/>
             <p:nvPr/>
           </p:nvSpPr>
           <p:spPr>
             <a:xfrm>
               <a:off x="817517" y="1896563"/>
-              <a:ext cx="6896679" cy="82021"/>
+              <a:ext cx="7048926" cy="82021"/>
             </a:xfrm>
             <a:prstGeom prst="rect">
               <a:avLst/>
@@ -4966,14 +4898,14 @@
                   <a:latin typeface="Helvetica"/>
                   <a:cs typeface="Helvetica"/>
                 </a:rPr>
-                <a:t>subHR per 0.1 ratio decline: 2.03 (1.19-3.46), p_Bonf = 0.056 (n = 6)  |  per IQR decline (Δ = 0.30): 8.07 (1.67-39.01)  |  IQR: [0.84, 1.14]</a:t>
+                <a:t>subHR per 10 % decline: 2.03 (1.19-3.46), p_Bonf = 0.056 (n = 6)  |  per IQR decline (Δ = 29.5 %): 8.07 (1.67-39.01)  |  IQR: [-15.6, 13.9] %</a:t>
               </a:r>
             </a:p>
           </p:txBody>
         </p:sp>
         <p:sp>
           <p:nvSpPr>
-            <p:cNvPr id="39" name="tx39"/>
+            <p:cNvPr id="37" name="tx37"/>
             <p:cNvSpPr/>
             <p:nvPr/>
           </p:nvSpPr>

--- a/docs/pptx/auc3/jx-auc3-linsubhr-ratio-throm3.pptx
+++ b/docs/pptx/auc3/jx-auc3-linsubhr-ratio-throm3.pptx
@@ -2265,34 +2265,26 @@
         </p:sp>
         <p:sp>
           <p:nvSpPr>
-            <p:cNvPr id="4" name="pl4"/>
+            <p:cNvPr id="4" name="rc4"/>
             <p:cNvSpPr/>
             <p:nvPr/>
           </p:nvSpPr>
           <p:spPr>
             <a:xfrm>
-              <a:off x="817517" y="5142518"/>
-              <a:ext cx="7799693" cy="0"/>
+              <a:off x="457200" y="1600200"/>
+              <a:ext cx="8229600" cy="4525962"/>
             </a:xfrm>
-            <a:custGeom>
+            <a:prstGeom prst="rect">
               <a:avLst/>
-              <a:pathLst>
-                <a:path w="7799693" h="0">
-                  <a:moveTo>
-                    <a:pt x="0" y="0"/>
-                  </a:moveTo>
-                  <a:lnTo>
-                    <a:pt x="7799693" y="0"/>
-                  </a:lnTo>
-                  <a:lnTo>
-                    <a:pt x="7799693" y="0"/>
-                  </a:lnTo>
-                </a:path>
-              </a:pathLst>
-            </a:custGeom>
-            <a:ln w="6775" cap="flat">
+            </a:prstGeom>
+            <a:solidFill>
+              <a:srgbClr val="FFFFFF">
+                <a:alpha val="100000"/>
+              </a:srgbClr>
+            </a:solidFill>
+            <a:ln w="13550" cap="rnd">
               <a:solidFill>
-                <a:srgbClr val="EBEBEB">
+                <a:srgbClr val="FFFFFF">
                   <a:alpha val="100000"/>
                 </a:srgbClr>
               </a:solidFill>
@@ -2314,21 +2306,21 @@
           </p:nvSpPr>
           <p:spPr>
             <a:xfrm>
-              <a:off x="817517" y="4313054"/>
-              <a:ext cx="7799693" cy="0"/>
+              <a:off x="887106" y="3250627"/>
+              <a:ext cx="7660515" cy="0"/>
             </a:xfrm>
             <a:custGeom>
               <a:avLst/>
               <a:pathLst>
-                <a:path w="7799693" h="0">
+                <a:path w="7660515" h="0">
                   <a:moveTo>
                     <a:pt x="0" y="0"/>
                   </a:moveTo>
                   <a:lnTo>
-                    <a:pt x="7799693" y="0"/>
-                  </a:lnTo>
-                  <a:lnTo>
-                    <a:pt x="7799693" y="0"/>
+                    <a:pt x="7660515" y="0"/>
+                  </a:lnTo>
+                  <a:lnTo>
+                    <a:pt x="7660515" y="0"/>
                   </a:lnTo>
                 </a:path>
               </a:pathLst>
@@ -2357,21 +2349,21 @@
           </p:nvSpPr>
           <p:spPr>
             <a:xfrm>
-              <a:off x="817517" y="3483591"/>
-              <a:ext cx="7799693" cy="0"/>
+              <a:off x="887106" y="2951293"/>
+              <a:ext cx="7660515" cy="0"/>
             </a:xfrm>
             <a:custGeom>
               <a:avLst/>
               <a:pathLst>
-                <a:path w="7799693" h="0">
+                <a:path w="7660515" h="0">
                   <a:moveTo>
                     <a:pt x="0" y="0"/>
                   </a:moveTo>
                   <a:lnTo>
-                    <a:pt x="7799693" y="0"/>
-                  </a:lnTo>
-                  <a:lnTo>
-                    <a:pt x="7799693" y="0"/>
+                    <a:pt x="7660515" y="0"/>
+                  </a:lnTo>
+                  <a:lnTo>
+                    <a:pt x="7660515" y="0"/>
                   </a:lnTo>
                 </a:path>
               </a:pathLst>
@@ -2400,21 +2392,21 @@
           </p:nvSpPr>
           <p:spPr>
             <a:xfrm>
-              <a:off x="817517" y="2654127"/>
-              <a:ext cx="7799693" cy="0"/>
+              <a:off x="887106" y="2651959"/>
+              <a:ext cx="7660515" cy="0"/>
             </a:xfrm>
             <a:custGeom>
               <a:avLst/>
               <a:pathLst>
-                <a:path w="7799693" h="0">
+                <a:path w="7660515" h="0">
                   <a:moveTo>
                     <a:pt x="0" y="0"/>
                   </a:moveTo>
                   <a:lnTo>
-                    <a:pt x="7799693" y="0"/>
-                  </a:lnTo>
-                  <a:lnTo>
-                    <a:pt x="7799693" y="0"/>
+                    <a:pt x="7660515" y="0"/>
+                  </a:lnTo>
+                  <a:lnTo>
+                    <a:pt x="7660515" y="0"/>
                   </a:lnTo>
                 </a:path>
               </a:pathLst>
@@ -2443,21 +2435,21 @@
           </p:nvSpPr>
           <p:spPr>
             <a:xfrm>
-              <a:off x="1531834" y="2073503"/>
-              <a:ext cx="0" cy="3649639"/>
+              <a:off x="887106" y="2352625"/>
+              <a:ext cx="7660515" cy="0"/>
             </a:xfrm>
             <a:custGeom>
               <a:avLst/>
               <a:pathLst>
-                <a:path w="0" h="3649639">
+                <a:path w="7660515" h="0">
                   <a:moveTo>
-                    <a:pt x="0" y="3649639"/>
+                    <a:pt x="0" y="0"/>
                   </a:moveTo>
                   <a:lnTo>
-                    <a:pt x="0" y="0"/>
-                  </a:lnTo>
-                  <a:lnTo>
-                    <a:pt x="0" y="0"/>
+                    <a:pt x="7660515" y="0"/>
+                  </a:lnTo>
+                  <a:lnTo>
+                    <a:pt x="7660515" y="0"/>
                   </a:lnTo>
                 </a:path>
               </a:pathLst>
@@ -2486,15 +2478,15 @@
           </p:nvSpPr>
           <p:spPr>
             <a:xfrm>
-              <a:off x="3586410" y="2073503"/>
-              <a:ext cx="0" cy="3649639"/>
+              <a:off x="1588677" y="2143092"/>
+              <a:ext cx="0" cy="1317069"/>
             </a:xfrm>
             <a:custGeom>
               <a:avLst/>
               <a:pathLst>
-                <a:path w="0" h="3649639">
+                <a:path w="0" h="1317069">
                   <a:moveTo>
-                    <a:pt x="0" y="3649639"/>
+                    <a:pt x="0" y="1317069"/>
                   </a:moveTo>
                   <a:lnTo>
                     <a:pt x="0" y="0"/>
@@ -2529,15 +2521,15 @@
           </p:nvSpPr>
           <p:spPr>
             <a:xfrm>
-              <a:off x="5640985" y="2073503"/>
-              <a:ext cx="0" cy="3649639"/>
+              <a:off x="3606590" y="2143092"/>
+              <a:ext cx="0" cy="1317069"/>
             </a:xfrm>
             <a:custGeom>
               <a:avLst/>
               <a:pathLst>
-                <a:path w="0" h="3649639">
+                <a:path w="0" h="1317069">
                   <a:moveTo>
-                    <a:pt x="0" y="3649639"/>
+                    <a:pt x="0" y="1317069"/>
                   </a:moveTo>
                   <a:lnTo>
                     <a:pt x="0" y="0"/>
@@ -2572,15 +2564,15 @@
           </p:nvSpPr>
           <p:spPr>
             <a:xfrm>
-              <a:off x="7695561" y="2073503"/>
-              <a:ext cx="0" cy="3649639"/>
+              <a:off x="5624504" y="2143092"/>
+              <a:ext cx="0" cy="1317069"/>
             </a:xfrm>
             <a:custGeom>
               <a:avLst/>
               <a:pathLst>
-                <a:path w="0" h="3649639">
+                <a:path w="0" h="1317069">
                   <a:moveTo>
-                    <a:pt x="0" y="3649639"/>
+                    <a:pt x="0" y="1317069"/>
                   </a:moveTo>
                   <a:lnTo>
                     <a:pt x="0" y="0"/>
@@ -2615,26 +2607,26 @@
           </p:nvSpPr>
           <p:spPr>
             <a:xfrm>
-              <a:off x="817517" y="5557249"/>
-              <a:ext cx="7799693" cy="0"/>
+              <a:off x="7642418" y="2143092"/>
+              <a:ext cx="0" cy="1317069"/>
             </a:xfrm>
             <a:custGeom>
               <a:avLst/>
               <a:pathLst>
-                <a:path w="7799693" h="0">
+                <a:path w="0" h="1317069">
                   <a:moveTo>
+                    <a:pt x="0" y="1317069"/>
+                  </a:moveTo>
+                  <a:lnTo>
                     <a:pt x="0" y="0"/>
-                  </a:moveTo>
-                  <a:lnTo>
-                    <a:pt x="7799693" y="0"/>
-                  </a:lnTo>
-                  <a:lnTo>
-                    <a:pt x="7799693" y="0"/>
+                  </a:lnTo>
+                  <a:lnTo>
+                    <a:pt x="0" y="0"/>
                   </a:lnTo>
                 </a:path>
               </a:pathLst>
             </a:custGeom>
-            <a:ln w="13550" cap="flat">
+            <a:ln w="6775" cap="flat">
               <a:solidFill>
                 <a:srgbClr val="EBEBEB">
                   <a:alpha val="100000"/>
@@ -2658,21 +2650,21 @@
           </p:nvSpPr>
           <p:spPr>
             <a:xfrm>
-              <a:off x="817517" y="4727786"/>
-              <a:ext cx="7799693" cy="0"/>
+              <a:off x="887106" y="3400294"/>
+              <a:ext cx="7660515" cy="0"/>
             </a:xfrm>
             <a:custGeom>
               <a:avLst/>
               <a:pathLst>
-                <a:path w="7799693" h="0">
+                <a:path w="7660515" h="0">
                   <a:moveTo>
                     <a:pt x="0" y="0"/>
                   </a:moveTo>
                   <a:lnTo>
-                    <a:pt x="7799693" y="0"/>
-                  </a:lnTo>
-                  <a:lnTo>
-                    <a:pt x="7799693" y="0"/>
+                    <a:pt x="7660515" y="0"/>
+                  </a:lnTo>
+                  <a:lnTo>
+                    <a:pt x="7660515" y="0"/>
                   </a:lnTo>
                 </a:path>
               </a:pathLst>
@@ -2701,21 +2693,21 @@
           </p:nvSpPr>
           <p:spPr>
             <a:xfrm>
-              <a:off x="817517" y="3898322"/>
-              <a:ext cx="7799693" cy="0"/>
+              <a:off x="887106" y="3100960"/>
+              <a:ext cx="7660515" cy="0"/>
             </a:xfrm>
             <a:custGeom>
               <a:avLst/>
               <a:pathLst>
-                <a:path w="7799693" h="0">
+                <a:path w="7660515" h="0">
                   <a:moveTo>
                     <a:pt x="0" y="0"/>
                   </a:moveTo>
                   <a:lnTo>
-                    <a:pt x="7799693" y="0"/>
-                  </a:lnTo>
-                  <a:lnTo>
-                    <a:pt x="7799693" y="0"/>
+                    <a:pt x="7660515" y="0"/>
+                  </a:lnTo>
+                  <a:lnTo>
+                    <a:pt x="7660515" y="0"/>
                   </a:lnTo>
                 </a:path>
               </a:pathLst>
@@ -2744,21 +2736,21 @@
           </p:nvSpPr>
           <p:spPr>
             <a:xfrm>
-              <a:off x="817517" y="3068859"/>
-              <a:ext cx="7799693" cy="0"/>
+              <a:off x="887106" y="2801626"/>
+              <a:ext cx="7660515" cy="0"/>
             </a:xfrm>
             <a:custGeom>
               <a:avLst/>
               <a:pathLst>
-                <a:path w="7799693" h="0">
+                <a:path w="7660515" h="0">
                   <a:moveTo>
                     <a:pt x="0" y="0"/>
                   </a:moveTo>
                   <a:lnTo>
-                    <a:pt x="7799693" y="0"/>
-                  </a:lnTo>
-                  <a:lnTo>
-                    <a:pt x="7799693" y="0"/>
+                    <a:pt x="7660515" y="0"/>
+                  </a:lnTo>
+                  <a:lnTo>
+                    <a:pt x="7660515" y="0"/>
                   </a:lnTo>
                 </a:path>
               </a:pathLst>
@@ -2787,21 +2779,21 @@
           </p:nvSpPr>
           <p:spPr>
             <a:xfrm>
-              <a:off x="817517" y="2239395"/>
-              <a:ext cx="7799693" cy="0"/>
+              <a:off x="887106" y="2502292"/>
+              <a:ext cx="7660515" cy="0"/>
             </a:xfrm>
             <a:custGeom>
               <a:avLst/>
               <a:pathLst>
-                <a:path w="7799693" h="0">
+                <a:path w="7660515" h="0">
                   <a:moveTo>
                     <a:pt x="0" y="0"/>
                   </a:moveTo>
                   <a:lnTo>
-                    <a:pt x="7799693" y="0"/>
-                  </a:lnTo>
-                  <a:lnTo>
-                    <a:pt x="7799693" y="0"/>
+                    <a:pt x="7660515" y="0"/>
+                  </a:lnTo>
+                  <a:lnTo>
+                    <a:pt x="7660515" y="0"/>
                   </a:lnTo>
                 </a:path>
               </a:pathLst>
@@ -2830,21 +2822,21 @@
           </p:nvSpPr>
           <p:spPr>
             <a:xfrm>
-              <a:off x="2559122" y="2073503"/>
-              <a:ext cx="0" cy="3649639"/>
+              <a:off x="887106" y="2202958"/>
+              <a:ext cx="7660515" cy="0"/>
             </a:xfrm>
             <a:custGeom>
               <a:avLst/>
               <a:pathLst>
-                <a:path w="0" h="3649639">
+                <a:path w="7660515" h="0">
                   <a:moveTo>
-                    <a:pt x="0" y="3649639"/>
+                    <a:pt x="0" y="0"/>
                   </a:moveTo>
                   <a:lnTo>
-                    <a:pt x="0" y="0"/>
-                  </a:lnTo>
-                  <a:lnTo>
-                    <a:pt x="0" y="0"/>
+                    <a:pt x="7660515" y="0"/>
+                  </a:lnTo>
+                  <a:lnTo>
+                    <a:pt x="7660515" y="0"/>
                   </a:lnTo>
                 </a:path>
               </a:pathLst>
@@ -2873,15 +2865,15 @@
           </p:nvSpPr>
           <p:spPr>
             <a:xfrm>
-              <a:off x="4613698" y="2073503"/>
-              <a:ext cx="0" cy="3649639"/>
+              <a:off x="2597634" y="2143092"/>
+              <a:ext cx="0" cy="1317069"/>
             </a:xfrm>
             <a:custGeom>
               <a:avLst/>
               <a:pathLst>
-                <a:path w="0" h="3649639">
+                <a:path w="0" h="1317069">
                   <a:moveTo>
-                    <a:pt x="0" y="3649639"/>
+                    <a:pt x="0" y="1317069"/>
                   </a:moveTo>
                   <a:lnTo>
                     <a:pt x="0" y="0"/>
@@ -2916,15 +2908,15 @@
           </p:nvSpPr>
           <p:spPr>
             <a:xfrm>
-              <a:off x="6668273" y="2073503"/>
-              <a:ext cx="0" cy="3649639"/>
+              <a:off x="4615547" y="2143092"/>
+              <a:ext cx="0" cy="1317069"/>
             </a:xfrm>
             <a:custGeom>
               <a:avLst/>
               <a:pathLst>
-                <a:path w="0" h="3649639">
+                <a:path w="0" h="1317069">
                   <a:moveTo>
-                    <a:pt x="0" y="3649639"/>
+                    <a:pt x="0" y="1317069"/>
                   </a:moveTo>
                   <a:lnTo>
                     <a:pt x="0" y="0"/>
@@ -2953,522 +2945,565 @@
         </p:sp>
         <p:sp>
           <p:nvSpPr>
-            <p:cNvPr id="20" name="pg20"/>
+            <p:cNvPr id="20" name="pl20"/>
             <p:cNvSpPr/>
             <p:nvPr/>
           </p:nvSpPr>
           <p:spPr>
             <a:xfrm>
-              <a:off x="1172049" y="2073503"/>
-              <a:ext cx="7090630" cy="3481046"/>
+              <a:off x="6633461" y="2143092"/>
+              <a:ext cx="0" cy="1317069"/>
             </a:xfrm>
             <a:custGeom>
               <a:avLst/>
               <a:pathLst>
-                <a:path w="7090630" h="3481046">
+                <a:path w="0" h="1317069">
                   <a:moveTo>
-                    <a:pt x="2346309" y="0"/>
+                    <a:pt x="0" y="1317069"/>
                   </a:moveTo>
                   <a:lnTo>
-                    <a:pt x="2363543" y="93145"/>
-                  </a:lnTo>
-                  <a:lnTo>
-                    <a:pt x="2435165" y="440581"/>
-                  </a:lnTo>
-                  <a:lnTo>
-                    <a:pt x="2506788" y="752414"/>
-                  </a:lnTo>
-                  <a:lnTo>
-                    <a:pt x="2578410" y="1032294"/>
-                  </a:lnTo>
-                  <a:lnTo>
-                    <a:pt x="2650033" y="1283495"/>
-                  </a:lnTo>
-                  <a:lnTo>
-                    <a:pt x="2721655" y="1508955"/>
-                  </a:lnTo>
-                  <a:lnTo>
-                    <a:pt x="2793278" y="1711312"/>
-                  </a:lnTo>
-                  <a:lnTo>
-                    <a:pt x="2864901" y="1892934"/>
-                  </a:lnTo>
-                  <a:lnTo>
-                    <a:pt x="2936523" y="2055944"/>
-                  </a:lnTo>
-                  <a:lnTo>
-                    <a:pt x="3008146" y="2202252"/>
-                  </a:lnTo>
-                  <a:lnTo>
-                    <a:pt x="3079768" y="2333567"/>
-                  </a:lnTo>
-                  <a:lnTo>
-                    <a:pt x="3151391" y="2451426"/>
-                  </a:lnTo>
-                  <a:lnTo>
-                    <a:pt x="3223013" y="2557208"/>
-                  </a:lnTo>
-                  <a:lnTo>
-                    <a:pt x="3294636" y="2652150"/>
-                  </a:lnTo>
-                  <a:lnTo>
-                    <a:pt x="3366258" y="2666431"/>
-                  </a:lnTo>
-                  <a:lnTo>
-                    <a:pt x="3437881" y="2678689"/>
-                  </a:lnTo>
-                  <a:lnTo>
-                    <a:pt x="3509503" y="2690764"/>
-                  </a:lnTo>
-                  <a:lnTo>
-                    <a:pt x="3581126" y="2702658"/>
-                  </a:lnTo>
-                  <a:lnTo>
-                    <a:pt x="3652748" y="2714374"/>
-                  </a:lnTo>
-                  <a:lnTo>
-                    <a:pt x="3724371" y="2725913"/>
-                  </a:lnTo>
-                  <a:lnTo>
-                    <a:pt x="3795993" y="2737280"/>
-                  </a:lnTo>
-                  <a:lnTo>
-                    <a:pt x="3867616" y="2748476"/>
-                  </a:lnTo>
-                  <a:lnTo>
-                    <a:pt x="3939238" y="2759505"/>
-                  </a:lnTo>
-                  <a:lnTo>
-                    <a:pt x="4010861" y="2770367"/>
-                  </a:lnTo>
-                  <a:lnTo>
-                    <a:pt x="4082483" y="2781067"/>
-                  </a:lnTo>
-                  <a:lnTo>
-                    <a:pt x="4154106" y="2791607"/>
-                  </a:lnTo>
-                  <a:lnTo>
-                    <a:pt x="4225729" y="2801988"/>
-                  </a:lnTo>
-                  <a:lnTo>
-                    <a:pt x="4297351" y="2812214"/>
-                  </a:lnTo>
-                  <a:lnTo>
-                    <a:pt x="4368974" y="2822286"/>
-                  </a:lnTo>
-                  <a:lnTo>
-                    <a:pt x="4440596" y="2832207"/>
-                  </a:lnTo>
-                  <a:lnTo>
-                    <a:pt x="4512219" y="2841979"/>
-                  </a:lnTo>
-                  <a:lnTo>
-                    <a:pt x="4583841" y="2851605"/>
-                  </a:lnTo>
-                  <a:lnTo>
-                    <a:pt x="4655464" y="2861087"/>
-                  </a:lnTo>
-                  <a:lnTo>
-                    <a:pt x="4727086" y="2870426"/>
-                  </a:lnTo>
-                  <a:lnTo>
-                    <a:pt x="4798709" y="2879625"/>
-                  </a:lnTo>
-                  <a:lnTo>
-                    <a:pt x="4870331" y="2888686"/>
-                  </a:lnTo>
-                  <a:lnTo>
-                    <a:pt x="4941954" y="2897611"/>
-                  </a:lnTo>
-                  <a:lnTo>
-                    <a:pt x="5013576" y="2906403"/>
-                  </a:lnTo>
-                  <a:lnTo>
-                    <a:pt x="5085199" y="2915062"/>
-                  </a:lnTo>
-                  <a:lnTo>
-                    <a:pt x="5156821" y="2923592"/>
-                  </a:lnTo>
-                  <a:lnTo>
-                    <a:pt x="5228444" y="2931994"/>
-                  </a:lnTo>
-                  <a:lnTo>
-                    <a:pt x="5300066" y="2940269"/>
-                  </a:lnTo>
-                  <a:lnTo>
-                    <a:pt x="5371689" y="2948421"/>
-                  </a:lnTo>
-                  <a:lnTo>
-                    <a:pt x="5443311" y="2956450"/>
-                  </a:lnTo>
-                  <a:lnTo>
-                    <a:pt x="5514934" y="2964359"/>
-                  </a:lnTo>
-                  <a:lnTo>
-                    <a:pt x="5586557" y="2972149"/>
-                  </a:lnTo>
-                  <a:lnTo>
-                    <a:pt x="5658179" y="2979823"/>
-                  </a:lnTo>
-                  <a:lnTo>
-                    <a:pt x="5729802" y="2987381"/>
-                  </a:lnTo>
-                  <a:lnTo>
-                    <a:pt x="5801424" y="2994826"/>
-                  </a:lnTo>
-                  <a:lnTo>
-                    <a:pt x="5873047" y="3002159"/>
-                  </a:lnTo>
-                  <a:lnTo>
-                    <a:pt x="5944669" y="3009382"/>
-                  </a:lnTo>
-                  <a:lnTo>
-                    <a:pt x="6016292" y="3016497"/>
-                  </a:lnTo>
-                  <a:lnTo>
-                    <a:pt x="6087914" y="3023506"/>
-                  </a:lnTo>
-                  <a:lnTo>
-                    <a:pt x="6159537" y="3030409"/>
-                  </a:lnTo>
-                  <a:lnTo>
-                    <a:pt x="6231159" y="3037208"/>
-                  </a:lnTo>
-                  <a:lnTo>
-                    <a:pt x="6302782" y="3043906"/>
-                  </a:lnTo>
-                  <a:lnTo>
-                    <a:pt x="6374404" y="3050503"/>
-                  </a:lnTo>
-                  <a:lnTo>
-                    <a:pt x="6446027" y="3057001"/>
-                  </a:lnTo>
-                  <a:lnTo>
-                    <a:pt x="6517649" y="3063402"/>
-                  </a:lnTo>
-                  <a:lnTo>
-                    <a:pt x="6589272" y="3069707"/>
-                  </a:lnTo>
-                  <a:lnTo>
-                    <a:pt x="6660894" y="3075917"/>
-                  </a:lnTo>
-                  <a:lnTo>
-                    <a:pt x="6732517" y="3082034"/>
-                  </a:lnTo>
-                  <a:lnTo>
-                    <a:pt x="6804139" y="3088059"/>
-                  </a:lnTo>
-                  <a:lnTo>
-                    <a:pt x="6875762" y="3093994"/>
-                  </a:lnTo>
-                  <a:lnTo>
-                    <a:pt x="6947385" y="3099840"/>
-                  </a:lnTo>
-                  <a:lnTo>
-                    <a:pt x="7019007" y="3105598"/>
-                  </a:lnTo>
-                  <a:lnTo>
-                    <a:pt x="7090630" y="3111270"/>
-                  </a:lnTo>
-                  <a:lnTo>
-                    <a:pt x="7090630" y="3481046"/>
-                  </a:lnTo>
-                  <a:lnTo>
-                    <a:pt x="7019007" y="3480737"/>
-                  </a:lnTo>
-                  <a:lnTo>
-                    <a:pt x="6947385" y="3480394"/>
-                  </a:lnTo>
-                  <a:lnTo>
-                    <a:pt x="6875762" y="3480011"/>
-                  </a:lnTo>
-                  <a:lnTo>
-                    <a:pt x="6804139" y="3479584"/>
-                  </a:lnTo>
-                  <a:lnTo>
-                    <a:pt x="6732517" y="3479109"/>
-                  </a:lnTo>
-                  <a:lnTo>
-                    <a:pt x="6660894" y="3478580"/>
-                  </a:lnTo>
-                  <a:lnTo>
-                    <a:pt x="6589272" y="3477990"/>
-                  </a:lnTo>
-                  <a:lnTo>
-                    <a:pt x="6517649" y="3477333"/>
-                  </a:lnTo>
-                  <a:lnTo>
-                    <a:pt x="6446027" y="3476600"/>
-                  </a:lnTo>
-                  <a:lnTo>
-                    <a:pt x="6374404" y="3475785"/>
-                  </a:lnTo>
-                  <a:lnTo>
-                    <a:pt x="6302782" y="3474876"/>
-                  </a:lnTo>
-                  <a:lnTo>
-                    <a:pt x="6231159" y="3473863"/>
-                  </a:lnTo>
-                  <a:lnTo>
-                    <a:pt x="6159537" y="3472734"/>
-                  </a:lnTo>
-                  <a:lnTo>
-                    <a:pt x="6087914" y="3471477"/>
-                  </a:lnTo>
-                  <a:lnTo>
-                    <a:pt x="6016292" y="3470076"/>
-                  </a:lnTo>
-                  <a:lnTo>
-                    <a:pt x="5944669" y="3468516"/>
-                  </a:lnTo>
-                  <a:lnTo>
-                    <a:pt x="5873047" y="3466777"/>
-                  </a:lnTo>
-                  <a:lnTo>
-                    <a:pt x="5801424" y="3464839"/>
-                  </a:lnTo>
-                  <a:lnTo>
-                    <a:pt x="5729802" y="3462681"/>
-                  </a:lnTo>
-                  <a:lnTo>
-                    <a:pt x="5658179" y="3460276"/>
-                  </a:lnTo>
-                  <a:lnTo>
-                    <a:pt x="5586557" y="3457596"/>
-                  </a:lnTo>
-                  <a:lnTo>
-                    <a:pt x="5514934" y="3454610"/>
-                  </a:lnTo>
-                  <a:lnTo>
-                    <a:pt x="5443311" y="3451284"/>
-                  </a:lnTo>
-                  <a:lnTo>
-                    <a:pt x="5371689" y="3447578"/>
-                  </a:lnTo>
-                  <a:lnTo>
-                    <a:pt x="5300066" y="3443449"/>
-                  </a:lnTo>
-                  <a:lnTo>
-                    <a:pt x="5228444" y="3438848"/>
-                  </a:lnTo>
-                  <a:lnTo>
-                    <a:pt x="5156821" y="3433722"/>
-                  </a:lnTo>
-                  <a:lnTo>
-                    <a:pt x="5085199" y="3428010"/>
-                  </a:lnTo>
-                  <a:lnTo>
-                    <a:pt x="5013576" y="3421647"/>
-                  </a:lnTo>
-                  <a:lnTo>
-                    <a:pt x="4941954" y="3414557"/>
-                  </a:lnTo>
-                  <a:lnTo>
-                    <a:pt x="4870331" y="3406658"/>
-                  </a:lnTo>
-                  <a:lnTo>
-                    <a:pt x="4798709" y="3397857"/>
-                  </a:lnTo>
-                  <a:lnTo>
-                    <a:pt x="4727086" y="3388051"/>
-                  </a:lnTo>
-                  <a:lnTo>
-                    <a:pt x="4655464" y="3377126"/>
-                  </a:lnTo>
-                  <a:lnTo>
-                    <a:pt x="4583841" y="3364953"/>
-                  </a:lnTo>
-                  <a:lnTo>
-                    <a:pt x="4512219" y="3351390"/>
-                  </a:lnTo>
-                  <a:lnTo>
-                    <a:pt x="4440596" y="3336279"/>
-                  </a:lnTo>
-                  <a:lnTo>
-                    <a:pt x="4368974" y="3319443"/>
-                  </a:lnTo>
-                  <a:lnTo>
-                    <a:pt x="4297351" y="3300685"/>
-                  </a:lnTo>
-                  <a:lnTo>
-                    <a:pt x="4225729" y="3279785"/>
-                  </a:lnTo>
-                  <a:lnTo>
-                    <a:pt x="4154106" y="3256499"/>
-                  </a:lnTo>
-                  <a:lnTo>
-                    <a:pt x="4082483" y="3230554"/>
-                  </a:lnTo>
-                  <a:lnTo>
-                    <a:pt x="4010861" y="3201647"/>
-                  </a:lnTo>
-                  <a:lnTo>
-                    <a:pt x="3939238" y="3169440"/>
-                  </a:lnTo>
-                  <a:lnTo>
-                    <a:pt x="3867616" y="3133556"/>
-                  </a:lnTo>
-                  <a:lnTo>
-                    <a:pt x="3795993" y="3093576"/>
-                  </a:lnTo>
-                  <a:lnTo>
-                    <a:pt x="3724371" y="3049030"/>
-                  </a:lnTo>
-                  <a:lnTo>
-                    <a:pt x="3652748" y="2999399"/>
-                  </a:lnTo>
-                  <a:lnTo>
-                    <a:pt x="3581126" y="2944101"/>
-                  </a:lnTo>
-                  <a:lnTo>
-                    <a:pt x="3509503" y="2882491"/>
-                  </a:lnTo>
-                  <a:lnTo>
-                    <a:pt x="3437881" y="2813846"/>
-                  </a:lnTo>
-                  <a:lnTo>
-                    <a:pt x="3366258" y="2737364"/>
-                  </a:lnTo>
-                  <a:lnTo>
-                    <a:pt x="3294636" y="2653985"/>
-                  </a:lnTo>
-                  <a:lnTo>
-                    <a:pt x="3223013" y="2641350"/>
-                  </a:lnTo>
-                  <a:lnTo>
-                    <a:pt x="3151391" y="2628523"/>
-                  </a:lnTo>
-                  <a:lnTo>
-                    <a:pt x="3079768" y="2615500"/>
-                  </a:lnTo>
-                  <a:lnTo>
-                    <a:pt x="3008146" y="2602279"/>
-                  </a:lnTo>
-                  <a:lnTo>
-                    <a:pt x="2936523" y="2588856"/>
-                  </a:lnTo>
-                  <a:lnTo>
-                    <a:pt x="2864901" y="2575230"/>
-                  </a:lnTo>
-                  <a:lnTo>
-                    <a:pt x="2793278" y="2561395"/>
-                  </a:lnTo>
-                  <a:lnTo>
-                    <a:pt x="2721655" y="2547351"/>
-                  </a:lnTo>
-                  <a:lnTo>
-                    <a:pt x="2650033" y="2533092"/>
-                  </a:lnTo>
-                  <a:lnTo>
-                    <a:pt x="2578410" y="2518616"/>
-                  </a:lnTo>
-                  <a:lnTo>
-                    <a:pt x="2506788" y="2503920"/>
-                  </a:lnTo>
-                  <a:lnTo>
-                    <a:pt x="2435165" y="2488999"/>
-                  </a:lnTo>
-                  <a:lnTo>
-                    <a:pt x="2363543" y="2473852"/>
-                  </a:lnTo>
-                  <a:lnTo>
-                    <a:pt x="2291920" y="2458474"/>
-                  </a:lnTo>
-                  <a:lnTo>
-                    <a:pt x="2220298" y="2442862"/>
-                  </a:lnTo>
-                  <a:lnTo>
-                    <a:pt x="2148675" y="2427012"/>
-                  </a:lnTo>
-                  <a:lnTo>
-                    <a:pt x="2077053" y="2410921"/>
-                  </a:lnTo>
-                  <a:lnTo>
-                    <a:pt x="2005430" y="2394585"/>
-                  </a:lnTo>
-                  <a:lnTo>
-                    <a:pt x="1933808" y="2378000"/>
-                  </a:lnTo>
-                  <a:lnTo>
-                    <a:pt x="1862185" y="2361162"/>
-                  </a:lnTo>
-                  <a:lnTo>
-                    <a:pt x="1790563" y="2344068"/>
-                  </a:lnTo>
-                  <a:lnTo>
-                    <a:pt x="1718940" y="2326714"/>
-                  </a:lnTo>
-                  <a:lnTo>
-                    <a:pt x="1647318" y="2309096"/>
-                  </a:lnTo>
-                  <a:lnTo>
-                    <a:pt x="1575695" y="2291209"/>
-                  </a:lnTo>
-                  <a:lnTo>
-                    <a:pt x="1504073" y="2273050"/>
-                  </a:lnTo>
-                  <a:lnTo>
-                    <a:pt x="1432450" y="2254614"/>
-                  </a:lnTo>
-                  <a:lnTo>
-                    <a:pt x="1360827" y="2235898"/>
-                  </a:lnTo>
-                  <a:lnTo>
-                    <a:pt x="1289205" y="2216897"/>
-                  </a:lnTo>
-                  <a:lnTo>
-                    <a:pt x="1217582" y="2197606"/>
-                  </a:lnTo>
-                  <a:lnTo>
-                    <a:pt x="1145960" y="2178021"/>
-                  </a:lnTo>
-                  <a:lnTo>
-                    <a:pt x="1074337" y="2158139"/>
-                  </a:lnTo>
-                  <a:lnTo>
-                    <a:pt x="1002715" y="2137953"/>
-                  </a:lnTo>
-                  <a:lnTo>
-                    <a:pt x="931092" y="2117461"/>
-                  </a:lnTo>
-                  <a:lnTo>
-                    <a:pt x="859470" y="2096656"/>
-                  </a:lnTo>
-                  <a:lnTo>
-                    <a:pt x="787847" y="2075534"/>
-                  </a:lnTo>
-                  <a:lnTo>
-                    <a:pt x="716225" y="2054091"/>
-                  </a:lnTo>
-                  <a:lnTo>
-                    <a:pt x="644602" y="2032321"/>
-                  </a:lnTo>
-                  <a:lnTo>
-                    <a:pt x="572980" y="2010220"/>
-                  </a:lnTo>
-                  <a:lnTo>
-                    <a:pt x="501357" y="1987782"/>
-                  </a:lnTo>
-                  <a:lnTo>
-                    <a:pt x="429735" y="1965002"/>
-                  </a:lnTo>
-                  <a:lnTo>
-                    <a:pt x="358112" y="1941876"/>
-                  </a:lnTo>
-                  <a:lnTo>
-                    <a:pt x="286490" y="1918398"/>
-                  </a:lnTo>
-                  <a:lnTo>
-                    <a:pt x="214867" y="1894562"/>
-                  </a:lnTo>
-                  <a:lnTo>
-                    <a:pt x="143245" y="1870363"/>
-                  </a:lnTo>
-                  <a:lnTo>
-                    <a:pt x="71622" y="1845795"/>
-                  </a:lnTo>
-                  <a:lnTo>
-                    <a:pt x="0" y="1820854"/>
+                    <a:pt x="0" y="0"/>
+                  </a:lnTo>
+                  <a:lnTo>
+                    <a:pt x="0" y="0"/>
+                  </a:lnTo>
+                </a:path>
+              </a:pathLst>
+            </a:custGeom>
+            <a:ln w="13550" cap="flat">
+              <a:solidFill>
+                <a:srgbClr val="EBEBEB">
+                  <a:alpha val="100000"/>
+                </a:srgbClr>
+              </a:solidFill>
+              <a:prstDash val="solid"/>
+              <a:round/>
+            </a:ln>
+          </p:spPr>
+          <p:txBody>
+            <a:bodyPr/>
+            <a:lstStyle/>
+            <a:p/>
+          </p:txBody>
+        </p:sp>
+        <p:sp>
+          <p:nvSpPr>
+            <p:cNvPr id="21" name="pg21"/>
+            <p:cNvSpPr/>
+            <p:nvPr/>
+          </p:nvSpPr>
+          <p:spPr>
+            <a:xfrm>
+              <a:off x="1235312" y="2143092"/>
+              <a:ext cx="6964104" cy="1256227"/>
+            </a:xfrm>
+            <a:custGeom>
+              <a:avLst/>
+              <a:pathLst>
+                <a:path w="6964104" h="1256227">
+                  <a:moveTo>
+                    <a:pt x="2304441" y="0"/>
+                  </a:moveTo>
+                  <a:lnTo>
+                    <a:pt x="2321368" y="33614"/>
+                  </a:lnTo>
+                  <a:lnTo>
+                    <a:pt x="2391712" y="158995"/>
+                  </a:lnTo>
+                  <a:lnTo>
+                    <a:pt x="2462057" y="271528"/>
+                  </a:lnTo>
+                  <a:lnTo>
+                    <a:pt x="2532401" y="372530"/>
+                  </a:lnTo>
+                  <a:lnTo>
+                    <a:pt x="2602746" y="463183"/>
+                  </a:lnTo>
+                  <a:lnTo>
+                    <a:pt x="2673090" y="544546"/>
+                  </a:lnTo>
+                  <a:lnTo>
+                    <a:pt x="2743435" y="617572"/>
+                  </a:lnTo>
+                  <a:lnTo>
+                    <a:pt x="2813779" y="683115"/>
+                  </a:lnTo>
+                  <a:lnTo>
+                    <a:pt x="2884124" y="741942"/>
+                  </a:lnTo>
+                  <a:lnTo>
+                    <a:pt x="2954468" y="794740"/>
+                  </a:lnTo>
+                  <a:lnTo>
+                    <a:pt x="3024813" y="842129"/>
+                  </a:lnTo>
+                  <a:lnTo>
+                    <a:pt x="3095157" y="884662"/>
+                  </a:lnTo>
+                  <a:lnTo>
+                    <a:pt x="3165502" y="922836"/>
+                  </a:lnTo>
+                  <a:lnTo>
+                    <a:pt x="3235846" y="957098"/>
+                  </a:lnTo>
+                  <a:lnTo>
+                    <a:pt x="3306191" y="962252"/>
+                  </a:lnTo>
+                  <a:lnTo>
+                    <a:pt x="3376535" y="966676"/>
+                  </a:lnTo>
+                  <a:lnTo>
+                    <a:pt x="3446880" y="971033"/>
+                  </a:lnTo>
+                  <a:lnTo>
+                    <a:pt x="3517224" y="975325"/>
+                  </a:lnTo>
+                  <a:lnTo>
+                    <a:pt x="3587569" y="979553"/>
+                  </a:lnTo>
+                  <a:lnTo>
+                    <a:pt x="3657913" y="983718"/>
+                  </a:lnTo>
+                  <a:lnTo>
+                    <a:pt x="3728257" y="987820"/>
+                  </a:lnTo>
+                  <a:lnTo>
+                    <a:pt x="3798602" y="991860"/>
+                  </a:lnTo>
+                  <a:lnTo>
+                    <a:pt x="3868946" y="995840"/>
+                  </a:lnTo>
+                  <a:lnTo>
+                    <a:pt x="3939291" y="999760"/>
+                  </a:lnTo>
+                  <a:lnTo>
+                    <a:pt x="4009635" y="1003621"/>
+                  </a:lnTo>
+                  <a:lnTo>
+                    <a:pt x="4079980" y="1007425"/>
+                  </a:lnTo>
+                  <a:lnTo>
+                    <a:pt x="4150324" y="1011171"/>
+                  </a:lnTo>
+                  <a:lnTo>
+                    <a:pt x="4220669" y="1014861"/>
+                  </a:lnTo>
+                  <a:lnTo>
+                    <a:pt x="4291013" y="1018496"/>
+                  </a:lnTo>
+                  <a:lnTo>
+                    <a:pt x="4361358" y="1022077"/>
+                  </a:lnTo>
+                  <a:lnTo>
+                    <a:pt x="4431702" y="1025603"/>
+                  </a:lnTo>
+                  <a:lnTo>
+                    <a:pt x="4502047" y="1029077"/>
+                  </a:lnTo>
+                  <a:lnTo>
+                    <a:pt x="4572391" y="1032499"/>
+                  </a:lnTo>
+                  <a:lnTo>
+                    <a:pt x="4642736" y="1035869"/>
+                  </a:lnTo>
+                  <a:lnTo>
+                    <a:pt x="4713080" y="1039189"/>
+                  </a:lnTo>
+                  <a:lnTo>
+                    <a:pt x="4783425" y="1042459"/>
+                  </a:lnTo>
+                  <a:lnTo>
+                    <a:pt x="4853769" y="1045679"/>
+                  </a:lnTo>
+                  <a:lnTo>
+                    <a:pt x="4924114" y="1048852"/>
+                  </a:lnTo>
+                  <a:lnTo>
+                    <a:pt x="4994458" y="1051977"/>
+                  </a:lnTo>
+                  <a:lnTo>
+                    <a:pt x="5064803" y="1055055"/>
+                  </a:lnTo>
+                  <a:lnTo>
+                    <a:pt x="5135147" y="1058087"/>
+                  </a:lnTo>
+                  <a:lnTo>
+                    <a:pt x="5205492" y="1061074"/>
+                  </a:lnTo>
+                  <a:lnTo>
+                    <a:pt x="5275836" y="1064015"/>
+                  </a:lnTo>
+                  <a:lnTo>
+                    <a:pt x="5346181" y="1066913"/>
+                  </a:lnTo>
+                  <a:lnTo>
+                    <a:pt x="5416525" y="1069767"/>
+                  </a:lnTo>
+                  <a:lnTo>
+                    <a:pt x="5486870" y="1072578"/>
+                  </a:lnTo>
+                  <a:lnTo>
+                    <a:pt x="5557214" y="1075348"/>
+                  </a:lnTo>
+                  <a:lnTo>
+                    <a:pt x="5627559" y="1078075"/>
+                  </a:lnTo>
+                  <a:lnTo>
+                    <a:pt x="5697903" y="1080762"/>
+                  </a:lnTo>
+                  <a:lnTo>
+                    <a:pt x="5768248" y="1083408"/>
+                  </a:lnTo>
+                  <a:lnTo>
+                    <a:pt x="5838592" y="1086015"/>
+                  </a:lnTo>
+                  <a:lnTo>
+                    <a:pt x="5908937" y="1088583"/>
+                  </a:lnTo>
+                  <a:lnTo>
+                    <a:pt x="5979281" y="1091112"/>
+                  </a:lnTo>
+                  <a:lnTo>
+                    <a:pt x="6049626" y="1093603"/>
+                  </a:lnTo>
+                  <a:lnTo>
+                    <a:pt x="6119970" y="1096057"/>
+                  </a:lnTo>
+                  <a:lnTo>
+                    <a:pt x="6190315" y="1098474"/>
+                  </a:lnTo>
+                  <a:lnTo>
+                    <a:pt x="6260659" y="1100854"/>
+                  </a:lnTo>
+                  <a:lnTo>
+                    <a:pt x="6331004" y="1103199"/>
+                  </a:lnTo>
+                  <a:lnTo>
+                    <a:pt x="6401348" y="1105509"/>
+                  </a:lnTo>
+                  <a:lnTo>
+                    <a:pt x="6471693" y="1107785"/>
+                  </a:lnTo>
+                  <a:lnTo>
+                    <a:pt x="6542037" y="1110026"/>
+                  </a:lnTo>
+                  <a:lnTo>
+                    <a:pt x="6612382" y="1112233"/>
+                  </a:lnTo>
+                  <a:lnTo>
+                    <a:pt x="6682726" y="1114408"/>
+                  </a:lnTo>
+                  <a:lnTo>
+                    <a:pt x="6753071" y="1116549"/>
+                  </a:lnTo>
+                  <a:lnTo>
+                    <a:pt x="6823415" y="1118659"/>
+                  </a:lnTo>
+                  <a:lnTo>
+                    <a:pt x="6893760" y="1120737"/>
+                  </a:lnTo>
+                  <a:lnTo>
+                    <a:pt x="6964104" y="1122784"/>
+                  </a:lnTo>
+                  <a:lnTo>
+                    <a:pt x="6964104" y="1256227"/>
+                  </a:lnTo>
+                  <a:lnTo>
+                    <a:pt x="6893760" y="1256116"/>
+                  </a:lnTo>
+                  <a:lnTo>
+                    <a:pt x="6823415" y="1255992"/>
+                  </a:lnTo>
+                  <a:lnTo>
+                    <a:pt x="6753071" y="1255854"/>
+                  </a:lnTo>
+                  <a:lnTo>
+                    <a:pt x="6682726" y="1255700"/>
+                  </a:lnTo>
+                  <a:lnTo>
+                    <a:pt x="6612382" y="1255528"/>
+                  </a:lnTo>
+                  <a:lnTo>
+                    <a:pt x="6542037" y="1255337"/>
+                  </a:lnTo>
+                  <a:lnTo>
+                    <a:pt x="6471693" y="1255124"/>
+                  </a:lnTo>
+                  <a:lnTo>
+                    <a:pt x="6401348" y="1254887"/>
+                  </a:lnTo>
+                  <a:lnTo>
+                    <a:pt x="6331004" y="1254623"/>
+                  </a:lnTo>
+                  <a:lnTo>
+                    <a:pt x="6260659" y="1254329"/>
+                  </a:lnTo>
+                  <a:lnTo>
+                    <a:pt x="6190315" y="1254001"/>
+                  </a:lnTo>
+                  <a:lnTo>
+                    <a:pt x="6119970" y="1253635"/>
+                  </a:lnTo>
+                  <a:lnTo>
+                    <a:pt x="6049626" y="1253228"/>
+                  </a:lnTo>
+                  <a:lnTo>
+                    <a:pt x="5979281" y="1252774"/>
+                  </a:lnTo>
+                  <a:lnTo>
+                    <a:pt x="5908937" y="1252269"/>
+                  </a:lnTo>
+                  <a:lnTo>
+                    <a:pt x="5838592" y="1251705"/>
+                  </a:lnTo>
+                  <a:lnTo>
+                    <a:pt x="5768248" y="1251078"/>
+                  </a:lnTo>
+                  <a:lnTo>
+                    <a:pt x="5697903" y="1250379"/>
+                  </a:lnTo>
+                  <a:lnTo>
+                    <a:pt x="5627559" y="1249600"/>
+                  </a:lnTo>
+                  <a:lnTo>
+                    <a:pt x="5557214" y="1248732"/>
+                  </a:lnTo>
+                  <a:lnTo>
+                    <a:pt x="5486870" y="1247765"/>
+                  </a:lnTo>
+                  <a:lnTo>
+                    <a:pt x="5416525" y="1246687"/>
+                  </a:lnTo>
+                  <a:lnTo>
+                    <a:pt x="5346181" y="1245487"/>
+                  </a:lnTo>
+                  <a:lnTo>
+                    <a:pt x="5275836" y="1244149"/>
+                  </a:lnTo>
+                  <a:lnTo>
+                    <a:pt x="5205492" y="1242659"/>
+                  </a:lnTo>
+                  <a:lnTo>
+                    <a:pt x="5135147" y="1240999"/>
+                  </a:lnTo>
+                  <a:lnTo>
+                    <a:pt x="5064803" y="1239149"/>
+                  </a:lnTo>
+                  <a:lnTo>
+                    <a:pt x="4994458" y="1237088"/>
+                  </a:lnTo>
+                  <a:lnTo>
+                    <a:pt x="4924114" y="1234792"/>
+                  </a:lnTo>
+                  <a:lnTo>
+                    <a:pt x="4853769" y="1232233"/>
+                  </a:lnTo>
+                  <a:lnTo>
+                    <a:pt x="4783425" y="1229382"/>
+                  </a:lnTo>
+                  <a:lnTo>
+                    <a:pt x="4713080" y="1226206"/>
+                  </a:lnTo>
+                  <a:lnTo>
+                    <a:pt x="4642736" y="1222668"/>
+                  </a:lnTo>
+                  <a:lnTo>
+                    <a:pt x="4572391" y="1218725"/>
+                  </a:lnTo>
+                  <a:lnTo>
+                    <a:pt x="4502047" y="1214332"/>
+                  </a:lnTo>
+                  <a:lnTo>
+                    <a:pt x="4431702" y="1209438"/>
+                  </a:lnTo>
+                  <a:lnTo>
+                    <a:pt x="4361358" y="1203984"/>
+                  </a:lnTo>
+                  <a:lnTo>
+                    <a:pt x="4291013" y="1197909"/>
+                  </a:lnTo>
+                  <a:lnTo>
+                    <a:pt x="4220669" y="1191139"/>
+                  </a:lnTo>
+                  <a:lnTo>
+                    <a:pt x="4150324" y="1183597"/>
+                  </a:lnTo>
+                  <a:lnTo>
+                    <a:pt x="4079980" y="1175193"/>
+                  </a:lnTo>
+                  <a:lnTo>
+                    <a:pt x="4009635" y="1165831"/>
+                  </a:lnTo>
+                  <a:lnTo>
+                    <a:pt x="3939291" y="1155399"/>
+                  </a:lnTo>
+                  <a:lnTo>
+                    <a:pt x="3868946" y="1143776"/>
+                  </a:lnTo>
+                  <a:lnTo>
+                    <a:pt x="3798602" y="1130826"/>
+                  </a:lnTo>
+                  <a:lnTo>
+                    <a:pt x="3728257" y="1116398"/>
+                  </a:lnTo>
+                  <a:lnTo>
+                    <a:pt x="3657913" y="1100323"/>
+                  </a:lnTo>
+                  <a:lnTo>
+                    <a:pt x="3587569" y="1082412"/>
+                  </a:lnTo>
+                  <a:lnTo>
+                    <a:pt x="3517224" y="1062457"/>
+                  </a:lnTo>
+                  <a:lnTo>
+                    <a:pt x="3446880" y="1040223"/>
+                  </a:lnTo>
+                  <a:lnTo>
+                    <a:pt x="3376535" y="1015450"/>
+                  </a:lnTo>
+                  <a:lnTo>
+                    <a:pt x="3306191" y="987850"/>
+                  </a:lnTo>
+                  <a:lnTo>
+                    <a:pt x="3235846" y="957760"/>
+                  </a:lnTo>
+                  <a:lnTo>
+                    <a:pt x="3165502" y="953201"/>
+                  </a:lnTo>
+                  <a:lnTo>
+                    <a:pt x="3095157" y="948572"/>
+                  </a:lnTo>
+                  <a:lnTo>
+                    <a:pt x="3024813" y="943872"/>
+                  </a:lnTo>
+                  <a:lnTo>
+                    <a:pt x="2954468" y="939101"/>
+                  </a:lnTo>
+                  <a:lnTo>
+                    <a:pt x="2884124" y="934257"/>
+                  </a:lnTo>
+                  <a:lnTo>
+                    <a:pt x="2813779" y="929340"/>
+                  </a:lnTo>
+                  <a:lnTo>
+                    <a:pt x="2743435" y="924347"/>
+                  </a:lnTo>
+                  <a:lnTo>
+                    <a:pt x="2673090" y="919279"/>
+                  </a:lnTo>
+                  <a:lnTo>
+                    <a:pt x="2602746" y="914133"/>
+                  </a:lnTo>
+                  <a:lnTo>
+                    <a:pt x="2532401" y="908909"/>
+                  </a:lnTo>
+                  <a:lnTo>
+                    <a:pt x="2462057" y="903605"/>
+                  </a:lnTo>
+                  <a:lnTo>
+                    <a:pt x="2391712" y="898221"/>
+                  </a:lnTo>
+                  <a:lnTo>
+                    <a:pt x="2321368" y="892755"/>
+                  </a:lnTo>
+                  <a:lnTo>
+                    <a:pt x="2251023" y="887205"/>
+                  </a:lnTo>
+                  <a:lnTo>
+                    <a:pt x="2180679" y="881571"/>
+                  </a:lnTo>
+                  <a:lnTo>
+                    <a:pt x="2110334" y="875851"/>
+                  </a:lnTo>
+                  <a:lnTo>
+                    <a:pt x="2039990" y="870044"/>
+                  </a:lnTo>
+                  <a:lnTo>
+                    <a:pt x="1969645" y="864149"/>
+                  </a:lnTo>
+                  <a:lnTo>
+                    <a:pt x="1899301" y="858164"/>
+                  </a:lnTo>
+                  <a:lnTo>
+                    <a:pt x="1828956" y="852088"/>
+                  </a:lnTo>
+                  <a:lnTo>
+                    <a:pt x="1758612" y="845919"/>
+                  </a:lnTo>
+                  <a:lnTo>
+                    <a:pt x="1688267" y="839656"/>
+                  </a:lnTo>
+                  <a:lnTo>
+                    <a:pt x="1617923" y="833298"/>
+                  </a:lnTo>
+                  <a:lnTo>
+                    <a:pt x="1547578" y="826843"/>
+                  </a:lnTo>
+                  <a:lnTo>
+                    <a:pt x="1477234" y="820290"/>
+                  </a:lnTo>
+                  <a:lnTo>
+                    <a:pt x="1406889" y="813637"/>
+                  </a:lnTo>
+                  <a:lnTo>
+                    <a:pt x="1336545" y="806883"/>
+                  </a:lnTo>
+                  <a:lnTo>
+                    <a:pt x="1266200" y="800025"/>
+                  </a:lnTo>
+                  <a:lnTo>
+                    <a:pt x="1195856" y="793064"/>
+                  </a:lnTo>
+                  <a:lnTo>
+                    <a:pt x="1125511" y="785996"/>
+                  </a:lnTo>
+                  <a:lnTo>
+                    <a:pt x="1055167" y="778821"/>
+                  </a:lnTo>
+                  <a:lnTo>
+                    <a:pt x="984822" y="771537"/>
+                  </a:lnTo>
+                  <a:lnTo>
+                    <a:pt x="914478" y="764141"/>
+                  </a:lnTo>
+                  <a:lnTo>
+                    <a:pt x="844133" y="756633"/>
+                  </a:lnTo>
+                  <a:lnTo>
+                    <a:pt x="773789" y="749011"/>
+                  </a:lnTo>
+                  <a:lnTo>
+                    <a:pt x="703444" y="741273"/>
+                  </a:lnTo>
+                  <a:lnTo>
+                    <a:pt x="633100" y="733417"/>
+                  </a:lnTo>
+                  <a:lnTo>
+                    <a:pt x="562755" y="725441"/>
+                  </a:lnTo>
+                  <a:lnTo>
+                    <a:pt x="492411" y="717343"/>
+                  </a:lnTo>
+                  <a:lnTo>
+                    <a:pt x="422066" y="709123"/>
+                  </a:lnTo>
+                  <a:lnTo>
+                    <a:pt x="351722" y="700777"/>
+                  </a:lnTo>
+                  <a:lnTo>
+                    <a:pt x="281377" y="692304"/>
+                  </a:lnTo>
+                  <a:lnTo>
+                    <a:pt x="211033" y="683702"/>
+                  </a:lnTo>
+                  <a:lnTo>
+                    <a:pt x="140688" y="674970"/>
+                  </a:lnTo>
+                  <a:lnTo>
+                    <a:pt x="70344" y="666104"/>
+                  </a:lnTo>
+                  <a:lnTo>
+                    <a:pt x="0" y="657103"/>
                   </a:lnTo>
                   <a:lnTo>
                     <a:pt x="0" y="0"/>
@@ -3491,547 +3526,222 @@
         </p:sp>
         <p:sp>
           <p:nvSpPr>
-            <p:cNvPr id="21" name="pl21"/>
-            <p:cNvSpPr/>
-            <p:nvPr/>
-          </p:nvSpPr>
-          <p:spPr>
-            <a:xfrm>
-              <a:off x="3518358" y="2073503"/>
-              <a:ext cx="4744320" cy="3111270"/>
-            </a:xfrm>
-            <a:custGeom>
-              <a:avLst/>
-              <a:pathLst>
-                <a:path w="4744320" h="3111270">
-                  <a:moveTo>
-                    <a:pt x="0" y="0"/>
-                  </a:moveTo>
-                  <a:lnTo>
-                    <a:pt x="17234" y="93145"/>
-                  </a:lnTo>
-                  <a:lnTo>
-                    <a:pt x="88856" y="440581"/>
-                  </a:lnTo>
-                  <a:lnTo>
-                    <a:pt x="160479" y="752414"/>
-                  </a:lnTo>
-                  <a:lnTo>
-                    <a:pt x="232101" y="1032294"/>
-                  </a:lnTo>
-                  <a:lnTo>
-                    <a:pt x="303724" y="1283495"/>
-                  </a:lnTo>
-                  <a:lnTo>
-                    <a:pt x="375346" y="1508955"/>
-                  </a:lnTo>
-                  <a:lnTo>
-                    <a:pt x="446969" y="1711312"/>
-                  </a:lnTo>
-                  <a:lnTo>
-                    <a:pt x="518591" y="1892934"/>
-                  </a:lnTo>
-                  <a:lnTo>
-                    <a:pt x="590214" y="2055944"/>
-                  </a:lnTo>
-                  <a:lnTo>
-                    <a:pt x="661836" y="2202252"/>
-                  </a:lnTo>
-                  <a:lnTo>
-                    <a:pt x="733459" y="2333567"/>
-                  </a:lnTo>
-                  <a:lnTo>
-                    <a:pt x="805081" y="2451426"/>
-                  </a:lnTo>
-                  <a:lnTo>
-                    <a:pt x="876704" y="2557208"/>
-                  </a:lnTo>
-                  <a:lnTo>
-                    <a:pt x="948326" y="2652150"/>
-                  </a:lnTo>
-                  <a:lnTo>
-                    <a:pt x="1019949" y="2666431"/>
-                  </a:lnTo>
-                  <a:lnTo>
-                    <a:pt x="1091571" y="2678689"/>
-                  </a:lnTo>
-                  <a:lnTo>
-                    <a:pt x="1163194" y="2690764"/>
-                  </a:lnTo>
-                  <a:lnTo>
-                    <a:pt x="1234816" y="2702658"/>
-                  </a:lnTo>
-                  <a:lnTo>
-                    <a:pt x="1306439" y="2714374"/>
-                  </a:lnTo>
-                  <a:lnTo>
-                    <a:pt x="1378062" y="2725913"/>
-                  </a:lnTo>
-                  <a:lnTo>
-                    <a:pt x="1449684" y="2737280"/>
-                  </a:lnTo>
-                  <a:lnTo>
-                    <a:pt x="1521307" y="2748476"/>
-                  </a:lnTo>
-                  <a:lnTo>
-                    <a:pt x="1592929" y="2759505"/>
-                  </a:lnTo>
-                  <a:lnTo>
-                    <a:pt x="1664552" y="2770367"/>
-                  </a:lnTo>
-                  <a:lnTo>
-                    <a:pt x="1736174" y="2781067"/>
-                  </a:lnTo>
-                  <a:lnTo>
-                    <a:pt x="1807797" y="2791607"/>
-                  </a:lnTo>
-                  <a:lnTo>
-                    <a:pt x="1879419" y="2801988"/>
-                  </a:lnTo>
-                  <a:lnTo>
-                    <a:pt x="1951042" y="2812214"/>
-                  </a:lnTo>
-                  <a:lnTo>
-                    <a:pt x="2022664" y="2822286"/>
-                  </a:lnTo>
-                  <a:lnTo>
-                    <a:pt x="2094287" y="2832207"/>
-                  </a:lnTo>
-                  <a:lnTo>
-                    <a:pt x="2165909" y="2841979"/>
-                  </a:lnTo>
-                  <a:lnTo>
-                    <a:pt x="2237532" y="2851605"/>
-                  </a:lnTo>
-                  <a:lnTo>
-                    <a:pt x="2309154" y="2861087"/>
-                  </a:lnTo>
-                  <a:lnTo>
-                    <a:pt x="2380777" y="2870426"/>
-                  </a:lnTo>
-                  <a:lnTo>
-                    <a:pt x="2452399" y="2879625"/>
-                  </a:lnTo>
-                  <a:lnTo>
-                    <a:pt x="2524022" y="2888686"/>
-                  </a:lnTo>
-                  <a:lnTo>
-                    <a:pt x="2595644" y="2897611"/>
-                  </a:lnTo>
-                  <a:lnTo>
-                    <a:pt x="2667267" y="2906403"/>
-                  </a:lnTo>
-                  <a:lnTo>
-                    <a:pt x="2738890" y="2915062"/>
-                  </a:lnTo>
-                  <a:lnTo>
-                    <a:pt x="2810512" y="2923592"/>
-                  </a:lnTo>
-                  <a:lnTo>
-                    <a:pt x="2882135" y="2931994"/>
-                  </a:lnTo>
-                  <a:lnTo>
-                    <a:pt x="2953757" y="2940269"/>
-                  </a:lnTo>
-                  <a:lnTo>
-                    <a:pt x="3025380" y="2948421"/>
-                  </a:lnTo>
-                  <a:lnTo>
-                    <a:pt x="3097002" y="2956450"/>
-                  </a:lnTo>
-                  <a:lnTo>
-                    <a:pt x="3168625" y="2964359"/>
-                  </a:lnTo>
-                  <a:lnTo>
-                    <a:pt x="3240247" y="2972149"/>
-                  </a:lnTo>
-                  <a:lnTo>
-                    <a:pt x="3311870" y="2979823"/>
-                  </a:lnTo>
-                  <a:lnTo>
-                    <a:pt x="3383492" y="2987381"/>
-                  </a:lnTo>
-                  <a:lnTo>
-                    <a:pt x="3455115" y="2994826"/>
-                  </a:lnTo>
-                  <a:lnTo>
-                    <a:pt x="3526737" y="3002159"/>
-                  </a:lnTo>
-                  <a:lnTo>
-                    <a:pt x="3598360" y="3009382"/>
-                  </a:lnTo>
-                  <a:lnTo>
-                    <a:pt x="3669982" y="3016497"/>
-                  </a:lnTo>
-                  <a:lnTo>
-                    <a:pt x="3741605" y="3023506"/>
-                  </a:lnTo>
-                  <a:lnTo>
-                    <a:pt x="3813227" y="3030409"/>
-                  </a:lnTo>
-                  <a:lnTo>
-                    <a:pt x="3884850" y="3037208"/>
-                  </a:lnTo>
-                  <a:lnTo>
-                    <a:pt x="3956472" y="3043906"/>
-                  </a:lnTo>
-                  <a:lnTo>
-                    <a:pt x="4028095" y="3050503"/>
-                  </a:lnTo>
-                  <a:lnTo>
-                    <a:pt x="4099718" y="3057001"/>
-                  </a:lnTo>
-                  <a:lnTo>
-                    <a:pt x="4171340" y="3063402"/>
-                  </a:lnTo>
-                  <a:lnTo>
-                    <a:pt x="4242963" y="3069707"/>
-                  </a:lnTo>
-                  <a:lnTo>
-                    <a:pt x="4314585" y="3075917"/>
-                  </a:lnTo>
-                  <a:lnTo>
-                    <a:pt x="4386208" y="3082034"/>
-                  </a:lnTo>
-                  <a:lnTo>
-                    <a:pt x="4457830" y="3088059"/>
-                  </a:lnTo>
-                  <a:lnTo>
-                    <a:pt x="4529453" y="3093994"/>
-                  </a:lnTo>
-                  <a:lnTo>
-                    <a:pt x="4601075" y="3099840"/>
-                  </a:lnTo>
-                  <a:lnTo>
-                    <a:pt x="4672698" y="3105598"/>
-                  </a:lnTo>
-                  <a:lnTo>
-                    <a:pt x="4744320" y="3111270"/>
-                  </a:lnTo>
-                </a:path>
-              </a:pathLst>
-            </a:custGeom>
-          </p:spPr>
-          <p:txBody>
-            <a:bodyPr/>
-            <a:lstStyle/>
-            <a:p/>
-          </p:txBody>
-        </p:sp>
-        <p:sp>
-          <p:nvSpPr>
             <p:cNvPr id="22" name="pl22"/>
             <p:cNvSpPr/>
             <p:nvPr/>
           </p:nvSpPr>
           <p:spPr>
             <a:xfrm>
-              <a:off x="1172049" y="3894357"/>
-              <a:ext cx="7090630" cy="1660192"/>
+              <a:off x="3539753" y="2143092"/>
+              <a:ext cx="4659662" cy="1122784"/>
             </a:xfrm>
             <a:custGeom>
               <a:avLst/>
               <a:pathLst>
-                <a:path w="7090630" h="1660192">
+                <a:path w="4659662" h="1122784">
                   <a:moveTo>
-                    <a:pt x="7090630" y="1660192"/>
+                    <a:pt x="0" y="0"/>
                   </a:moveTo>
                   <a:lnTo>
-                    <a:pt x="7019007" y="1659883"/>
-                  </a:lnTo>
-                  <a:lnTo>
-                    <a:pt x="6947385" y="1659540"/>
-                  </a:lnTo>
-                  <a:lnTo>
-                    <a:pt x="6875762" y="1659157"/>
-                  </a:lnTo>
-                  <a:lnTo>
-                    <a:pt x="6804139" y="1658730"/>
-                  </a:lnTo>
-                  <a:lnTo>
-                    <a:pt x="6732517" y="1658255"/>
-                  </a:lnTo>
-                  <a:lnTo>
-                    <a:pt x="6660894" y="1657726"/>
-                  </a:lnTo>
-                  <a:lnTo>
-                    <a:pt x="6589272" y="1657136"/>
-                  </a:lnTo>
-                  <a:lnTo>
-                    <a:pt x="6517649" y="1656479"/>
-                  </a:lnTo>
-                  <a:lnTo>
-                    <a:pt x="6446027" y="1655746"/>
-                  </a:lnTo>
-                  <a:lnTo>
-                    <a:pt x="6374404" y="1654930"/>
-                  </a:lnTo>
-                  <a:lnTo>
-                    <a:pt x="6302782" y="1654021"/>
-                  </a:lnTo>
-                  <a:lnTo>
-                    <a:pt x="6231159" y="1653009"/>
-                  </a:lnTo>
-                  <a:lnTo>
-                    <a:pt x="6159537" y="1651880"/>
-                  </a:lnTo>
-                  <a:lnTo>
-                    <a:pt x="6087914" y="1650623"/>
-                  </a:lnTo>
-                  <a:lnTo>
-                    <a:pt x="6016292" y="1649222"/>
-                  </a:lnTo>
-                  <a:lnTo>
-                    <a:pt x="5944669" y="1647662"/>
-                  </a:lnTo>
-                  <a:lnTo>
-                    <a:pt x="5873047" y="1645923"/>
-                  </a:lnTo>
-                  <a:lnTo>
-                    <a:pt x="5801424" y="1643985"/>
-                  </a:lnTo>
-                  <a:lnTo>
-                    <a:pt x="5729802" y="1641827"/>
-                  </a:lnTo>
-                  <a:lnTo>
-                    <a:pt x="5658179" y="1639422"/>
-                  </a:lnTo>
-                  <a:lnTo>
-                    <a:pt x="5586557" y="1636742"/>
-                  </a:lnTo>
-                  <a:lnTo>
-                    <a:pt x="5514934" y="1633756"/>
-                  </a:lnTo>
-                  <a:lnTo>
-                    <a:pt x="5443311" y="1630430"/>
-                  </a:lnTo>
-                  <a:lnTo>
-                    <a:pt x="5371689" y="1626724"/>
-                  </a:lnTo>
-                  <a:lnTo>
-                    <a:pt x="5300066" y="1622595"/>
-                  </a:lnTo>
-                  <a:lnTo>
-                    <a:pt x="5228444" y="1617994"/>
-                  </a:lnTo>
-                  <a:lnTo>
-                    <a:pt x="5156821" y="1612868"/>
-                  </a:lnTo>
-                  <a:lnTo>
-                    <a:pt x="5085199" y="1607156"/>
-                  </a:lnTo>
-                  <a:lnTo>
-                    <a:pt x="5013576" y="1600793"/>
-                  </a:lnTo>
-                  <a:lnTo>
-                    <a:pt x="4941954" y="1593703"/>
-                  </a:lnTo>
-                  <a:lnTo>
-                    <a:pt x="4870331" y="1585804"/>
-                  </a:lnTo>
-                  <a:lnTo>
-                    <a:pt x="4798709" y="1577003"/>
-                  </a:lnTo>
-                  <a:lnTo>
-                    <a:pt x="4727086" y="1567197"/>
-                  </a:lnTo>
-                  <a:lnTo>
-                    <a:pt x="4655464" y="1556272"/>
-                  </a:lnTo>
-                  <a:lnTo>
-                    <a:pt x="4583841" y="1544099"/>
-                  </a:lnTo>
-                  <a:lnTo>
-                    <a:pt x="4512219" y="1530536"/>
-                  </a:lnTo>
-                  <a:lnTo>
-                    <a:pt x="4440596" y="1515425"/>
-                  </a:lnTo>
-                  <a:lnTo>
-                    <a:pt x="4368974" y="1498589"/>
-                  </a:lnTo>
-                  <a:lnTo>
-                    <a:pt x="4297351" y="1479831"/>
-                  </a:lnTo>
-                  <a:lnTo>
-                    <a:pt x="4225729" y="1458931"/>
-                  </a:lnTo>
-                  <a:lnTo>
-                    <a:pt x="4154106" y="1435645"/>
-                  </a:lnTo>
-                  <a:lnTo>
-                    <a:pt x="4082483" y="1409700"/>
-                  </a:lnTo>
-                  <a:lnTo>
-                    <a:pt x="4010861" y="1380793"/>
-                  </a:lnTo>
-                  <a:lnTo>
-                    <a:pt x="3939238" y="1348586"/>
-                  </a:lnTo>
-                  <a:lnTo>
-                    <a:pt x="3867616" y="1312702"/>
-                  </a:lnTo>
-                  <a:lnTo>
-                    <a:pt x="3795993" y="1272722"/>
-                  </a:lnTo>
-                  <a:lnTo>
-                    <a:pt x="3724371" y="1228176"/>
-                  </a:lnTo>
-                  <a:lnTo>
-                    <a:pt x="3652748" y="1178545"/>
-                  </a:lnTo>
-                  <a:lnTo>
-                    <a:pt x="3581126" y="1123247"/>
-                  </a:lnTo>
-                  <a:lnTo>
-                    <a:pt x="3509503" y="1061637"/>
-                  </a:lnTo>
-                  <a:lnTo>
-                    <a:pt x="3437881" y="992992"/>
-                  </a:lnTo>
-                  <a:lnTo>
-                    <a:pt x="3366258" y="916510"/>
-                  </a:lnTo>
-                  <a:lnTo>
-                    <a:pt x="3294636" y="833131"/>
-                  </a:lnTo>
-                  <a:lnTo>
-                    <a:pt x="3223013" y="820496"/>
-                  </a:lnTo>
-                  <a:lnTo>
-                    <a:pt x="3151391" y="807669"/>
-                  </a:lnTo>
-                  <a:lnTo>
-                    <a:pt x="3079768" y="794646"/>
-                  </a:lnTo>
-                  <a:lnTo>
-                    <a:pt x="3008146" y="781425"/>
-                  </a:lnTo>
-                  <a:lnTo>
-                    <a:pt x="2936523" y="768002"/>
-                  </a:lnTo>
-                  <a:lnTo>
-                    <a:pt x="2864901" y="754376"/>
-                  </a:lnTo>
-                  <a:lnTo>
-                    <a:pt x="2793278" y="740541"/>
-                  </a:lnTo>
-                  <a:lnTo>
-                    <a:pt x="2721655" y="726497"/>
-                  </a:lnTo>
-                  <a:lnTo>
-                    <a:pt x="2650033" y="712238"/>
-                  </a:lnTo>
-                  <a:lnTo>
-                    <a:pt x="2578410" y="697762"/>
-                  </a:lnTo>
-                  <a:lnTo>
-                    <a:pt x="2506788" y="683066"/>
-                  </a:lnTo>
-                  <a:lnTo>
-                    <a:pt x="2435165" y="668145"/>
-                  </a:lnTo>
-                  <a:lnTo>
-                    <a:pt x="2363543" y="652998"/>
-                  </a:lnTo>
-                  <a:lnTo>
-                    <a:pt x="2291920" y="637620"/>
-                  </a:lnTo>
-                  <a:lnTo>
-                    <a:pt x="2220298" y="622008"/>
-                  </a:lnTo>
-                  <a:lnTo>
-                    <a:pt x="2148675" y="606158"/>
-                  </a:lnTo>
-                  <a:lnTo>
-                    <a:pt x="2077053" y="590067"/>
-                  </a:lnTo>
-                  <a:lnTo>
-                    <a:pt x="2005430" y="573731"/>
-                  </a:lnTo>
-                  <a:lnTo>
-                    <a:pt x="1933808" y="557146"/>
-                  </a:lnTo>
-                  <a:lnTo>
-                    <a:pt x="1862185" y="540308"/>
-                  </a:lnTo>
-                  <a:lnTo>
-                    <a:pt x="1790563" y="523214"/>
-                  </a:lnTo>
-                  <a:lnTo>
-                    <a:pt x="1718940" y="505860"/>
-                  </a:lnTo>
-                  <a:lnTo>
-                    <a:pt x="1647318" y="488242"/>
-                  </a:lnTo>
-                  <a:lnTo>
-                    <a:pt x="1575695" y="470355"/>
-                  </a:lnTo>
-                  <a:lnTo>
-                    <a:pt x="1504073" y="452196"/>
-                  </a:lnTo>
-                  <a:lnTo>
-                    <a:pt x="1432450" y="433760"/>
-                  </a:lnTo>
-                  <a:lnTo>
-                    <a:pt x="1360827" y="415044"/>
-                  </a:lnTo>
-                  <a:lnTo>
-                    <a:pt x="1289205" y="396042"/>
-                  </a:lnTo>
-                  <a:lnTo>
-                    <a:pt x="1217582" y="376752"/>
-                  </a:lnTo>
-                  <a:lnTo>
-                    <a:pt x="1145960" y="357167"/>
-                  </a:lnTo>
-                  <a:lnTo>
-                    <a:pt x="1074337" y="337285"/>
-                  </a:lnTo>
-                  <a:lnTo>
-                    <a:pt x="1002715" y="317099"/>
-                  </a:lnTo>
-                  <a:lnTo>
-                    <a:pt x="931092" y="296607"/>
-                  </a:lnTo>
-                  <a:lnTo>
-                    <a:pt x="859470" y="275802"/>
-                  </a:lnTo>
-                  <a:lnTo>
-                    <a:pt x="787847" y="254680"/>
-                  </a:lnTo>
-                  <a:lnTo>
-                    <a:pt x="716225" y="233237"/>
-                  </a:lnTo>
-                  <a:lnTo>
-                    <a:pt x="644602" y="211467"/>
-                  </a:lnTo>
-                  <a:lnTo>
-                    <a:pt x="572980" y="189366"/>
-                  </a:lnTo>
-                  <a:lnTo>
-                    <a:pt x="501357" y="166928"/>
-                  </a:lnTo>
-                  <a:lnTo>
-                    <a:pt x="429735" y="144148"/>
-                  </a:lnTo>
-                  <a:lnTo>
-                    <a:pt x="358112" y="121022"/>
-                  </a:lnTo>
-                  <a:lnTo>
-                    <a:pt x="286490" y="97544"/>
-                  </a:lnTo>
-                  <a:lnTo>
-                    <a:pt x="214867" y="73708"/>
-                  </a:lnTo>
-                  <a:lnTo>
-                    <a:pt x="143245" y="49509"/>
-                  </a:lnTo>
-                  <a:lnTo>
-                    <a:pt x="71622" y="24941"/>
-                  </a:lnTo>
-                  <a:lnTo>
-                    <a:pt x="0" y="0"/>
+                    <a:pt x="16926" y="33614"/>
+                  </a:lnTo>
+                  <a:lnTo>
+                    <a:pt x="87271" y="158995"/>
+                  </a:lnTo>
+                  <a:lnTo>
+                    <a:pt x="157615" y="271528"/>
+                  </a:lnTo>
+                  <a:lnTo>
+                    <a:pt x="227959" y="372530"/>
+                  </a:lnTo>
+                  <a:lnTo>
+                    <a:pt x="298304" y="463183"/>
+                  </a:lnTo>
+                  <a:lnTo>
+                    <a:pt x="368648" y="544546"/>
+                  </a:lnTo>
+                  <a:lnTo>
+                    <a:pt x="438993" y="617572"/>
+                  </a:lnTo>
+                  <a:lnTo>
+                    <a:pt x="509337" y="683115"/>
+                  </a:lnTo>
+                  <a:lnTo>
+                    <a:pt x="579682" y="741942"/>
+                  </a:lnTo>
+                  <a:lnTo>
+                    <a:pt x="650026" y="794740"/>
+                  </a:lnTo>
+                  <a:lnTo>
+                    <a:pt x="720371" y="842129"/>
+                  </a:lnTo>
+                  <a:lnTo>
+                    <a:pt x="790715" y="884662"/>
+                  </a:lnTo>
+                  <a:lnTo>
+                    <a:pt x="861060" y="922836"/>
+                  </a:lnTo>
+                  <a:lnTo>
+                    <a:pt x="931404" y="957098"/>
+                  </a:lnTo>
+                  <a:lnTo>
+                    <a:pt x="1001749" y="962252"/>
+                  </a:lnTo>
+                  <a:lnTo>
+                    <a:pt x="1072093" y="966676"/>
+                  </a:lnTo>
+                  <a:lnTo>
+                    <a:pt x="1142438" y="971033"/>
+                  </a:lnTo>
+                  <a:lnTo>
+                    <a:pt x="1212782" y="975325"/>
+                  </a:lnTo>
+                  <a:lnTo>
+                    <a:pt x="1283127" y="979553"/>
+                  </a:lnTo>
+                  <a:lnTo>
+                    <a:pt x="1353471" y="983718"/>
+                  </a:lnTo>
+                  <a:lnTo>
+                    <a:pt x="1423816" y="987820"/>
+                  </a:lnTo>
+                  <a:lnTo>
+                    <a:pt x="1494160" y="991860"/>
+                  </a:lnTo>
+                  <a:lnTo>
+                    <a:pt x="1564505" y="995840"/>
+                  </a:lnTo>
+                  <a:lnTo>
+                    <a:pt x="1634849" y="999760"/>
+                  </a:lnTo>
+                  <a:lnTo>
+                    <a:pt x="1705194" y="1003621"/>
+                  </a:lnTo>
+                  <a:lnTo>
+                    <a:pt x="1775538" y="1007425"/>
+                  </a:lnTo>
+                  <a:lnTo>
+                    <a:pt x="1845883" y="1011171"/>
+                  </a:lnTo>
+                  <a:lnTo>
+                    <a:pt x="1916227" y="1014861"/>
+                  </a:lnTo>
+                  <a:lnTo>
+                    <a:pt x="1986572" y="1018496"/>
+                  </a:lnTo>
+                  <a:lnTo>
+                    <a:pt x="2056916" y="1022077"/>
+                  </a:lnTo>
+                  <a:lnTo>
+                    <a:pt x="2127261" y="1025603"/>
+                  </a:lnTo>
+                  <a:lnTo>
+                    <a:pt x="2197605" y="1029077"/>
+                  </a:lnTo>
+                  <a:lnTo>
+                    <a:pt x="2267950" y="1032499"/>
+                  </a:lnTo>
+                  <a:lnTo>
+                    <a:pt x="2338294" y="1035869"/>
+                  </a:lnTo>
+                  <a:lnTo>
+                    <a:pt x="2408639" y="1039189"/>
+                  </a:lnTo>
+                  <a:lnTo>
+                    <a:pt x="2478983" y="1042459"/>
+                  </a:lnTo>
+                  <a:lnTo>
+                    <a:pt x="2549328" y="1045679"/>
+                  </a:lnTo>
+                  <a:lnTo>
+                    <a:pt x="2619672" y="1048852"/>
+                  </a:lnTo>
+                  <a:lnTo>
+                    <a:pt x="2690017" y="1051977"/>
+                  </a:lnTo>
+                  <a:lnTo>
+                    <a:pt x="2760361" y="1055055"/>
+                  </a:lnTo>
+                  <a:lnTo>
+                    <a:pt x="2830706" y="1058087"/>
+                  </a:lnTo>
+                  <a:lnTo>
+                    <a:pt x="2901050" y="1061074"/>
+                  </a:lnTo>
+                  <a:lnTo>
+                    <a:pt x="2971395" y="1064015"/>
+                  </a:lnTo>
+                  <a:lnTo>
+                    <a:pt x="3041739" y="1066913"/>
+                  </a:lnTo>
+                  <a:lnTo>
+                    <a:pt x="3112084" y="1069767"/>
+                  </a:lnTo>
+                  <a:lnTo>
+                    <a:pt x="3182428" y="1072578"/>
+                  </a:lnTo>
+                  <a:lnTo>
+                    <a:pt x="3252773" y="1075348"/>
+                  </a:lnTo>
+                  <a:lnTo>
+                    <a:pt x="3323117" y="1078075"/>
+                  </a:lnTo>
+                  <a:lnTo>
+                    <a:pt x="3393462" y="1080762"/>
+                  </a:lnTo>
+                  <a:lnTo>
+                    <a:pt x="3463806" y="1083408"/>
+                  </a:lnTo>
+                  <a:lnTo>
+                    <a:pt x="3534151" y="1086015"/>
+                  </a:lnTo>
+                  <a:lnTo>
+                    <a:pt x="3604495" y="1088583"/>
+                  </a:lnTo>
+                  <a:lnTo>
+                    <a:pt x="3674840" y="1091112"/>
+                  </a:lnTo>
+                  <a:lnTo>
+                    <a:pt x="3745184" y="1093603"/>
+                  </a:lnTo>
+                  <a:lnTo>
+                    <a:pt x="3815529" y="1096057"/>
+                  </a:lnTo>
+                  <a:lnTo>
+                    <a:pt x="3885873" y="1098474"/>
+                  </a:lnTo>
+                  <a:lnTo>
+                    <a:pt x="3956217" y="1100854"/>
+                  </a:lnTo>
+                  <a:lnTo>
+                    <a:pt x="4026562" y="1103199"/>
+                  </a:lnTo>
+                  <a:lnTo>
+                    <a:pt x="4096906" y="1105509"/>
+                  </a:lnTo>
+                  <a:lnTo>
+                    <a:pt x="4167251" y="1107785"/>
+                  </a:lnTo>
+                  <a:lnTo>
+                    <a:pt x="4237595" y="1110026"/>
+                  </a:lnTo>
+                  <a:lnTo>
+                    <a:pt x="4307940" y="1112233"/>
+                  </a:lnTo>
+                  <a:lnTo>
+                    <a:pt x="4378284" y="1114408"/>
+                  </a:lnTo>
+                  <a:lnTo>
+                    <a:pt x="4448629" y="1116549"/>
+                  </a:lnTo>
+                  <a:lnTo>
+                    <a:pt x="4518973" y="1118659"/>
+                  </a:lnTo>
+                  <a:lnTo>
+                    <a:pt x="4589318" y="1120737"/>
+                  </a:lnTo>
+                  <a:lnTo>
+                    <a:pt x="4659662" y="1122784"/>
                   </a:lnTo>
                 </a:path>
               </a:pathLst>
@@ -4051,246 +3761,571 @@
           </p:nvSpPr>
           <p:spPr>
             <a:xfrm>
-              <a:off x="2800530" y="2073503"/>
-              <a:ext cx="5462148" cy="3452029"/>
+              <a:off x="1235312" y="2800195"/>
+              <a:ext cx="6964104" cy="599124"/>
             </a:xfrm>
             <a:custGeom>
               <a:avLst/>
               <a:pathLst>
-                <a:path w="5462148" h="3452029">
+                <a:path w="6964104" h="599124">
+                  <a:moveTo>
+                    <a:pt x="6964104" y="599124"/>
+                  </a:moveTo>
+                  <a:lnTo>
+                    <a:pt x="6893760" y="599012"/>
+                  </a:lnTo>
+                  <a:lnTo>
+                    <a:pt x="6823415" y="598888"/>
+                  </a:lnTo>
+                  <a:lnTo>
+                    <a:pt x="6753071" y="598750"/>
+                  </a:lnTo>
+                  <a:lnTo>
+                    <a:pt x="6682726" y="598596"/>
+                  </a:lnTo>
+                  <a:lnTo>
+                    <a:pt x="6612382" y="598425"/>
+                  </a:lnTo>
+                  <a:lnTo>
+                    <a:pt x="6542037" y="598234"/>
+                  </a:lnTo>
+                  <a:lnTo>
+                    <a:pt x="6471693" y="598021"/>
+                  </a:lnTo>
+                  <a:lnTo>
+                    <a:pt x="6401348" y="597784"/>
+                  </a:lnTo>
+                  <a:lnTo>
+                    <a:pt x="6331004" y="597520"/>
+                  </a:lnTo>
+                  <a:lnTo>
+                    <a:pt x="6260659" y="597225"/>
+                  </a:lnTo>
+                  <a:lnTo>
+                    <a:pt x="6190315" y="596897"/>
+                  </a:lnTo>
+                  <a:lnTo>
+                    <a:pt x="6119970" y="596532"/>
+                  </a:lnTo>
+                  <a:lnTo>
+                    <a:pt x="6049626" y="596124"/>
+                  </a:lnTo>
+                  <a:lnTo>
+                    <a:pt x="5979281" y="595671"/>
+                  </a:lnTo>
+                  <a:lnTo>
+                    <a:pt x="5908937" y="595165"/>
+                  </a:lnTo>
+                  <a:lnTo>
+                    <a:pt x="5838592" y="594602"/>
+                  </a:lnTo>
+                  <a:lnTo>
+                    <a:pt x="5768248" y="593974"/>
+                  </a:lnTo>
+                  <a:lnTo>
+                    <a:pt x="5697903" y="593275"/>
+                  </a:lnTo>
+                  <a:lnTo>
+                    <a:pt x="5627559" y="592496"/>
+                  </a:lnTo>
+                  <a:lnTo>
+                    <a:pt x="5557214" y="591628"/>
+                  </a:lnTo>
+                  <a:lnTo>
+                    <a:pt x="5486870" y="590661"/>
+                  </a:lnTo>
+                  <a:lnTo>
+                    <a:pt x="5416525" y="589584"/>
+                  </a:lnTo>
+                  <a:lnTo>
+                    <a:pt x="5346181" y="588384"/>
+                  </a:lnTo>
+                  <a:lnTo>
+                    <a:pt x="5275836" y="587046"/>
+                  </a:lnTo>
+                  <a:lnTo>
+                    <a:pt x="5205492" y="585556"/>
+                  </a:lnTo>
+                  <a:lnTo>
+                    <a:pt x="5135147" y="583896"/>
+                  </a:lnTo>
+                  <a:lnTo>
+                    <a:pt x="5064803" y="582046"/>
+                  </a:lnTo>
+                  <a:lnTo>
+                    <a:pt x="4994458" y="579985"/>
+                  </a:lnTo>
+                  <a:lnTo>
+                    <a:pt x="4924114" y="577688"/>
+                  </a:lnTo>
+                  <a:lnTo>
+                    <a:pt x="4853769" y="575130"/>
+                  </a:lnTo>
+                  <a:lnTo>
+                    <a:pt x="4783425" y="572279"/>
+                  </a:lnTo>
+                  <a:lnTo>
+                    <a:pt x="4713080" y="569103"/>
+                  </a:lnTo>
+                  <a:lnTo>
+                    <a:pt x="4642736" y="565564"/>
+                  </a:lnTo>
+                  <a:lnTo>
+                    <a:pt x="4572391" y="561621"/>
+                  </a:lnTo>
+                  <a:lnTo>
+                    <a:pt x="4502047" y="557229"/>
+                  </a:lnTo>
+                  <a:lnTo>
+                    <a:pt x="4431702" y="552334"/>
+                  </a:lnTo>
+                  <a:lnTo>
+                    <a:pt x="4361358" y="546881"/>
+                  </a:lnTo>
+                  <a:lnTo>
+                    <a:pt x="4291013" y="540805"/>
+                  </a:lnTo>
+                  <a:lnTo>
+                    <a:pt x="4220669" y="534036"/>
+                  </a:lnTo>
+                  <a:lnTo>
+                    <a:pt x="4150324" y="526493"/>
+                  </a:lnTo>
+                  <a:lnTo>
+                    <a:pt x="4079980" y="518090"/>
+                  </a:lnTo>
+                  <a:lnTo>
+                    <a:pt x="4009635" y="508727"/>
+                  </a:lnTo>
+                  <a:lnTo>
+                    <a:pt x="3939291" y="498296"/>
+                  </a:lnTo>
+                  <a:lnTo>
+                    <a:pt x="3868946" y="486673"/>
+                  </a:lnTo>
+                  <a:lnTo>
+                    <a:pt x="3798602" y="473723"/>
+                  </a:lnTo>
+                  <a:lnTo>
+                    <a:pt x="3728257" y="459295"/>
+                  </a:lnTo>
+                  <a:lnTo>
+                    <a:pt x="3657913" y="443220"/>
+                  </a:lnTo>
+                  <a:lnTo>
+                    <a:pt x="3587569" y="425309"/>
+                  </a:lnTo>
+                  <a:lnTo>
+                    <a:pt x="3517224" y="405353"/>
+                  </a:lnTo>
+                  <a:lnTo>
+                    <a:pt x="3446880" y="383119"/>
+                  </a:lnTo>
+                  <a:lnTo>
+                    <a:pt x="3376535" y="358347"/>
+                  </a:lnTo>
+                  <a:lnTo>
+                    <a:pt x="3306191" y="330747"/>
+                  </a:lnTo>
+                  <a:lnTo>
+                    <a:pt x="3235846" y="300657"/>
+                  </a:lnTo>
+                  <a:lnTo>
+                    <a:pt x="3165502" y="296097"/>
+                  </a:lnTo>
+                  <a:lnTo>
+                    <a:pt x="3095157" y="291468"/>
+                  </a:lnTo>
+                  <a:lnTo>
+                    <a:pt x="3024813" y="286769"/>
+                  </a:lnTo>
+                  <a:lnTo>
+                    <a:pt x="2954468" y="281998"/>
+                  </a:lnTo>
+                  <a:lnTo>
+                    <a:pt x="2884124" y="277154"/>
+                  </a:lnTo>
+                  <a:lnTo>
+                    <a:pt x="2813779" y="272236"/>
+                  </a:lnTo>
+                  <a:lnTo>
+                    <a:pt x="2743435" y="267244"/>
+                  </a:lnTo>
+                  <a:lnTo>
+                    <a:pt x="2673090" y="262175"/>
+                  </a:lnTo>
+                  <a:lnTo>
+                    <a:pt x="2602746" y="257030"/>
+                  </a:lnTo>
+                  <a:lnTo>
+                    <a:pt x="2532401" y="251806"/>
+                  </a:lnTo>
+                  <a:lnTo>
+                    <a:pt x="2462057" y="246502"/>
+                  </a:lnTo>
+                  <a:lnTo>
+                    <a:pt x="2391712" y="241118"/>
+                  </a:lnTo>
+                  <a:lnTo>
+                    <a:pt x="2321368" y="235651"/>
+                  </a:lnTo>
+                  <a:lnTo>
+                    <a:pt x="2251023" y="230102"/>
+                  </a:lnTo>
+                  <a:lnTo>
+                    <a:pt x="2180679" y="224468"/>
+                  </a:lnTo>
+                  <a:lnTo>
+                    <a:pt x="2110334" y="218748"/>
+                  </a:lnTo>
+                  <a:lnTo>
+                    <a:pt x="2039990" y="212941"/>
+                  </a:lnTo>
+                  <a:lnTo>
+                    <a:pt x="1969645" y="207046"/>
+                  </a:lnTo>
+                  <a:lnTo>
+                    <a:pt x="1899301" y="201060"/>
+                  </a:lnTo>
+                  <a:lnTo>
+                    <a:pt x="1828956" y="194984"/>
+                  </a:lnTo>
+                  <a:lnTo>
+                    <a:pt x="1758612" y="188815"/>
+                  </a:lnTo>
+                  <a:lnTo>
+                    <a:pt x="1688267" y="182553"/>
+                  </a:lnTo>
+                  <a:lnTo>
+                    <a:pt x="1617923" y="176195"/>
+                  </a:lnTo>
+                  <a:lnTo>
+                    <a:pt x="1547578" y="169740"/>
+                  </a:lnTo>
+                  <a:lnTo>
+                    <a:pt x="1477234" y="163187"/>
+                  </a:lnTo>
+                  <a:lnTo>
+                    <a:pt x="1406889" y="156534"/>
+                  </a:lnTo>
+                  <a:lnTo>
+                    <a:pt x="1336545" y="149779"/>
+                  </a:lnTo>
+                  <a:lnTo>
+                    <a:pt x="1266200" y="142922"/>
+                  </a:lnTo>
+                  <a:lnTo>
+                    <a:pt x="1195856" y="135961"/>
+                  </a:lnTo>
+                  <a:lnTo>
+                    <a:pt x="1125511" y="128893"/>
+                  </a:lnTo>
+                  <a:lnTo>
+                    <a:pt x="1055167" y="121718"/>
+                  </a:lnTo>
+                  <a:lnTo>
+                    <a:pt x="984822" y="114433"/>
+                  </a:lnTo>
+                  <a:lnTo>
+                    <a:pt x="914478" y="107038"/>
+                  </a:lnTo>
+                  <a:lnTo>
+                    <a:pt x="844133" y="99530"/>
+                  </a:lnTo>
+                  <a:lnTo>
+                    <a:pt x="773789" y="91908"/>
+                  </a:lnTo>
+                  <a:lnTo>
+                    <a:pt x="703444" y="84169"/>
+                  </a:lnTo>
+                  <a:lnTo>
+                    <a:pt x="633100" y="76313"/>
+                  </a:lnTo>
+                  <a:lnTo>
+                    <a:pt x="562755" y="68337"/>
+                  </a:lnTo>
+                  <a:lnTo>
+                    <a:pt x="492411" y="60240"/>
+                  </a:lnTo>
+                  <a:lnTo>
+                    <a:pt x="422066" y="52019"/>
+                  </a:lnTo>
+                  <a:lnTo>
+                    <a:pt x="351722" y="43674"/>
+                  </a:lnTo>
+                  <a:lnTo>
+                    <a:pt x="281377" y="35201"/>
+                  </a:lnTo>
+                  <a:lnTo>
+                    <a:pt x="211033" y="26599"/>
+                  </a:lnTo>
+                  <a:lnTo>
+                    <a:pt x="140688" y="17866"/>
+                  </a:lnTo>
+                  <a:lnTo>
+                    <a:pt x="70344" y="9000"/>
+                  </a:lnTo>
+                  <a:lnTo>
+                    <a:pt x="0" y="0"/>
+                  </a:lnTo>
+                </a:path>
+              </a:pathLst>
+            </a:custGeom>
+          </p:spPr>
+          <p:txBody>
+            <a:bodyPr/>
+            <a:lstStyle/>
+            <a:p/>
+          </p:txBody>
+        </p:sp>
+        <p:sp>
+          <p:nvSpPr>
+            <p:cNvPr id="24" name="pl24"/>
+            <p:cNvSpPr/>
+            <p:nvPr/>
+          </p:nvSpPr>
+          <p:spPr>
+            <a:xfrm>
+              <a:off x="2834734" y="2143092"/>
+              <a:ext cx="5364681" cy="1245756"/>
+            </a:xfrm>
+            <a:custGeom>
+              <a:avLst/>
+              <a:pathLst>
+                <a:path w="5364681" h="1245756">
                   <a:moveTo>
                     <a:pt x="0" y="0"/>
                   </a:moveTo>
                   <a:lnTo>
-                    <a:pt x="18836" y="57267"/>
-                  </a:lnTo>
-                  <a:lnTo>
-                    <a:pt x="90459" y="262003"/>
-                  </a:lnTo>
-                  <a:lnTo>
-                    <a:pt x="162081" y="454506"/>
-                  </a:lnTo>
-                  <a:lnTo>
-                    <a:pt x="233704" y="635506"/>
-                  </a:lnTo>
-                  <a:lnTo>
-                    <a:pt x="305326" y="805692"/>
-                  </a:lnTo>
-                  <a:lnTo>
-                    <a:pt x="376949" y="965709"/>
-                  </a:lnTo>
-                  <a:lnTo>
-                    <a:pt x="448571" y="1116164"/>
-                  </a:lnTo>
-                  <a:lnTo>
-                    <a:pt x="520194" y="1257630"/>
-                  </a:lnTo>
-                  <a:lnTo>
-                    <a:pt x="591816" y="1390643"/>
-                  </a:lnTo>
-                  <a:lnTo>
-                    <a:pt x="663439" y="1515708"/>
-                  </a:lnTo>
-                  <a:lnTo>
-                    <a:pt x="735061" y="1633301"/>
-                  </a:lnTo>
-                  <a:lnTo>
-                    <a:pt x="806684" y="1743867"/>
-                  </a:lnTo>
-                  <a:lnTo>
-                    <a:pt x="878306" y="1847827"/>
-                  </a:lnTo>
-                  <a:lnTo>
-                    <a:pt x="949929" y="1945575"/>
-                  </a:lnTo>
-                  <a:lnTo>
-                    <a:pt x="1021551" y="2037483"/>
-                  </a:lnTo>
-                  <a:lnTo>
-                    <a:pt x="1093174" y="2123898"/>
-                  </a:lnTo>
-                  <a:lnTo>
-                    <a:pt x="1164797" y="2205151"/>
-                  </a:lnTo>
-                  <a:lnTo>
-                    <a:pt x="1236419" y="2281548"/>
-                  </a:lnTo>
-                  <a:lnTo>
-                    <a:pt x="1308042" y="2353381"/>
-                  </a:lnTo>
-                  <a:lnTo>
-                    <a:pt x="1379664" y="2420922"/>
-                  </a:lnTo>
-                  <a:lnTo>
-                    <a:pt x="1451287" y="2484427"/>
-                  </a:lnTo>
-                  <a:lnTo>
-                    <a:pt x="1522909" y="2544137"/>
-                  </a:lnTo>
-                  <a:lnTo>
-                    <a:pt x="1594532" y="2600280"/>
-                  </a:lnTo>
-                  <a:lnTo>
-                    <a:pt x="1666154" y="2653068"/>
-                  </a:lnTo>
-                  <a:lnTo>
-                    <a:pt x="1737777" y="2702702"/>
-                  </a:lnTo>
-                  <a:lnTo>
-                    <a:pt x="1809399" y="2749370"/>
-                  </a:lnTo>
-                  <a:lnTo>
-                    <a:pt x="1881022" y="2793250"/>
-                  </a:lnTo>
-                  <a:lnTo>
-                    <a:pt x="1952644" y="2834508"/>
-                  </a:lnTo>
-                  <a:lnTo>
-                    <a:pt x="2024267" y="2873301"/>
-                  </a:lnTo>
-                  <a:lnTo>
-                    <a:pt x="2095889" y="2909776"/>
-                  </a:lnTo>
-                  <a:lnTo>
-                    <a:pt x="2167512" y="2944071"/>
-                  </a:lnTo>
-                  <a:lnTo>
-                    <a:pt x="2239134" y="2976317"/>
-                  </a:lnTo>
-                  <a:lnTo>
-                    <a:pt x="2310757" y="3006637"/>
-                  </a:lnTo>
-                  <a:lnTo>
-                    <a:pt x="2382379" y="3035145"/>
-                  </a:lnTo>
-                  <a:lnTo>
-                    <a:pt x="2454002" y="3061949"/>
-                  </a:lnTo>
-                  <a:lnTo>
-                    <a:pt x="2525625" y="3087152"/>
-                  </a:lnTo>
-                  <a:lnTo>
-                    <a:pt x="2597247" y="3110849"/>
-                  </a:lnTo>
-                  <a:lnTo>
-                    <a:pt x="2668870" y="3133130"/>
-                  </a:lnTo>
-                  <a:lnTo>
-                    <a:pt x="2740492" y="3154080"/>
-                  </a:lnTo>
-                  <a:lnTo>
-                    <a:pt x="2812115" y="3173778"/>
-                  </a:lnTo>
-                  <a:lnTo>
-                    <a:pt x="2883737" y="3192299"/>
-                  </a:lnTo>
-                  <a:lnTo>
-                    <a:pt x="2955360" y="3209713"/>
-                  </a:lnTo>
-                  <a:lnTo>
-                    <a:pt x="3026982" y="3226087"/>
-                  </a:lnTo>
-                  <a:lnTo>
-                    <a:pt x="3098605" y="3241482"/>
-                  </a:lnTo>
-                  <a:lnTo>
-                    <a:pt x="3170227" y="3255958"/>
-                  </a:lnTo>
-                  <a:lnTo>
-                    <a:pt x="3241850" y="3269568"/>
-                  </a:lnTo>
-                  <a:lnTo>
-                    <a:pt x="3313472" y="3282366"/>
-                  </a:lnTo>
-                  <a:lnTo>
-                    <a:pt x="3385095" y="3294399"/>
-                  </a:lnTo>
-                  <a:lnTo>
-                    <a:pt x="3456717" y="3305712"/>
-                  </a:lnTo>
-                  <a:lnTo>
-                    <a:pt x="3528340" y="3316350"/>
-                  </a:lnTo>
-                  <a:lnTo>
-                    <a:pt x="3599962" y="3326352"/>
-                  </a:lnTo>
-                  <a:lnTo>
-                    <a:pt x="3671585" y="3335757"/>
-                  </a:lnTo>
-                  <a:lnTo>
-                    <a:pt x="3743207" y="3344599"/>
-                  </a:lnTo>
-                  <a:lnTo>
-                    <a:pt x="3814830" y="3352913"/>
-                  </a:lnTo>
-                  <a:lnTo>
-                    <a:pt x="3886453" y="3360731"/>
-                  </a:lnTo>
-                  <a:lnTo>
-                    <a:pt x="3958075" y="3368081"/>
-                  </a:lnTo>
-                  <a:lnTo>
-                    <a:pt x="4029698" y="3374992"/>
-                  </a:lnTo>
-                  <a:lnTo>
-                    <a:pt x="4101320" y="3381490"/>
-                  </a:lnTo>
-                  <a:lnTo>
-                    <a:pt x="4172943" y="3387600"/>
-                  </a:lnTo>
-                  <a:lnTo>
-                    <a:pt x="4244565" y="3393345"/>
-                  </a:lnTo>
-                  <a:lnTo>
-                    <a:pt x="4316188" y="3398747"/>
-                  </a:lnTo>
-                  <a:lnTo>
-                    <a:pt x="4387810" y="3403826"/>
-                  </a:lnTo>
-                  <a:lnTo>
-                    <a:pt x="4459433" y="3408601"/>
-                  </a:lnTo>
-                  <a:lnTo>
-                    <a:pt x="4531055" y="3413091"/>
-                  </a:lnTo>
-                  <a:lnTo>
-                    <a:pt x="4602678" y="3417313"/>
-                  </a:lnTo>
-                  <a:lnTo>
-                    <a:pt x="4674300" y="3421282"/>
-                  </a:lnTo>
-                  <a:lnTo>
-                    <a:pt x="4745923" y="3425015"/>
-                  </a:lnTo>
-                  <a:lnTo>
-                    <a:pt x="4817545" y="3428524"/>
-                  </a:lnTo>
-                  <a:lnTo>
-                    <a:pt x="4889168" y="3431823"/>
-                  </a:lnTo>
-                  <a:lnTo>
-                    <a:pt x="4960790" y="3434926"/>
-                  </a:lnTo>
-                  <a:lnTo>
-                    <a:pt x="5032413" y="3437843"/>
-                  </a:lnTo>
-                  <a:lnTo>
-                    <a:pt x="5104035" y="3440586"/>
-                  </a:lnTo>
-                  <a:lnTo>
-                    <a:pt x="5175658" y="3443165"/>
-                  </a:lnTo>
-                  <a:lnTo>
-                    <a:pt x="5247281" y="3445589"/>
-                  </a:lnTo>
-                  <a:lnTo>
-                    <a:pt x="5318903" y="3447869"/>
-                  </a:lnTo>
-                  <a:lnTo>
-                    <a:pt x="5390526" y="3450013"/>
-                  </a:lnTo>
-                  <a:lnTo>
-                    <a:pt x="5462148" y="3452029"/>
+                    <a:pt x="18500" y="20666"/>
+                  </a:lnTo>
+                  <a:lnTo>
+                    <a:pt x="88844" y="94550"/>
+                  </a:lnTo>
+                  <a:lnTo>
+                    <a:pt x="159189" y="164020"/>
+                  </a:lnTo>
+                  <a:lnTo>
+                    <a:pt x="229533" y="229339"/>
+                  </a:lnTo>
+                  <a:lnTo>
+                    <a:pt x="299878" y="290755"/>
+                  </a:lnTo>
+                  <a:lnTo>
+                    <a:pt x="370222" y="348501"/>
+                  </a:lnTo>
+                  <a:lnTo>
+                    <a:pt x="440567" y="402797"/>
+                  </a:lnTo>
+                  <a:lnTo>
+                    <a:pt x="510911" y="453849"/>
+                  </a:lnTo>
+                  <a:lnTo>
+                    <a:pt x="581256" y="501850"/>
+                  </a:lnTo>
+                  <a:lnTo>
+                    <a:pt x="651600" y="546983"/>
+                  </a:lnTo>
+                  <a:lnTo>
+                    <a:pt x="721945" y="589420"/>
+                  </a:lnTo>
+                  <a:lnTo>
+                    <a:pt x="792289" y="629320"/>
+                  </a:lnTo>
+                  <a:lnTo>
+                    <a:pt x="862634" y="666837"/>
+                  </a:lnTo>
+                  <a:lnTo>
+                    <a:pt x="932978" y="702112"/>
+                  </a:lnTo>
+                  <a:lnTo>
+                    <a:pt x="1003323" y="735279"/>
+                  </a:lnTo>
+                  <a:lnTo>
+                    <a:pt x="1073667" y="766465"/>
+                  </a:lnTo>
+                  <a:lnTo>
+                    <a:pt x="1144012" y="795787"/>
+                  </a:lnTo>
+                  <a:lnTo>
+                    <a:pt x="1214356" y="823357"/>
+                  </a:lnTo>
+                  <a:lnTo>
+                    <a:pt x="1284701" y="849280"/>
+                  </a:lnTo>
+                  <a:lnTo>
+                    <a:pt x="1355045" y="873653"/>
+                  </a:lnTo>
+                  <a:lnTo>
+                    <a:pt x="1425390" y="896571"/>
+                  </a:lnTo>
+                  <a:lnTo>
+                    <a:pt x="1495734" y="918119"/>
+                  </a:lnTo>
+                  <a:lnTo>
+                    <a:pt x="1566079" y="938380"/>
+                  </a:lnTo>
+                  <a:lnTo>
+                    <a:pt x="1636423" y="957430"/>
+                  </a:lnTo>
+                  <a:lnTo>
+                    <a:pt x="1706768" y="975341"/>
+                  </a:lnTo>
+                  <a:lnTo>
+                    <a:pt x="1777112" y="992183"/>
+                  </a:lnTo>
+                  <a:lnTo>
+                    <a:pt x="1847457" y="1008018"/>
+                  </a:lnTo>
+                  <a:lnTo>
+                    <a:pt x="1917801" y="1022907"/>
+                  </a:lnTo>
+                  <a:lnTo>
+                    <a:pt x="1988146" y="1036906"/>
+                  </a:lnTo>
+                  <a:lnTo>
+                    <a:pt x="2058490" y="1050069"/>
+                  </a:lnTo>
+                  <a:lnTo>
+                    <a:pt x="2128835" y="1062446"/>
+                  </a:lnTo>
+                  <a:lnTo>
+                    <a:pt x="2199179" y="1074083"/>
+                  </a:lnTo>
+                  <a:lnTo>
+                    <a:pt x="2269524" y="1085024"/>
+                  </a:lnTo>
+                  <a:lnTo>
+                    <a:pt x="2339868" y="1095312"/>
+                  </a:lnTo>
+                  <a:lnTo>
+                    <a:pt x="2410213" y="1104985"/>
+                  </a:lnTo>
+                  <a:lnTo>
+                    <a:pt x="2480557" y="1114080"/>
+                  </a:lnTo>
+                  <a:lnTo>
+                    <a:pt x="2550902" y="1122632"/>
+                  </a:lnTo>
+                  <a:lnTo>
+                    <a:pt x="2621246" y="1130673"/>
+                  </a:lnTo>
+                  <a:lnTo>
+                    <a:pt x="2691591" y="1138233"/>
+                  </a:lnTo>
+                  <a:lnTo>
+                    <a:pt x="2761935" y="1145341"/>
+                  </a:lnTo>
+                  <a:lnTo>
+                    <a:pt x="2832280" y="1152025"/>
+                  </a:lnTo>
+                  <a:lnTo>
+                    <a:pt x="2902624" y="1158310"/>
+                  </a:lnTo>
+                  <a:lnTo>
+                    <a:pt x="2972969" y="1164219"/>
+                  </a:lnTo>
+                  <a:lnTo>
+                    <a:pt x="3043313" y="1169774"/>
+                  </a:lnTo>
+                  <a:lnTo>
+                    <a:pt x="3113658" y="1174998"/>
+                  </a:lnTo>
+                  <a:lnTo>
+                    <a:pt x="3184002" y="1179910"/>
+                  </a:lnTo>
+                  <a:lnTo>
+                    <a:pt x="3254347" y="1184528"/>
+                  </a:lnTo>
+                  <a:lnTo>
+                    <a:pt x="3324691" y="1188871"/>
+                  </a:lnTo>
+                  <a:lnTo>
+                    <a:pt x="3395036" y="1192953"/>
+                  </a:lnTo>
+                  <a:lnTo>
+                    <a:pt x="3465380" y="1196792"/>
+                  </a:lnTo>
+                  <a:lnTo>
+                    <a:pt x="3535725" y="1200402"/>
+                  </a:lnTo>
+                  <a:lnTo>
+                    <a:pt x="3606069" y="1203796"/>
+                  </a:lnTo>
+                  <a:lnTo>
+                    <a:pt x="3676413" y="1206987"/>
+                  </a:lnTo>
+                  <a:lnTo>
+                    <a:pt x="3746758" y="1209987"/>
+                  </a:lnTo>
+                  <a:lnTo>
+                    <a:pt x="3817102" y="1212808"/>
+                  </a:lnTo>
+                  <a:lnTo>
+                    <a:pt x="3887447" y="1215461"/>
+                  </a:lnTo>
+                  <a:lnTo>
+                    <a:pt x="3957791" y="1217955"/>
+                  </a:lnTo>
+                  <a:lnTo>
+                    <a:pt x="4028136" y="1220300"/>
+                  </a:lnTo>
+                  <a:lnTo>
+                    <a:pt x="4098480" y="1222505"/>
+                  </a:lnTo>
+                  <a:lnTo>
+                    <a:pt x="4168825" y="1224578"/>
+                  </a:lnTo>
+                  <a:lnTo>
+                    <a:pt x="4239169" y="1226527"/>
+                  </a:lnTo>
+                  <a:lnTo>
+                    <a:pt x="4309514" y="1228360"/>
+                  </a:lnTo>
+                  <a:lnTo>
+                    <a:pt x="4379858" y="1230084"/>
+                  </a:lnTo>
+                  <a:lnTo>
+                    <a:pt x="4450203" y="1231704"/>
+                  </a:lnTo>
+                  <a:lnTo>
+                    <a:pt x="4520547" y="1233227"/>
+                  </a:lnTo>
+                  <a:lnTo>
+                    <a:pt x="4590892" y="1234660"/>
+                  </a:lnTo>
+                  <a:lnTo>
+                    <a:pt x="4661236" y="1236007"/>
+                  </a:lnTo>
+                  <a:lnTo>
+                    <a:pt x="4731581" y="1237273"/>
+                  </a:lnTo>
+                  <a:lnTo>
+                    <a:pt x="4801925" y="1238464"/>
+                  </a:lnTo>
+                  <a:lnTo>
+                    <a:pt x="4872270" y="1239584"/>
+                  </a:lnTo>
+                  <a:lnTo>
+                    <a:pt x="4942614" y="1240636"/>
+                  </a:lnTo>
+                  <a:lnTo>
+                    <a:pt x="5012959" y="1241626"/>
+                  </a:lnTo>
+                  <a:lnTo>
+                    <a:pt x="5083303" y="1242557"/>
+                  </a:lnTo>
+                  <a:lnTo>
+                    <a:pt x="5153648" y="1243432"/>
+                  </a:lnTo>
+                  <a:lnTo>
+                    <a:pt x="5223992" y="1244255"/>
+                  </a:lnTo>
+                  <a:lnTo>
+                    <a:pt x="5294337" y="1245028"/>
+                  </a:lnTo>
+                  <a:lnTo>
+                    <a:pt x="5364681" y="1245756"/>
                   </a:lnTo>
                 </a:path>
               </a:pathLst>
@@ -4313,27 +4348,27 @@
         </p:sp>
         <p:sp>
           <p:nvSpPr>
-            <p:cNvPr id="24" name="pl24"/>
+            <p:cNvPr id="25" name="pl25"/>
             <p:cNvSpPr/>
             <p:nvPr/>
           </p:nvSpPr>
           <p:spPr>
             <a:xfrm>
-              <a:off x="817517" y="4727786"/>
-              <a:ext cx="7799693" cy="0"/>
+              <a:off x="887106" y="3100960"/>
+              <a:ext cx="7660515" cy="0"/>
             </a:xfrm>
             <a:custGeom>
               <a:avLst/>
               <a:pathLst>
-                <a:path w="7799693" h="0">
+                <a:path w="7660515" h="0">
                   <a:moveTo>
                     <a:pt x="0" y="0"/>
                   </a:moveTo>
                   <a:lnTo>
-                    <a:pt x="7799693" y="0"/>
-                  </a:lnTo>
-                  <a:lnTo>
-                    <a:pt x="7799693" y="0"/>
+                    <a:pt x="7660515" y="0"/>
+                  </a:lnTo>
+                  <a:lnTo>
+                    <a:pt x="7660515" y="0"/>
                   </a:lnTo>
                 </a:path>
               </a:pathLst>
@@ -4356,21 +4391,21 @@
         </p:sp>
         <p:sp>
           <p:nvSpPr>
-            <p:cNvPr id="25" name="pl25"/>
+            <p:cNvPr id="26" name="pl26"/>
             <p:cNvSpPr/>
             <p:nvPr/>
           </p:nvSpPr>
           <p:spPr>
             <a:xfrm>
-              <a:off x="4468386" y="2073503"/>
-              <a:ext cx="0" cy="3649639"/>
+              <a:off x="4472829" y="2143092"/>
+              <a:ext cx="0" cy="1317069"/>
             </a:xfrm>
             <a:custGeom>
               <a:avLst/>
               <a:pathLst>
-                <a:path w="0" h="3649639">
+                <a:path w="0" h="1317069">
                   <a:moveTo>
-                    <a:pt x="0" y="3649639"/>
+                    <a:pt x="0" y="1317069"/>
                   </a:moveTo>
                   <a:lnTo>
                     <a:pt x="0" y="0"/>
@@ -4399,13 +4434,13 @@
         </p:sp>
         <p:sp>
           <p:nvSpPr>
-            <p:cNvPr id="26" name="tx26"/>
+            <p:cNvPr id="27" name="tx27"/>
             <p:cNvSpPr/>
             <p:nvPr/>
           </p:nvSpPr>
           <p:spPr>
             <a:xfrm>
-              <a:off x="692708" y="5517199"/>
+              <a:off x="762297" y="3360243"/>
               <a:ext cx="62179" cy="80101"/>
             </a:xfrm>
             <a:prstGeom prst="rect">
@@ -4445,13 +4480,13 @@
         </p:sp>
         <p:sp>
           <p:nvSpPr>
-            <p:cNvPr id="27" name="tx27"/>
+            <p:cNvPr id="28" name="tx28"/>
             <p:cNvSpPr/>
             <p:nvPr/>
           </p:nvSpPr>
           <p:spPr>
             <a:xfrm>
-              <a:off x="692708" y="4687735"/>
+              <a:off x="762297" y="3060909"/>
               <a:ext cx="62179" cy="80101"/>
             </a:xfrm>
             <a:prstGeom prst="rect">
@@ -4491,13 +4526,13 @@
         </p:sp>
         <p:sp>
           <p:nvSpPr>
-            <p:cNvPr id="28" name="tx28"/>
+            <p:cNvPr id="29" name="tx29"/>
             <p:cNvSpPr/>
             <p:nvPr/>
           </p:nvSpPr>
           <p:spPr>
             <a:xfrm>
-              <a:off x="692708" y="3858272"/>
+              <a:off x="762297" y="2761575"/>
               <a:ext cx="62179" cy="80101"/>
             </a:xfrm>
             <a:prstGeom prst="rect">
@@ -4537,13 +4572,13 @@
         </p:sp>
         <p:sp>
           <p:nvSpPr>
-            <p:cNvPr id="29" name="tx29"/>
+            <p:cNvPr id="30" name="tx30"/>
             <p:cNvSpPr/>
             <p:nvPr/>
           </p:nvSpPr>
           <p:spPr>
             <a:xfrm>
-              <a:off x="692708" y="3028808"/>
+              <a:off x="762297" y="2462242"/>
               <a:ext cx="62179" cy="80101"/>
             </a:xfrm>
             <a:prstGeom prst="rect">
@@ -4583,13 +4618,13 @@
         </p:sp>
         <p:sp>
           <p:nvSpPr>
-            <p:cNvPr id="30" name="tx30"/>
+            <p:cNvPr id="31" name="tx31"/>
             <p:cNvSpPr/>
             <p:nvPr/>
           </p:nvSpPr>
           <p:spPr>
             <a:xfrm>
-              <a:off x="692708" y="2199345"/>
+              <a:off x="762297" y="2162908"/>
               <a:ext cx="62179" cy="80101"/>
             </a:xfrm>
             <a:prstGeom prst="rect">
@@ -4629,13 +4664,13 @@
         </p:sp>
         <p:sp>
           <p:nvSpPr>
-            <p:cNvPr id="31" name="tx31"/>
+            <p:cNvPr id="32" name="tx32"/>
             <p:cNvSpPr/>
             <p:nvPr/>
           </p:nvSpPr>
           <p:spPr>
             <a:xfrm>
-              <a:off x="2478335" y="5785772"/>
+              <a:off x="2516846" y="3522791"/>
               <a:ext cx="161574" cy="80101"/>
             </a:xfrm>
             <a:prstGeom prst="rect">
@@ -4675,13 +4710,13 @@
         </p:sp>
         <p:sp>
           <p:nvSpPr>
-            <p:cNvPr id="32" name="tx32"/>
+            <p:cNvPr id="33" name="tx33"/>
             <p:cNvSpPr/>
             <p:nvPr/>
           </p:nvSpPr>
           <p:spPr>
             <a:xfrm>
-              <a:off x="4582608" y="5785772"/>
+              <a:off x="4584458" y="3522791"/>
               <a:ext cx="62179" cy="80101"/>
             </a:xfrm>
             <a:prstGeom prst="rect">
@@ -4721,13 +4756,13 @@
         </p:sp>
         <p:sp>
           <p:nvSpPr>
-            <p:cNvPr id="33" name="tx33"/>
+            <p:cNvPr id="34" name="tx34"/>
             <p:cNvSpPr/>
             <p:nvPr/>
           </p:nvSpPr>
           <p:spPr>
             <a:xfrm>
-              <a:off x="6606094" y="5785772"/>
+              <a:off x="6571282" y="3522791"/>
               <a:ext cx="124358" cy="80101"/>
             </a:xfrm>
             <a:prstGeom prst="rect">
@@ -4767,13 +4802,13 @@
         </p:sp>
         <p:sp>
           <p:nvSpPr>
-            <p:cNvPr id="34" name="tx34"/>
+            <p:cNvPr id="35" name="tx35"/>
             <p:cNvSpPr/>
             <p:nvPr/>
           </p:nvSpPr>
           <p:spPr>
             <a:xfrm>
-              <a:off x="2928340" y="5925448"/>
+              <a:off x="2928340" y="3662467"/>
               <a:ext cx="3578047" cy="100218"/>
             </a:xfrm>
             <a:prstGeom prst="rect">
@@ -4813,13 +4848,13 @@
         </p:sp>
         <p:sp>
           <p:nvSpPr>
-            <p:cNvPr id="35" name="tx35"/>
+            <p:cNvPr id="36" name="tx36"/>
             <p:cNvSpPr/>
             <p:nvPr/>
           </p:nvSpPr>
           <p:spPr>
             <a:xfrm rot="-5400000">
-              <a:off x="68446" y="3848213"/>
+              <a:off x="138035" y="2751517"/>
               <a:ext cx="1016904" cy="100218"/>
             </a:xfrm>
             <a:prstGeom prst="rect">
@@ -4859,13 +4894,13 @@
         </p:sp>
         <p:sp>
           <p:nvSpPr>
-            <p:cNvPr id="36" name="tx36"/>
+            <p:cNvPr id="37" name="tx37"/>
             <p:cNvSpPr/>
             <p:nvPr/>
           </p:nvSpPr>
           <p:spPr>
             <a:xfrm>
-              <a:off x="817517" y="1896563"/>
+              <a:off x="887106" y="1966152"/>
               <a:ext cx="7048926" cy="82021"/>
             </a:xfrm>
             <a:prstGeom prst="rect">
@@ -4905,13 +4940,3491 @@
         </p:sp>
         <p:sp>
           <p:nvSpPr>
-            <p:cNvPr id="37" name="tx37"/>
+            <p:cNvPr id="38" name="tx38"/>
             <p:cNvSpPr/>
             <p:nvPr/>
           </p:nvSpPr>
           <p:spPr>
             <a:xfrm>
-              <a:off x="817517" y="1669789"/>
+              <a:off x="887106" y="1739378"/>
+              <a:ext cx="3732672" cy="120152"/>
+            </a:xfrm>
+            <a:prstGeom prst="rect">
+              <a:avLst/>
+            </a:prstGeom>
+            <a:noFill/>
+          </p:spPr>
+          <p:txBody>
+            <a:bodyPr lIns="0" rIns="0" tIns="0" bIns="0" anchorCtr="1" anchor="ctr" wrap="none"/>
+            <a:lstStyle/>
+            <a:p>
+              <a:pPr algn="l" marL="0" marR="0" indent="0">
+                <a:lnSpc>
+                  <a:spcPts val="1320"/>
+                </a:lnSpc>
+                <a:spcBef>
+                  <a:spcPts val="0"/>
+                </a:spcBef>
+                <a:spcAft>
+                  <a:spcPts val="0"/>
+                </a:spcAft>
+              </a:pPr>
+              <a:r>
+                <a:rPr sz="1320">
+                  <a:solidFill>
+                    <a:srgbClr val="000000">
+                      <a:alpha val="100000"/>
+                    </a:srgbClr>
+                  </a:solidFill>
+                  <a:latin typeface="Helvetica"/>
+                  <a:cs typeface="Helvetica"/>
+                </a:rPr>
+                <a:t>Thrombocytopenia Grade 3 (Carboplatin AUC ≥ 3)</a:t>
+              </a:r>
+            </a:p>
+          </p:txBody>
+        </p:sp>
+        <p:sp>
+          <p:nvSpPr>
+            <p:cNvPr id="39" name="pl39"/>
+            <p:cNvSpPr/>
+            <p:nvPr/>
+          </p:nvSpPr>
+          <p:spPr>
+            <a:xfrm>
+              <a:off x="887106" y="5444019"/>
+              <a:ext cx="7660515" cy="0"/>
+            </a:xfrm>
+            <a:custGeom>
+              <a:avLst/>
+              <a:pathLst>
+                <a:path w="7660515" h="0">
+                  <a:moveTo>
+                    <a:pt x="0" y="0"/>
+                  </a:moveTo>
+                  <a:lnTo>
+                    <a:pt x="7660515" y="0"/>
+                  </a:lnTo>
+                  <a:lnTo>
+                    <a:pt x="7660515" y="0"/>
+                  </a:lnTo>
+                </a:path>
+              </a:pathLst>
+            </a:custGeom>
+            <a:ln w="6775" cap="flat">
+              <a:solidFill>
+                <a:srgbClr val="EBEBEB">
+                  <a:alpha val="100000"/>
+                </a:srgbClr>
+              </a:solidFill>
+              <a:prstDash val="solid"/>
+              <a:round/>
+            </a:ln>
+          </p:spPr>
+          <p:txBody>
+            <a:bodyPr/>
+            <a:lstStyle/>
+            <a:p/>
+          </p:txBody>
+        </p:sp>
+        <p:sp>
+          <p:nvSpPr>
+            <p:cNvPr id="40" name="pl40"/>
+            <p:cNvSpPr/>
+            <p:nvPr/>
+          </p:nvSpPr>
+          <p:spPr>
+            <a:xfrm>
+              <a:off x="887106" y="5144686"/>
+              <a:ext cx="7660515" cy="0"/>
+            </a:xfrm>
+            <a:custGeom>
+              <a:avLst/>
+              <a:pathLst>
+                <a:path w="7660515" h="0">
+                  <a:moveTo>
+                    <a:pt x="0" y="0"/>
+                  </a:moveTo>
+                  <a:lnTo>
+                    <a:pt x="7660515" y="0"/>
+                  </a:lnTo>
+                  <a:lnTo>
+                    <a:pt x="7660515" y="0"/>
+                  </a:lnTo>
+                </a:path>
+              </a:pathLst>
+            </a:custGeom>
+            <a:ln w="6775" cap="flat">
+              <a:solidFill>
+                <a:srgbClr val="EBEBEB">
+                  <a:alpha val="100000"/>
+                </a:srgbClr>
+              </a:solidFill>
+              <a:prstDash val="solid"/>
+              <a:round/>
+            </a:ln>
+          </p:spPr>
+          <p:txBody>
+            <a:bodyPr/>
+            <a:lstStyle/>
+            <a:p/>
+          </p:txBody>
+        </p:sp>
+        <p:sp>
+          <p:nvSpPr>
+            <p:cNvPr id="41" name="pl41"/>
+            <p:cNvSpPr/>
+            <p:nvPr/>
+          </p:nvSpPr>
+          <p:spPr>
+            <a:xfrm>
+              <a:off x="887106" y="4845352"/>
+              <a:ext cx="7660515" cy="0"/>
+            </a:xfrm>
+            <a:custGeom>
+              <a:avLst/>
+              <a:pathLst>
+                <a:path w="7660515" h="0">
+                  <a:moveTo>
+                    <a:pt x="0" y="0"/>
+                  </a:moveTo>
+                  <a:lnTo>
+                    <a:pt x="7660515" y="0"/>
+                  </a:lnTo>
+                  <a:lnTo>
+                    <a:pt x="7660515" y="0"/>
+                  </a:lnTo>
+                </a:path>
+              </a:pathLst>
+            </a:custGeom>
+            <a:ln w="6775" cap="flat">
+              <a:solidFill>
+                <a:srgbClr val="EBEBEB">
+                  <a:alpha val="100000"/>
+                </a:srgbClr>
+              </a:solidFill>
+              <a:prstDash val="solid"/>
+              <a:round/>
+            </a:ln>
+          </p:spPr>
+          <p:txBody>
+            <a:bodyPr/>
+            <a:lstStyle/>
+            <a:p/>
+          </p:txBody>
+        </p:sp>
+        <p:sp>
+          <p:nvSpPr>
+            <p:cNvPr id="42" name="pl42"/>
+            <p:cNvSpPr/>
+            <p:nvPr/>
+          </p:nvSpPr>
+          <p:spPr>
+            <a:xfrm>
+              <a:off x="887106" y="4546018"/>
+              <a:ext cx="7660515" cy="0"/>
+            </a:xfrm>
+            <a:custGeom>
+              <a:avLst/>
+              <a:pathLst>
+                <a:path w="7660515" h="0">
+                  <a:moveTo>
+                    <a:pt x="0" y="0"/>
+                  </a:moveTo>
+                  <a:lnTo>
+                    <a:pt x="7660515" y="0"/>
+                  </a:lnTo>
+                  <a:lnTo>
+                    <a:pt x="7660515" y="0"/>
+                  </a:lnTo>
+                </a:path>
+              </a:pathLst>
+            </a:custGeom>
+            <a:ln w="6775" cap="flat">
+              <a:solidFill>
+                <a:srgbClr val="EBEBEB">
+                  <a:alpha val="100000"/>
+                </a:srgbClr>
+              </a:solidFill>
+              <a:prstDash val="solid"/>
+              <a:round/>
+            </a:ln>
+          </p:spPr>
+          <p:txBody>
+            <a:bodyPr/>
+            <a:lstStyle/>
+            <a:p/>
+          </p:txBody>
+        </p:sp>
+        <p:sp>
+          <p:nvSpPr>
+            <p:cNvPr id="43" name="pl43"/>
+            <p:cNvSpPr/>
+            <p:nvPr/>
+          </p:nvSpPr>
+          <p:spPr>
+            <a:xfrm>
+              <a:off x="983303" y="4336484"/>
+              <a:ext cx="0" cy="1317069"/>
+            </a:xfrm>
+            <a:custGeom>
+              <a:avLst/>
+              <a:pathLst>
+                <a:path w="0" h="1317069">
+                  <a:moveTo>
+                    <a:pt x="0" y="1317069"/>
+                  </a:moveTo>
+                  <a:lnTo>
+                    <a:pt x="0" y="0"/>
+                  </a:lnTo>
+                  <a:lnTo>
+                    <a:pt x="0" y="0"/>
+                  </a:lnTo>
+                </a:path>
+              </a:pathLst>
+            </a:custGeom>
+            <a:ln w="6775" cap="flat">
+              <a:solidFill>
+                <a:srgbClr val="EBEBEB">
+                  <a:alpha val="100000"/>
+                </a:srgbClr>
+              </a:solidFill>
+              <a:prstDash val="solid"/>
+              <a:round/>
+            </a:ln>
+          </p:spPr>
+          <p:txBody>
+            <a:bodyPr/>
+            <a:lstStyle/>
+            <a:p/>
+          </p:txBody>
+        </p:sp>
+        <p:sp>
+          <p:nvSpPr>
+            <p:cNvPr id="44" name="pl44"/>
+            <p:cNvSpPr/>
+            <p:nvPr/>
+          </p:nvSpPr>
+          <p:spPr>
+            <a:xfrm>
+              <a:off x="1790468" y="4336484"/>
+              <a:ext cx="0" cy="1317069"/>
+            </a:xfrm>
+            <a:custGeom>
+              <a:avLst/>
+              <a:pathLst>
+                <a:path w="0" h="1317069">
+                  <a:moveTo>
+                    <a:pt x="0" y="1317069"/>
+                  </a:moveTo>
+                  <a:lnTo>
+                    <a:pt x="0" y="0"/>
+                  </a:lnTo>
+                  <a:lnTo>
+                    <a:pt x="0" y="0"/>
+                  </a:lnTo>
+                </a:path>
+              </a:pathLst>
+            </a:custGeom>
+            <a:ln w="6775" cap="flat">
+              <a:solidFill>
+                <a:srgbClr val="EBEBEB">
+                  <a:alpha val="100000"/>
+                </a:srgbClr>
+              </a:solidFill>
+              <a:prstDash val="solid"/>
+              <a:round/>
+            </a:ln>
+          </p:spPr>
+          <p:txBody>
+            <a:bodyPr/>
+            <a:lstStyle/>
+            <a:p/>
+          </p:txBody>
+        </p:sp>
+        <p:sp>
+          <p:nvSpPr>
+            <p:cNvPr id="45" name="pl45"/>
+            <p:cNvSpPr/>
+            <p:nvPr/>
+          </p:nvSpPr>
+          <p:spPr>
+            <a:xfrm>
+              <a:off x="2597634" y="4336484"/>
+              <a:ext cx="0" cy="1317069"/>
+            </a:xfrm>
+            <a:custGeom>
+              <a:avLst/>
+              <a:pathLst>
+                <a:path w="0" h="1317069">
+                  <a:moveTo>
+                    <a:pt x="0" y="1317069"/>
+                  </a:moveTo>
+                  <a:lnTo>
+                    <a:pt x="0" y="0"/>
+                  </a:lnTo>
+                  <a:lnTo>
+                    <a:pt x="0" y="0"/>
+                  </a:lnTo>
+                </a:path>
+              </a:pathLst>
+            </a:custGeom>
+            <a:ln w="6775" cap="flat">
+              <a:solidFill>
+                <a:srgbClr val="EBEBEB">
+                  <a:alpha val="100000"/>
+                </a:srgbClr>
+              </a:solidFill>
+              <a:prstDash val="solid"/>
+              <a:round/>
+            </a:ln>
+          </p:spPr>
+          <p:txBody>
+            <a:bodyPr/>
+            <a:lstStyle/>
+            <a:p/>
+          </p:txBody>
+        </p:sp>
+        <p:sp>
+          <p:nvSpPr>
+            <p:cNvPr id="46" name="pl46"/>
+            <p:cNvSpPr/>
+            <p:nvPr/>
+          </p:nvSpPr>
+          <p:spPr>
+            <a:xfrm>
+              <a:off x="3404799" y="4336484"/>
+              <a:ext cx="0" cy="1317069"/>
+            </a:xfrm>
+            <a:custGeom>
+              <a:avLst/>
+              <a:pathLst>
+                <a:path w="0" h="1317069">
+                  <a:moveTo>
+                    <a:pt x="0" y="1317069"/>
+                  </a:moveTo>
+                  <a:lnTo>
+                    <a:pt x="0" y="0"/>
+                  </a:lnTo>
+                  <a:lnTo>
+                    <a:pt x="0" y="0"/>
+                  </a:lnTo>
+                </a:path>
+              </a:pathLst>
+            </a:custGeom>
+            <a:ln w="6775" cap="flat">
+              <a:solidFill>
+                <a:srgbClr val="EBEBEB">
+                  <a:alpha val="100000"/>
+                </a:srgbClr>
+              </a:solidFill>
+              <a:prstDash val="solid"/>
+              <a:round/>
+            </a:ln>
+          </p:spPr>
+          <p:txBody>
+            <a:bodyPr/>
+            <a:lstStyle/>
+            <a:p/>
+          </p:txBody>
+        </p:sp>
+        <p:sp>
+          <p:nvSpPr>
+            <p:cNvPr id="47" name="pl47"/>
+            <p:cNvSpPr/>
+            <p:nvPr/>
+          </p:nvSpPr>
+          <p:spPr>
+            <a:xfrm>
+              <a:off x="4211965" y="4336484"/>
+              <a:ext cx="0" cy="1317069"/>
+            </a:xfrm>
+            <a:custGeom>
+              <a:avLst/>
+              <a:pathLst>
+                <a:path w="0" h="1317069">
+                  <a:moveTo>
+                    <a:pt x="0" y="1317069"/>
+                  </a:moveTo>
+                  <a:lnTo>
+                    <a:pt x="0" y="0"/>
+                  </a:lnTo>
+                  <a:lnTo>
+                    <a:pt x="0" y="0"/>
+                  </a:lnTo>
+                </a:path>
+              </a:pathLst>
+            </a:custGeom>
+            <a:ln w="6775" cap="flat">
+              <a:solidFill>
+                <a:srgbClr val="EBEBEB">
+                  <a:alpha val="100000"/>
+                </a:srgbClr>
+              </a:solidFill>
+              <a:prstDash val="solid"/>
+              <a:round/>
+            </a:ln>
+          </p:spPr>
+          <p:txBody>
+            <a:bodyPr/>
+            <a:lstStyle/>
+            <a:p/>
+          </p:txBody>
+        </p:sp>
+        <p:sp>
+          <p:nvSpPr>
+            <p:cNvPr id="48" name="pl48"/>
+            <p:cNvSpPr/>
+            <p:nvPr/>
+          </p:nvSpPr>
+          <p:spPr>
+            <a:xfrm>
+              <a:off x="5019130" y="4336484"/>
+              <a:ext cx="0" cy="1317069"/>
+            </a:xfrm>
+            <a:custGeom>
+              <a:avLst/>
+              <a:pathLst>
+                <a:path w="0" h="1317069">
+                  <a:moveTo>
+                    <a:pt x="0" y="1317069"/>
+                  </a:moveTo>
+                  <a:lnTo>
+                    <a:pt x="0" y="0"/>
+                  </a:lnTo>
+                  <a:lnTo>
+                    <a:pt x="0" y="0"/>
+                  </a:lnTo>
+                </a:path>
+              </a:pathLst>
+            </a:custGeom>
+            <a:ln w="6775" cap="flat">
+              <a:solidFill>
+                <a:srgbClr val="EBEBEB">
+                  <a:alpha val="100000"/>
+                </a:srgbClr>
+              </a:solidFill>
+              <a:prstDash val="solid"/>
+              <a:round/>
+            </a:ln>
+          </p:spPr>
+          <p:txBody>
+            <a:bodyPr/>
+            <a:lstStyle/>
+            <a:p/>
+          </p:txBody>
+        </p:sp>
+        <p:sp>
+          <p:nvSpPr>
+            <p:cNvPr id="49" name="pl49"/>
+            <p:cNvSpPr/>
+            <p:nvPr/>
+          </p:nvSpPr>
+          <p:spPr>
+            <a:xfrm>
+              <a:off x="5826296" y="4336484"/>
+              <a:ext cx="0" cy="1317069"/>
+            </a:xfrm>
+            <a:custGeom>
+              <a:avLst/>
+              <a:pathLst>
+                <a:path w="0" h="1317069">
+                  <a:moveTo>
+                    <a:pt x="0" y="1317069"/>
+                  </a:moveTo>
+                  <a:lnTo>
+                    <a:pt x="0" y="0"/>
+                  </a:lnTo>
+                  <a:lnTo>
+                    <a:pt x="0" y="0"/>
+                  </a:lnTo>
+                </a:path>
+              </a:pathLst>
+            </a:custGeom>
+            <a:ln w="6775" cap="flat">
+              <a:solidFill>
+                <a:srgbClr val="EBEBEB">
+                  <a:alpha val="100000"/>
+                </a:srgbClr>
+              </a:solidFill>
+              <a:prstDash val="solid"/>
+              <a:round/>
+            </a:ln>
+          </p:spPr>
+          <p:txBody>
+            <a:bodyPr/>
+            <a:lstStyle/>
+            <a:p/>
+          </p:txBody>
+        </p:sp>
+        <p:sp>
+          <p:nvSpPr>
+            <p:cNvPr id="50" name="pl50"/>
+            <p:cNvSpPr/>
+            <p:nvPr/>
+          </p:nvSpPr>
+          <p:spPr>
+            <a:xfrm>
+              <a:off x="6633461" y="4336484"/>
+              <a:ext cx="0" cy="1317069"/>
+            </a:xfrm>
+            <a:custGeom>
+              <a:avLst/>
+              <a:pathLst>
+                <a:path w="0" h="1317069">
+                  <a:moveTo>
+                    <a:pt x="0" y="1317069"/>
+                  </a:moveTo>
+                  <a:lnTo>
+                    <a:pt x="0" y="0"/>
+                  </a:lnTo>
+                  <a:lnTo>
+                    <a:pt x="0" y="0"/>
+                  </a:lnTo>
+                </a:path>
+              </a:pathLst>
+            </a:custGeom>
+            <a:ln w="6775" cap="flat">
+              <a:solidFill>
+                <a:srgbClr val="EBEBEB">
+                  <a:alpha val="100000"/>
+                </a:srgbClr>
+              </a:solidFill>
+              <a:prstDash val="solid"/>
+              <a:round/>
+            </a:ln>
+          </p:spPr>
+          <p:txBody>
+            <a:bodyPr/>
+            <a:lstStyle/>
+            <a:p/>
+          </p:txBody>
+        </p:sp>
+        <p:sp>
+          <p:nvSpPr>
+            <p:cNvPr id="51" name="pl51"/>
+            <p:cNvSpPr/>
+            <p:nvPr/>
+          </p:nvSpPr>
+          <p:spPr>
+            <a:xfrm>
+              <a:off x="7440627" y="4336484"/>
+              <a:ext cx="0" cy="1317069"/>
+            </a:xfrm>
+            <a:custGeom>
+              <a:avLst/>
+              <a:pathLst>
+                <a:path w="0" h="1317069">
+                  <a:moveTo>
+                    <a:pt x="0" y="1317069"/>
+                  </a:moveTo>
+                  <a:lnTo>
+                    <a:pt x="0" y="0"/>
+                  </a:lnTo>
+                  <a:lnTo>
+                    <a:pt x="0" y="0"/>
+                  </a:lnTo>
+                </a:path>
+              </a:pathLst>
+            </a:custGeom>
+            <a:ln w="6775" cap="flat">
+              <a:solidFill>
+                <a:srgbClr val="EBEBEB">
+                  <a:alpha val="100000"/>
+                </a:srgbClr>
+              </a:solidFill>
+              <a:prstDash val="solid"/>
+              <a:round/>
+            </a:ln>
+          </p:spPr>
+          <p:txBody>
+            <a:bodyPr/>
+            <a:lstStyle/>
+            <a:p/>
+          </p:txBody>
+        </p:sp>
+        <p:sp>
+          <p:nvSpPr>
+            <p:cNvPr id="52" name="pl52"/>
+            <p:cNvSpPr/>
+            <p:nvPr/>
+          </p:nvSpPr>
+          <p:spPr>
+            <a:xfrm>
+              <a:off x="8247792" y="4336484"/>
+              <a:ext cx="0" cy="1317069"/>
+            </a:xfrm>
+            <a:custGeom>
+              <a:avLst/>
+              <a:pathLst>
+                <a:path w="0" h="1317069">
+                  <a:moveTo>
+                    <a:pt x="0" y="1317069"/>
+                  </a:moveTo>
+                  <a:lnTo>
+                    <a:pt x="0" y="0"/>
+                  </a:lnTo>
+                  <a:lnTo>
+                    <a:pt x="0" y="0"/>
+                  </a:lnTo>
+                </a:path>
+              </a:pathLst>
+            </a:custGeom>
+            <a:ln w="6775" cap="flat">
+              <a:solidFill>
+                <a:srgbClr val="EBEBEB">
+                  <a:alpha val="100000"/>
+                </a:srgbClr>
+              </a:solidFill>
+              <a:prstDash val="solid"/>
+              <a:round/>
+            </a:ln>
+          </p:spPr>
+          <p:txBody>
+            <a:bodyPr/>
+            <a:lstStyle/>
+            <a:p/>
+          </p:txBody>
+        </p:sp>
+        <p:sp>
+          <p:nvSpPr>
+            <p:cNvPr id="53" name="pl53"/>
+            <p:cNvSpPr/>
+            <p:nvPr/>
+          </p:nvSpPr>
+          <p:spPr>
+            <a:xfrm>
+              <a:off x="887106" y="5593686"/>
+              <a:ext cx="7660515" cy="0"/>
+            </a:xfrm>
+            <a:custGeom>
+              <a:avLst/>
+              <a:pathLst>
+                <a:path w="7660515" h="0">
+                  <a:moveTo>
+                    <a:pt x="0" y="0"/>
+                  </a:moveTo>
+                  <a:lnTo>
+                    <a:pt x="7660515" y="0"/>
+                  </a:lnTo>
+                  <a:lnTo>
+                    <a:pt x="7660515" y="0"/>
+                  </a:lnTo>
+                </a:path>
+              </a:pathLst>
+            </a:custGeom>
+            <a:ln w="13550" cap="flat">
+              <a:solidFill>
+                <a:srgbClr val="EBEBEB">
+                  <a:alpha val="100000"/>
+                </a:srgbClr>
+              </a:solidFill>
+              <a:prstDash val="solid"/>
+              <a:round/>
+            </a:ln>
+          </p:spPr>
+          <p:txBody>
+            <a:bodyPr/>
+            <a:lstStyle/>
+            <a:p/>
+          </p:txBody>
+        </p:sp>
+        <p:sp>
+          <p:nvSpPr>
+            <p:cNvPr id="54" name="pl54"/>
+            <p:cNvSpPr/>
+            <p:nvPr/>
+          </p:nvSpPr>
+          <p:spPr>
+            <a:xfrm>
+              <a:off x="887106" y="5294352"/>
+              <a:ext cx="7660515" cy="0"/>
+            </a:xfrm>
+            <a:custGeom>
+              <a:avLst/>
+              <a:pathLst>
+                <a:path w="7660515" h="0">
+                  <a:moveTo>
+                    <a:pt x="0" y="0"/>
+                  </a:moveTo>
+                  <a:lnTo>
+                    <a:pt x="7660515" y="0"/>
+                  </a:lnTo>
+                  <a:lnTo>
+                    <a:pt x="7660515" y="0"/>
+                  </a:lnTo>
+                </a:path>
+              </a:pathLst>
+            </a:custGeom>
+            <a:ln w="13550" cap="flat">
+              <a:solidFill>
+                <a:srgbClr val="EBEBEB">
+                  <a:alpha val="100000"/>
+                </a:srgbClr>
+              </a:solidFill>
+              <a:prstDash val="solid"/>
+              <a:round/>
+            </a:ln>
+          </p:spPr>
+          <p:txBody>
+            <a:bodyPr/>
+            <a:lstStyle/>
+            <a:p/>
+          </p:txBody>
+        </p:sp>
+        <p:sp>
+          <p:nvSpPr>
+            <p:cNvPr id="55" name="pl55"/>
+            <p:cNvSpPr/>
+            <p:nvPr/>
+          </p:nvSpPr>
+          <p:spPr>
+            <a:xfrm>
+              <a:off x="887106" y="4995019"/>
+              <a:ext cx="7660515" cy="0"/>
+            </a:xfrm>
+            <a:custGeom>
+              <a:avLst/>
+              <a:pathLst>
+                <a:path w="7660515" h="0">
+                  <a:moveTo>
+                    <a:pt x="0" y="0"/>
+                  </a:moveTo>
+                  <a:lnTo>
+                    <a:pt x="7660515" y="0"/>
+                  </a:lnTo>
+                  <a:lnTo>
+                    <a:pt x="7660515" y="0"/>
+                  </a:lnTo>
+                </a:path>
+              </a:pathLst>
+            </a:custGeom>
+            <a:ln w="13550" cap="flat">
+              <a:solidFill>
+                <a:srgbClr val="EBEBEB">
+                  <a:alpha val="100000"/>
+                </a:srgbClr>
+              </a:solidFill>
+              <a:prstDash val="solid"/>
+              <a:round/>
+            </a:ln>
+          </p:spPr>
+          <p:txBody>
+            <a:bodyPr/>
+            <a:lstStyle/>
+            <a:p/>
+          </p:txBody>
+        </p:sp>
+        <p:sp>
+          <p:nvSpPr>
+            <p:cNvPr id="56" name="pl56"/>
+            <p:cNvSpPr/>
+            <p:nvPr/>
+          </p:nvSpPr>
+          <p:spPr>
+            <a:xfrm>
+              <a:off x="887106" y="4695685"/>
+              <a:ext cx="7660515" cy="0"/>
+            </a:xfrm>
+            <a:custGeom>
+              <a:avLst/>
+              <a:pathLst>
+                <a:path w="7660515" h="0">
+                  <a:moveTo>
+                    <a:pt x="0" y="0"/>
+                  </a:moveTo>
+                  <a:lnTo>
+                    <a:pt x="7660515" y="0"/>
+                  </a:lnTo>
+                  <a:lnTo>
+                    <a:pt x="7660515" y="0"/>
+                  </a:lnTo>
+                </a:path>
+              </a:pathLst>
+            </a:custGeom>
+            <a:ln w="13550" cap="flat">
+              <a:solidFill>
+                <a:srgbClr val="EBEBEB">
+                  <a:alpha val="100000"/>
+                </a:srgbClr>
+              </a:solidFill>
+              <a:prstDash val="solid"/>
+              <a:round/>
+            </a:ln>
+          </p:spPr>
+          <p:txBody>
+            <a:bodyPr/>
+            <a:lstStyle/>
+            <a:p/>
+          </p:txBody>
+        </p:sp>
+        <p:sp>
+          <p:nvSpPr>
+            <p:cNvPr id="57" name="pl57"/>
+            <p:cNvSpPr/>
+            <p:nvPr/>
+          </p:nvSpPr>
+          <p:spPr>
+            <a:xfrm>
+              <a:off x="887106" y="4396351"/>
+              <a:ext cx="7660515" cy="0"/>
+            </a:xfrm>
+            <a:custGeom>
+              <a:avLst/>
+              <a:pathLst>
+                <a:path w="7660515" h="0">
+                  <a:moveTo>
+                    <a:pt x="0" y="0"/>
+                  </a:moveTo>
+                  <a:lnTo>
+                    <a:pt x="7660515" y="0"/>
+                  </a:lnTo>
+                  <a:lnTo>
+                    <a:pt x="7660515" y="0"/>
+                  </a:lnTo>
+                </a:path>
+              </a:pathLst>
+            </a:custGeom>
+            <a:ln w="13550" cap="flat">
+              <a:solidFill>
+                <a:srgbClr val="EBEBEB">
+                  <a:alpha val="100000"/>
+                </a:srgbClr>
+              </a:solidFill>
+              <a:prstDash val="solid"/>
+              <a:round/>
+            </a:ln>
+          </p:spPr>
+          <p:txBody>
+            <a:bodyPr/>
+            <a:lstStyle/>
+            <a:p/>
+          </p:txBody>
+        </p:sp>
+        <p:sp>
+          <p:nvSpPr>
+            <p:cNvPr id="58" name="pl58"/>
+            <p:cNvSpPr/>
+            <p:nvPr/>
+          </p:nvSpPr>
+          <p:spPr>
+            <a:xfrm>
+              <a:off x="1386885" y="4336484"/>
+              <a:ext cx="0" cy="1317069"/>
+            </a:xfrm>
+            <a:custGeom>
+              <a:avLst/>
+              <a:pathLst>
+                <a:path w="0" h="1317069">
+                  <a:moveTo>
+                    <a:pt x="0" y="1317069"/>
+                  </a:moveTo>
+                  <a:lnTo>
+                    <a:pt x="0" y="0"/>
+                  </a:lnTo>
+                  <a:lnTo>
+                    <a:pt x="0" y="0"/>
+                  </a:lnTo>
+                </a:path>
+              </a:pathLst>
+            </a:custGeom>
+            <a:ln w="13550" cap="flat">
+              <a:solidFill>
+                <a:srgbClr val="EBEBEB">
+                  <a:alpha val="100000"/>
+                </a:srgbClr>
+              </a:solidFill>
+              <a:prstDash val="solid"/>
+              <a:round/>
+            </a:ln>
+          </p:spPr>
+          <p:txBody>
+            <a:bodyPr/>
+            <a:lstStyle/>
+            <a:p/>
+          </p:txBody>
+        </p:sp>
+        <p:sp>
+          <p:nvSpPr>
+            <p:cNvPr id="59" name="pl59"/>
+            <p:cNvSpPr/>
+            <p:nvPr/>
+          </p:nvSpPr>
+          <p:spPr>
+            <a:xfrm>
+              <a:off x="2194051" y="4336484"/>
+              <a:ext cx="0" cy="1317069"/>
+            </a:xfrm>
+            <a:custGeom>
+              <a:avLst/>
+              <a:pathLst>
+                <a:path w="0" h="1317069">
+                  <a:moveTo>
+                    <a:pt x="0" y="1317069"/>
+                  </a:moveTo>
+                  <a:lnTo>
+                    <a:pt x="0" y="0"/>
+                  </a:lnTo>
+                  <a:lnTo>
+                    <a:pt x="0" y="0"/>
+                  </a:lnTo>
+                </a:path>
+              </a:pathLst>
+            </a:custGeom>
+            <a:ln w="13550" cap="flat">
+              <a:solidFill>
+                <a:srgbClr val="EBEBEB">
+                  <a:alpha val="100000"/>
+                </a:srgbClr>
+              </a:solidFill>
+              <a:prstDash val="solid"/>
+              <a:round/>
+            </a:ln>
+          </p:spPr>
+          <p:txBody>
+            <a:bodyPr/>
+            <a:lstStyle/>
+            <a:p/>
+          </p:txBody>
+        </p:sp>
+        <p:sp>
+          <p:nvSpPr>
+            <p:cNvPr id="60" name="pl60"/>
+            <p:cNvSpPr/>
+            <p:nvPr/>
+          </p:nvSpPr>
+          <p:spPr>
+            <a:xfrm>
+              <a:off x="3001216" y="4336484"/>
+              <a:ext cx="0" cy="1317069"/>
+            </a:xfrm>
+            <a:custGeom>
+              <a:avLst/>
+              <a:pathLst>
+                <a:path w="0" h="1317069">
+                  <a:moveTo>
+                    <a:pt x="0" y="1317069"/>
+                  </a:moveTo>
+                  <a:lnTo>
+                    <a:pt x="0" y="0"/>
+                  </a:lnTo>
+                  <a:lnTo>
+                    <a:pt x="0" y="0"/>
+                  </a:lnTo>
+                </a:path>
+              </a:pathLst>
+            </a:custGeom>
+            <a:ln w="13550" cap="flat">
+              <a:solidFill>
+                <a:srgbClr val="EBEBEB">
+                  <a:alpha val="100000"/>
+                </a:srgbClr>
+              </a:solidFill>
+              <a:prstDash val="solid"/>
+              <a:round/>
+            </a:ln>
+          </p:spPr>
+          <p:txBody>
+            <a:bodyPr/>
+            <a:lstStyle/>
+            <a:p/>
+          </p:txBody>
+        </p:sp>
+        <p:sp>
+          <p:nvSpPr>
+            <p:cNvPr id="61" name="pl61"/>
+            <p:cNvSpPr/>
+            <p:nvPr/>
+          </p:nvSpPr>
+          <p:spPr>
+            <a:xfrm>
+              <a:off x="3808382" y="4336484"/>
+              <a:ext cx="0" cy="1317069"/>
+            </a:xfrm>
+            <a:custGeom>
+              <a:avLst/>
+              <a:pathLst>
+                <a:path w="0" h="1317069">
+                  <a:moveTo>
+                    <a:pt x="0" y="1317069"/>
+                  </a:moveTo>
+                  <a:lnTo>
+                    <a:pt x="0" y="0"/>
+                  </a:lnTo>
+                  <a:lnTo>
+                    <a:pt x="0" y="0"/>
+                  </a:lnTo>
+                </a:path>
+              </a:pathLst>
+            </a:custGeom>
+            <a:ln w="13550" cap="flat">
+              <a:solidFill>
+                <a:srgbClr val="EBEBEB">
+                  <a:alpha val="100000"/>
+                </a:srgbClr>
+              </a:solidFill>
+              <a:prstDash val="solid"/>
+              <a:round/>
+            </a:ln>
+          </p:spPr>
+          <p:txBody>
+            <a:bodyPr/>
+            <a:lstStyle/>
+            <a:p/>
+          </p:txBody>
+        </p:sp>
+        <p:sp>
+          <p:nvSpPr>
+            <p:cNvPr id="62" name="pl62"/>
+            <p:cNvSpPr/>
+            <p:nvPr/>
+          </p:nvSpPr>
+          <p:spPr>
+            <a:xfrm>
+              <a:off x="4615547" y="4336484"/>
+              <a:ext cx="0" cy="1317069"/>
+            </a:xfrm>
+            <a:custGeom>
+              <a:avLst/>
+              <a:pathLst>
+                <a:path w="0" h="1317069">
+                  <a:moveTo>
+                    <a:pt x="0" y="1317069"/>
+                  </a:moveTo>
+                  <a:lnTo>
+                    <a:pt x="0" y="0"/>
+                  </a:lnTo>
+                  <a:lnTo>
+                    <a:pt x="0" y="0"/>
+                  </a:lnTo>
+                </a:path>
+              </a:pathLst>
+            </a:custGeom>
+            <a:ln w="13550" cap="flat">
+              <a:solidFill>
+                <a:srgbClr val="EBEBEB">
+                  <a:alpha val="100000"/>
+                </a:srgbClr>
+              </a:solidFill>
+              <a:prstDash val="solid"/>
+              <a:round/>
+            </a:ln>
+          </p:spPr>
+          <p:txBody>
+            <a:bodyPr/>
+            <a:lstStyle/>
+            <a:p/>
+          </p:txBody>
+        </p:sp>
+        <p:sp>
+          <p:nvSpPr>
+            <p:cNvPr id="63" name="pl63"/>
+            <p:cNvSpPr/>
+            <p:nvPr/>
+          </p:nvSpPr>
+          <p:spPr>
+            <a:xfrm>
+              <a:off x="5422713" y="4336484"/>
+              <a:ext cx="0" cy="1317069"/>
+            </a:xfrm>
+            <a:custGeom>
+              <a:avLst/>
+              <a:pathLst>
+                <a:path w="0" h="1317069">
+                  <a:moveTo>
+                    <a:pt x="0" y="1317069"/>
+                  </a:moveTo>
+                  <a:lnTo>
+                    <a:pt x="0" y="0"/>
+                  </a:lnTo>
+                  <a:lnTo>
+                    <a:pt x="0" y="0"/>
+                  </a:lnTo>
+                </a:path>
+              </a:pathLst>
+            </a:custGeom>
+            <a:ln w="13550" cap="flat">
+              <a:solidFill>
+                <a:srgbClr val="EBEBEB">
+                  <a:alpha val="100000"/>
+                </a:srgbClr>
+              </a:solidFill>
+              <a:prstDash val="solid"/>
+              <a:round/>
+            </a:ln>
+          </p:spPr>
+          <p:txBody>
+            <a:bodyPr/>
+            <a:lstStyle/>
+            <a:p/>
+          </p:txBody>
+        </p:sp>
+        <p:sp>
+          <p:nvSpPr>
+            <p:cNvPr id="64" name="pl64"/>
+            <p:cNvSpPr/>
+            <p:nvPr/>
+          </p:nvSpPr>
+          <p:spPr>
+            <a:xfrm>
+              <a:off x="6229878" y="4336484"/>
+              <a:ext cx="0" cy="1317069"/>
+            </a:xfrm>
+            <a:custGeom>
+              <a:avLst/>
+              <a:pathLst>
+                <a:path w="0" h="1317069">
+                  <a:moveTo>
+                    <a:pt x="0" y="1317069"/>
+                  </a:moveTo>
+                  <a:lnTo>
+                    <a:pt x="0" y="0"/>
+                  </a:lnTo>
+                  <a:lnTo>
+                    <a:pt x="0" y="0"/>
+                  </a:lnTo>
+                </a:path>
+              </a:pathLst>
+            </a:custGeom>
+            <a:ln w="13550" cap="flat">
+              <a:solidFill>
+                <a:srgbClr val="EBEBEB">
+                  <a:alpha val="100000"/>
+                </a:srgbClr>
+              </a:solidFill>
+              <a:prstDash val="solid"/>
+              <a:round/>
+            </a:ln>
+          </p:spPr>
+          <p:txBody>
+            <a:bodyPr/>
+            <a:lstStyle/>
+            <a:p/>
+          </p:txBody>
+        </p:sp>
+        <p:sp>
+          <p:nvSpPr>
+            <p:cNvPr id="65" name="pl65"/>
+            <p:cNvSpPr/>
+            <p:nvPr/>
+          </p:nvSpPr>
+          <p:spPr>
+            <a:xfrm>
+              <a:off x="7037044" y="4336484"/>
+              <a:ext cx="0" cy="1317069"/>
+            </a:xfrm>
+            <a:custGeom>
+              <a:avLst/>
+              <a:pathLst>
+                <a:path w="0" h="1317069">
+                  <a:moveTo>
+                    <a:pt x="0" y="1317069"/>
+                  </a:moveTo>
+                  <a:lnTo>
+                    <a:pt x="0" y="0"/>
+                  </a:lnTo>
+                  <a:lnTo>
+                    <a:pt x="0" y="0"/>
+                  </a:lnTo>
+                </a:path>
+              </a:pathLst>
+            </a:custGeom>
+            <a:ln w="13550" cap="flat">
+              <a:solidFill>
+                <a:srgbClr val="EBEBEB">
+                  <a:alpha val="100000"/>
+                </a:srgbClr>
+              </a:solidFill>
+              <a:prstDash val="solid"/>
+              <a:round/>
+            </a:ln>
+          </p:spPr>
+          <p:txBody>
+            <a:bodyPr/>
+            <a:lstStyle/>
+            <a:p/>
+          </p:txBody>
+        </p:sp>
+        <p:sp>
+          <p:nvSpPr>
+            <p:cNvPr id="66" name="pl66"/>
+            <p:cNvSpPr/>
+            <p:nvPr/>
+          </p:nvSpPr>
+          <p:spPr>
+            <a:xfrm>
+              <a:off x="7844209" y="4336484"/>
+              <a:ext cx="0" cy="1317069"/>
+            </a:xfrm>
+            <a:custGeom>
+              <a:avLst/>
+              <a:pathLst>
+                <a:path w="0" h="1317069">
+                  <a:moveTo>
+                    <a:pt x="0" y="1317069"/>
+                  </a:moveTo>
+                  <a:lnTo>
+                    <a:pt x="0" y="0"/>
+                  </a:lnTo>
+                  <a:lnTo>
+                    <a:pt x="0" y="0"/>
+                  </a:lnTo>
+                </a:path>
+              </a:pathLst>
+            </a:custGeom>
+            <a:ln w="13550" cap="flat">
+              <a:solidFill>
+                <a:srgbClr val="EBEBEB">
+                  <a:alpha val="100000"/>
+                </a:srgbClr>
+              </a:solidFill>
+              <a:prstDash val="solid"/>
+              <a:round/>
+            </a:ln>
+          </p:spPr>
+          <p:txBody>
+            <a:bodyPr/>
+            <a:lstStyle/>
+            <a:p/>
+          </p:txBody>
+        </p:sp>
+        <p:sp>
+          <p:nvSpPr>
+            <p:cNvPr id="67" name="pg67"/>
+            <p:cNvSpPr/>
+            <p:nvPr/>
+          </p:nvSpPr>
+          <p:spPr>
+            <a:xfrm>
+              <a:off x="1235312" y="4336484"/>
+              <a:ext cx="6964104" cy="1256227"/>
+            </a:xfrm>
+            <a:custGeom>
+              <a:avLst/>
+              <a:pathLst>
+                <a:path w="6964104" h="1256227">
+                  <a:moveTo>
+                    <a:pt x="2304441" y="0"/>
+                  </a:moveTo>
+                  <a:lnTo>
+                    <a:pt x="2321368" y="33614"/>
+                  </a:lnTo>
+                  <a:lnTo>
+                    <a:pt x="2391712" y="158995"/>
+                  </a:lnTo>
+                  <a:lnTo>
+                    <a:pt x="2462057" y="271528"/>
+                  </a:lnTo>
+                  <a:lnTo>
+                    <a:pt x="2532401" y="372530"/>
+                  </a:lnTo>
+                  <a:lnTo>
+                    <a:pt x="2602746" y="463183"/>
+                  </a:lnTo>
+                  <a:lnTo>
+                    <a:pt x="2673090" y="544546"/>
+                  </a:lnTo>
+                  <a:lnTo>
+                    <a:pt x="2743435" y="617572"/>
+                  </a:lnTo>
+                  <a:lnTo>
+                    <a:pt x="2813779" y="683115"/>
+                  </a:lnTo>
+                  <a:lnTo>
+                    <a:pt x="2884124" y="741942"/>
+                  </a:lnTo>
+                  <a:lnTo>
+                    <a:pt x="2954468" y="794740"/>
+                  </a:lnTo>
+                  <a:lnTo>
+                    <a:pt x="3024813" y="842129"/>
+                  </a:lnTo>
+                  <a:lnTo>
+                    <a:pt x="3095157" y="884662"/>
+                  </a:lnTo>
+                  <a:lnTo>
+                    <a:pt x="3165502" y="922836"/>
+                  </a:lnTo>
+                  <a:lnTo>
+                    <a:pt x="3235846" y="957098"/>
+                  </a:lnTo>
+                  <a:lnTo>
+                    <a:pt x="3306191" y="962252"/>
+                  </a:lnTo>
+                  <a:lnTo>
+                    <a:pt x="3376535" y="966676"/>
+                  </a:lnTo>
+                  <a:lnTo>
+                    <a:pt x="3446880" y="971033"/>
+                  </a:lnTo>
+                  <a:lnTo>
+                    <a:pt x="3517224" y="975325"/>
+                  </a:lnTo>
+                  <a:lnTo>
+                    <a:pt x="3587569" y="979553"/>
+                  </a:lnTo>
+                  <a:lnTo>
+                    <a:pt x="3657913" y="983718"/>
+                  </a:lnTo>
+                  <a:lnTo>
+                    <a:pt x="3728257" y="987820"/>
+                  </a:lnTo>
+                  <a:lnTo>
+                    <a:pt x="3798602" y="991860"/>
+                  </a:lnTo>
+                  <a:lnTo>
+                    <a:pt x="3868946" y="995840"/>
+                  </a:lnTo>
+                  <a:lnTo>
+                    <a:pt x="3939291" y="999760"/>
+                  </a:lnTo>
+                  <a:lnTo>
+                    <a:pt x="4009635" y="1003621"/>
+                  </a:lnTo>
+                  <a:lnTo>
+                    <a:pt x="4079980" y="1007425"/>
+                  </a:lnTo>
+                  <a:lnTo>
+                    <a:pt x="4150324" y="1011171"/>
+                  </a:lnTo>
+                  <a:lnTo>
+                    <a:pt x="4220669" y="1014861"/>
+                  </a:lnTo>
+                  <a:lnTo>
+                    <a:pt x="4291013" y="1018496"/>
+                  </a:lnTo>
+                  <a:lnTo>
+                    <a:pt x="4361358" y="1022077"/>
+                  </a:lnTo>
+                  <a:lnTo>
+                    <a:pt x="4431702" y="1025603"/>
+                  </a:lnTo>
+                  <a:lnTo>
+                    <a:pt x="4502047" y="1029077"/>
+                  </a:lnTo>
+                  <a:lnTo>
+                    <a:pt x="4572391" y="1032499"/>
+                  </a:lnTo>
+                  <a:lnTo>
+                    <a:pt x="4642736" y="1035869"/>
+                  </a:lnTo>
+                  <a:lnTo>
+                    <a:pt x="4713080" y="1039189"/>
+                  </a:lnTo>
+                  <a:lnTo>
+                    <a:pt x="4783425" y="1042459"/>
+                  </a:lnTo>
+                  <a:lnTo>
+                    <a:pt x="4853769" y="1045679"/>
+                  </a:lnTo>
+                  <a:lnTo>
+                    <a:pt x="4924114" y="1048852"/>
+                  </a:lnTo>
+                  <a:lnTo>
+                    <a:pt x="4994458" y="1051977"/>
+                  </a:lnTo>
+                  <a:lnTo>
+                    <a:pt x="5064803" y="1055055"/>
+                  </a:lnTo>
+                  <a:lnTo>
+                    <a:pt x="5135147" y="1058087"/>
+                  </a:lnTo>
+                  <a:lnTo>
+                    <a:pt x="5205492" y="1061074"/>
+                  </a:lnTo>
+                  <a:lnTo>
+                    <a:pt x="5275836" y="1064015"/>
+                  </a:lnTo>
+                  <a:lnTo>
+                    <a:pt x="5346181" y="1066913"/>
+                  </a:lnTo>
+                  <a:lnTo>
+                    <a:pt x="5416525" y="1069767"/>
+                  </a:lnTo>
+                  <a:lnTo>
+                    <a:pt x="5486870" y="1072578"/>
+                  </a:lnTo>
+                  <a:lnTo>
+                    <a:pt x="5557214" y="1075348"/>
+                  </a:lnTo>
+                  <a:lnTo>
+                    <a:pt x="5627559" y="1078075"/>
+                  </a:lnTo>
+                  <a:lnTo>
+                    <a:pt x="5697903" y="1080762"/>
+                  </a:lnTo>
+                  <a:lnTo>
+                    <a:pt x="5768248" y="1083408"/>
+                  </a:lnTo>
+                  <a:lnTo>
+                    <a:pt x="5838592" y="1086015"/>
+                  </a:lnTo>
+                  <a:lnTo>
+                    <a:pt x="5908937" y="1088583"/>
+                  </a:lnTo>
+                  <a:lnTo>
+                    <a:pt x="5979281" y="1091112"/>
+                  </a:lnTo>
+                  <a:lnTo>
+                    <a:pt x="6049626" y="1093603"/>
+                  </a:lnTo>
+                  <a:lnTo>
+                    <a:pt x="6119970" y="1096057"/>
+                  </a:lnTo>
+                  <a:lnTo>
+                    <a:pt x="6190315" y="1098474"/>
+                  </a:lnTo>
+                  <a:lnTo>
+                    <a:pt x="6260659" y="1100854"/>
+                  </a:lnTo>
+                  <a:lnTo>
+                    <a:pt x="6331004" y="1103199"/>
+                  </a:lnTo>
+                  <a:lnTo>
+                    <a:pt x="6401348" y="1105509"/>
+                  </a:lnTo>
+                  <a:lnTo>
+                    <a:pt x="6471693" y="1107785"/>
+                  </a:lnTo>
+                  <a:lnTo>
+                    <a:pt x="6542037" y="1110026"/>
+                  </a:lnTo>
+                  <a:lnTo>
+                    <a:pt x="6612382" y="1112233"/>
+                  </a:lnTo>
+                  <a:lnTo>
+                    <a:pt x="6682726" y="1114408"/>
+                  </a:lnTo>
+                  <a:lnTo>
+                    <a:pt x="6753071" y="1116549"/>
+                  </a:lnTo>
+                  <a:lnTo>
+                    <a:pt x="6823415" y="1118659"/>
+                  </a:lnTo>
+                  <a:lnTo>
+                    <a:pt x="6893760" y="1120737"/>
+                  </a:lnTo>
+                  <a:lnTo>
+                    <a:pt x="6964104" y="1122784"/>
+                  </a:lnTo>
+                  <a:lnTo>
+                    <a:pt x="6964104" y="1256227"/>
+                  </a:lnTo>
+                  <a:lnTo>
+                    <a:pt x="6893760" y="1256116"/>
+                  </a:lnTo>
+                  <a:lnTo>
+                    <a:pt x="6823415" y="1255992"/>
+                  </a:lnTo>
+                  <a:lnTo>
+                    <a:pt x="6753071" y="1255854"/>
+                  </a:lnTo>
+                  <a:lnTo>
+                    <a:pt x="6682726" y="1255700"/>
+                  </a:lnTo>
+                  <a:lnTo>
+                    <a:pt x="6612382" y="1255528"/>
+                  </a:lnTo>
+                  <a:lnTo>
+                    <a:pt x="6542037" y="1255337"/>
+                  </a:lnTo>
+                  <a:lnTo>
+                    <a:pt x="6471693" y="1255124"/>
+                  </a:lnTo>
+                  <a:lnTo>
+                    <a:pt x="6401348" y="1254887"/>
+                  </a:lnTo>
+                  <a:lnTo>
+                    <a:pt x="6331004" y="1254623"/>
+                  </a:lnTo>
+                  <a:lnTo>
+                    <a:pt x="6260659" y="1254329"/>
+                  </a:lnTo>
+                  <a:lnTo>
+                    <a:pt x="6190315" y="1254001"/>
+                  </a:lnTo>
+                  <a:lnTo>
+                    <a:pt x="6119970" y="1253635"/>
+                  </a:lnTo>
+                  <a:lnTo>
+                    <a:pt x="6049626" y="1253228"/>
+                  </a:lnTo>
+                  <a:lnTo>
+                    <a:pt x="5979281" y="1252774"/>
+                  </a:lnTo>
+                  <a:lnTo>
+                    <a:pt x="5908937" y="1252269"/>
+                  </a:lnTo>
+                  <a:lnTo>
+                    <a:pt x="5838592" y="1251705"/>
+                  </a:lnTo>
+                  <a:lnTo>
+                    <a:pt x="5768248" y="1251078"/>
+                  </a:lnTo>
+                  <a:lnTo>
+                    <a:pt x="5697903" y="1250379"/>
+                  </a:lnTo>
+                  <a:lnTo>
+                    <a:pt x="5627559" y="1249600"/>
+                  </a:lnTo>
+                  <a:lnTo>
+                    <a:pt x="5557214" y="1248732"/>
+                  </a:lnTo>
+                  <a:lnTo>
+                    <a:pt x="5486870" y="1247765"/>
+                  </a:lnTo>
+                  <a:lnTo>
+                    <a:pt x="5416525" y="1246687"/>
+                  </a:lnTo>
+                  <a:lnTo>
+                    <a:pt x="5346181" y="1245487"/>
+                  </a:lnTo>
+                  <a:lnTo>
+                    <a:pt x="5275836" y="1244149"/>
+                  </a:lnTo>
+                  <a:lnTo>
+                    <a:pt x="5205492" y="1242659"/>
+                  </a:lnTo>
+                  <a:lnTo>
+                    <a:pt x="5135147" y="1240999"/>
+                  </a:lnTo>
+                  <a:lnTo>
+                    <a:pt x="5064803" y="1239149"/>
+                  </a:lnTo>
+                  <a:lnTo>
+                    <a:pt x="4994458" y="1237088"/>
+                  </a:lnTo>
+                  <a:lnTo>
+                    <a:pt x="4924114" y="1234792"/>
+                  </a:lnTo>
+                  <a:lnTo>
+                    <a:pt x="4853769" y="1232233"/>
+                  </a:lnTo>
+                  <a:lnTo>
+                    <a:pt x="4783425" y="1229382"/>
+                  </a:lnTo>
+                  <a:lnTo>
+                    <a:pt x="4713080" y="1226206"/>
+                  </a:lnTo>
+                  <a:lnTo>
+                    <a:pt x="4642736" y="1222668"/>
+                  </a:lnTo>
+                  <a:lnTo>
+                    <a:pt x="4572391" y="1218725"/>
+                  </a:lnTo>
+                  <a:lnTo>
+                    <a:pt x="4502047" y="1214332"/>
+                  </a:lnTo>
+                  <a:lnTo>
+                    <a:pt x="4431702" y="1209438"/>
+                  </a:lnTo>
+                  <a:lnTo>
+                    <a:pt x="4361358" y="1203984"/>
+                  </a:lnTo>
+                  <a:lnTo>
+                    <a:pt x="4291013" y="1197909"/>
+                  </a:lnTo>
+                  <a:lnTo>
+                    <a:pt x="4220669" y="1191139"/>
+                  </a:lnTo>
+                  <a:lnTo>
+                    <a:pt x="4150324" y="1183597"/>
+                  </a:lnTo>
+                  <a:lnTo>
+                    <a:pt x="4079980" y="1175193"/>
+                  </a:lnTo>
+                  <a:lnTo>
+                    <a:pt x="4009635" y="1165831"/>
+                  </a:lnTo>
+                  <a:lnTo>
+                    <a:pt x="3939291" y="1155399"/>
+                  </a:lnTo>
+                  <a:lnTo>
+                    <a:pt x="3868946" y="1143776"/>
+                  </a:lnTo>
+                  <a:lnTo>
+                    <a:pt x="3798602" y="1130826"/>
+                  </a:lnTo>
+                  <a:lnTo>
+                    <a:pt x="3728257" y="1116398"/>
+                  </a:lnTo>
+                  <a:lnTo>
+                    <a:pt x="3657913" y="1100323"/>
+                  </a:lnTo>
+                  <a:lnTo>
+                    <a:pt x="3587569" y="1082412"/>
+                  </a:lnTo>
+                  <a:lnTo>
+                    <a:pt x="3517224" y="1062457"/>
+                  </a:lnTo>
+                  <a:lnTo>
+                    <a:pt x="3446880" y="1040223"/>
+                  </a:lnTo>
+                  <a:lnTo>
+                    <a:pt x="3376535" y="1015450"/>
+                  </a:lnTo>
+                  <a:lnTo>
+                    <a:pt x="3306191" y="987850"/>
+                  </a:lnTo>
+                  <a:lnTo>
+                    <a:pt x="3235846" y="957760"/>
+                  </a:lnTo>
+                  <a:lnTo>
+                    <a:pt x="3165502" y="953201"/>
+                  </a:lnTo>
+                  <a:lnTo>
+                    <a:pt x="3095157" y="948572"/>
+                  </a:lnTo>
+                  <a:lnTo>
+                    <a:pt x="3024813" y="943872"/>
+                  </a:lnTo>
+                  <a:lnTo>
+                    <a:pt x="2954468" y="939101"/>
+                  </a:lnTo>
+                  <a:lnTo>
+                    <a:pt x="2884124" y="934257"/>
+                  </a:lnTo>
+                  <a:lnTo>
+                    <a:pt x="2813779" y="929340"/>
+                  </a:lnTo>
+                  <a:lnTo>
+                    <a:pt x="2743435" y="924347"/>
+                  </a:lnTo>
+                  <a:lnTo>
+                    <a:pt x="2673090" y="919279"/>
+                  </a:lnTo>
+                  <a:lnTo>
+                    <a:pt x="2602746" y="914133"/>
+                  </a:lnTo>
+                  <a:lnTo>
+                    <a:pt x="2532401" y="908909"/>
+                  </a:lnTo>
+                  <a:lnTo>
+                    <a:pt x="2462057" y="903605"/>
+                  </a:lnTo>
+                  <a:lnTo>
+                    <a:pt x="2391712" y="898221"/>
+                  </a:lnTo>
+                  <a:lnTo>
+                    <a:pt x="2321368" y="892755"/>
+                  </a:lnTo>
+                  <a:lnTo>
+                    <a:pt x="2251023" y="887205"/>
+                  </a:lnTo>
+                  <a:lnTo>
+                    <a:pt x="2180679" y="881571"/>
+                  </a:lnTo>
+                  <a:lnTo>
+                    <a:pt x="2110334" y="875851"/>
+                  </a:lnTo>
+                  <a:lnTo>
+                    <a:pt x="2039990" y="870044"/>
+                  </a:lnTo>
+                  <a:lnTo>
+                    <a:pt x="1969645" y="864149"/>
+                  </a:lnTo>
+                  <a:lnTo>
+                    <a:pt x="1899301" y="858164"/>
+                  </a:lnTo>
+                  <a:lnTo>
+                    <a:pt x="1828956" y="852088"/>
+                  </a:lnTo>
+                  <a:lnTo>
+                    <a:pt x="1758612" y="845919"/>
+                  </a:lnTo>
+                  <a:lnTo>
+                    <a:pt x="1688267" y="839656"/>
+                  </a:lnTo>
+                  <a:lnTo>
+                    <a:pt x="1617923" y="833298"/>
+                  </a:lnTo>
+                  <a:lnTo>
+                    <a:pt x="1547578" y="826843"/>
+                  </a:lnTo>
+                  <a:lnTo>
+                    <a:pt x="1477234" y="820290"/>
+                  </a:lnTo>
+                  <a:lnTo>
+                    <a:pt x="1406889" y="813637"/>
+                  </a:lnTo>
+                  <a:lnTo>
+                    <a:pt x="1336545" y="806883"/>
+                  </a:lnTo>
+                  <a:lnTo>
+                    <a:pt x="1266200" y="800025"/>
+                  </a:lnTo>
+                  <a:lnTo>
+                    <a:pt x="1195856" y="793064"/>
+                  </a:lnTo>
+                  <a:lnTo>
+                    <a:pt x="1125511" y="785996"/>
+                  </a:lnTo>
+                  <a:lnTo>
+                    <a:pt x="1055167" y="778821"/>
+                  </a:lnTo>
+                  <a:lnTo>
+                    <a:pt x="984822" y="771537"/>
+                  </a:lnTo>
+                  <a:lnTo>
+                    <a:pt x="914478" y="764141"/>
+                  </a:lnTo>
+                  <a:lnTo>
+                    <a:pt x="844133" y="756633"/>
+                  </a:lnTo>
+                  <a:lnTo>
+                    <a:pt x="773789" y="749011"/>
+                  </a:lnTo>
+                  <a:lnTo>
+                    <a:pt x="703444" y="741273"/>
+                  </a:lnTo>
+                  <a:lnTo>
+                    <a:pt x="633100" y="733417"/>
+                  </a:lnTo>
+                  <a:lnTo>
+                    <a:pt x="562755" y="725441"/>
+                  </a:lnTo>
+                  <a:lnTo>
+                    <a:pt x="492411" y="717343"/>
+                  </a:lnTo>
+                  <a:lnTo>
+                    <a:pt x="422066" y="709123"/>
+                  </a:lnTo>
+                  <a:lnTo>
+                    <a:pt x="351722" y="700777"/>
+                  </a:lnTo>
+                  <a:lnTo>
+                    <a:pt x="281377" y="692304"/>
+                  </a:lnTo>
+                  <a:lnTo>
+                    <a:pt x="211033" y="683702"/>
+                  </a:lnTo>
+                  <a:lnTo>
+                    <a:pt x="140688" y="674970"/>
+                  </a:lnTo>
+                  <a:lnTo>
+                    <a:pt x="70344" y="666104"/>
+                  </a:lnTo>
+                  <a:lnTo>
+                    <a:pt x="0" y="657103"/>
+                  </a:lnTo>
+                  <a:lnTo>
+                    <a:pt x="0" y="0"/>
+                  </a:lnTo>
+                  <a:close/>
+                </a:path>
+              </a:pathLst>
+            </a:custGeom>
+            <a:solidFill>
+              <a:srgbClr val="FF8C00">
+                <a:alpha val="20000"/>
+              </a:srgbClr>
+            </a:solidFill>
+          </p:spPr>
+          <p:txBody>
+            <a:bodyPr/>
+            <a:lstStyle/>
+            <a:p/>
+          </p:txBody>
+        </p:sp>
+        <p:sp>
+          <p:nvSpPr>
+            <p:cNvPr id="68" name="pl68"/>
+            <p:cNvSpPr/>
+            <p:nvPr/>
+          </p:nvSpPr>
+          <p:spPr>
+            <a:xfrm>
+              <a:off x="3539753" y="4336484"/>
+              <a:ext cx="4659662" cy="1122784"/>
+            </a:xfrm>
+            <a:custGeom>
+              <a:avLst/>
+              <a:pathLst>
+                <a:path w="4659662" h="1122784">
+                  <a:moveTo>
+                    <a:pt x="0" y="0"/>
+                  </a:moveTo>
+                  <a:lnTo>
+                    <a:pt x="16926" y="33614"/>
+                  </a:lnTo>
+                  <a:lnTo>
+                    <a:pt x="87271" y="158995"/>
+                  </a:lnTo>
+                  <a:lnTo>
+                    <a:pt x="157615" y="271528"/>
+                  </a:lnTo>
+                  <a:lnTo>
+                    <a:pt x="227959" y="372530"/>
+                  </a:lnTo>
+                  <a:lnTo>
+                    <a:pt x="298304" y="463183"/>
+                  </a:lnTo>
+                  <a:lnTo>
+                    <a:pt x="368648" y="544546"/>
+                  </a:lnTo>
+                  <a:lnTo>
+                    <a:pt x="438993" y="617572"/>
+                  </a:lnTo>
+                  <a:lnTo>
+                    <a:pt x="509337" y="683115"/>
+                  </a:lnTo>
+                  <a:lnTo>
+                    <a:pt x="579682" y="741942"/>
+                  </a:lnTo>
+                  <a:lnTo>
+                    <a:pt x="650026" y="794740"/>
+                  </a:lnTo>
+                  <a:lnTo>
+                    <a:pt x="720371" y="842129"/>
+                  </a:lnTo>
+                  <a:lnTo>
+                    <a:pt x="790715" y="884662"/>
+                  </a:lnTo>
+                  <a:lnTo>
+                    <a:pt x="861060" y="922836"/>
+                  </a:lnTo>
+                  <a:lnTo>
+                    <a:pt x="931404" y="957098"/>
+                  </a:lnTo>
+                  <a:lnTo>
+                    <a:pt x="1001749" y="962252"/>
+                  </a:lnTo>
+                  <a:lnTo>
+                    <a:pt x="1072093" y="966676"/>
+                  </a:lnTo>
+                  <a:lnTo>
+                    <a:pt x="1142438" y="971033"/>
+                  </a:lnTo>
+                  <a:lnTo>
+                    <a:pt x="1212782" y="975325"/>
+                  </a:lnTo>
+                  <a:lnTo>
+                    <a:pt x="1283127" y="979553"/>
+                  </a:lnTo>
+                  <a:lnTo>
+                    <a:pt x="1353471" y="983718"/>
+                  </a:lnTo>
+                  <a:lnTo>
+                    <a:pt x="1423816" y="987820"/>
+                  </a:lnTo>
+                  <a:lnTo>
+                    <a:pt x="1494160" y="991860"/>
+                  </a:lnTo>
+                  <a:lnTo>
+                    <a:pt x="1564505" y="995840"/>
+                  </a:lnTo>
+                  <a:lnTo>
+                    <a:pt x="1634849" y="999760"/>
+                  </a:lnTo>
+                  <a:lnTo>
+                    <a:pt x="1705194" y="1003621"/>
+                  </a:lnTo>
+                  <a:lnTo>
+                    <a:pt x="1775538" y="1007425"/>
+                  </a:lnTo>
+                  <a:lnTo>
+                    <a:pt x="1845883" y="1011171"/>
+                  </a:lnTo>
+                  <a:lnTo>
+                    <a:pt x="1916227" y="1014861"/>
+                  </a:lnTo>
+                  <a:lnTo>
+                    <a:pt x="1986572" y="1018496"/>
+                  </a:lnTo>
+                  <a:lnTo>
+                    <a:pt x="2056916" y="1022077"/>
+                  </a:lnTo>
+                  <a:lnTo>
+                    <a:pt x="2127261" y="1025603"/>
+                  </a:lnTo>
+                  <a:lnTo>
+                    <a:pt x="2197605" y="1029077"/>
+                  </a:lnTo>
+                  <a:lnTo>
+                    <a:pt x="2267950" y="1032499"/>
+                  </a:lnTo>
+                  <a:lnTo>
+                    <a:pt x="2338294" y="1035869"/>
+                  </a:lnTo>
+                  <a:lnTo>
+                    <a:pt x="2408639" y="1039189"/>
+                  </a:lnTo>
+                  <a:lnTo>
+                    <a:pt x="2478983" y="1042459"/>
+                  </a:lnTo>
+                  <a:lnTo>
+                    <a:pt x="2549328" y="1045679"/>
+                  </a:lnTo>
+                  <a:lnTo>
+                    <a:pt x="2619672" y="1048852"/>
+                  </a:lnTo>
+                  <a:lnTo>
+                    <a:pt x="2690017" y="1051977"/>
+                  </a:lnTo>
+                  <a:lnTo>
+                    <a:pt x="2760361" y="1055055"/>
+                  </a:lnTo>
+                  <a:lnTo>
+                    <a:pt x="2830706" y="1058087"/>
+                  </a:lnTo>
+                  <a:lnTo>
+                    <a:pt x="2901050" y="1061074"/>
+                  </a:lnTo>
+                  <a:lnTo>
+                    <a:pt x="2971395" y="1064015"/>
+                  </a:lnTo>
+                  <a:lnTo>
+                    <a:pt x="3041739" y="1066913"/>
+                  </a:lnTo>
+                  <a:lnTo>
+                    <a:pt x="3112084" y="1069767"/>
+                  </a:lnTo>
+                  <a:lnTo>
+                    <a:pt x="3182428" y="1072578"/>
+                  </a:lnTo>
+                  <a:lnTo>
+                    <a:pt x="3252773" y="1075348"/>
+                  </a:lnTo>
+                  <a:lnTo>
+                    <a:pt x="3323117" y="1078075"/>
+                  </a:lnTo>
+                  <a:lnTo>
+                    <a:pt x="3393462" y="1080762"/>
+                  </a:lnTo>
+                  <a:lnTo>
+                    <a:pt x="3463806" y="1083408"/>
+                  </a:lnTo>
+                  <a:lnTo>
+                    <a:pt x="3534151" y="1086015"/>
+                  </a:lnTo>
+                  <a:lnTo>
+                    <a:pt x="3604495" y="1088583"/>
+                  </a:lnTo>
+                  <a:lnTo>
+                    <a:pt x="3674840" y="1091112"/>
+                  </a:lnTo>
+                  <a:lnTo>
+                    <a:pt x="3745184" y="1093603"/>
+                  </a:lnTo>
+                  <a:lnTo>
+                    <a:pt x="3815529" y="1096057"/>
+                  </a:lnTo>
+                  <a:lnTo>
+                    <a:pt x="3885873" y="1098474"/>
+                  </a:lnTo>
+                  <a:lnTo>
+                    <a:pt x="3956217" y="1100854"/>
+                  </a:lnTo>
+                  <a:lnTo>
+                    <a:pt x="4026562" y="1103199"/>
+                  </a:lnTo>
+                  <a:lnTo>
+                    <a:pt x="4096906" y="1105509"/>
+                  </a:lnTo>
+                  <a:lnTo>
+                    <a:pt x="4167251" y="1107785"/>
+                  </a:lnTo>
+                  <a:lnTo>
+                    <a:pt x="4237595" y="1110026"/>
+                  </a:lnTo>
+                  <a:lnTo>
+                    <a:pt x="4307940" y="1112233"/>
+                  </a:lnTo>
+                  <a:lnTo>
+                    <a:pt x="4378284" y="1114408"/>
+                  </a:lnTo>
+                  <a:lnTo>
+                    <a:pt x="4448629" y="1116549"/>
+                  </a:lnTo>
+                  <a:lnTo>
+                    <a:pt x="4518973" y="1118659"/>
+                  </a:lnTo>
+                  <a:lnTo>
+                    <a:pt x="4589318" y="1120737"/>
+                  </a:lnTo>
+                  <a:lnTo>
+                    <a:pt x="4659662" y="1122784"/>
+                  </a:lnTo>
+                </a:path>
+              </a:pathLst>
+            </a:custGeom>
+          </p:spPr>
+          <p:txBody>
+            <a:bodyPr/>
+            <a:lstStyle/>
+            <a:p/>
+          </p:txBody>
+        </p:sp>
+        <p:sp>
+          <p:nvSpPr>
+            <p:cNvPr id="69" name="pl69"/>
+            <p:cNvSpPr/>
+            <p:nvPr/>
+          </p:nvSpPr>
+          <p:spPr>
+            <a:xfrm>
+              <a:off x="1235312" y="4993587"/>
+              <a:ext cx="6964104" cy="599124"/>
+            </a:xfrm>
+            <a:custGeom>
+              <a:avLst/>
+              <a:pathLst>
+                <a:path w="6964104" h="599124">
+                  <a:moveTo>
+                    <a:pt x="6964104" y="599124"/>
+                  </a:moveTo>
+                  <a:lnTo>
+                    <a:pt x="6893760" y="599012"/>
+                  </a:lnTo>
+                  <a:lnTo>
+                    <a:pt x="6823415" y="598888"/>
+                  </a:lnTo>
+                  <a:lnTo>
+                    <a:pt x="6753071" y="598750"/>
+                  </a:lnTo>
+                  <a:lnTo>
+                    <a:pt x="6682726" y="598596"/>
+                  </a:lnTo>
+                  <a:lnTo>
+                    <a:pt x="6612382" y="598425"/>
+                  </a:lnTo>
+                  <a:lnTo>
+                    <a:pt x="6542037" y="598234"/>
+                  </a:lnTo>
+                  <a:lnTo>
+                    <a:pt x="6471693" y="598021"/>
+                  </a:lnTo>
+                  <a:lnTo>
+                    <a:pt x="6401348" y="597784"/>
+                  </a:lnTo>
+                  <a:lnTo>
+                    <a:pt x="6331004" y="597520"/>
+                  </a:lnTo>
+                  <a:lnTo>
+                    <a:pt x="6260659" y="597225"/>
+                  </a:lnTo>
+                  <a:lnTo>
+                    <a:pt x="6190315" y="596897"/>
+                  </a:lnTo>
+                  <a:lnTo>
+                    <a:pt x="6119970" y="596532"/>
+                  </a:lnTo>
+                  <a:lnTo>
+                    <a:pt x="6049626" y="596124"/>
+                  </a:lnTo>
+                  <a:lnTo>
+                    <a:pt x="5979281" y="595671"/>
+                  </a:lnTo>
+                  <a:lnTo>
+                    <a:pt x="5908937" y="595165"/>
+                  </a:lnTo>
+                  <a:lnTo>
+                    <a:pt x="5838592" y="594602"/>
+                  </a:lnTo>
+                  <a:lnTo>
+                    <a:pt x="5768248" y="593974"/>
+                  </a:lnTo>
+                  <a:lnTo>
+                    <a:pt x="5697903" y="593275"/>
+                  </a:lnTo>
+                  <a:lnTo>
+                    <a:pt x="5627559" y="592496"/>
+                  </a:lnTo>
+                  <a:lnTo>
+                    <a:pt x="5557214" y="591628"/>
+                  </a:lnTo>
+                  <a:lnTo>
+                    <a:pt x="5486870" y="590661"/>
+                  </a:lnTo>
+                  <a:lnTo>
+                    <a:pt x="5416525" y="589584"/>
+                  </a:lnTo>
+                  <a:lnTo>
+                    <a:pt x="5346181" y="588384"/>
+                  </a:lnTo>
+                  <a:lnTo>
+                    <a:pt x="5275836" y="587046"/>
+                  </a:lnTo>
+                  <a:lnTo>
+                    <a:pt x="5205492" y="585556"/>
+                  </a:lnTo>
+                  <a:lnTo>
+                    <a:pt x="5135147" y="583896"/>
+                  </a:lnTo>
+                  <a:lnTo>
+                    <a:pt x="5064803" y="582046"/>
+                  </a:lnTo>
+                  <a:lnTo>
+                    <a:pt x="4994458" y="579985"/>
+                  </a:lnTo>
+                  <a:lnTo>
+                    <a:pt x="4924114" y="577688"/>
+                  </a:lnTo>
+                  <a:lnTo>
+                    <a:pt x="4853769" y="575130"/>
+                  </a:lnTo>
+                  <a:lnTo>
+                    <a:pt x="4783425" y="572279"/>
+                  </a:lnTo>
+                  <a:lnTo>
+                    <a:pt x="4713080" y="569103"/>
+                  </a:lnTo>
+                  <a:lnTo>
+                    <a:pt x="4642736" y="565564"/>
+                  </a:lnTo>
+                  <a:lnTo>
+                    <a:pt x="4572391" y="561621"/>
+                  </a:lnTo>
+                  <a:lnTo>
+                    <a:pt x="4502047" y="557229"/>
+                  </a:lnTo>
+                  <a:lnTo>
+                    <a:pt x="4431702" y="552334"/>
+                  </a:lnTo>
+                  <a:lnTo>
+                    <a:pt x="4361358" y="546881"/>
+                  </a:lnTo>
+                  <a:lnTo>
+                    <a:pt x="4291013" y="540805"/>
+                  </a:lnTo>
+                  <a:lnTo>
+                    <a:pt x="4220669" y="534036"/>
+                  </a:lnTo>
+                  <a:lnTo>
+                    <a:pt x="4150324" y="526493"/>
+                  </a:lnTo>
+                  <a:lnTo>
+                    <a:pt x="4079980" y="518090"/>
+                  </a:lnTo>
+                  <a:lnTo>
+                    <a:pt x="4009635" y="508727"/>
+                  </a:lnTo>
+                  <a:lnTo>
+                    <a:pt x="3939291" y="498296"/>
+                  </a:lnTo>
+                  <a:lnTo>
+                    <a:pt x="3868946" y="486673"/>
+                  </a:lnTo>
+                  <a:lnTo>
+                    <a:pt x="3798602" y="473723"/>
+                  </a:lnTo>
+                  <a:lnTo>
+                    <a:pt x="3728257" y="459295"/>
+                  </a:lnTo>
+                  <a:lnTo>
+                    <a:pt x="3657913" y="443220"/>
+                  </a:lnTo>
+                  <a:lnTo>
+                    <a:pt x="3587569" y="425309"/>
+                  </a:lnTo>
+                  <a:lnTo>
+                    <a:pt x="3517224" y="405353"/>
+                  </a:lnTo>
+                  <a:lnTo>
+                    <a:pt x="3446880" y="383119"/>
+                  </a:lnTo>
+                  <a:lnTo>
+                    <a:pt x="3376535" y="358347"/>
+                  </a:lnTo>
+                  <a:lnTo>
+                    <a:pt x="3306191" y="330747"/>
+                  </a:lnTo>
+                  <a:lnTo>
+                    <a:pt x="3235846" y="300657"/>
+                  </a:lnTo>
+                  <a:lnTo>
+                    <a:pt x="3165502" y="296097"/>
+                  </a:lnTo>
+                  <a:lnTo>
+                    <a:pt x="3095157" y="291468"/>
+                  </a:lnTo>
+                  <a:lnTo>
+                    <a:pt x="3024813" y="286769"/>
+                  </a:lnTo>
+                  <a:lnTo>
+                    <a:pt x="2954468" y="281998"/>
+                  </a:lnTo>
+                  <a:lnTo>
+                    <a:pt x="2884124" y="277154"/>
+                  </a:lnTo>
+                  <a:lnTo>
+                    <a:pt x="2813779" y="272236"/>
+                  </a:lnTo>
+                  <a:lnTo>
+                    <a:pt x="2743435" y="267244"/>
+                  </a:lnTo>
+                  <a:lnTo>
+                    <a:pt x="2673090" y="262175"/>
+                  </a:lnTo>
+                  <a:lnTo>
+                    <a:pt x="2602746" y="257030"/>
+                  </a:lnTo>
+                  <a:lnTo>
+                    <a:pt x="2532401" y="251806"/>
+                  </a:lnTo>
+                  <a:lnTo>
+                    <a:pt x="2462057" y="246502"/>
+                  </a:lnTo>
+                  <a:lnTo>
+                    <a:pt x="2391712" y="241118"/>
+                  </a:lnTo>
+                  <a:lnTo>
+                    <a:pt x="2321368" y="235651"/>
+                  </a:lnTo>
+                  <a:lnTo>
+                    <a:pt x="2251023" y="230102"/>
+                  </a:lnTo>
+                  <a:lnTo>
+                    <a:pt x="2180679" y="224468"/>
+                  </a:lnTo>
+                  <a:lnTo>
+                    <a:pt x="2110334" y="218748"/>
+                  </a:lnTo>
+                  <a:lnTo>
+                    <a:pt x="2039990" y="212941"/>
+                  </a:lnTo>
+                  <a:lnTo>
+                    <a:pt x="1969645" y="207046"/>
+                  </a:lnTo>
+                  <a:lnTo>
+                    <a:pt x="1899301" y="201060"/>
+                  </a:lnTo>
+                  <a:lnTo>
+                    <a:pt x="1828956" y="194984"/>
+                  </a:lnTo>
+                  <a:lnTo>
+                    <a:pt x="1758612" y="188815"/>
+                  </a:lnTo>
+                  <a:lnTo>
+                    <a:pt x="1688267" y="182553"/>
+                  </a:lnTo>
+                  <a:lnTo>
+                    <a:pt x="1617923" y="176195"/>
+                  </a:lnTo>
+                  <a:lnTo>
+                    <a:pt x="1547578" y="169740"/>
+                  </a:lnTo>
+                  <a:lnTo>
+                    <a:pt x="1477234" y="163187"/>
+                  </a:lnTo>
+                  <a:lnTo>
+                    <a:pt x="1406889" y="156534"/>
+                  </a:lnTo>
+                  <a:lnTo>
+                    <a:pt x="1336545" y="149779"/>
+                  </a:lnTo>
+                  <a:lnTo>
+                    <a:pt x="1266200" y="142922"/>
+                  </a:lnTo>
+                  <a:lnTo>
+                    <a:pt x="1195856" y="135961"/>
+                  </a:lnTo>
+                  <a:lnTo>
+                    <a:pt x="1125511" y="128893"/>
+                  </a:lnTo>
+                  <a:lnTo>
+                    <a:pt x="1055167" y="121718"/>
+                  </a:lnTo>
+                  <a:lnTo>
+                    <a:pt x="984822" y="114433"/>
+                  </a:lnTo>
+                  <a:lnTo>
+                    <a:pt x="914478" y="107038"/>
+                  </a:lnTo>
+                  <a:lnTo>
+                    <a:pt x="844133" y="99530"/>
+                  </a:lnTo>
+                  <a:lnTo>
+                    <a:pt x="773789" y="91908"/>
+                  </a:lnTo>
+                  <a:lnTo>
+                    <a:pt x="703444" y="84169"/>
+                  </a:lnTo>
+                  <a:lnTo>
+                    <a:pt x="633100" y="76313"/>
+                  </a:lnTo>
+                  <a:lnTo>
+                    <a:pt x="562755" y="68337"/>
+                  </a:lnTo>
+                  <a:lnTo>
+                    <a:pt x="492411" y="60240"/>
+                  </a:lnTo>
+                  <a:lnTo>
+                    <a:pt x="422066" y="52019"/>
+                  </a:lnTo>
+                  <a:lnTo>
+                    <a:pt x="351722" y="43674"/>
+                  </a:lnTo>
+                  <a:lnTo>
+                    <a:pt x="281377" y="35201"/>
+                  </a:lnTo>
+                  <a:lnTo>
+                    <a:pt x="211033" y="26599"/>
+                  </a:lnTo>
+                  <a:lnTo>
+                    <a:pt x="140688" y="17866"/>
+                  </a:lnTo>
+                  <a:lnTo>
+                    <a:pt x="70344" y="9000"/>
+                  </a:lnTo>
+                  <a:lnTo>
+                    <a:pt x="0" y="0"/>
+                  </a:lnTo>
+                </a:path>
+              </a:pathLst>
+            </a:custGeom>
+          </p:spPr>
+          <p:txBody>
+            <a:bodyPr/>
+            <a:lstStyle/>
+            <a:p/>
+          </p:txBody>
+        </p:sp>
+        <p:sp>
+          <p:nvSpPr>
+            <p:cNvPr id="70" name="pl70"/>
+            <p:cNvSpPr/>
+            <p:nvPr/>
+          </p:nvSpPr>
+          <p:spPr>
+            <a:xfrm>
+              <a:off x="2834734" y="4336484"/>
+              <a:ext cx="5364681" cy="1245756"/>
+            </a:xfrm>
+            <a:custGeom>
+              <a:avLst/>
+              <a:pathLst>
+                <a:path w="5364681" h="1245756">
+                  <a:moveTo>
+                    <a:pt x="0" y="0"/>
+                  </a:moveTo>
+                  <a:lnTo>
+                    <a:pt x="18500" y="20666"/>
+                  </a:lnTo>
+                  <a:lnTo>
+                    <a:pt x="88844" y="94550"/>
+                  </a:lnTo>
+                  <a:lnTo>
+                    <a:pt x="159189" y="164020"/>
+                  </a:lnTo>
+                  <a:lnTo>
+                    <a:pt x="229533" y="229339"/>
+                  </a:lnTo>
+                  <a:lnTo>
+                    <a:pt x="299878" y="290755"/>
+                  </a:lnTo>
+                  <a:lnTo>
+                    <a:pt x="370222" y="348501"/>
+                  </a:lnTo>
+                  <a:lnTo>
+                    <a:pt x="440567" y="402797"/>
+                  </a:lnTo>
+                  <a:lnTo>
+                    <a:pt x="510911" y="453849"/>
+                  </a:lnTo>
+                  <a:lnTo>
+                    <a:pt x="581256" y="501850"/>
+                  </a:lnTo>
+                  <a:lnTo>
+                    <a:pt x="651600" y="546983"/>
+                  </a:lnTo>
+                  <a:lnTo>
+                    <a:pt x="721945" y="589420"/>
+                  </a:lnTo>
+                  <a:lnTo>
+                    <a:pt x="792289" y="629320"/>
+                  </a:lnTo>
+                  <a:lnTo>
+                    <a:pt x="862634" y="666837"/>
+                  </a:lnTo>
+                  <a:lnTo>
+                    <a:pt x="932978" y="702112"/>
+                  </a:lnTo>
+                  <a:lnTo>
+                    <a:pt x="1003323" y="735279"/>
+                  </a:lnTo>
+                  <a:lnTo>
+                    <a:pt x="1073667" y="766465"/>
+                  </a:lnTo>
+                  <a:lnTo>
+                    <a:pt x="1144012" y="795787"/>
+                  </a:lnTo>
+                  <a:lnTo>
+                    <a:pt x="1214356" y="823357"/>
+                  </a:lnTo>
+                  <a:lnTo>
+                    <a:pt x="1284701" y="849280"/>
+                  </a:lnTo>
+                  <a:lnTo>
+                    <a:pt x="1355045" y="873653"/>
+                  </a:lnTo>
+                  <a:lnTo>
+                    <a:pt x="1425390" y="896571"/>
+                  </a:lnTo>
+                  <a:lnTo>
+                    <a:pt x="1495734" y="918119"/>
+                  </a:lnTo>
+                  <a:lnTo>
+                    <a:pt x="1566079" y="938380"/>
+                  </a:lnTo>
+                  <a:lnTo>
+                    <a:pt x="1636423" y="957430"/>
+                  </a:lnTo>
+                  <a:lnTo>
+                    <a:pt x="1706768" y="975341"/>
+                  </a:lnTo>
+                  <a:lnTo>
+                    <a:pt x="1777112" y="992183"/>
+                  </a:lnTo>
+                  <a:lnTo>
+                    <a:pt x="1847457" y="1008018"/>
+                  </a:lnTo>
+                  <a:lnTo>
+                    <a:pt x="1917801" y="1022907"/>
+                  </a:lnTo>
+                  <a:lnTo>
+                    <a:pt x="1988146" y="1036906"/>
+                  </a:lnTo>
+                  <a:lnTo>
+                    <a:pt x="2058490" y="1050069"/>
+                  </a:lnTo>
+                  <a:lnTo>
+                    <a:pt x="2128835" y="1062446"/>
+                  </a:lnTo>
+                  <a:lnTo>
+                    <a:pt x="2199179" y="1074083"/>
+                  </a:lnTo>
+                  <a:lnTo>
+                    <a:pt x="2269524" y="1085024"/>
+                  </a:lnTo>
+                  <a:lnTo>
+                    <a:pt x="2339868" y="1095312"/>
+                  </a:lnTo>
+                  <a:lnTo>
+                    <a:pt x="2410213" y="1104985"/>
+                  </a:lnTo>
+                  <a:lnTo>
+                    <a:pt x="2480557" y="1114080"/>
+                  </a:lnTo>
+                  <a:lnTo>
+                    <a:pt x="2550902" y="1122632"/>
+                  </a:lnTo>
+                  <a:lnTo>
+                    <a:pt x="2621246" y="1130673"/>
+                  </a:lnTo>
+                  <a:lnTo>
+                    <a:pt x="2691591" y="1138233"/>
+                  </a:lnTo>
+                  <a:lnTo>
+                    <a:pt x="2761935" y="1145341"/>
+                  </a:lnTo>
+                  <a:lnTo>
+                    <a:pt x="2832280" y="1152025"/>
+                  </a:lnTo>
+                  <a:lnTo>
+                    <a:pt x="2902624" y="1158310"/>
+                  </a:lnTo>
+                  <a:lnTo>
+                    <a:pt x="2972969" y="1164219"/>
+                  </a:lnTo>
+                  <a:lnTo>
+                    <a:pt x="3043313" y="1169774"/>
+                  </a:lnTo>
+                  <a:lnTo>
+                    <a:pt x="3113658" y="1174998"/>
+                  </a:lnTo>
+                  <a:lnTo>
+                    <a:pt x="3184002" y="1179910"/>
+                  </a:lnTo>
+                  <a:lnTo>
+                    <a:pt x="3254347" y="1184528"/>
+                  </a:lnTo>
+                  <a:lnTo>
+                    <a:pt x="3324691" y="1188871"/>
+                  </a:lnTo>
+                  <a:lnTo>
+                    <a:pt x="3395036" y="1192953"/>
+                  </a:lnTo>
+                  <a:lnTo>
+                    <a:pt x="3465380" y="1196792"/>
+                  </a:lnTo>
+                  <a:lnTo>
+                    <a:pt x="3535725" y="1200402"/>
+                  </a:lnTo>
+                  <a:lnTo>
+                    <a:pt x="3606069" y="1203796"/>
+                  </a:lnTo>
+                  <a:lnTo>
+                    <a:pt x="3676413" y="1206987"/>
+                  </a:lnTo>
+                  <a:lnTo>
+                    <a:pt x="3746758" y="1209987"/>
+                  </a:lnTo>
+                  <a:lnTo>
+                    <a:pt x="3817102" y="1212808"/>
+                  </a:lnTo>
+                  <a:lnTo>
+                    <a:pt x="3887447" y="1215461"/>
+                  </a:lnTo>
+                  <a:lnTo>
+                    <a:pt x="3957791" y="1217955"/>
+                  </a:lnTo>
+                  <a:lnTo>
+                    <a:pt x="4028136" y="1220300"/>
+                  </a:lnTo>
+                  <a:lnTo>
+                    <a:pt x="4098480" y="1222505"/>
+                  </a:lnTo>
+                  <a:lnTo>
+                    <a:pt x="4168825" y="1224578"/>
+                  </a:lnTo>
+                  <a:lnTo>
+                    <a:pt x="4239169" y="1226527"/>
+                  </a:lnTo>
+                  <a:lnTo>
+                    <a:pt x="4309514" y="1228360"/>
+                  </a:lnTo>
+                  <a:lnTo>
+                    <a:pt x="4379858" y="1230084"/>
+                  </a:lnTo>
+                  <a:lnTo>
+                    <a:pt x="4450203" y="1231704"/>
+                  </a:lnTo>
+                  <a:lnTo>
+                    <a:pt x="4520547" y="1233227"/>
+                  </a:lnTo>
+                  <a:lnTo>
+                    <a:pt x="4590892" y="1234660"/>
+                  </a:lnTo>
+                  <a:lnTo>
+                    <a:pt x="4661236" y="1236007"/>
+                  </a:lnTo>
+                  <a:lnTo>
+                    <a:pt x="4731581" y="1237273"/>
+                  </a:lnTo>
+                  <a:lnTo>
+                    <a:pt x="4801925" y="1238464"/>
+                  </a:lnTo>
+                  <a:lnTo>
+                    <a:pt x="4872270" y="1239584"/>
+                  </a:lnTo>
+                  <a:lnTo>
+                    <a:pt x="4942614" y="1240636"/>
+                  </a:lnTo>
+                  <a:lnTo>
+                    <a:pt x="5012959" y="1241626"/>
+                  </a:lnTo>
+                  <a:lnTo>
+                    <a:pt x="5083303" y="1242557"/>
+                  </a:lnTo>
+                  <a:lnTo>
+                    <a:pt x="5153648" y="1243432"/>
+                  </a:lnTo>
+                  <a:lnTo>
+                    <a:pt x="5223992" y="1244255"/>
+                  </a:lnTo>
+                  <a:lnTo>
+                    <a:pt x="5294337" y="1245028"/>
+                  </a:lnTo>
+                  <a:lnTo>
+                    <a:pt x="5364681" y="1245756"/>
+                  </a:lnTo>
+                </a:path>
+              </a:pathLst>
+            </a:custGeom>
+            <a:ln w="27101" cap="flat">
+              <a:solidFill>
+                <a:srgbClr val="FF8C00">
+                  <a:alpha val="100000"/>
+                </a:srgbClr>
+              </a:solidFill>
+              <a:prstDash val="solid"/>
+              <a:round/>
+            </a:ln>
+          </p:spPr>
+          <p:txBody>
+            <a:bodyPr/>
+            <a:lstStyle/>
+            <a:p/>
+          </p:txBody>
+        </p:sp>
+        <p:sp>
+          <p:nvSpPr>
+            <p:cNvPr id="71" name="pl71"/>
+            <p:cNvSpPr/>
+            <p:nvPr/>
+          </p:nvSpPr>
+          <p:spPr>
+            <a:xfrm>
+              <a:off x="887106" y="5294352"/>
+              <a:ext cx="7660515" cy="0"/>
+            </a:xfrm>
+            <a:custGeom>
+              <a:avLst/>
+              <a:pathLst>
+                <a:path w="7660515" h="0">
+                  <a:moveTo>
+                    <a:pt x="0" y="0"/>
+                  </a:moveTo>
+                  <a:lnTo>
+                    <a:pt x="7660515" y="0"/>
+                  </a:lnTo>
+                  <a:lnTo>
+                    <a:pt x="7660515" y="0"/>
+                  </a:lnTo>
+                </a:path>
+              </a:pathLst>
+            </a:custGeom>
+            <a:ln w="13550" cap="flat">
+              <a:solidFill>
+                <a:srgbClr val="7F7F7F">
+                  <a:alpha val="100000"/>
+                </a:srgbClr>
+              </a:solidFill>
+              <a:prstDash val="dash"/>
+              <a:round/>
+            </a:ln>
+          </p:spPr>
+          <p:txBody>
+            <a:bodyPr/>
+            <a:lstStyle/>
+            <a:p/>
+          </p:txBody>
+        </p:sp>
+        <p:sp>
+          <p:nvSpPr>
+            <p:cNvPr id="72" name="pl72"/>
+            <p:cNvSpPr/>
+            <p:nvPr/>
+          </p:nvSpPr>
+          <p:spPr>
+            <a:xfrm>
+              <a:off x="4472829" y="4336484"/>
+              <a:ext cx="0" cy="1317069"/>
+            </a:xfrm>
+            <a:custGeom>
+              <a:avLst/>
+              <a:pathLst>
+                <a:path w="0" h="1317069">
+                  <a:moveTo>
+                    <a:pt x="0" y="1317069"/>
+                  </a:moveTo>
+                  <a:lnTo>
+                    <a:pt x="0" y="0"/>
+                  </a:lnTo>
+                  <a:lnTo>
+                    <a:pt x="0" y="0"/>
+                  </a:lnTo>
+                </a:path>
+              </a:pathLst>
+            </a:custGeom>
+            <a:ln w="13550" cap="flat">
+              <a:solidFill>
+                <a:srgbClr val="666666">
+                  <a:alpha val="100000"/>
+                </a:srgbClr>
+              </a:solidFill>
+              <a:prstDash val="dot"/>
+              <a:round/>
+            </a:ln>
+          </p:spPr>
+          <p:txBody>
+            <a:bodyPr/>
+            <a:lstStyle/>
+            <a:p/>
+          </p:txBody>
+        </p:sp>
+        <p:sp>
+          <p:nvSpPr>
+            <p:cNvPr id="73" name="tx73"/>
+            <p:cNvSpPr/>
+            <p:nvPr/>
+          </p:nvSpPr>
+          <p:spPr>
+            <a:xfrm>
+              <a:off x="762297" y="5553636"/>
+              <a:ext cx="62179" cy="80101"/>
+            </a:xfrm>
+            <a:prstGeom prst="rect">
+              <a:avLst/>
+            </a:prstGeom>
+            <a:noFill/>
+          </p:spPr>
+          <p:txBody>
+            <a:bodyPr lIns="0" rIns="0" tIns="0" bIns="0" anchorCtr="1" anchor="ctr" wrap="none"/>
+            <a:lstStyle/>
+            <a:p>
+              <a:pPr algn="l" marL="0" marR="0" indent="0">
+                <a:lnSpc>
+                  <a:spcPts val="880"/>
+                </a:lnSpc>
+                <a:spcBef>
+                  <a:spcPts val="0"/>
+                </a:spcBef>
+                <a:spcAft>
+                  <a:spcPts val="0"/>
+                </a:spcAft>
+              </a:pPr>
+              <a:r>
+                <a:rPr sz="880">
+                  <a:solidFill>
+                    <a:srgbClr val="4D4D4D">
+                      <a:alpha val="100000"/>
+                    </a:srgbClr>
+                  </a:solidFill>
+                  <a:latin typeface="Helvetica"/>
+                  <a:cs typeface="Helvetica"/>
+                </a:rPr>
+                <a:t>0</a:t>
+              </a:r>
+            </a:p>
+          </p:txBody>
+        </p:sp>
+        <p:sp>
+          <p:nvSpPr>
+            <p:cNvPr id="74" name="tx74"/>
+            <p:cNvSpPr/>
+            <p:nvPr/>
+          </p:nvSpPr>
+          <p:spPr>
+            <a:xfrm>
+              <a:off x="762297" y="5254302"/>
+              <a:ext cx="62179" cy="80101"/>
+            </a:xfrm>
+            <a:prstGeom prst="rect">
+              <a:avLst/>
+            </a:prstGeom>
+            <a:noFill/>
+          </p:spPr>
+          <p:txBody>
+            <a:bodyPr lIns="0" rIns="0" tIns="0" bIns="0" anchorCtr="1" anchor="ctr" wrap="none"/>
+            <a:lstStyle/>
+            <a:p>
+              <a:pPr algn="l" marL="0" marR="0" indent="0">
+                <a:lnSpc>
+                  <a:spcPts val="880"/>
+                </a:lnSpc>
+                <a:spcBef>
+                  <a:spcPts val="0"/>
+                </a:spcBef>
+                <a:spcAft>
+                  <a:spcPts val="0"/>
+                </a:spcAft>
+              </a:pPr>
+              <a:r>
+                <a:rPr sz="880">
+                  <a:solidFill>
+                    <a:srgbClr val="4D4D4D">
+                      <a:alpha val="100000"/>
+                    </a:srgbClr>
+                  </a:solidFill>
+                  <a:latin typeface="Helvetica"/>
+                  <a:cs typeface="Helvetica"/>
+                </a:rPr>
+                <a:t>1</a:t>
+              </a:r>
+            </a:p>
+          </p:txBody>
+        </p:sp>
+        <p:sp>
+          <p:nvSpPr>
+            <p:cNvPr id="75" name="tx75"/>
+            <p:cNvSpPr/>
+            <p:nvPr/>
+          </p:nvSpPr>
+          <p:spPr>
+            <a:xfrm>
+              <a:off x="762297" y="4954968"/>
+              <a:ext cx="62179" cy="80101"/>
+            </a:xfrm>
+            <a:prstGeom prst="rect">
+              <a:avLst/>
+            </a:prstGeom>
+            <a:noFill/>
+          </p:spPr>
+          <p:txBody>
+            <a:bodyPr lIns="0" rIns="0" tIns="0" bIns="0" anchorCtr="1" anchor="ctr" wrap="none"/>
+            <a:lstStyle/>
+            <a:p>
+              <a:pPr algn="l" marL="0" marR="0" indent="0">
+                <a:lnSpc>
+                  <a:spcPts val="880"/>
+                </a:lnSpc>
+                <a:spcBef>
+                  <a:spcPts val="0"/>
+                </a:spcBef>
+                <a:spcAft>
+                  <a:spcPts val="0"/>
+                </a:spcAft>
+              </a:pPr>
+              <a:r>
+                <a:rPr sz="880">
+                  <a:solidFill>
+                    <a:srgbClr val="4D4D4D">
+                      <a:alpha val="100000"/>
+                    </a:srgbClr>
+                  </a:solidFill>
+                  <a:latin typeface="Helvetica"/>
+                  <a:cs typeface="Helvetica"/>
+                </a:rPr>
+                <a:t>2</a:t>
+              </a:r>
+            </a:p>
+          </p:txBody>
+        </p:sp>
+        <p:sp>
+          <p:nvSpPr>
+            <p:cNvPr id="76" name="tx76"/>
+            <p:cNvSpPr/>
+            <p:nvPr/>
+          </p:nvSpPr>
+          <p:spPr>
+            <a:xfrm>
+              <a:off x="762297" y="4655634"/>
+              <a:ext cx="62179" cy="80101"/>
+            </a:xfrm>
+            <a:prstGeom prst="rect">
+              <a:avLst/>
+            </a:prstGeom>
+            <a:noFill/>
+          </p:spPr>
+          <p:txBody>
+            <a:bodyPr lIns="0" rIns="0" tIns="0" bIns="0" anchorCtr="1" anchor="ctr" wrap="none"/>
+            <a:lstStyle/>
+            <a:p>
+              <a:pPr algn="l" marL="0" marR="0" indent="0">
+                <a:lnSpc>
+                  <a:spcPts val="880"/>
+                </a:lnSpc>
+                <a:spcBef>
+                  <a:spcPts val="0"/>
+                </a:spcBef>
+                <a:spcAft>
+                  <a:spcPts val="0"/>
+                </a:spcAft>
+              </a:pPr>
+              <a:r>
+                <a:rPr sz="880">
+                  <a:solidFill>
+                    <a:srgbClr val="4D4D4D">
+                      <a:alpha val="100000"/>
+                    </a:srgbClr>
+                  </a:solidFill>
+                  <a:latin typeface="Helvetica"/>
+                  <a:cs typeface="Helvetica"/>
+                </a:rPr>
+                <a:t>3</a:t>
+              </a:r>
+            </a:p>
+          </p:txBody>
+        </p:sp>
+        <p:sp>
+          <p:nvSpPr>
+            <p:cNvPr id="77" name="tx77"/>
+            <p:cNvSpPr/>
+            <p:nvPr/>
+          </p:nvSpPr>
+          <p:spPr>
+            <a:xfrm>
+              <a:off x="762297" y="4356300"/>
+              <a:ext cx="62179" cy="80101"/>
+            </a:xfrm>
+            <a:prstGeom prst="rect">
+              <a:avLst/>
+            </a:prstGeom>
+            <a:noFill/>
+          </p:spPr>
+          <p:txBody>
+            <a:bodyPr lIns="0" rIns="0" tIns="0" bIns="0" anchorCtr="1" anchor="ctr" wrap="none"/>
+            <a:lstStyle/>
+            <a:p>
+              <a:pPr algn="l" marL="0" marR="0" indent="0">
+                <a:lnSpc>
+                  <a:spcPts val="880"/>
+                </a:lnSpc>
+                <a:spcBef>
+                  <a:spcPts val="0"/>
+                </a:spcBef>
+                <a:spcAft>
+                  <a:spcPts val="0"/>
+                </a:spcAft>
+              </a:pPr>
+              <a:r>
+                <a:rPr sz="880">
+                  <a:solidFill>
+                    <a:srgbClr val="4D4D4D">
+                      <a:alpha val="100000"/>
+                    </a:srgbClr>
+                  </a:solidFill>
+                  <a:latin typeface="Helvetica"/>
+                  <a:cs typeface="Helvetica"/>
+                </a:rPr>
+                <a:t>4</a:t>
+              </a:r>
+            </a:p>
+          </p:txBody>
+        </p:sp>
+        <p:sp>
+          <p:nvSpPr>
+            <p:cNvPr id="78" name="tx78"/>
+            <p:cNvSpPr/>
+            <p:nvPr/>
+          </p:nvSpPr>
+          <p:spPr>
+            <a:xfrm>
+              <a:off x="1306098" y="5716183"/>
+              <a:ext cx="161574" cy="80101"/>
+            </a:xfrm>
+            <a:prstGeom prst="rect">
+              <a:avLst/>
+            </a:prstGeom>
+            <a:noFill/>
+          </p:spPr>
+          <p:txBody>
+            <a:bodyPr lIns="0" rIns="0" tIns="0" bIns="0" anchorCtr="1" anchor="ctr" wrap="none"/>
+            <a:lstStyle/>
+            <a:p>
+              <a:pPr algn="l" marL="0" marR="0" indent="0">
+                <a:lnSpc>
+                  <a:spcPts val="880"/>
+                </a:lnSpc>
+                <a:spcBef>
+                  <a:spcPts val="0"/>
+                </a:spcBef>
+                <a:spcAft>
+                  <a:spcPts val="0"/>
+                </a:spcAft>
+              </a:pPr>
+              <a:r>
+                <a:rPr sz="880">
+                  <a:solidFill>
+                    <a:srgbClr val="4D4D4D">
+                      <a:alpha val="100000"/>
+                    </a:srgbClr>
+                  </a:solidFill>
+                  <a:latin typeface="Helvetica"/>
+                  <a:cs typeface="Helvetica"/>
+                </a:rPr>
+                <a:t>-40</a:t>
+              </a:r>
+            </a:p>
+          </p:txBody>
+        </p:sp>
+        <p:sp>
+          <p:nvSpPr>
+            <p:cNvPr id="79" name="tx79"/>
+            <p:cNvSpPr/>
+            <p:nvPr/>
+          </p:nvSpPr>
+          <p:spPr>
+            <a:xfrm>
+              <a:off x="2113264" y="5716183"/>
+              <a:ext cx="161574" cy="80101"/>
+            </a:xfrm>
+            <a:prstGeom prst="rect">
+              <a:avLst/>
+            </a:prstGeom>
+            <a:noFill/>
+          </p:spPr>
+          <p:txBody>
+            <a:bodyPr lIns="0" rIns="0" tIns="0" bIns="0" anchorCtr="1" anchor="ctr" wrap="none"/>
+            <a:lstStyle/>
+            <a:p>
+              <a:pPr algn="l" marL="0" marR="0" indent="0">
+                <a:lnSpc>
+                  <a:spcPts val="880"/>
+                </a:lnSpc>
+                <a:spcBef>
+                  <a:spcPts val="0"/>
+                </a:spcBef>
+                <a:spcAft>
+                  <a:spcPts val="0"/>
+                </a:spcAft>
+              </a:pPr>
+              <a:r>
+                <a:rPr sz="880">
+                  <a:solidFill>
+                    <a:srgbClr val="4D4D4D">
+                      <a:alpha val="100000"/>
+                    </a:srgbClr>
+                  </a:solidFill>
+                  <a:latin typeface="Helvetica"/>
+                  <a:cs typeface="Helvetica"/>
+                </a:rPr>
+                <a:t>-30</a:t>
+              </a:r>
+            </a:p>
+          </p:txBody>
+        </p:sp>
+        <p:sp>
+          <p:nvSpPr>
+            <p:cNvPr id="80" name="tx80"/>
+            <p:cNvSpPr/>
+            <p:nvPr/>
+          </p:nvSpPr>
+          <p:spPr>
+            <a:xfrm>
+              <a:off x="2920429" y="5716183"/>
+              <a:ext cx="161574" cy="80101"/>
+            </a:xfrm>
+            <a:prstGeom prst="rect">
+              <a:avLst/>
+            </a:prstGeom>
+            <a:noFill/>
+          </p:spPr>
+          <p:txBody>
+            <a:bodyPr lIns="0" rIns="0" tIns="0" bIns="0" anchorCtr="1" anchor="ctr" wrap="none"/>
+            <a:lstStyle/>
+            <a:p>
+              <a:pPr algn="l" marL="0" marR="0" indent="0">
+                <a:lnSpc>
+                  <a:spcPts val="880"/>
+                </a:lnSpc>
+                <a:spcBef>
+                  <a:spcPts val="0"/>
+                </a:spcBef>
+                <a:spcAft>
+                  <a:spcPts val="0"/>
+                </a:spcAft>
+              </a:pPr>
+              <a:r>
+                <a:rPr sz="880">
+                  <a:solidFill>
+                    <a:srgbClr val="4D4D4D">
+                      <a:alpha val="100000"/>
+                    </a:srgbClr>
+                  </a:solidFill>
+                  <a:latin typeface="Helvetica"/>
+                  <a:cs typeface="Helvetica"/>
+                </a:rPr>
+                <a:t>-20</a:t>
+              </a:r>
+            </a:p>
+          </p:txBody>
+        </p:sp>
+        <p:sp>
+          <p:nvSpPr>
+            <p:cNvPr id="81" name="tx81"/>
+            <p:cNvSpPr/>
+            <p:nvPr/>
+          </p:nvSpPr>
+          <p:spPr>
+            <a:xfrm>
+              <a:off x="3727595" y="5716183"/>
+              <a:ext cx="161574" cy="80101"/>
+            </a:xfrm>
+            <a:prstGeom prst="rect">
+              <a:avLst/>
+            </a:prstGeom>
+            <a:noFill/>
+          </p:spPr>
+          <p:txBody>
+            <a:bodyPr lIns="0" rIns="0" tIns="0" bIns="0" anchorCtr="1" anchor="ctr" wrap="none"/>
+            <a:lstStyle/>
+            <a:p>
+              <a:pPr algn="l" marL="0" marR="0" indent="0">
+                <a:lnSpc>
+                  <a:spcPts val="880"/>
+                </a:lnSpc>
+                <a:spcBef>
+                  <a:spcPts val="0"/>
+                </a:spcBef>
+                <a:spcAft>
+                  <a:spcPts val="0"/>
+                </a:spcAft>
+              </a:pPr>
+              <a:r>
+                <a:rPr sz="880">
+                  <a:solidFill>
+                    <a:srgbClr val="4D4D4D">
+                      <a:alpha val="100000"/>
+                    </a:srgbClr>
+                  </a:solidFill>
+                  <a:latin typeface="Helvetica"/>
+                  <a:cs typeface="Helvetica"/>
+                </a:rPr>
+                <a:t>-10</a:t>
+              </a:r>
+            </a:p>
+          </p:txBody>
+        </p:sp>
+        <p:sp>
+          <p:nvSpPr>
+            <p:cNvPr id="82" name="tx82"/>
+            <p:cNvSpPr/>
+            <p:nvPr/>
+          </p:nvSpPr>
+          <p:spPr>
+            <a:xfrm>
+              <a:off x="4584458" y="5716183"/>
+              <a:ext cx="62179" cy="80101"/>
+            </a:xfrm>
+            <a:prstGeom prst="rect">
+              <a:avLst/>
+            </a:prstGeom>
+            <a:noFill/>
+          </p:spPr>
+          <p:txBody>
+            <a:bodyPr lIns="0" rIns="0" tIns="0" bIns="0" anchorCtr="1" anchor="ctr" wrap="none"/>
+            <a:lstStyle/>
+            <a:p>
+              <a:pPr algn="l" marL="0" marR="0" indent="0">
+                <a:lnSpc>
+                  <a:spcPts val="880"/>
+                </a:lnSpc>
+                <a:spcBef>
+                  <a:spcPts val="0"/>
+                </a:spcBef>
+                <a:spcAft>
+                  <a:spcPts val="0"/>
+                </a:spcAft>
+              </a:pPr>
+              <a:r>
+                <a:rPr sz="880">
+                  <a:solidFill>
+                    <a:srgbClr val="4D4D4D">
+                      <a:alpha val="100000"/>
+                    </a:srgbClr>
+                  </a:solidFill>
+                  <a:latin typeface="Helvetica"/>
+                  <a:cs typeface="Helvetica"/>
+                </a:rPr>
+                <a:t>0</a:t>
+              </a:r>
+            </a:p>
+          </p:txBody>
+        </p:sp>
+        <p:sp>
+          <p:nvSpPr>
+            <p:cNvPr id="83" name="tx83"/>
+            <p:cNvSpPr/>
+            <p:nvPr/>
+          </p:nvSpPr>
+          <p:spPr>
+            <a:xfrm>
+              <a:off x="5360534" y="5716183"/>
+              <a:ext cx="124358" cy="80101"/>
+            </a:xfrm>
+            <a:prstGeom prst="rect">
+              <a:avLst/>
+            </a:prstGeom>
+            <a:noFill/>
+          </p:spPr>
+          <p:txBody>
+            <a:bodyPr lIns="0" rIns="0" tIns="0" bIns="0" anchorCtr="1" anchor="ctr" wrap="none"/>
+            <a:lstStyle/>
+            <a:p>
+              <a:pPr algn="l" marL="0" marR="0" indent="0">
+                <a:lnSpc>
+                  <a:spcPts val="880"/>
+                </a:lnSpc>
+                <a:spcBef>
+                  <a:spcPts val="0"/>
+                </a:spcBef>
+                <a:spcAft>
+                  <a:spcPts val="0"/>
+                </a:spcAft>
+              </a:pPr>
+              <a:r>
+                <a:rPr sz="880">
+                  <a:solidFill>
+                    <a:srgbClr val="4D4D4D">
+                      <a:alpha val="100000"/>
+                    </a:srgbClr>
+                  </a:solidFill>
+                  <a:latin typeface="Helvetica"/>
+                  <a:cs typeface="Helvetica"/>
+                </a:rPr>
+                <a:t>10</a:t>
+              </a:r>
+            </a:p>
+          </p:txBody>
+        </p:sp>
+        <p:sp>
+          <p:nvSpPr>
+            <p:cNvPr id="84" name="tx84"/>
+            <p:cNvSpPr/>
+            <p:nvPr/>
+          </p:nvSpPr>
+          <p:spPr>
+            <a:xfrm>
+              <a:off x="6167699" y="5716183"/>
+              <a:ext cx="124358" cy="80101"/>
+            </a:xfrm>
+            <a:prstGeom prst="rect">
+              <a:avLst/>
+            </a:prstGeom>
+            <a:noFill/>
+          </p:spPr>
+          <p:txBody>
+            <a:bodyPr lIns="0" rIns="0" tIns="0" bIns="0" anchorCtr="1" anchor="ctr" wrap="none"/>
+            <a:lstStyle/>
+            <a:p>
+              <a:pPr algn="l" marL="0" marR="0" indent="0">
+                <a:lnSpc>
+                  <a:spcPts val="880"/>
+                </a:lnSpc>
+                <a:spcBef>
+                  <a:spcPts val="0"/>
+                </a:spcBef>
+                <a:spcAft>
+                  <a:spcPts val="0"/>
+                </a:spcAft>
+              </a:pPr>
+              <a:r>
+                <a:rPr sz="880">
+                  <a:solidFill>
+                    <a:srgbClr val="4D4D4D">
+                      <a:alpha val="100000"/>
+                    </a:srgbClr>
+                  </a:solidFill>
+                  <a:latin typeface="Helvetica"/>
+                  <a:cs typeface="Helvetica"/>
+                </a:rPr>
+                <a:t>20</a:t>
+              </a:r>
+            </a:p>
+          </p:txBody>
+        </p:sp>
+        <p:sp>
+          <p:nvSpPr>
+            <p:cNvPr id="85" name="tx85"/>
+            <p:cNvSpPr/>
+            <p:nvPr/>
+          </p:nvSpPr>
+          <p:spPr>
+            <a:xfrm>
+              <a:off x="6974865" y="5716183"/>
+              <a:ext cx="124358" cy="80101"/>
+            </a:xfrm>
+            <a:prstGeom prst="rect">
+              <a:avLst/>
+            </a:prstGeom>
+            <a:noFill/>
+          </p:spPr>
+          <p:txBody>
+            <a:bodyPr lIns="0" rIns="0" tIns="0" bIns="0" anchorCtr="1" anchor="ctr" wrap="none"/>
+            <a:lstStyle/>
+            <a:p>
+              <a:pPr algn="l" marL="0" marR="0" indent="0">
+                <a:lnSpc>
+                  <a:spcPts val="880"/>
+                </a:lnSpc>
+                <a:spcBef>
+                  <a:spcPts val="0"/>
+                </a:spcBef>
+                <a:spcAft>
+                  <a:spcPts val="0"/>
+                </a:spcAft>
+              </a:pPr>
+              <a:r>
+                <a:rPr sz="880">
+                  <a:solidFill>
+                    <a:srgbClr val="4D4D4D">
+                      <a:alpha val="100000"/>
+                    </a:srgbClr>
+                  </a:solidFill>
+                  <a:latin typeface="Helvetica"/>
+                  <a:cs typeface="Helvetica"/>
+                </a:rPr>
+                <a:t>30</a:t>
+              </a:r>
+            </a:p>
+          </p:txBody>
+        </p:sp>
+        <p:sp>
+          <p:nvSpPr>
+            <p:cNvPr id="86" name="tx86"/>
+            <p:cNvSpPr/>
+            <p:nvPr/>
+          </p:nvSpPr>
+          <p:spPr>
+            <a:xfrm>
+              <a:off x="7782030" y="5716183"/>
+              <a:ext cx="124358" cy="80101"/>
+            </a:xfrm>
+            <a:prstGeom prst="rect">
+              <a:avLst/>
+            </a:prstGeom>
+            <a:noFill/>
+          </p:spPr>
+          <p:txBody>
+            <a:bodyPr lIns="0" rIns="0" tIns="0" bIns="0" anchorCtr="1" anchor="ctr" wrap="none"/>
+            <a:lstStyle/>
+            <a:p>
+              <a:pPr algn="l" marL="0" marR="0" indent="0">
+                <a:lnSpc>
+                  <a:spcPts val="880"/>
+                </a:lnSpc>
+                <a:spcBef>
+                  <a:spcPts val="0"/>
+                </a:spcBef>
+                <a:spcAft>
+                  <a:spcPts val="0"/>
+                </a:spcAft>
+              </a:pPr>
+              <a:r>
+                <a:rPr sz="880">
+                  <a:solidFill>
+                    <a:srgbClr val="4D4D4D">
+                      <a:alpha val="100000"/>
+                    </a:srgbClr>
+                  </a:solidFill>
+                  <a:latin typeface="Helvetica"/>
+                  <a:cs typeface="Helvetica"/>
+                </a:rPr>
+                <a:t>40</a:t>
+              </a:r>
+            </a:p>
+          </p:txBody>
+        </p:sp>
+        <p:sp>
+          <p:nvSpPr>
+            <p:cNvPr id="87" name="tx87"/>
+            <p:cNvSpPr/>
+            <p:nvPr/>
+          </p:nvSpPr>
+          <p:spPr>
+            <a:xfrm>
+              <a:off x="2928340" y="5855859"/>
+              <a:ext cx="3578047" cy="100218"/>
+            </a:xfrm>
+            <a:prstGeom prst="rect">
+              <a:avLst/>
+            </a:prstGeom>
+            <a:noFill/>
+          </p:spPr>
+          <p:txBody>
+            <a:bodyPr lIns="0" rIns="0" tIns="0" bIns="0" anchorCtr="1" anchor="ctr" wrap="none"/>
+            <a:lstStyle/>
+            <a:p>
+              <a:pPr algn="l" marL="0" marR="0" indent="0">
+                <a:lnSpc>
+                  <a:spcPts val="1100"/>
+                </a:lnSpc>
+                <a:spcBef>
+                  <a:spcPts val="0"/>
+                </a:spcBef>
+                <a:spcAft>
+                  <a:spcPts val="0"/>
+                </a:spcAft>
+              </a:pPr>
+              <a:r>
+                <a:rPr sz="1100">
+                  <a:solidFill>
+                    <a:srgbClr val="000000">
+                      <a:alpha val="100000"/>
+                    </a:srgbClr>
+                  </a:solidFill>
+                  <a:latin typeface="Helvetica"/>
+                  <a:cs typeface="Helvetica"/>
+                </a:rPr>
+                <a:t>eGFR difference (%): 100 × (CKD-EPI Cr-Cys − CG) / CG</a:t>
+              </a:r>
+            </a:p>
+          </p:txBody>
+        </p:sp>
+        <p:sp>
+          <p:nvSpPr>
+            <p:cNvPr id="88" name="tx88"/>
+            <p:cNvSpPr/>
+            <p:nvPr/>
+          </p:nvSpPr>
+          <p:spPr>
+            <a:xfrm rot="-5400000">
+              <a:off x="138035" y="4944909"/>
+              <a:ext cx="1016904" cy="100218"/>
+            </a:xfrm>
+            <a:prstGeom prst="rect">
+              <a:avLst/>
+            </a:prstGeom>
+            <a:noFill/>
+          </p:spPr>
+          <p:txBody>
+            <a:bodyPr lIns="0" rIns="0" tIns="0" bIns="0" anchorCtr="1" anchor="ctr" wrap="none"/>
+            <a:lstStyle/>
+            <a:p>
+              <a:pPr algn="l" marL="0" marR="0" indent="0">
+                <a:lnSpc>
+                  <a:spcPts val="1100"/>
+                </a:lnSpc>
+                <a:spcBef>
+                  <a:spcPts val="0"/>
+                </a:spcBef>
+                <a:spcAft>
+                  <a:spcPts val="0"/>
+                </a:spcAft>
+              </a:pPr>
+              <a:r>
+                <a:rPr sz="1100">
+                  <a:solidFill>
+                    <a:srgbClr val="000000">
+                      <a:alpha val="100000"/>
+                    </a:srgbClr>
+                  </a:solidFill>
+                  <a:latin typeface="Helvetica"/>
+                  <a:cs typeface="Helvetica"/>
+                </a:rPr>
+                <a:t>subHR (95% CI)</a:t>
+              </a:r>
+            </a:p>
+          </p:txBody>
+        </p:sp>
+        <p:sp>
+          <p:nvSpPr>
+            <p:cNvPr id="89" name="tx89"/>
+            <p:cNvSpPr/>
+            <p:nvPr/>
+          </p:nvSpPr>
+          <p:spPr>
+            <a:xfrm>
+              <a:off x="887106" y="4159544"/>
+              <a:ext cx="7048926" cy="82021"/>
+            </a:xfrm>
+            <a:prstGeom prst="rect">
+              <a:avLst/>
+            </a:prstGeom>
+            <a:noFill/>
+          </p:spPr>
+          <p:txBody>
+            <a:bodyPr lIns="0" rIns="0" tIns="0" bIns="0" anchorCtr="1" anchor="ctr" wrap="none"/>
+            <a:lstStyle/>
+            <a:p>
+              <a:pPr algn="l" marL="0" marR="0" indent="0">
+                <a:lnSpc>
+                  <a:spcPts val="900"/>
+                </a:lnSpc>
+                <a:spcBef>
+                  <a:spcPts val="0"/>
+                </a:spcBef>
+                <a:spcAft>
+                  <a:spcPts val="0"/>
+                </a:spcAft>
+              </a:pPr>
+              <a:r>
+                <a:rPr sz="900">
+                  <a:solidFill>
+                    <a:srgbClr val="404040">
+                      <a:alpha val="100000"/>
+                    </a:srgbClr>
+                  </a:solidFill>
+                  <a:latin typeface="Helvetica"/>
+                  <a:cs typeface="Helvetica"/>
+                </a:rPr>
+                <a:t>subHR per 10 % decline: 2.03 (1.19-3.46), p_Bonf = 0.056 (n = 6)  |  per IQR decline (Δ = 29.5 %): 8.07 (1.67-39.01)  |  IQR: [-15.6, 13.9] %</a:t>
+              </a:r>
+            </a:p>
+          </p:txBody>
+        </p:sp>
+        <p:sp>
+          <p:nvSpPr>
+            <p:cNvPr id="90" name="tx90"/>
+            <p:cNvSpPr/>
+            <p:nvPr/>
+          </p:nvSpPr>
+          <p:spPr>
+            <a:xfrm>
+              <a:off x="887106" y="3932770"/>
               <a:ext cx="3732672" cy="120152"/>
             </a:xfrm>
             <a:prstGeom prst="rect">
